--- a/examples/research-seminar/animated.pptx
+++ b/examples/research-seminar/animated.pptx
@@ -132,11 +132,11 @@
           <c:idx val="0"/>
           <c:order val="0"/>
           <c:tx>
-            <c:v>지연 (ms)</c:v>
+            <c:v>Latency (ms)</c:v>
           </c:tx>
           <c:spPr>
             <a:solidFill>
-              <a:srgbClr val="007E80"/>
+              <a:srgbClr val="287D78"/>
             </a:solidFill>
           </c:spPr>
           <c:invertIfNegative val="1"/>
@@ -146,12 +146,12 @@
             <c:bubble3D val="0"/>
             <c:spPr>
               <a:solidFill>
-                <a:srgbClr val="7D9192"/>
+                <a:srgbClr val="9EADA5"/>
               </a:solidFill>
             </c:spPr>
             <c:extLst>
               <c:ext xmlns:c16="http://schemas.microsoft.com/office/drawing/2014/chart" uri="{C3380CC4-5D6E-409C-BE32-E72D297353CC}">
-                <c16:uniqueId val="{00000001-5E97-4EFF-9E41-3A624D2105CD}"/>
+                <c16:uniqueId val="{00000001-64F9-463C-BA85-3156AF375E0C}"/>
               </c:ext>
             </c:extLst>
           </c:dPt>
@@ -159,9 +159,14 @@
             <c:idx val="1"/>
             <c:invertIfNegative val="0"/>
             <c:bubble3D val="0"/>
+            <c:spPr>
+              <a:solidFill>
+                <a:srgbClr val="639D90"/>
+              </a:solidFill>
+            </c:spPr>
             <c:extLst>
               <c:ext xmlns:c16="http://schemas.microsoft.com/office/drawing/2014/chart" uri="{C3380CC4-5D6E-409C-BE32-E72D297353CC}">
-                <c16:uniqueId val="{00000003-5E97-4EFF-9E41-3A624D2105CD}"/>
+                <c16:uniqueId val="{00000003-64F9-463C-BA85-3156AF375E0C}"/>
               </c:ext>
             </c:extLst>
           </c:dPt>
@@ -169,14 +174,9 @@
             <c:idx val="2"/>
             <c:invertIfNegative val="0"/>
             <c:bubble3D val="0"/>
-            <c:spPr>
-              <a:solidFill>
-                <a:srgbClr val="173F40"/>
-              </a:solidFill>
-            </c:spPr>
             <c:extLst>
               <c:ext xmlns:c16="http://schemas.microsoft.com/office/drawing/2014/chart" uri="{C3380CC4-5D6E-409C-BE32-E72D297353CC}">
-                <c16:uniqueId val="{00000005-5E97-4EFF-9E41-3A624D2105CD}"/>
+                <c16:uniqueId val="{00000005-64F9-463C-BA85-3156AF375E0C}"/>
               </c:ext>
             </c:extLst>
           </c:dPt>
@@ -193,13 +193,13 @@
               <a:lstStyle/>
               <a:p>
                 <a:pPr>
-                  <a:defRPr sz="2175" b="1">
+                  <a:defRPr sz="2025">
                     <a:solidFill>
-                      <a:srgbClr val="173F40"/>
+                      <a:srgbClr val="1E302F"/>
                     </a:solidFill>
-                    <a:latin typeface="Malgun Gothic"/>
-                    <a:ea typeface="Malgun Gothic"/>
-                    <a:cs typeface="Malgun Gothic"/>
+                    <a:latin typeface="Segoe UI"/>
+                    <a:ea typeface="Segoe UI"/>
+                    <a:cs typeface="Segoe UI"/>
                   </a:defRPr>
                 </a:pPr>
                 <a:endParaRPr lang="ko-KR"/>
@@ -265,7 +265,7 @@
               </c14:invertSolidFillFmt>
             </c:ext>
             <c:ext xmlns:c16="http://schemas.microsoft.com/office/drawing/2014/chart" uri="{C3380CC4-5D6E-409C-BE32-E72D297353CC}">
-              <c16:uniqueId val="{00000006-5E97-4EFF-9E41-3A624D2105CD}"/>
+              <c16:uniqueId val="{00000006-64F9-463C-BA85-3156AF375E0C}"/>
             </c:ext>
           </c:extLst>
         </c:ser>
@@ -278,7 +278,7 @@
           <c:showPercent val="0"/>
           <c:showBubbleSize val="0"/>
         </c:dLbls>
-        <c:gapWidth val="90"/>
+        <c:gapWidth val="130"/>
         <c:axId val="48650112"/>
         <c:axId val="48672768"/>
       </c:barChart>
@@ -296,7 +296,7 @@
         <c:spPr>
           <a:ln w="9525">
             <a:solidFill>
-              <a:srgbClr val="456162"/>
+              <a:srgbClr val="CFD8D1"/>
             </a:solidFill>
           </a:ln>
         </c:spPr>
@@ -305,13 +305,13 @@
           <a:lstStyle/>
           <a:p>
             <a:pPr>
-              <a:defRPr sz="1800">
-                <a:solidFill>
-                  <a:srgbClr val="173F40"/>
-                </a:solidFill>
-                <a:latin typeface="Malgun Gothic"/>
-                <a:ea typeface="Malgun Gothic"/>
-                <a:cs typeface="Malgun Gothic"/>
+              <a:defRPr sz="1725">
+                <a:solidFill>
+                  <a:srgbClr val="1E302F"/>
+                </a:solidFill>
+                <a:latin typeface="Segoe UI"/>
+                <a:ea typeface="Segoe UI"/>
+                <a:cs typeface="Segoe UI"/>
               </a:defRPr>
             </a:pPr>
             <a:endParaRPr lang="ko-KR"/>
@@ -335,9 +335,9 @@
         <c:axPos val="l"/>
         <c:majorGridlines>
           <c:spPr>
-            <a:ln w="9525">
+            <a:ln w="6668">
               <a:solidFill>
-                <a:srgbClr val="D8E8E6"/>
+                <a:srgbClr val="CFD8D1"/>
               </a:solidFill>
             </a:ln>
           </c:spPr>
@@ -359,13 +359,13 @@
           <a:lstStyle/>
           <a:p>
             <a:pPr>
-              <a:defRPr sz="1575">
-                <a:solidFill>
-                  <a:srgbClr val="456162"/>
-                </a:solidFill>
-                <a:latin typeface="Malgun Gothic"/>
-                <a:ea typeface="Malgun Gothic"/>
-                <a:cs typeface="Malgun Gothic"/>
+              <a:defRPr sz="1425">
+                <a:solidFill>
+                  <a:srgbClr val="586C68"/>
+                </a:solidFill>
+                <a:latin typeface="Segoe UI"/>
+                <a:ea typeface="Segoe UI"/>
+                <a:cs typeface="Segoe UI"/>
               </a:defRPr>
             </a:pPr>
             <a:endParaRPr lang="ko-KR"/>
@@ -378,7 +378,7 @@
       </c:valAx>
       <c:spPr>
         <a:solidFill>
-          <a:srgbClr val="F7FAF9"/>
+          <a:srgbClr val="F6F4EE"/>
         </a:solidFill>
       </c:spPr>
     </c:plotArea>
@@ -388,7 +388,7 @@
   </c:chart>
   <c:spPr>
     <a:solidFill>
-      <a:srgbClr val="F7FAF9"/>
+      <a:srgbClr val="F6F4EE"/>
     </a:solidFill>
   </c:spPr>
   <c:externalData r:id="rId1">
@@ -613,7 +613,7 @@
           <a:lstStyle/>
           <a:p>
             <a:r>
-              <a:t>발표 시간 30초. 이 발표의 성능 수치는 모두 사용자가 제공한 가상 예시이다. 실제 실험 결과나 특정 데이터셋의 평가 결과가 아니다. 동일 장치·데이터에서 비교한다는 조건만 주어져 있다.</a:t>
+              <a:t>30 seconds. All performance values in this deck are fictional user-supplied examples. They are not empirical findings. A common device and dataset are assumed, but their identities are unspecified. The cover is AI-generated conceptual artwork, not a model architecture or a measurement.</a:t>
             </a:r>
           </a:p>
         </p:txBody>
@@ -690,7 +690,7 @@
           <a:lstStyle/>
           <a:p>
             <a:r>
-              <a:t>발표 시간 90초. 교사 모델의 예측을 학생 모델의 학습에 활용하는 지식 증류와 수치 표현을 8비트 정수로 바꾸는 양자화를 개념적으로 설명한다. 학습 방법과 양자화 범위는 사용자에게서 제공받지 않았으므로 구체적인 손실함수, 비트 범위, PTQ/QAT를 단정하지 않는다. 첫 클릭에서 증류 단계, 둘째 클릭에서 INT8 단계를 설명한다. 출처: Hinton et al., Distilling the Knowledge in a Neural Network (2015), https://arxiv.org/abs/1503.02531 ; Jacob et al., Quantization and Training of Neural Networks for Efficient Integer-Arithmetic-Only Inference (2017), https://arxiv.org/abs/1712.05877 . 문헌의 결과 수치를 이 예시로 사용하지 않았다.</a:t>
+              <a:t>90 seconds. The teacher provides prediction knowledge for learning a smaller student; INT8 represents student numbers using 8-bit integers. Architecture, loss, quantization scope, and PTQ versus QAT are unspecified. Do not assume preservation of all teacher knowledge or claim a particular implementation. In the animated edition, reveal distillation on click 1 and INT8 on click 2. Concept sources: Hinton et al. (2015), https://arxiv.org/abs/1503.02531 ; Jacob et al. (2017), https://arxiv.org/abs/1712.05877 . No empirical results were taken from those papers.</a:t>
             </a:r>
           </a:p>
         </p:txBody>
@@ -767,7 +767,7 @@
           <a:lstStyle/>
           <a:p>
             <a:r>
-              <a:t>발표 시간 60초. 출처: 사용자 제공 가상 데이터. baseline: 지연 120ms, F1 0.910, 모델 48MB. distilled: 72ms, 0.902, 18MB. int8: 54ms, 0.896, 12MB. 장치·데이터는 동일하다는 조건이다. 표본수·분산·실제 데이터셋명은 미제공. 지연 통계량의 정의, F1 집계 방법, 데이터 분할과 장치 사양도 알려지지 않았다. 단일 가상 요약값의 산술 비교이며 통계적 유의성, 신뢰구간, 일반화 성능을 주장하지 않는다.</a:t>
+              <a:t>60 seconds. Fictional values: baseline 120 ms / F1 0.910 / 48 MB; distilled 72 ms / 0.902 / 18 MB; int8 54 ms / 0.896 / 12 MB. The same device and data are assumed. Sample count, variance, dataset, split, device specifications, latency statistic, and F1 aggregation are unspecified. These are arithmetic comparisons, not evidence of statistical significance or generalization.</a:t>
             </a:r>
           </a:p>
         </p:txBody>
@@ -844,7 +844,7 @@
           <a:lstStyle/>
           <a:p>
             <a:r>
-              <a:t>발표 시간 65초. 모든 수치는 사용자 제공 가상 데이터에서 계산했다. 전체 지연 감소율: (120−54)/120 = 55%. 전체 모델 크기 감소율: (48−12)/48 = 75%. F1 절대 차이: 0.896−0.910 = −0.014. 증류 단계 지연 감소율: (120−72)/120 = 40%, F1 차이 −0.008. 추가 양자화 단계: (72−54)/72 = 25%, F1 차이 −0.006. 단계별 감소율의 분모가 다르므로 40%와 25%를 더하지 않는다. F1 차이는 상대 감소율 또는 퍼센트포인트라는 표현 없이 절대 차이로 제시했다. 표본수와 분산이 없어 통계적 판단은 불가하다.</a:t>
+              <a:t>65 seconds. Overall latency reduction (120−54)/120 = 55%; size reduction (48−12)/48 = 75%; F1 absolute difference 0.896−0.910 = −0.014. Distillation latency reduction (120−72)/120 = 40%, F1 difference −0.008. Additional INT8 latency reduction (72−54)/72 = 25%, F1 difference −0.006. Do not add 40% and 25% because their denominators differ. No statistical inference is possible from the fictional summaries.</a:t>
             </a:r>
           </a:p>
         </p:txBody>
@@ -921,7 +921,7 @@
           <a:lstStyle/>
           <a:p>
             <a:r>
-              <a:t>발표 시간 55초. 어느 모델이 최선이라고 단정하지 않는다. 사용 환경에 맞는 지연 한도와 허용 가능한 F1 저하부터 정해야 한다. 실제 데이터셋에서 반복 측정하여 분산과 실패 사례를 확인해야 한다. 현재 수치는 모두 가상이므로 실제 적용 성능이나 일반화 능력을 예측하지 않는다. 총 발표 시간 300초.</a:t>
+              <a:t>55 seconds. These fictional values illustrate an efficiency–F1 trade-off. They do not select a universally best model. Define the acceptable loss in F1 and the latency budget for the intended environment. Repeat measurements on actual data, estimate variation, and inspect failures by anomaly type. No real dataset or sample count was supplied, so no generalization claim is justified. Total presentation time: 300 seconds.</a:t>
             </a:r>
           </a:p>
         </p:txBody>
@@ -1292,7 +1292,7 @@
     <p:bg>
       <p:bgPr>
         <a:solidFill>
-          <a:srgbClr val="173F40"/>
+          <a:srgbClr val="F6F4EE"/>
         </a:solidFill>
         <a:effectLst/>
       </p:bgPr>
@@ -1311,12 +1311,37 @@
           <a:chExt cx="0" cy="0"/>
         </a:xfrm>
       </p:grpSpPr>
-      <p:sp>
-        <p:nvSpPr>
-          <p:cNvPr id="5" name="S01-title">
+      <p:pic>
+        <p:nvPicPr>
+          <p:cNvPr id="7" name="그림 6"/>
+          <p:cNvPicPr>
+            <a:picLocks noChangeAspect="1"/>
+          </p:cNvPicPr>
+          <p:nvPr/>
+        </p:nvPicPr>
+        <p:blipFill>
+          <a:blip r:embed="rId3"/>
+          <a:srcRect l="6092" r="6092"/>
+          <a:stretch>
+            <a:fillRect/>
+          </a:stretch>
+        </p:blipFill>
+        <p:spPr>
+          <a:xfrm>
+            <a:off x="7372350" y="0"/>
+            <a:ext cx="4819650" cy="6858000"/>
+          </a:xfrm>
+          <a:prstGeom prst="rect">
+            <a:avLst/>
+          </a:prstGeom>
+        </p:spPr>
+      </p:pic>
+      <p:sp>
+        <p:nvSpPr>
+          <p:cNvPr id="2" name="S01-section">
             <a:extLst>
               <a:ext uri="{FF2B5EF4-FFF2-40B4-BE49-F238E27FC236}">
-                <a16:creationId xmlns:a16="http://schemas.microsoft.com/office/drawing/2014/main" id="{7B7AFD70-B979-4E05-BA08-1CE709AB0310}"/>
+                <a16:creationId xmlns:a16="http://schemas.microsoft.com/office/drawing/2014/main" id="{D6E8A9ED-5F1A-40DB-B550-14998D956CD9}"/>
               </a:ext>
             </a:extLst>
           </p:cNvPr>
@@ -1327,8 +1352,8 @@
         </p:nvSpPr>
         <p:spPr>
           <a:xfrm>
-            <a:off x="609600" y="1571625"/>
-            <a:ext cx="10934700" cy="1714500"/>
+            <a:off x="685800" y="590550"/>
+            <a:ext cx="6191250" cy="285750"/>
           </a:xfrm>
           <a:prstGeom prst="rect">
             <a:avLst/>
@@ -1345,58 +1370,35 @@
           <a:lstStyle/>
           <a:p>
             <a:pPr>
-              <a:defRPr sz="4800" b="1">
-                <a:solidFill>
-                  <a:srgbClr val="FFFFFF"/>
-                </a:solidFill>
-                <a:latin typeface="Malgun Gothic"/>
-                <a:ea typeface="Malgun Gothic"/>
-                <a:cs typeface="Malgun Gothic"/>
+              <a:defRPr sz="1425" b="0">
+                <a:solidFill>
+                  <a:srgbClr val="287D78"/>
+                </a:solidFill>
+                <a:latin typeface="Segoe UI"/>
+                <a:ea typeface="Segoe UI"/>
+                <a:cs typeface="Segoe UI"/>
               </a:defRPr>
             </a:pPr>
             <a:r>
-              <a:rPr sz="4800" b="1">
-                <a:solidFill>
-                  <a:srgbClr val="FFFFFF"/>
-                </a:solidFill>
-                <a:latin typeface="Malgun Gothic"/>
-                <a:ea typeface="Malgun Gothic"/>
-                <a:cs typeface="Malgun Gothic"/>
+              <a:rPr sz="1425" b="0">
+                <a:solidFill>
+                  <a:srgbClr val="287D78"/>
+                </a:solidFill>
+                <a:latin typeface="Segoe UI"/>
+                <a:ea typeface="Segoe UI"/>
+                <a:cs typeface="Segoe UI"/>
               </a:rPr>
-              <a:t>센서 이상 탐지 모델의</a:t>
+              <a:t>RESEARCH NOTE / 01</a:t>
             </a:r>
           </a:p>
-          <a:p>
-            <a:pPr>
-              <a:defRPr sz="4800" b="1">
-                <a:solidFill>
-                  <a:srgbClr val="FFFFFF"/>
-                </a:solidFill>
-                <a:latin typeface="Malgun Gothic"/>
-                <a:ea typeface="Malgun Gothic"/>
-                <a:cs typeface="Malgun Gothic"/>
-              </a:defRPr>
-            </a:pPr>
-            <a:r>
-              <a:rPr sz="4800" b="1">
-                <a:solidFill>
-                  <a:srgbClr val="FFFFFF"/>
-                </a:solidFill>
-                <a:latin typeface="Malgun Gothic"/>
-                <a:ea typeface="Malgun Gothic"/>
-                <a:cs typeface="Malgun Gothic"/>
-              </a:rPr>
-              <a:t>경량화</a:t>
-            </a:r>
-          </a:p>
-        </p:txBody>
-      </p:sp>
-      <p:sp>
-        <p:nvSpPr>
-          <p:cNvPr id="2" name="S01-subtitle">
+        </p:txBody>
+      </p:sp>
+      <p:sp>
+        <p:nvSpPr>
+          <p:cNvPr id="3" name="S01-title">
             <a:extLst>
               <a:ext uri="{FF2B5EF4-FFF2-40B4-BE49-F238E27FC236}">
-                <a16:creationId xmlns:a16="http://schemas.microsoft.com/office/drawing/2014/main" id="{881B07A9-251E-4C37-B7EE-41C04FF575A2}"/>
+                <a16:creationId xmlns:a16="http://schemas.microsoft.com/office/drawing/2014/main" id="{4C2F98CD-761C-4BE1-B0E6-D8D7623A14E2}"/>
               </a:ext>
             </a:extLst>
           </p:cNvPr>
@@ -1407,8 +1409,8 @@
         </p:nvSpPr>
         <p:spPr>
           <a:xfrm>
-            <a:off x="647700" y="3810000"/>
-            <a:ext cx="10477500" cy="533400"/>
+            <a:off x="685800" y="1895475"/>
+            <a:ext cx="6591300" cy="1600200"/>
           </a:xfrm>
           <a:prstGeom prst="rect">
             <a:avLst/>
@@ -1425,35 +1427,58 @@
           <a:lstStyle/>
           <a:p>
             <a:pPr>
-              <a:defRPr sz="2325" b="0">
-                <a:solidFill>
-                  <a:srgbClr val="FFFFFF"/>
-                </a:solidFill>
-                <a:latin typeface="Malgun Gothic"/>
-                <a:ea typeface="Malgun Gothic"/>
-                <a:cs typeface="Malgun Gothic"/>
+              <a:defRPr sz="4200" b="0">
+                <a:solidFill>
+                  <a:srgbClr val="1E302F"/>
+                </a:solidFill>
+                <a:latin typeface="Segoe UI"/>
+                <a:ea typeface="Segoe UI"/>
+                <a:cs typeface="Segoe UI"/>
               </a:defRPr>
             </a:pPr>
             <a:r>
-              <a:rPr sz="2325" b="0">
-                <a:solidFill>
-                  <a:srgbClr val="FFFFFF"/>
-                </a:solidFill>
-                <a:latin typeface="Malgun Gothic"/>
-                <a:ea typeface="Malgun Gothic"/>
-                <a:cs typeface="Malgun Gothic"/>
+              <a:rPr sz="4200" b="0">
+                <a:solidFill>
+                  <a:srgbClr val="1E302F"/>
+                </a:solidFill>
+                <a:latin typeface="Segoe UI"/>
+                <a:ea typeface="Segoe UI"/>
+                <a:cs typeface="Segoe UI"/>
               </a:rPr>
-              <a:t>지식 증류와 INT8 양자화의 성능 교환관계</a:t>
+              <a:t>Smaller models.</a:t>
             </a:r>
           </a:p>
-        </p:txBody>
-      </p:sp>
-      <p:sp>
-        <p:nvSpPr>
-          <p:cNvPr id="3" name="S01-context">
+          <a:p>
+            <a:pPr>
+              <a:defRPr sz="4200" b="0">
+                <a:solidFill>
+                  <a:srgbClr val="1E302F"/>
+                </a:solidFill>
+                <a:latin typeface="Segoe UI"/>
+                <a:ea typeface="Segoe UI"/>
+                <a:cs typeface="Segoe UI"/>
+              </a:defRPr>
+            </a:pPr>
+            <a:r>
+              <a:rPr sz="4200" b="0">
+                <a:solidFill>
+                  <a:srgbClr val="1E302F"/>
+                </a:solidFill>
+                <a:latin typeface="Segoe UI"/>
+                <a:ea typeface="Segoe UI"/>
+                <a:cs typeface="Segoe UI"/>
+              </a:rPr>
+              <a:t>Considered trade-offs.</a:t>
+            </a:r>
+          </a:p>
+        </p:txBody>
+      </p:sp>
+      <p:sp>
+        <p:nvSpPr>
+          <p:cNvPr id="4" name="S01-subtitle">
             <a:extLst>
               <a:ext uri="{FF2B5EF4-FFF2-40B4-BE49-F238E27FC236}">
-                <a16:creationId xmlns:a16="http://schemas.microsoft.com/office/drawing/2014/main" id="{4EA2CB9D-147A-44A2-8391-9CF930527BF9}"/>
+                <a16:creationId xmlns:a16="http://schemas.microsoft.com/office/drawing/2014/main" id="{26242D5B-C040-47B5-8284-A994E17ED53A}"/>
               </a:ext>
             </a:extLst>
           </p:cNvPr>
@@ -1464,8 +1489,8 @@
         </p:nvSpPr>
         <p:spPr>
           <a:xfrm>
-            <a:off x="647700" y="4610100"/>
-            <a:ext cx="9525000" cy="419100"/>
+            <a:off x="723900" y="3905250"/>
+            <a:ext cx="6048375" cy="781050"/>
           </a:xfrm>
           <a:prstGeom prst="rect">
             <a:avLst/>
@@ -1482,35 +1507,58 @@
           <a:lstStyle/>
           <a:p>
             <a:pPr>
-              <a:defRPr sz="1800" b="0">
-                <a:solidFill>
-                  <a:srgbClr val="C8E2DE"/>
-                </a:solidFill>
-                <a:latin typeface="Malgun Gothic"/>
-                <a:ea typeface="Malgun Gothic"/>
-                <a:cs typeface="Malgun Gothic"/>
+              <a:defRPr sz="2175" b="0">
+                <a:solidFill>
+                  <a:srgbClr val="586C68"/>
+                </a:solidFill>
+                <a:latin typeface="Segoe UI"/>
+                <a:ea typeface="Segoe UI"/>
+                <a:cs typeface="Segoe UI"/>
               </a:defRPr>
             </a:pPr>
             <a:r>
-              <a:rPr sz="1800" b="0">
-                <a:solidFill>
-                  <a:srgbClr val="C8E2DE"/>
-                </a:solidFill>
-                <a:latin typeface="Malgun Gothic"/>
-                <a:ea typeface="Malgun Gothic"/>
-                <a:cs typeface="Malgun Gothic"/>
+              <a:rPr sz="2175" b="0">
+                <a:solidFill>
+                  <a:srgbClr val="586C68"/>
+                </a:solidFill>
+                <a:latin typeface="Segoe UI"/>
+                <a:ea typeface="Segoe UI"/>
+                <a:cs typeface="Segoe UI"/>
               </a:rPr>
-              <a:t>연구실 세미나 · 5분</a:t>
+              <a:t>Sensor anomaly detection with</a:t>
             </a:r>
           </a:p>
-        </p:txBody>
-      </p:sp>
-      <p:sp>
-        <p:nvSpPr>
-          <p:cNvPr id="4" name="S01-disclosure">
+          <a:p>
+            <a:pPr>
+              <a:defRPr sz="2175" b="0">
+                <a:solidFill>
+                  <a:srgbClr val="586C68"/>
+                </a:solidFill>
+                <a:latin typeface="Segoe UI"/>
+                <a:ea typeface="Segoe UI"/>
+                <a:cs typeface="Segoe UI"/>
+              </a:defRPr>
+            </a:pPr>
+            <a:r>
+              <a:rPr sz="2175" b="0">
+                <a:solidFill>
+                  <a:srgbClr val="586C68"/>
+                </a:solidFill>
+                <a:latin typeface="Segoe UI"/>
+                <a:ea typeface="Segoe UI"/>
+                <a:cs typeface="Segoe UI"/>
+              </a:rPr>
+              <a:t>distillation and INT8 quantization</a:t>
+            </a:r>
+          </a:p>
+        </p:txBody>
+      </p:sp>
+      <p:sp>
+        <p:nvSpPr>
+          <p:cNvPr id="5" name="S01-context">
             <a:extLst>
               <a:ext uri="{FF2B5EF4-FFF2-40B4-BE49-F238E27FC236}">
-                <a16:creationId xmlns:a16="http://schemas.microsoft.com/office/drawing/2014/main" id="{1CDDF37E-E3C1-4A58-88BC-77207933FA12}"/>
+                <a16:creationId xmlns:a16="http://schemas.microsoft.com/office/drawing/2014/main" id="{CE5D0945-2804-42F1-BE98-430B6393548F}"/>
               </a:ext>
             </a:extLst>
           </p:cNvPr>
@@ -1521,8 +1569,8 @@
         </p:nvSpPr>
         <p:spPr>
           <a:xfrm>
-            <a:off x="647700" y="6191250"/>
-            <a:ext cx="10477500" cy="342900"/>
+            <a:off x="723900" y="5410200"/>
+            <a:ext cx="5905500" cy="333375"/>
           </a:xfrm>
           <a:prstGeom prst="rect">
             <a:avLst/>
@@ -1539,25 +1587,82 @@
           <a:lstStyle/>
           <a:p>
             <a:pPr>
-              <a:defRPr sz="1650" b="0">
-                <a:solidFill>
-                  <a:srgbClr val="C8E2DE"/>
-                </a:solidFill>
-                <a:latin typeface="Malgun Gothic"/>
-                <a:ea typeface="Malgun Gothic"/>
-                <a:cs typeface="Malgun Gothic"/>
+              <a:defRPr sz="1725" b="0">
+                <a:solidFill>
+                  <a:srgbClr val="1E302F"/>
+                </a:solidFill>
+                <a:latin typeface="Segoe UI"/>
+                <a:ea typeface="Segoe UI"/>
+                <a:cs typeface="Segoe UI"/>
               </a:defRPr>
             </a:pPr>
             <a:r>
-              <a:rPr sz="1650" b="0">
-                <a:solidFill>
-                  <a:srgbClr val="C8E2DE"/>
-                </a:solidFill>
-                <a:latin typeface="Malgun Gothic"/>
-                <a:ea typeface="Malgun Gothic"/>
-                <a:cs typeface="Malgun Gothic"/>
+              <a:rPr sz="1725" b="0">
+                <a:solidFill>
+                  <a:srgbClr val="1E302F"/>
+                </a:solidFill>
+                <a:latin typeface="Segoe UI"/>
+                <a:ea typeface="Segoe UI"/>
+                <a:cs typeface="Segoe UI"/>
               </a:rPr>
-              <a:t>모든 성능 수치는 가상 예시입니다</a:t>
+              <a:t>Lab seminar · 5 minutes</a:t>
+            </a:r>
+          </a:p>
+        </p:txBody>
+      </p:sp>
+      <p:sp>
+        <p:nvSpPr>
+          <p:cNvPr id="6" name="S01-disclosure">
+            <a:extLst>
+              <a:ext uri="{FF2B5EF4-FFF2-40B4-BE49-F238E27FC236}">
+                <a16:creationId xmlns:a16="http://schemas.microsoft.com/office/drawing/2014/main" id="{A847D8A6-1E81-4416-955C-608099BBDF94}"/>
+              </a:ext>
+            </a:extLst>
+          </p:cNvPr>
+          <p:cNvSpPr>
+            <a:spLocks noGrp="1"/>
+          </p:cNvSpPr>
+          <p:nvPr/>
+        </p:nvSpPr>
+        <p:spPr>
+          <a:xfrm>
+            <a:off x="723900" y="6343650"/>
+            <a:ext cx="6191250" cy="247650"/>
+          </a:xfrm>
+          <a:prstGeom prst="rect">
+            <a:avLst/>
+          </a:prstGeom>
+          <a:noFill/>
+          <a:ln w="0">
+            <a:noFill/>
+          </a:ln>
+        </p:spPr>
+        <p:txBody>
+          <a:bodyPr wrap="none" lIns="0" tIns="0" rIns="0" bIns="0" anchor="ctr">
+            <a:noAutofit/>
+          </a:bodyPr>
+          <a:lstStyle/>
+          <a:p>
+            <a:pPr>
+              <a:defRPr sz="1275" b="0">
+                <a:solidFill>
+                  <a:srgbClr val="586C68"/>
+                </a:solidFill>
+                <a:latin typeface="Segoe UI"/>
+                <a:ea typeface="Segoe UI"/>
+                <a:cs typeface="Segoe UI"/>
+              </a:defRPr>
+            </a:pPr>
+            <a:r>
+              <a:rPr sz="1275" b="0">
+                <a:solidFill>
+                  <a:srgbClr val="586C68"/>
+                </a:solidFill>
+                <a:latin typeface="Segoe UI"/>
+                <a:ea typeface="Segoe UI"/>
+                <a:cs typeface="Segoe UI"/>
+              </a:rPr>
+              <a:t>Illustrative data · not experimental results</a:t>
             </a:r>
           </a:p>
         </p:txBody>
@@ -1565,7 +1670,7 @@
     </p:spTree>
     <p:extLst>
       <p:ext uri="{BB962C8B-B14F-4D97-AF65-F5344CB8AC3E}">
-        <p14:creationId xmlns:p14="http://schemas.microsoft.com/office/powerpoint/2010/main" val="1081520876"/>
+        <p14:creationId xmlns:p14="http://schemas.microsoft.com/office/powerpoint/2010/main" val="872901537"/>
       </p:ext>
     </p:extLst>
   </p:cSld>
@@ -1581,7 +1686,7 @@
     <p:bg>
       <p:bgPr>
         <a:solidFill>
-          <a:srgbClr val="F7FAF9"/>
+          <a:srgbClr val="F6F4EE"/>
         </a:solidFill>
         <a:effectLst/>
       </p:bgPr>
@@ -1602,10 +1707,10 @@
       </p:grpSpPr>
       <p:sp>
         <p:nvSpPr>
-          <p:cNvPr id="18" name="S02-title">
+          <p:cNvPr id="22" name="S02-section">
             <a:extLst>
               <a:ext uri="{FF2B5EF4-FFF2-40B4-BE49-F238E27FC236}">
-                <a16:creationId xmlns:a16="http://schemas.microsoft.com/office/drawing/2014/main" id="{6315F9F1-0BBD-4A88-92EC-F6EDB12505B0}"/>
+                <a16:creationId xmlns:a16="http://schemas.microsoft.com/office/drawing/2014/main" id="{38AF2B2F-DFDC-44CF-AFD0-A937CEF5A931}"/>
               </a:ext>
             </a:extLst>
           </p:cNvPr>
@@ -1616,8 +1721,8 @@
         </p:nvSpPr>
         <p:spPr>
           <a:xfrm>
-            <a:off x="609600" y="438150"/>
-            <a:ext cx="10972800" cy="666750"/>
+            <a:off x="685800" y="400050"/>
+            <a:ext cx="10744200" cy="257175"/>
           </a:xfrm>
           <a:prstGeom prst="rect">
             <a:avLst/>
@@ -1634,35 +1739,35 @@
           <a:lstStyle/>
           <a:p>
             <a:pPr>
-              <a:defRPr sz="3375" b="1">
-                <a:solidFill>
-                  <a:srgbClr val="173F40"/>
-                </a:solidFill>
-                <a:latin typeface="Malgun Gothic"/>
-                <a:ea typeface="Malgun Gothic"/>
-                <a:cs typeface="Malgun Gothic"/>
+              <a:defRPr sz="1425" b="0">
+                <a:solidFill>
+                  <a:srgbClr val="287D78"/>
+                </a:solidFill>
+                <a:latin typeface="Segoe UI"/>
+                <a:ea typeface="Segoe UI"/>
+                <a:cs typeface="Segoe UI"/>
               </a:defRPr>
             </a:pPr>
             <a:r>
-              <a:rPr sz="3375" b="1">
-                <a:solidFill>
-                  <a:srgbClr val="173F40"/>
-                </a:solidFill>
-                <a:latin typeface="Malgun Gothic"/>
-                <a:ea typeface="Malgun Gothic"/>
-                <a:cs typeface="Malgun Gothic"/>
+              <a:rPr sz="1425" b="0">
+                <a:solidFill>
+                  <a:srgbClr val="287D78"/>
+                </a:solidFill>
+                <a:latin typeface="Segoe UI"/>
+                <a:ea typeface="Segoe UI"/>
+                <a:cs typeface="Segoe UI"/>
               </a:rPr>
-              <a:t>원본 모델, 지식 증류, INT8 양자화</a:t>
+              <a:t>METHOD / TWO COMPRESSION STEPS</a:t>
             </a:r>
           </a:p>
         </p:txBody>
       </p:sp>
       <p:sp>
         <p:nvSpPr>
-          <p:cNvPr id="2" name="S02-disclosure">
+          <p:cNvPr id="2" name="S02-title">
             <a:extLst>
               <a:ext uri="{FF2B5EF4-FFF2-40B4-BE49-F238E27FC236}">
-                <a16:creationId xmlns:a16="http://schemas.microsoft.com/office/drawing/2014/main" id="{338D7C5E-66FA-469C-A9AD-BBBEBE263C2C}"/>
+                <a16:creationId xmlns:a16="http://schemas.microsoft.com/office/drawing/2014/main" id="{B0A18481-3748-46C8-B040-D773482F990F}"/>
               </a:ext>
             </a:extLst>
           </p:cNvPr>
@@ -1673,8 +1778,8 @@
         </p:nvSpPr>
         <p:spPr>
           <a:xfrm>
-            <a:off x="609600" y="6286500"/>
-            <a:ext cx="9525000" cy="285750"/>
+            <a:off x="685800" y="895350"/>
+            <a:ext cx="10820400" cy="666750"/>
           </a:xfrm>
           <a:prstGeom prst="rect">
             <a:avLst/>
@@ -1691,35 +1796,35 @@
           <a:lstStyle/>
           <a:p>
             <a:pPr>
-              <a:defRPr sz="1425" b="0">
-                <a:solidFill>
-                  <a:srgbClr val="456162"/>
-                </a:solidFill>
-                <a:latin typeface="Malgun Gothic"/>
-                <a:ea typeface="Malgun Gothic"/>
-                <a:cs typeface="Malgun Gothic"/>
+              <a:defRPr sz="3225" b="0">
+                <a:solidFill>
+                  <a:srgbClr val="1E302F"/>
+                </a:solidFill>
+                <a:latin typeface="Segoe UI"/>
+                <a:ea typeface="Segoe UI"/>
+                <a:cs typeface="Segoe UI"/>
               </a:defRPr>
             </a:pPr>
             <a:r>
-              <a:rPr sz="1425" b="0">
-                <a:solidFill>
-                  <a:srgbClr val="456162"/>
-                </a:solidFill>
-                <a:latin typeface="Malgun Gothic"/>
-                <a:ea typeface="Malgun Gothic"/>
-                <a:cs typeface="Malgun Gothic"/>
+              <a:rPr sz="3225" b="0">
+                <a:solidFill>
+                  <a:srgbClr val="1E302F"/>
+                </a:solidFill>
+                <a:latin typeface="Segoe UI"/>
+                <a:ea typeface="Segoe UI"/>
+                <a:cs typeface="Segoe UI"/>
               </a:rPr>
-              <a:t>모든 성능 수치는 가상 예시입니다</a:t>
+              <a:t>From a teacher to a compact student</a:t>
             </a:r>
           </a:p>
         </p:txBody>
       </p:sp>
       <p:sp>
         <p:nvSpPr>
-          <p:cNvPr id="3" name="S02-number">
+          <p:cNvPr id="3" name="S02-disclosure">
             <a:extLst>
               <a:ext uri="{FF2B5EF4-FFF2-40B4-BE49-F238E27FC236}">
-                <a16:creationId xmlns:a16="http://schemas.microsoft.com/office/drawing/2014/main" id="{DABE90B2-EE35-41C5-8FF0-811B566FB3CC}"/>
+                <a16:creationId xmlns:a16="http://schemas.microsoft.com/office/drawing/2014/main" id="{0D26C020-E687-43A2-9252-B85FDA2591D6}"/>
               </a:ext>
             </a:extLst>
           </p:cNvPr>
@@ -1730,8 +1835,8 @@
         </p:nvSpPr>
         <p:spPr>
           <a:xfrm>
-            <a:off x="10953750" y="6286500"/>
-            <a:ext cx="609600" cy="285750"/>
+            <a:off x="685800" y="6372225"/>
+            <a:ext cx="9525000" cy="219075"/>
           </a:xfrm>
           <a:prstGeom prst="rect">
             <a:avLst/>
@@ -1748,23 +1853,80 @@
           <a:lstStyle/>
           <a:p>
             <a:pPr>
-              <a:defRPr sz="1425" b="0">
-                <a:solidFill>
-                  <a:srgbClr val="456162"/>
-                </a:solidFill>
-                <a:latin typeface="Malgun Gothic"/>
-                <a:ea typeface="Malgun Gothic"/>
-                <a:cs typeface="Malgun Gothic"/>
+              <a:defRPr sz="1275" b="0">
+                <a:solidFill>
+                  <a:srgbClr val="586C68"/>
+                </a:solidFill>
+                <a:latin typeface="Segoe UI"/>
+                <a:ea typeface="Segoe UI"/>
+                <a:cs typeface="Segoe UI"/>
               </a:defRPr>
             </a:pPr>
             <a:r>
-              <a:rPr sz="1425" b="0">
-                <a:solidFill>
-                  <a:srgbClr val="456162"/>
-                </a:solidFill>
-                <a:latin typeface="Malgun Gothic"/>
-                <a:ea typeface="Malgun Gothic"/>
-                <a:cs typeface="Malgun Gothic"/>
+              <a:rPr sz="1275" b="0">
+                <a:solidFill>
+                  <a:srgbClr val="586C68"/>
+                </a:solidFill>
+                <a:latin typeface="Segoe UI"/>
+                <a:ea typeface="Segoe UI"/>
+                <a:cs typeface="Segoe UI"/>
+              </a:rPr>
+              <a:t>Illustrative data · not experimental results</a:t>
+            </a:r>
+          </a:p>
+        </p:txBody>
+      </p:sp>
+      <p:sp>
+        <p:nvSpPr>
+          <p:cNvPr id="4" name="S02-number">
+            <a:extLst>
+              <a:ext uri="{FF2B5EF4-FFF2-40B4-BE49-F238E27FC236}">
+                <a16:creationId xmlns:a16="http://schemas.microsoft.com/office/drawing/2014/main" id="{16C78E3E-1CEB-47EA-B53A-2BEE9C7E5285}"/>
+              </a:ext>
+            </a:extLst>
+          </p:cNvPr>
+          <p:cNvSpPr>
+            <a:spLocks noGrp="1"/>
+          </p:cNvSpPr>
+          <p:nvPr/>
+        </p:nvSpPr>
+        <p:spPr>
+          <a:xfrm>
+            <a:off x="11144250" y="6372225"/>
+            <a:ext cx="361950" cy="219075"/>
+          </a:xfrm>
+          <a:prstGeom prst="rect">
+            <a:avLst/>
+          </a:prstGeom>
+          <a:noFill/>
+          <a:ln w="0">
+            <a:noFill/>
+          </a:ln>
+        </p:spPr>
+        <p:txBody>
+          <a:bodyPr wrap="none" lIns="0" tIns="0" rIns="0" bIns="0" anchor="ctr">
+            <a:noAutofit/>
+          </a:bodyPr>
+          <a:lstStyle/>
+          <a:p>
+            <a:pPr>
+              <a:defRPr sz="1275" b="0">
+                <a:solidFill>
+                  <a:srgbClr val="586C68"/>
+                </a:solidFill>
+                <a:latin typeface="Segoe UI"/>
+                <a:ea typeface="Segoe UI"/>
+                <a:cs typeface="Segoe UI"/>
+              </a:defRPr>
+            </a:pPr>
+            <a:r>
+              <a:rPr sz="1275" b="0">
+                <a:solidFill>
+                  <a:srgbClr val="586C68"/>
+                </a:solidFill>
+                <a:latin typeface="Segoe UI"/>
+                <a:ea typeface="Segoe UI"/>
+                <a:cs typeface="Segoe UI"/>
               </a:rPr>
               <a:t>02</a:t>
             </a:r>
@@ -1773,10 +1935,10 @@
       </p:sp>
       <p:sp>
         <p:nvSpPr>
-          <p:cNvPr id="4" name="S02-stage-1">
+          <p:cNvPr id="5" name="S02-marker-1">
             <a:extLst>
               <a:ext uri="{FF2B5EF4-FFF2-40B4-BE49-F238E27FC236}">
-                <a16:creationId xmlns:a16="http://schemas.microsoft.com/office/drawing/2014/main" id="{4BF2E19D-7875-4BAC-9595-A5E06884DD12}"/>
+                <a16:creationId xmlns:a16="http://schemas.microsoft.com/office/drawing/2014/main" id="{A1CCCF3E-D131-4C6A-8EBA-BE7D30BBDCC5}"/>
               </a:ext>
             </a:extLst>
           </p:cNvPr>
@@ -1787,53 +1949,53 @@
         </p:nvSpPr>
         <p:spPr>
           <a:xfrm>
-            <a:off x="609600" y="2343150"/>
-            <a:ext cx="3124200" cy="1066800"/>
+            <a:off x="685800" y="2333625"/>
+            <a:ext cx="533400" cy="533400"/>
           </a:xfrm>
-          <a:prstGeom prst="rect">
+          <a:prstGeom prst="ellipse">
             <a:avLst/>
           </a:prstGeom>
           <a:solidFill>
-            <a:srgbClr val="7D9192"/>
+            <a:srgbClr val="E8EDE5"/>
           </a:solidFill>
           <a:ln w="0">
             <a:noFill/>
           </a:ln>
         </p:spPr>
         <p:txBody>
-          <a:bodyPr anchor="ctr"/>
+          <a:bodyPr lIns="0" tIns="0" rIns="0" bIns="0" anchor="ctr"/>
           <a:lstStyle/>
           <a:p>
             <a:pPr algn="ctr">
-              <a:defRPr sz="2550" b="1">
-                <a:solidFill>
-                  <a:srgbClr val="FFFFFF"/>
-                </a:solidFill>
-                <a:latin typeface="Malgun Gothic"/>
-                <a:ea typeface="Malgun Gothic"/>
-                <a:cs typeface="Malgun Gothic"/>
+              <a:defRPr sz="1650">
+                <a:solidFill>
+                  <a:srgbClr val="287D78"/>
+                </a:solidFill>
+                <a:latin typeface="Segoe UI"/>
+                <a:ea typeface="Segoe UI"/>
+                <a:cs typeface="Segoe UI"/>
               </a:defRPr>
             </a:pPr>
             <a:r>
-              <a:rPr sz="2550" b="1">
-                <a:solidFill>
-                  <a:srgbClr val="FFFFFF"/>
-                </a:solidFill>
-                <a:latin typeface="Malgun Gothic"/>
-                <a:ea typeface="Malgun Gothic"/>
-                <a:cs typeface="Malgun Gothic"/>
+              <a:rPr sz="1650">
+                <a:solidFill>
+                  <a:srgbClr val="287D78"/>
+                </a:solidFill>
+                <a:latin typeface="Segoe UI"/>
+                <a:ea typeface="Segoe UI"/>
+                <a:cs typeface="Segoe UI"/>
               </a:rPr>
-              <a:t>원본 모델</a:t>
+              <a:t>01</a:t>
             </a:r>
           </a:p>
         </p:txBody>
       </p:sp>
       <p:sp>
         <p:nvSpPr>
-          <p:cNvPr id="5" name="S02-stage-2">
+          <p:cNvPr id="6" name="S02-marker-2">
             <a:extLst>
               <a:ext uri="{FF2B5EF4-FFF2-40B4-BE49-F238E27FC236}">
-                <a16:creationId xmlns:a16="http://schemas.microsoft.com/office/drawing/2014/main" id="{5EFEBC4D-44BC-4EBC-ADA2-7FDD965511FB}"/>
+                <a16:creationId xmlns:a16="http://schemas.microsoft.com/office/drawing/2014/main" id="{E30A7E0B-6A7F-4EB3-B049-ED9215FC7920}"/>
               </a:ext>
             </a:extLst>
           </p:cNvPr>
@@ -1844,53 +2006,53 @@
         </p:nvSpPr>
         <p:spPr>
           <a:xfrm>
-            <a:off x="4533900" y="2343150"/>
-            <a:ext cx="3124200" cy="1066800"/>
+            <a:off x="4648200" y="2333625"/>
+            <a:ext cx="533400" cy="533400"/>
           </a:xfrm>
-          <a:prstGeom prst="rect">
+          <a:prstGeom prst="ellipse">
             <a:avLst/>
           </a:prstGeom>
           <a:solidFill>
-            <a:srgbClr val="007E80"/>
+            <a:srgbClr val="E8EDE5"/>
           </a:solidFill>
           <a:ln w="0">
             <a:noFill/>
           </a:ln>
         </p:spPr>
         <p:txBody>
-          <a:bodyPr anchor="ctr"/>
+          <a:bodyPr lIns="0" tIns="0" rIns="0" bIns="0" anchor="ctr"/>
           <a:lstStyle/>
           <a:p>
             <a:pPr algn="ctr">
-              <a:defRPr sz="2550" b="1">
-                <a:solidFill>
-                  <a:srgbClr val="FFFFFF"/>
-                </a:solidFill>
-                <a:latin typeface="Malgun Gothic"/>
-                <a:ea typeface="Malgun Gothic"/>
-                <a:cs typeface="Malgun Gothic"/>
+              <a:defRPr sz="1650">
+                <a:solidFill>
+                  <a:srgbClr val="287D78"/>
+                </a:solidFill>
+                <a:latin typeface="Segoe UI"/>
+                <a:ea typeface="Segoe UI"/>
+                <a:cs typeface="Segoe UI"/>
               </a:defRPr>
             </a:pPr>
             <a:r>
-              <a:rPr sz="2550" b="1">
-                <a:solidFill>
-                  <a:srgbClr val="FFFFFF"/>
-                </a:solidFill>
-                <a:latin typeface="Malgun Gothic"/>
-                <a:ea typeface="Malgun Gothic"/>
-                <a:cs typeface="Malgun Gothic"/>
+              <a:rPr sz="1650">
+                <a:solidFill>
+                  <a:srgbClr val="287D78"/>
+                </a:solidFill>
+                <a:latin typeface="Segoe UI"/>
+                <a:ea typeface="Segoe UI"/>
+                <a:cs typeface="Segoe UI"/>
               </a:rPr>
-              <a:t>지식 증류</a:t>
+              <a:t>02</a:t>
             </a:r>
           </a:p>
         </p:txBody>
       </p:sp>
       <p:sp>
         <p:nvSpPr>
-          <p:cNvPr id="6" name="S02-stage-3">
+          <p:cNvPr id="7" name="S02-marker-3">
             <a:extLst>
               <a:ext uri="{FF2B5EF4-FFF2-40B4-BE49-F238E27FC236}">
-                <a16:creationId xmlns:a16="http://schemas.microsoft.com/office/drawing/2014/main" id="{9DE3AEFA-1DC3-4FF1-B401-3676139D4389}"/>
+                <a16:creationId xmlns:a16="http://schemas.microsoft.com/office/drawing/2014/main" id="{589A3122-8F0E-4C97-A5B4-3A6FE7F24859}"/>
               </a:ext>
             </a:extLst>
           </p:cNvPr>
@@ -1901,67 +2063,67 @@
         </p:nvSpPr>
         <p:spPr>
           <a:xfrm>
-            <a:off x="8458200" y="2343150"/>
-            <a:ext cx="3124200" cy="1066800"/>
+            <a:off x="8610600" y="2333625"/>
+            <a:ext cx="533400" cy="533400"/>
           </a:xfrm>
-          <a:prstGeom prst="rect">
+          <a:prstGeom prst="ellipse">
             <a:avLst/>
           </a:prstGeom>
           <a:solidFill>
-            <a:srgbClr val="173F40"/>
+            <a:srgbClr val="287D78"/>
           </a:solidFill>
           <a:ln w="0">
             <a:noFill/>
           </a:ln>
         </p:spPr>
         <p:txBody>
-          <a:bodyPr anchor="ctr"/>
+          <a:bodyPr lIns="0" tIns="0" rIns="0" bIns="0" anchor="ctr"/>
           <a:lstStyle/>
           <a:p>
             <a:pPr algn="ctr">
-              <a:defRPr sz="2550" b="1">
+              <a:defRPr sz="1650">
                 <a:solidFill>
                   <a:srgbClr val="FFFFFF"/>
                 </a:solidFill>
-                <a:latin typeface="Malgun Gothic"/>
-                <a:ea typeface="Malgun Gothic"/>
-                <a:cs typeface="Malgun Gothic"/>
+                <a:latin typeface="Segoe UI"/>
+                <a:ea typeface="Segoe UI"/>
+                <a:cs typeface="Segoe UI"/>
               </a:defRPr>
             </a:pPr>
             <a:r>
-              <a:rPr sz="2550" b="1">
+              <a:rPr sz="1650">
                 <a:solidFill>
                   <a:srgbClr val="FFFFFF"/>
                 </a:solidFill>
-                <a:latin typeface="Malgun Gothic"/>
-                <a:ea typeface="Malgun Gothic"/>
-                <a:cs typeface="Malgun Gothic"/>
+                <a:latin typeface="Segoe UI"/>
+                <a:ea typeface="Segoe UI"/>
+                <a:cs typeface="Segoe UI"/>
               </a:rPr>
-              <a:t>INT8 양자화</a:t>
+              <a:t>03</a:t>
             </a:r>
           </a:p>
         </p:txBody>
       </p:sp>
       <p:cxnSp>
         <p:nvCxnSpPr>
-          <p:cNvPr id="24" name="S02-link-2"/>
+          <p:cNvPr id="29" name="S02-link-2"/>
           <p:cNvCxnSpPr>
-            <a:stCxn id="4" idx="3"/>
-            <a:endCxn id="5" idx="1"/>
+            <a:stCxn id="5" idx="6"/>
+            <a:endCxn id="6" idx="2"/>
           </p:cNvCxnSpPr>
           <p:nvPr/>
         </p:nvCxnSpPr>
         <p:spPr>
           <a:xfrm>
-            <a:off x="3733800" y="2876550"/>
-            <a:ext cx="800100" cy="0"/>
+            <a:off x="1219200" y="2600325"/>
+            <a:ext cx="3429000" cy="0"/>
           </a:xfrm>
           <a:prstGeom prst="straightConnector1">
             <a:avLst/>
           </a:prstGeom>
-          <a:ln w="28575">
+          <a:ln w="17145">
             <a:solidFill>
-              <a:srgbClr val="456162"/>
+              <a:srgbClr val="9EADA5"/>
             </a:solidFill>
             <a:tailEnd type="triangle" w="sm" len="sm"/>
           </a:ln>
@@ -1969,24 +2131,24 @@
       </p:cxnSp>
       <p:cxnSp>
         <p:nvCxnSpPr>
-          <p:cNvPr id="25" name="S02-link-3"/>
+          <p:cNvPr id="30" name="S02-link-3"/>
           <p:cNvCxnSpPr>
-            <a:stCxn id="5" idx="3"/>
-            <a:endCxn id="6" idx="1"/>
+            <a:stCxn id="6" idx="6"/>
+            <a:endCxn id="7" idx="2"/>
           </p:cNvCxnSpPr>
           <p:nvPr/>
         </p:nvCxnSpPr>
         <p:spPr>
           <a:xfrm>
-            <a:off x="7658100" y="2876550"/>
-            <a:ext cx="800100" cy="0"/>
+            <a:off x="5181600" y="2600325"/>
+            <a:ext cx="3429000" cy="0"/>
           </a:xfrm>
           <a:prstGeom prst="straightConnector1">
             <a:avLst/>
           </a:prstGeom>
-          <a:ln w="28575">
+          <a:ln w="17145">
             <a:solidFill>
-              <a:srgbClr val="456162"/>
+              <a:srgbClr val="9EADA5"/>
             </a:solidFill>
             <a:tailEnd type="triangle" w="sm" len="sm"/>
           </a:ln>
@@ -1994,10 +2156,10 @@
       </p:cxnSp>
       <p:sp>
         <p:nvSpPr>
-          <p:cNvPr id="9" name="S02-flow-2">
+          <p:cNvPr id="10" name="S02-flow-2">
             <a:extLst>
               <a:ext uri="{FF2B5EF4-FFF2-40B4-BE49-F238E27FC236}">
-                <a16:creationId xmlns:a16="http://schemas.microsoft.com/office/drawing/2014/main" id="{63D8E09F-B10B-4A88-A3F4-8B69AB6D7956}"/>
+                <a16:creationId xmlns:a16="http://schemas.microsoft.com/office/drawing/2014/main" id="{C3FB482B-8C3A-4AF4-9139-6144D2C21705}"/>
               </a:ext>
             </a:extLst>
           </p:cNvPr>
@@ -2008,8 +2170,8 @@
         </p:nvSpPr>
         <p:spPr>
           <a:xfrm>
-            <a:off x="2800350" y="1781175"/>
-            <a:ext cx="3238500" cy="361950"/>
+            <a:off x="1466850" y="2076450"/>
+            <a:ext cx="2971800" cy="352425"/>
           </a:xfrm>
           <a:prstGeom prst="rect">
             <a:avLst/>
@@ -2026,35 +2188,286 @@
           <a:lstStyle/>
           <a:p>
             <a:pPr>
+              <a:defRPr sz="1575" b="0">
+                <a:solidFill>
+                  <a:srgbClr val="586C68"/>
+                </a:solidFill>
+                <a:latin typeface="Segoe UI"/>
+                <a:ea typeface="Segoe UI"/>
+                <a:cs typeface="Segoe UI"/>
+              </a:defRPr>
+            </a:pPr>
+            <a:r>
+              <a:rPr sz="1575" b="0">
+                <a:solidFill>
+                  <a:srgbClr val="586C68"/>
+                </a:solidFill>
+                <a:latin typeface="Segoe UI"/>
+                <a:ea typeface="Segoe UI"/>
+                <a:cs typeface="Segoe UI"/>
+              </a:rPr>
+              <a:t>Prediction transfer</a:t>
+            </a:r>
+          </a:p>
+        </p:txBody>
+      </p:sp>
+      <p:sp>
+        <p:nvSpPr>
+          <p:cNvPr id="11" name="S02-flow-3">
+            <a:extLst>
+              <a:ext uri="{FF2B5EF4-FFF2-40B4-BE49-F238E27FC236}">
+                <a16:creationId xmlns:a16="http://schemas.microsoft.com/office/drawing/2014/main" id="{D6EC3D8F-1037-4D7D-8D4F-6F442121BDBC}"/>
+              </a:ext>
+            </a:extLst>
+          </p:cNvPr>
+          <p:cNvSpPr>
+            <a:spLocks noGrp="1"/>
+          </p:cNvSpPr>
+          <p:nvPr/>
+        </p:nvSpPr>
+        <p:spPr>
+          <a:xfrm>
+            <a:off x="5429250" y="2076450"/>
+            <a:ext cx="2971800" cy="352425"/>
+          </a:xfrm>
+          <a:prstGeom prst="rect">
+            <a:avLst/>
+          </a:prstGeom>
+          <a:noFill/>
+          <a:ln w="0">
+            <a:noFill/>
+          </a:ln>
+        </p:spPr>
+        <p:txBody>
+          <a:bodyPr wrap="none" lIns="0" tIns="0" rIns="0" bIns="0" anchor="ctr">
+            <a:noAutofit/>
+          </a:bodyPr>
+          <a:lstStyle/>
+          <a:p>
+            <a:pPr>
+              <a:defRPr sz="1575" b="0">
+                <a:solidFill>
+                  <a:srgbClr val="586C68"/>
+                </a:solidFill>
+                <a:latin typeface="Segoe UI"/>
+                <a:ea typeface="Segoe UI"/>
+                <a:cs typeface="Segoe UI"/>
+              </a:defRPr>
+            </a:pPr>
+            <a:r>
+              <a:rPr sz="1575" b="0">
+                <a:solidFill>
+                  <a:srgbClr val="586C68"/>
+                </a:solidFill>
+                <a:latin typeface="Segoe UI"/>
+                <a:ea typeface="Segoe UI"/>
+                <a:cs typeface="Segoe UI"/>
+              </a:rPr>
+              <a:t>Numeric conversion</a:t>
+            </a:r>
+          </a:p>
+        </p:txBody>
+      </p:sp>
+      <p:sp>
+        <p:nvSpPr>
+          <p:cNvPr id="12" name="S02-stage-1">
+            <a:extLst>
+              <a:ext uri="{FF2B5EF4-FFF2-40B4-BE49-F238E27FC236}">
+                <a16:creationId xmlns:a16="http://schemas.microsoft.com/office/drawing/2014/main" id="{8985360B-9721-48F9-B506-A2502A8D348A}"/>
+              </a:ext>
+            </a:extLst>
+          </p:cNvPr>
+          <p:cNvSpPr>
+            <a:spLocks noGrp="1"/>
+          </p:cNvSpPr>
+          <p:nvPr/>
+        </p:nvSpPr>
+        <p:spPr>
+          <a:xfrm>
+            <a:off x="685800" y="3152775"/>
+            <a:ext cx="3181350" cy="457200"/>
+          </a:xfrm>
+          <a:prstGeom prst="rect">
+            <a:avLst/>
+          </a:prstGeom>
+          <a:noFill/>
+          <a:ln w="0">
+            <a:noFill/>
+          </a:ln>
+        </p:spPr>
+        <p:txBody>
+          <a:bodyPr wrap="none" lIns="0" tIns="0" rIns="0" bIns="0" anchor="ctr">
+            <a:noAutofit/>
+          </a:bodyPr>
+          <a:lstStyle/>
+          <a:p>
+            <a:pPr>
+              <a:defRPr sz="2250" b="0">
+                <a:solidFill>
+                  <a:srgbClr val="1E302F"/>
+                </a:solidFill>
+                <a:latin typeface="Segoe UI"/>
+                <a:ea typeface="Segoe UI"/>
+                <a:cs typeface="Segoe UI"/>
+              </a:defRPr>
+            </a:pPr>
+            <a:r>
+              <a:rPr sz="2250" b="0">
+                <a:solidFill>
+                  <a:srgbClr val="1E302F"/>
+                </a:solidFill>
+                <a:latin typeface="Segoe UI"/>
+                <a:ea typeface="Segoe UI"/>
+                <a:cs typeface="Segoe UI"/>
+              </a:rPr>
+              <a:t>Baseline</a:t>
+            </a:r>
+          </a:p>
+        </p:txBody>
+      </p:sp>
+      <p:sp>
+        <p:nvSpPr>
+          <p:cNvPr id="13" name="S02-name-1">
+            <a:extLst>
+              <a:ext uri="{FF2B5EF4-FFF2-40B4-BE49-F238E27FC236}">
+                <a16:creationId xmlns:a16="http://schemas.microsoft.com/office/drawing/2014/main" id="{95049510-C349-4929-8584-5DBC90F89AA2}"/>
+              </a:ext>
+            </a:extLst>
+          </p:cNvPr>
+          <p:cNvSpPr>
+            <a:spLocks noGrp="1"/>
+          </p:cNvSpPr>
+          <p:nvPr/>
+        </p:nvSpPr>
+        <p:spPr>
+          <a:xfrm>
+            <a:off x="685800" y="3724275"/>
+            <a:ext cx="3095625" cy="304800"/>
+          </a:xfrm>
+          <a:prstGeom prst="rect">
+            <a:avLst/>
+          </a:prstGeom>
+          <a:noFill/>
+          <a:ln w="0">
+            <a:noFill/>
+          </a:ln>
+        </p:spPr>
+        <p:txBody>
+          <a:bodyPr wrap="none" lIns="0" tIns="0" rIns="0" bIns="0" anchor="ctr">
+            <a:noAutofit/>
+          </a:bodyPr>
+          <a:lstStyle/>
+          <a:p>
+            <a:pPr>
+              <a:defRPr sz="1575" b="0">
+                <a:solidFill>
+                  <a:srgbClr val="287D78"/>
+                </a:solidFill>
+                <a:latin typeface="Segoe UI"/>
+                <a:ea typeface="Segoe UI"/>
+                <a:cs typeface="Segoe UI"/>
+              </a:defRPr>
+            </a:pPr>
+            <a:r>
+              <a:rPr sz="1575" b="0">
+                <a:solidFill>
+                  <a:srgbClr val="287D78"/>
+                </a:solidFill>
+                <a:latin typeface="Segoe UI"/>
+                <a:ea typeface="Segoe UI"/>
+                <a:cs typeface="Segoe UI"/>
+              </a:rPr>
+              <a:t>baseline</a:t>
+            </a:r>
+          </a:p>
+        </p:txBody>
+      </p:sp>
+      <p:sp>
+        <p:nvSpPr>
+          <p:cNvPr id="14" name="S02-detail-1">
+            <a:extLst>
+              <a:ext uri="{FF2B5EF4-FFF2-40B4-BE49-F238E27FC236}">
+                <a16:creationId xmlns:a16="http://schemas.microsoft.com/office/drawing/2014/main" id="{125424C2-44BA-44FE-848B-84FD7909F3D1}"/>
+              </a:ext>
+            </a:extLst>
+          </p:cNvPr>
+          <p:cNvSpPr>
+            <a:spLocks noGrp="1"/>
+          </p:cNvSpPr>
+          <p:nvPr/>
+        </p:nvSpPr>
+        <p:spPr>
+          <a:xfrm>
+            <a:off x="685800" y="4295775"/>
+            <a:ext cx="3181350" cy="771525"/>
+          </a:xfrm>
+          <a:prstGeom prst="rect">
+            <a:avLst/>
+          </a:prstGeom>
+          <a:noFill/>
+          <a:ln w="0">
+            <a:noFill/>
+          </a:ln>
+        </p:spPr>
+        <p:txBody>
+          <a:bodyPr wrap="none" lIns="0" tIns="0" rIns="0" bIns="0" anchor="ctr">
+            <a:noAutofit/>
+          </a:bodyPr>
+          <a:lstStyle/>
+          <a:p>
+            <a:pPr>
               <a:defRPr sz="1800" b="0">
                 <a:solidFill>
-                  <a:srgbClr val="456162"/>
-                </a:solidFill>
-                <a:latin typeface="Malgun Gothic"/>
-                <a:ea typeface="Malgun Gothic"/>
-                <a:cs typeface="Malgun Gothic"/>
+                  <a:srgbClr val="586C68"/>
+                </a:solidFill>
+                <a:latin typeface="Segoe UI"/>
+                <a:ea typeface="Segoe UI"/>
+                <a:cs typeface="Segoe UI"/>
               </a:defRPr>
             </a:pPr>
             <a:r>
               <a:rPr sz="1800" b="0">
                 <a:solidFill>
-                  <a:srgbClr val="456162"/>
-                </a:solidFill>
-                <a:latin typeface="Malgun Gothic"/>
-                <a:ea typeface="Malgun Gothic"/>
-                <a:cs typeface="Malgun Gothic"/>
+                  <a:srgbClr val="586C68"/>
+                </a:solidFill>
+                <a:latin typeface="Segoe UI"/>
+                <a:ea typeface="Segoe UI"/>
+                <a:cs typeface="Segoe UI"/>
               </a:rPr>
-              <a:t>예측 지식 전달</a:t>
+              <a:t>The reference model</a:t>
             </a:r>
           </a:p>
-        </p:txBody>
-      </p:sp>
-      <p:sp>
-        <p:nvSpPr>
-          <p:cNvPr id="10" name="S02-flow-3">
+          <a:p>
+            <a:pPr>
+              <a:defRPr sz="1800" b="0">
+                <a:solidFill>
+                  <a:srgbClr val="586C68"/>
+                </a:solidFill>
+                <a:latin typeface="Segoe UI"/>
+                <a:ea typeface="Segoe UI"/>
+                <a:cs typeface="Segoe UI"/>
+              </a:defRPr>
+            </a:pPr>
+            <a:r>
+              <a:rPr sz="1800" b="0">
+                <a:solidFill>
+                  <a:srgbClr val="586C68"/>
+                </a:solidFill>
+                <a:latin typeface="Segoe UI"/>
+                <a:ea typeface="Segoe UI"/>
+                <a:cs typeface="Segoe UI"/>
+              </a:rPr>
+              <a:t>serves as the teacher.</a:t>
+            </a:r>
+          </a:p>
+        </p:txBody>
+      </p:sp>
+      <p:sp>
+        <p:nvSpPr>
+          <p:cNvPr id="15" name="S02-stage-2">
             <a:extLst>
               <a:ext uri="{FF2B5EF4-FFF2-40B4-BE49-F238E27FC236}">
-                <a16:creationId xmlns:a16="http://schemas.microsoft.com/office/drawing/2014/main" id="{B9C7067B-B2B6-42C2-8AED-705DDC143E66}"/>
+                <a16:creationId xmlns:a16="http://schemas.microsoft.com/office/drawing/2014/main" id="{E5F9886C-E7E3-4633-A958-E5212F8E5317}"/>
               </a:ext>
             </a:extLst>
           </p:cNvPr>
@@ -2065,8 +2478,8 @@
         </p:nvSpPr>
         <p:spPr>
           <a:xfrm>
-            <a:off x="6724650" y="1781175"/>
-            <a:ext cx="3238500" cy="361950"/>
+            <a:off x="4648200" y="3152775"/>
+            <a:ext cx="3181350" cy="457200"/>
           </a:xfrm>
           <a:prstGeom prst="rect">
             <a:avLst/>
@@ -2083,35 +2496,172 @@
           <a:lstStyle/>
           <a:p>
             <a:pPr>
+              <a:defRPr sz="2250" b="0">
+                <a:solidFill>
+                  <a:srgbClr val="1E302F"/>
+                </a:solidFill>
+                <a:latin typeface="Segoe UI"/>
+                <a:ea typeface="Segoe UI"/>
+                <a:cs typeface="Segoe UI"/>
+              </a:defRPr>
+            </a:pPr>
+            <a:r>
+              <a:rPr sz="2250" b="0">
+                <a:solidFill>
+                  <a:srgbClr val="1E302F"/>
+                </a:solidFill>
+                <a:latin typeface="Segoe UI"/>
+                <a:ea typeface="Segoe UI"/>
+                <a:cs typeface="Segoe UI"/>
+              </a:rPr>
+              <a:t>Distillation</a:t>
+            </a:r>
+          </a:p>
+        </p:txBody>
+      </p:sp>
+      <p:sp>
+        <p:nvSpPr>
+          <p:cNvPr id="16" name="S02-name-2">
+            <a:extLst>
+              <a:ext uri="{FF2B5EF4-FFF2-40B4-BE49-F238E27FC236}">
+                <a16:creationId xmlns:a16="http://schemas.microsoft.com/office/drawing/2014/main" id="{8E293791-745A-4D99-A079-03922D0FDB19}"/>
+              </a:ext>
+            </a:extLst>
+          </p:cNvPr>
+          <p:cNvSpPr>
+            <a:spLocks noGrp="1"/>
+          </p:cNvSpPr>
+          <p:nvPr/>
+        </p:nvSpPr>
+        <p:spPr>
+          <a:xfrm>
+            <a:off x="4648200" y="3724275"/>
+            <a:ext cx="3095625" cy="304800"/>
+          </a:xfrm>
+          <a:prstGeom prst="rect">
+            <a:avLst/>
+          </a:prstGeom>
+          <a:noFill/>
+          <a:ln w="0">
+            <a:noFill/>
+          </a:ln>
+        </p:spPr>
+        <p:txBody>
+          <a:bodyPr wrap="none" lIns="0" tIns="0" rIns="0" bIns="0" anchor="ctr">
+            <a:noAutofit/>
+          </a:bodyPr>
+          <a:lstStyle/>
+          <a:p>
+            <a:pPr>
+              <a:defRPr sz="1575" b="0">
+                <a:solidFill>
+                  <a:srgbClr val="287D78"/>
+                </a:solidFill>
+                <a:latin typeface="Segoe UI"/>
+                <a:ea typeface="Segoe UI"/>
+                <a:cs typeface="Segoe UI"/>
+              </a:defRPr>
+            </a:pPr>
+            <a:r>
+              <a:rPr sz="1575" b="0">
+                <a:solidFill>
+                  <a:srgbClr val="287D78"/>
+                </a:solidFill>
+                <a:latin typeface="Segoe UI"/>
+                <a:ea typeface="Segoe UI"/>
+                <a:cs typeface="Segoe UI"/>
+              </a:rPr>
+              <a:t>distilled</a:t>
+            </a:r>
+          </a:p>
+        </p:txBody>
+      </p:sp>
+      <p:sp>
+        <p:nvSpPr>
+          <p:cNvPr id="17" name="S02-detail-2">
+            <a:extLst>
+              <a:ext uri="{FF2B5EF4-FFF2-40B4-BE49-F238E27FC236}">
+                <a16:creationId xmlns:a16="http://schemas.microsoft.com/office/drawing/2014/main" id="{83CF5FE0-4AD3-4D18-9AFA-7920E8EF220E}"/>
+              </a:ext>
+            </a:extLst>
+          </p:cNvPr>
+          <p:cNvSpPr>
+            <a:spLocks noGrp="1"/>
+          </p:cNvSpPr>
+          <p:nvPr/>
+        </p:nvSpPr>
+        <p:spPr>
+          <a:xfrm>
+            <a:off x="4648200" y="4295775"/>
+            <a:ext cx="3181350" cy="771525"/>
+          </a:xfrm>
+          <a:prstGeom prst="rect">
+            <a:avLst/>
+          </a:prstGeom>
+          <a:noFill/>
+          <a:ln w="0">
+            <a:noFill/>
+          </a:ln>
+        </p:spPr>
+        <p:txBody>
+          <a:bodyPr wrap="none" lIns="0" tIns="0" rIns="0" bIns="0" anchor="ctr">
+            <a:noAutofit/>
+          </a:bodyPr>
+          <a:lstStyle/>
+          <a:p>
+            <a:pPr>
               <a:defRPr sz="1800" b="0">
                 <a:solidFill>
-                  <a:srgbClr val="456162"/>
-                </a:solidFill>
-                <a:latin typeface="Malgun Gothic"/>
-                <a:ea typeface="Malgun Gothic"/>
-                <a:cs typeface="Malgun Gothic"/>
+                  <a:srgbClr val="586C68"/>
+                </a:solidFill>
+                <a:latin typeface="Segoe UI"/>
+                <a:ea typeface="Segoe UI"/>
+                <a:cs typeface="Segoe UI"/>
               </a:defRPr>
             </a:pPr>
             <a:r>
               <a:rPr sz="1800" b="0">
                 <a:solidFill>
-                  <a:srgbClr val="456162"/>
-                </a:solidFill>
-                <a:latin typeface="Malgun Gothic"/>
-                <a:ea typeface="Malgun Gothic"/>
-                <a:cs typeface="Malgun Gothic"/>
+                  <a:srgbClr val="586C68"/>
+                </a:solidFill>
+                <a:latin typeface="Segoe UI"/>
+                <a:ea typeface="Segoe UI"/>
+                <a:cs typeface="Segoe UI"/>
               </a:rPr>
-              <a:t>수치 표현 변환</a:t>
+              <a:t>A smaller student learns</a:t>
             </a:r>
           </a:p>
-        </p:txBody>
-      </p:sp>
-      <p:sp>
-        <p:nvSpPr>
-          <p:cNvPr id="11" name="S02-name-1">
+          <a:p>
+            <a:pPr>
+              <a:defRPr sz="1800" b="0">
+                <a:solidFill>
+                  <a:srgbClr val="586C68"/>
+                </a:solidFill>
+                <a:latin typeface="Segoe UI"/>
+                <a:ea typeface="Segoe UI"/>
+                <a:cs typeface="Segoe UI"/>
+              </a:defRPr>
+            </a:pPr>
+            <a:r>
+              <a:rPr sz="1800" b="0">
+                <a:solidFill>
+                  <a:srgbClr val="586C68"/>
+                </a:solidFill>
+                <a:latin typeface="Segoe UI"/>
+                <a:ea typeface="Segoe UI"/>
+                <a:cs typeface="Segoe UI"/>
+              </a:rPr>
+              <a:t>from teacher predictions.</a:t>
+            </a:r>
+          </a:p>
+        </p:txBody>
+      </p:sp>
+      <p:sp>
+        <p:nvSpPr>
+          <p:cNvPr id="18" name="S02-stage-3">
             <a:extLst>
               <a:ext uri="{FF2B5EF4-FFF2-40B4-BE49-F238E27FC236}">
-                <a16:creationId xmlns:a16="http://schemas.microsoft.com/office/drawing/2014/main" id="{78357F85-2057-4A51-AD28-31EEAB8821D5}"/>
+                <a16:creationId xmlns:a16="http://schemas.microsoft.com/office/drawing/2014/main" id="{7DF34022-0808-4707-8EB5-EE5830F647D9}"/>
               </a:ext>
             </a:extLst>
           </p:cNvPr>
@@ -2122,8 +2672,8 @@
         </p:nvSpPr>
         <p:spPr>
           <a:xfrm>
-            <a:off x="609600" y="3619500"/>
-            <a:ext cx="3124200" cy="400050"/>
+            <a:off x="8610600" y="3152775"/>
+            <a:ext cx="3181350" cy="457200"/>
           </a:xfrm>
           <a:prstGeom prst="rect">
             <a:avLst/>
@@ -2140,35 +2690,35 @@
           <a:lstStyle/>
           <a:p>
             <a:pPr>
-              <a:defRPr sz="2100" b="0">
-                <a:solidFill>
-                  <a:srgbClr val="456162"/>
-                </a:solidFill>
-                <a:latin typeface="Malgun Gothic"/>
-                <a:ea typeface="Malgun Gothic"/>
-                <a:cs typeface="Malgun Gothic"/>
+              <a:defRPr sz="2250" b="0">
+                <a:solidFill>
+                  <a:srgbClr val="1E302F"/>
+                </a:solidFill>
+                <a:latin typeface="Segoe UI"/>
+                <a:ea typeface="Segoe UI"/>
+                <a:cs typeface="Segoe UI"/>
               </a:defRPr>
             </a:pPr>
             <a:r>
-              <a:rPr sz="2100" b="0">
-                <a:solidFill>
-                  <a:srgbClr val="456162"/>
-                </a:solidFill>
-                <a:latin typeface="Malgun Gothic"/>
-                <a:ea typeface="Malgun Gothic"/>
-                <a:cs typeface="Malgun Gothic"/>
+              <a:rPr sz="2250" b="0">
+                <a:solidFill>
+                  <a:srgbClr val="1E302F"/>
+                </a:solidFill>
+                <a:latin typeface="Segoe UI"/>
+                <a:ea typeface="Segoe UI"/>
+                <a:cs typeface="Segoe UI"/>
               </a:rPr>
-              <a:t>baseline</a:t>
+              <a:t>INT8 quantization</a:t>
             </a:r>
           </a:p>
         </p:txBody>
       </p:sp>
       <p:sp>
         <p:nvSpPr>
-          <p:cNvPr id="12" name="S02-name-2">
+          <p:cNvPr id="19" name="S02-name-3">
             <a:extLst>
               <a:ext uri="{FF2B5EF4-FFF2-40B4-BE49-F238E27FC236}">
-                <a16:creationId xmlns:a16="http://schemas.microsoft.com/office/drawing/2014/main" id="{EB0257C9-B14C-458A-93DB-B450017F4AAF}"/>
+                <a16:creationId xmlns:a16="http://schemas.microsoft.com/office/drawing/2014/main" id="{636C148B-A2F9-4F48-A1EE-72E6A939F67A}"/>
               </a:ext>
             </a:extLst>
           </p:cNvPr>
@@ -2179,8 +2729,8 @@
         </p:nvSpPr>
         <p:spPr>
           <a:xfrm>
-            <a:off x="4533900" y="3619500"/>
-            <a:ext cx="3124200" cy="400050"/>
+            <a:off x="8610600" y="3724275"/>
+            <a:ext cx="3095625" cy="304800"/>
           </a:xfrm>
           <a:prstGeom prst="rect">
             <a:avLst/>
@@ -2197,35 +2747,35 @@
           <a:lstStyle/>
           <a:p>
             <a:pPr>
-              <a:defRPr sz="2100" b="0">
-                <a:solidFill>
-                  <a:srgbClr val="007E80"/>
-                </a:solidFill>
-                <a:latin typeface="Malgun Gothic"/>
-                <a:ea typeface="Malgun Gothic"/>
-                <a:cs typeface="Malgun Gothic"/>
+              <a:defRPr sz="1575" b="0">
+                <a:solidFill>
+                  <a:srgbClr val="287D78"/>
+                </a:solidFill>
+                <a:latin typeface="Segoe UI"/>
+                <a:ea typeface="Segoe UI"/>
+                <a:cs typeface="Segoe UI"/>
               </a:defRPr>
             </a:pPr>
             <a:r>
-              <a:rPr sz="2100" b="0">
-                <a:solidFill>
-                  <a:srgbClr val="007E80"/>
-                </a:solidFill>
-                <a:latin typeface="Malgun Gothic"/>
-                <a:ea typeface="Malgun Gothic"/>
-                <a:cs typeface="Malgun Gothic"/>
+              <a:rPr sz="1575" b="0">
+                <a:solidFill>
+                  <a:srgbClr val="287D78"/>
+                </a:solidFill>
+                <a:latin typeface="Segoe UI"/>
+                <a:ea typeface="Segoe UI"/>
+                <a:cs typeface="Segoe UI"/>
               </a:rPr>
-              <a:t>distilled</a:t>
+              <a:t>int8</a:t>
             </a:r>
           </a:p>
         </p:txBody>
       </p:sp>
       <p:sp>
         <p:nvSpPr>
-          <p:cNvPr id="13" name="S02-name-3">
+          <p:cNvPr id="20" name="S02-detail-3">
             <a:extLst>
               <a:ext uri="{FF2B5EF4-FFF2-40B4-BE49-F238E27FC236}">
-                <a16:creationId xmlns:a16="http://schemas.microsoft.com/office/drawing/2014/main" id="{9CEF6620-D8D7-4A7C-B9D7-660A1C8C332F}"/>
+                <a16:creationId xmlns:a16="http://schemas.microsoft.com/office/drawing/2014/main" id="{EA4199E6-94C7-46AF-BBBF-B1A92E9459A7}"/>
               </a:ext>
             </a:extLst>
           </p:cNvPr>
@@ -2236,8 +2786,8 @@
         </p:nvSpPr>
         <p:spPr>
           <a:xfrm>
-            <a:off x="8458200" y="3619500"/>
-            <a:ext cx="3124200" cy="400050"/>
+            <a:off x="8610600" y="4295775"/>
+            <a:ext cx="3181350" cy="771525"/>
           </a:xfrm>
           <a:prstGeom prst="rect">
             <a:avLst/>
@@ -2254,35 +2804,58 @@
           <a:lstStyle/>
           <a:p>
             <a:pPr>
-              <a:defRPr sz="2100" b="0">
-                <a:solidFill>
-                  <a:srgbClr val="173F40"/>
-                </a:solidFill>
-                <a:latin typeface="Malgun Gothic"/>
-                <a:ea typeface="Malgun Gothic"/>
-                <a:cs typeface="Malgun Gothic"/>
+              <a:defRPr sz="1800" b="0">
+                <a:solidFill>
+                  <a:srgbClr val="586C68"/>
+                </a:solidFill>
+                <a:latin typeface="Segoe UI"/>
+                <a:ea typeface="Segoe UI"/>
+                <a:cs typeface="Segoe UI"/>
               </a:defRPr>
             </a:pPr>
             <a:r>
-              <a:rPr sz="2100" b="0">
-                <a:solidFill>
-                  <a:srgbClr val="173F40"/>
-                </a:solidFill>
-                <a:latin typeface="Malgun Gothic"/>
-                <a:ea typeface="Malgun Gothic"/>
-                <a:cs typeface="Malgun Gothic"/>
+              <a:rPr sz="1800" b="0">
+                <a:solidFill>
+                  <a:srgbClr val="586C68"/>
+                </a:solidFill>
+                <a:latin typeface="Segoe UI"/>
+                <a:ea typeface="Segoe UI"/>
+                <a:cs typeface="Segoe UI"/>
               </a:rPr>
-              <a:t>int8</a:t>
+              <a:t>Represent student numbers</a:t>
             </a:r>
           </a:p>
-        </p:txBody>
-      </p:sp>
-      <p:sp>
-        <p:nvSpPr>
-          <p:cNvPr id="14" name="S02-detail-1">
+          <a:p>
+            <a:pPr>
+              <a:defRPr sz="1800" b="0">
+                <a:solidFill>
+                  <a:srgbClr val="586C68"/>
+                </a:solidFill>
+                <a:latin typeface="Segoe UI"/>
+                <a:ea typeface="Segoe UI"/>
+                <a:cs typeface="Segoe UI"/>
+              </a:defRPr>
+            </a:pPr>
+            <a:r>
+              <a:rPr sz="1800" b="0">
+                <a:solidFill>
+                  <a:srgbClr val="586C68"/>
+                </a:solidFill>
+                <a:latin typeface="Segoe UI"/>
+                <a:ea typeface="Segoe UI"/>
+                <a:cs typeface="Segoe UI"/>
+              </a:rPr>
+              <a:t>as 8-bit integers.</a:t>
+            </a:r>
+          </a:p>
+        </p:txBody>
+      </p:sp>
+      <p:sp>
+        <p:nvSpPr>
+          <p:cNvPr id="21" name="S02-caveat">
             <a:extLst>
               <a:ext uri="{FF2B5EF4-FFF2-40B4-BE49-F238E27FC236}">
-                <a16:creationId xmlns:a16="http://schemas.microsoft.com/office/drawing/2014/main" id="{C6E9E600-9F07-4925-B08A-3A052029B13F}"/>
+                <a16:creationId xmlns:a16="http://schemas.microsoft.com/office/drawing/2014/main" id="{C57FDE32-D10D-4606-886B-C68F08802B4B}"/>
               </a:ext>
             </a:extLst>
           </p:cNvPr>
@@ -2293,8 +2866,8 @@
         </p:nvSpPr>
         <p:spPr>
           <a:xfrm>
-            <a:off x="609600" y="4238625"/>
-            <a:ext cx="3124200" cy="857250"/>
+            <a:off x="685800" y="5657850"/>
+            <a:ext cx="10820400" cy="361950"/>
           </a:xfrm>
           <a:prstGeom prst="rect">
             <a:avLst/>
@@ -2311,242 +2884,25 @@
           <a:lstStyle/>
           <a:p>
             <a:pPr>
-              <a:defRPr sz="2025" b="0">
-                <a:solidFill>
-                  <a:srgbClr val="173F40"/>
-                </a:solidFill>
-                <a:latin typeface="Malgun Gothic"/>
-                <a:ea typeface="Malgun Gothic"/>
-                <a:cs typeface="Malgun Gothic"/>
+              <a:defRPr sz="1575" b="0">
+                <a:solidFill>
+                  <a:srgbClr val="586C68"/>
+                </a:solidFill>
+                <a:latin typeface="Segoe UI"/>
+                <a:ea typeface="Segoe UI"/>
+                <a:cs typeface="Segoe UI"/>
               </a:defRPr>
             </a:pPr>
             <a:r>
-              <a:rPr sz="2025" b="0">
-                <a:solidFill>
-                  <a:srgbClr val="173F40"/>
-                </a:solidFill>
-                <a:latin typeface="Malgun Gothic"/>
-                <a:ea typeface="Malgun Gothic"/>
-                <a:cs typeface="Malgun Gothic"/>
+              <a:rPr sz="1575" b="0">
+                <a:solidFill>
+                  <a:srgbClr val="586C68"/>
+                </a:solidFill>
+                <a:latin typeface="Segoe UI"/>
+                <a:ea typeface="Segoe UI"/>
+                <a:cs typeface="Segoe UI"/>
               </a:rPr>
-              <a:t>기준 모델, 교사 역할</a:t>
-            </a:r>
-          </a:p>
-        </p:txBody>
-      </p:sp>
-      <p:sp>
-        <p:nvSpPr>
-          <p:cNvPr id="15" name="S02-detail-2">
-            <a:extLst>
-              <a:ext uri="{FF2B5EF4-FFF2-40B4-BE49-F238E27FC236}">
-                <a16:creationId xmlns:a16="http://schemas.microsoft.com/office/drawing/2014/main" id="{0F1A5465-FA6D-4751-A64F-58AACA05A41B}"/>
-              </a:ext>
-            </a:extLst>
-          </p:cNvPr>
-          <p:cNvSpPr>
-            <a:spLocks noGrp="1"/>
-          </p:cNvSpPr>
-          <p:nvPr/>
-        </p:nvSpPr>
-        <p:spPr>
-          <a:xfrm>
-            <a:off x="4533900" y="4238625"/>
-            <a:ext cx="3124200" cy="857250"/>
-          </a:xfrm>
-          <a:prstGeom prst="rect">
-            <a:avLst/>
-          </a:prstGeom>
-          <a:noFill/>
-          <a:ln w="0">
-            <a:noFill/>
-          </a:ln>
-        </p:spPr>
-        <p:txBody>
-          <a:bodyPr wrap="none" lIns="0" tIns="0" rIns="0" bIns="0" anchor="ctr">
-            <a:noAutofit/>
-          </a:bodyPr>
-          <a:lstStyle/>
-          <a:p>
-            <a:pPr>
-              <a:defRPr sz="2025" b="0">
-                <a:solidFill>
-                  <a:srgbClr val="173F40"/>
-                </a:solidFill>
-                <a:latin typeface="Malgun Gothic"/>
-                <a:ea typeface="Malgun Gothic"/>
-                <a:cs typeface="Malgun Gothic"/>
-              </a:defRPr>
-            </a:pPr>
-            <a:r>
-              <a:rPr sz="2025" b="0">
-                <a:solidFill>
-                  <a:srgbClr val="173F40"/>
-                </a:solidFill>
-                <a:latin typeface="Malgun Gothic"/>
-                <a:ea typeface="Malgun Gothic"/>
-                <a:cs typeface="Malgun Gothic"/>
-              </a:rPr>
-              <a:t>교사 예측을 활용해</a:t>
-            </a:r>
-          </a:p>
-          <a:p>
-            <a:pPr>
-              <a:defRPr sz="2025" b="0">
-                <a:solidFill>
-                  <a:srgbClr val="173F40"/>
-                </a:solidFill>
-                <a:latin typeface="Malgun Gothic"/>
-                <a:ea typeface="Malgun Gothic"/>
-                <a:cs typeface="Malgun Gothic"/>
-              </a:defRPr>
-            </a:pPr>
-            <a:r>
-              <a:rPr sz="2025" b="0">
-                <a:solidFill>
-                  <a:srgbClr val="173F40"/>
-                </a:solidFill>
-                <a:latin typeface="Malgun Gothic"/>
-                <a:ea typeface="Malgun Gothic"/>
-                <a:cs typeface="Malgun Gothic"/>
-              </a:rPr>
-              <a:t>작은 학생 모델을 학습</a:t>
-            </a:r>
-          </a:p>
-        </p:txBody>
-      </p:sp>
-      <p:sp>
-        <p:nvSpPr>
-          <p:cNvPr id="16" name="S02-detail-3">
-            <a:extLst>
-              <a:ext uri="{FF2B5EF4-FFF2-40B4-BE49-F238E27FC236}">
-                <a16:creationId xmlns:a16="http://schemas.microsoft.com/office/drawing/2014/main" id="{7BE96265-20AF-47F5-858C-1B2B58B56435}"/>
-              </a:ext>
-            </a:extLst>
-          </p:cNvPr>
-          <p:cNvSpPr>
-            <a:spLocks noGrp="1"/>
-          </p:cNvSpPr>
-          <p:nvPr/>
-        </p:nvSpPr>
-        <p:spPr>
-          <a:xfrm>
-            <a:off x="8458200" y="4238625"/>
-            <a:ext cx="3124200" cy="857250"/>
-          </a:xfrm>
-          <a:prstGeom prst="rect">
-            <a:avLst/>
-          </a:prstGeom>
-          <a:noFill/>
-          <a:ln w="0">
-            <a:noFill/>
-          </a:ln>
-        </p:spPr>
-        <p:txBody>
-          <a:bodyPr wrap="none" lIns="0" tIns="0" rIns="0" bIns="0" anchor="ctr">
-            <a:noAutofit/>
-          </a:bodyPr>
-          <a:lstStyle/>
-          <a:p>
-            <a:pPr>
-              <a:defRPr sz="2025" b="0">
-                <a:solidFill>
-                  <a:srgbClr val="173F40"/>
-                </a:solidFill>
-                <a:latin typeface="Malgun Gothic"/>
-                <a:ea typeface="Malgun Gothic"/>
-                <a:cs typeface="Malgun Gothic"/>
-              </a:defRPr>
-            </a:pPr>
-            <a:r>
-              <a:rPr sz="2025" b="0">
-                <a:solidFill>
-                  <a:srgbClr val="173F40"/>
-                </a:solidFill>
-                <a:latin typeface="Malgun Gothic"/>
-                <a:ea typeface="Malgun Gothic"/>
-                <a:cs typeface="Malgun Gothic"/>
-              </a:rPr>
-              <a:t>학생 모델의 수치를</a:t>
-            </a:r>
-          </a:p>
-          <a:p>
-            <a:pPr>
-              <a:defRPr sz="2025" b="0">
-                <a:solidFill>
-                  <a:srgbClr val="173F40"/>
-                </a:solidFill>
-                <a:latin typeface="Malgun Gothic"/>
-                <a:ea typeface="Malgun Gothic"/>
-                <a:cs typeface="Malgun Gothic"/>
-              </a:defRPr>
-            </a:pPr>
-            <a:r>
-              <a:rPr sz="2025" b="0">
-                <a:solidFill>
-                  <a:srgbClr val="173F40"/>
-                </a:solidFill>
-                <a:latin typeface="Malgun Gothic"/>
-                <a:ea typeface="Malgun Gothic"/>
-                <a:cs typeface="Malgun Gothic"/>
-              </a:rPr>
-              <a:t>8비트 정수로 표현</a:t>
-            </a:r>
-          </a:p>
-        </p:txBody>
-      </p:sp>
-      <p:sp>
-        <p:nvSpPr>
-          <p:cNvPr id="17" name="S02-caveat">
-            <a:extLst>
-              <a:ext uri="{FF2B5EF4-FFF2-40B4-BE49-F238E27FC236}">
-                <a16:creationId xmlns:a16="http://schemas.microsoft.com/office/drawing/2014/main" id="{7B4DF687-57F2-49B1-943F-AC36FF2C1499}"/>
-              </a:ext>
-            </a:extLst>
-          </p:cNvPr>
-          <p:cNvSpPr>
-            <a:spLocks noGrp="1"/>
-          </p:cNvSpPr>
-          <p:nvPr/>
-        </p:nvSpPr>
-        <p:spPr>
-          <a:xfrm>
-            <a:off x="609600" y="5572125"/>
-            <a:ext cx="10953750" cy="428625"/>
-          </a:xfrm>
-          <a:prstGeom prst="rect">
-            <a:avLst/>
-          </a:prstGeom>
-          <a:noFill/>
-          <a:ln w="0">
-            <a:noFill/>
-          </a:ln>
-        </p:spPr>
-        <p:txBody>
-          <a:bodyPr wrap="none" lIns="0" tIns="0" rIns="0" bIns="0" anchor="ctr">
-            <a:noAutofit/>
-          </a:bodyPr>
-          <a:lstStyle/>
-          <a:p>
-            <a:pPr>
-              <a:defRPr sz="1725" b="0">
-                <a:solidFill>
-                  <a:srgbClr val="456162"/>
-                </a:solidFill>
-                <a:latin typeface="Malgun Gothic"/>
-                <a:ea typeface="Malgun Gothic"/>
-                <a:cs typeface="Malgun Gothic"/>
-              </a:defRPr>
-            </a:pPr>
-            <a:r>
-              <a:rPr sz="1725" b="0">
-                <a:solidFill>
-                  <a:srgbClr val="456162"/>
-                </a:solidFill>
-                <a:latin typeface="Malgun Gothic"/>
-                <a:ea typeface="Malgun Gothic"/>
-                <a:cs typeface="Malgun Gothic"/>
-              </a:rPr>
-              <a:t>개념도이며 모델 구조·학습 설정·양자화 범위는 미제공</a:t>
+              <a:t>Conceptual workflow. Architecture and quantization scope are unspecified.</a:t>
             </a:r>
           </a:p>
         </p:txBody>
@@ -2554,7 +2910,7 @@
     </p:spTree>
     <p:extLst>
       <p:ext uri="{BB962C8B-B14F-4D97-AF65-F5344CB8AC3E}">
-        <p14:creationId xmlns:p14="http://schemas.microsoft.com/office/powerpoint/2010/main" val="1768447204"/>
+        <p14:creationId xmlns:p14="http://schemas.microsoft.com/office/powerpoint/2010/main" val="1999575251"/>
       </p:ext>
     </p:extLst>
   </p:cSld>
@@ -2595,7 +2951,7 @@
                                           </p:stCondLst>
                                         </p:cTn>
                                         <p:tgtEl>
-                                          <p:spTgt spid="5"/>
+                                          <p:spTgt spid="6"/>
                                         </p:tgtEl>
                                         <p:attrNameLst>
                                           <p:attrName>style.visibility</p:attrName>
@@ -2609,7 +2965,7 @@
                                       <p:cBhvr>
                                         <p:cTn id="7" dur="350"/>
                                         <p:tgtEl>
-                                          <p:spTgt spid="5"/>
+                                          <p:spTgt spid="6"/>
                                         </p:tgtEl>
                                       </p:cBhvr>
                                     </p:animEffect>
@@ -2630,7 +2986,7 @@
                                           </p:stCondLst>
                                         </p:cTn>
                                         <p:tgtEl>
-                                          <p:spTgt spid="24"/>
+                                          <p:spTgt spid="29"/>
                                         </p:tgtEl>
                                         <p:attrNameLst>
                                           <p:attrName>style.visibility</p:attrName>
@@ -2644,7 +3000,7 @@
                                       <p:cBhvr>
                                         <p:cTn id="10" dur="350"/>
                                         <p:tgtEl>
-                                          <p:spTgt spid="24"/>
+                                          <p:spTgt spid="29"/>
                                         </p:tgtEl>
                                       </p:cBhvr>
                                     </p:animEffect>
@@ -2665,7 +3021,7 @@
                                           </p:stCondLst>
                                         </p:cTn>
                                         <p:tgtEl>
-                                          <p:spTgt spid="9"/>
+                                          <p:spTgt spid="10"/>
                                         </p:tgtEl>
                                         <p:attrNameLst>
                                           <p:attrName>style.visibility</p:attrName>
@@ -2679,7 +3035,7 @@
                                       <p:cBhvr>
                                         <p:cTn id="13" dur="350"/>
                                         <p:tgtEl>
-                                          <p:spTgt spid="9"/>
+                                          <p:spTgt spid="10"/>
                                         </p:tgtEl>
                                       </p:cBhvr>
                                     </p:animEffect>
@@ -2700,7 +3056,7 @@
                                           </p:stCondLst>
                                         </p:cTn>
                                         <p:tgtEl>
-                                          <p:spTgt spid="12"/>
+                                          <p:spTgt spid="15"/>
                                         </p:tgtEl>
                                         <p:attrNameLst>
                                           <p:attrName>style.visibility</p:attrName>
@@ -2714,7 +3070,7 @@
                                       <p:cBhvr>
                                         <p:cTn id="16" dur="350"/>
                                         <p:tgtEl>
-                                          <p:spTgt spid="12"/>
+                                          <p:spTgt spid="15"/>
                                         </p:tgtEl>
                                       </p:cBhvr>
                                     </p:animEffect>
@@ -2735,7 +3091,7 @@
                                           </p:stCondLst>
                                         </p:cTn>
                                         <p:tgtEl>
-                                          <p:spTgt spid="15"/>
+                                          <p:spTgt spid="16"/>
                                         </p:tgtEl>
                                         <p:attrNameLst>
                                           <p:attrName>style.visibility</p:attrName>
@@ -2749,7 +3105,42 @@
                                       <p:cBhvr>
                                         <p:cTn id="19" dur="350"/>
                                         <p:tgtEl>
-                                          <p:spTgt spid="15"/>
+                                          <p:spTgt spid="16"/>
+                                        </p:tgtEl>
+                                      </p:cBhvr>
+                                    </p:animEffect>
+                                  </p:childTnLst>
+                                </p:cTn>
+                              </p:par>
+                              <p:par>
+                                <p:cTn id="20" presetID="10" presetClass="entr" presetSubtype="0" fill="hold" grpId="0" nodeType="withEffect">
+                                  <p:stCondLst>
+                                    <p:cond delay="0"/>
+                                  </p:stCondLst>
+                                  <p:childTnLst>
+                                    <p:set>
+                                      <p:cBhvr>
+                                        <p:cTn id="21" dur="1" fill="hold">
+                                          <p:stCondLst>
+                                            <p:cond delay="0"/>
+                                          </p:stCondLst>
+                                        </p:cTn>
+                                        <p:tgtEl>
+                                          <p:spTgt spid="17"/>
+                                        </p:tgtEl>
+                                        <p:attrNameLst>
+                                          <p:attrName>style.visibility</p:attrName>
+                                        </p:attrNameLst>
+                                      </p:cBhvr>
+                                      <p:to>
+                                        <p:strVal val="visible"/>
+                                      </p:to>
+                                    </p:set>
+                                    <p:animEffect transition="in" filter="fade">
+                                      <p:cBhvr>
+                                        <p:cTn id="22" dur="350"/>
+                                        <p:tgtEl>
+                                          <p:spTgt spid="17"/>
                                         </p:tgtEl>
                                       </p:cBhvr>
                                     </p:animEffect>
@@ -2763,54 +3154,19 @@
                     </p:cTn>
                   </p:par>
                   <p:par>
-                    <p:cTn id="20" fill="hold">
+                    <p:cTn id="23" fill="hold">
                       <p:stCondLst>
                         <p:cond delay="indefinite"/>
                       </p:stCondLst>
                       <p:childTnLst>
                         <p:par>
-                          <p:cTn id="21" fill="hold">
+                          <p:cTn id="24" fill="hold">
                             <p:stCondLst>
                               <p:cond delay="0"/>
                             </p:stCondLst>
                             <p:childTnLst>
                               <p:par>
-                                <p:cTn id="22" presetID="10" presetClass="entr" presetSubtype="0" fill="hold" grpId="0" nodeType="clickEffect">
-                                  <p:stCondLst>
-                                    <p:cond delay="0"/>
-                                  </p:stCondLst>
-                                  <p:childTnLst>
-                                    <p:set>
-                                      <p:cBhvr>
-                                        <p:cTn id="23" dur="1" fill="hold">
-                                          <p:stCondLst>
-                                            <p:cond delay="0"/>
-                                          </p:stCondLst>
-                                        </p:cTn>
-                                        <p:tgtEl>
-                                          <p:spTgt spid="6"/>
-                                        </p:tgtEl>
-                                        <p:attrNameLst>
-                                          <p:attrName>style.visibility</p:attrName>
-                                        </p:attrNameLst>
-                                      </p:cBhvr>
-                                      <p:to>
-                                        <p:strVal val="visible"/>
-                                      </p:to>
-                                    </p:set>
-                                    <p:animEffect transition="in" filter="fade">
-                                      <p:cBhvr>
-                                        <p:cTn id="24" dur="350"/>
-                                        <p:tgtEl>
-                                          <p:spTgt spid="6"/>
-                                        </p:tgtEl>
-                                      </p:cBhvr>
-                                    </p:animEffect>
-                                  </p:childTnLst>
-                                </p:cTn>
-                              </p:par>
-                              <p:par>
-                                <p:cTn id="25" presetID="10" presetClass="entr" presetSubtype="0" fill="hold" nodeType="withEffect">
+                                <p:cTn id="25" presetID="10" presetClass="entr" presetSubtype="0" fill="hold" grpId="0" nodeType="clickEffect">
                                   <p:stCondLst>
                                     <p:cond delay="0"/>
                                   </p:stCondLst>
@@ -2823,7 +3179,7 @@
                                           </p:stCondLst>
                                         </p:cTn>
                                         <p:tgtEl>
-                                          <p:spTgt spid="25"/>
+                                          <p:spTgt spid="7"/>
                                         </p:tgtEl>
                                         <p:attrNameLst>
                                           <p:attrName>style.visibility</p:attrName>
@@ -2837,7 +3193,7 @@
                                       <p:cBhvr>
                                         <p:cTn id="27" dur="350"/>
                                         <p:tgtEl>
-                                          <p:spTgt spid="25"/>
+                                          <p:spTgt spid="7"/>
                                         </p:tgtEl>
                                       </p:cBhvr>
                                     </p:animEffect>
@@ -2845,7 +3201,7 @@
                                 </p:cTn>
                               </p:par>
                               <p:par>
-                                <p:cTn id="28" presetID="10" presetClass="entr" presetSubtype="0" fill="hold" grpId="0" nodeType="withEffect">
+                                <p:cTn id="28" presetID="10" presetClass="entr" presetSubtype="0" fill="hold" nodeType="withEffect">
                                   <p:stCondLst>
                                     <p:cond delay="0"/>
                                   </p:stCondLst>
@@ -2858,7 +3214,7 @@
                                           </p:stCondLst>
                                         </p:cTn>
                                         <p:tgtEl>
-                                          <p:spTgt spid="10"/>
+                                          <p:spTgt spid="30"/>
                                         </p:tgtEl>
                                         <p:attrNameLst>
                                           <p:attrName>style.visibility</p:attrName>
@@ -2872,7 +3228,7 @@
                                       <p:cBhvr>
                                         <p:cTn id="30" dur="350"/>
                                         <p:tgtEl>
-                                          <p:spTgt spid="10"/>
+                                          <p:spTgt spid="30"/>
                                         </p:tgtEl>
                                       </p:cBhvr>
                                     </p:animEffect>
@@ -2893,7 +3249,7 @@
                                           </p:stCondLst>
                                         </p:cTn>
                                         <p:tgtEl>
-                                          <p:spTgt spid="13"/>
+                                          <p:spTgt spid="11"/>
                                         </p:tgtEl>
                                         <p:attrNameLst>
                                           <p:attrName>style.visibility</p:attrName>
@@ -2907,7 +3263,7 @@
                                       <p:cBhvr>
                                         <p:cTn id="33" dur="350"/>
                                         <p:tgtEl>
-                                          <p:spTgt spid="13"/>
+                                          <p:spTgt spid="11"/>
                                         </p:tgtEl>
                                       </p:cBhvr>
                                     </p:animEffect>
@@ -2928,7 +3284,7 @@
                                           </p:stCondLst>
                                         </p:cTn>
                                         <p:tgtEl>
-                                          <p:spTgt spid="16"/>
+                                          <p:spTgt spid="18"/>
                                         </p:tgtEl>
                                         <p:attrNameLst>
                                           <p:attrName>style.visibility</p:attrName>
@@ -2942,7 +3298,77 @@
                                       <p:cBhvr>
                                         <p:cTn id="36" dur="350"/>
                                         <p:tgtEl>
-                                          <p:spTgt spid="16"/>
+                                          <p:spTgt spid="18"/>
+                                        </p:tgtEl>
+                                      </p:cBhvr>
+                                    </p:animEffect>
+                                  </p:childTnLst>
+                                </p:cTn>
+                              </p:par>
+                              <p:par>
+                                <p:cTn id="37" presetID="10" presetClass="entr" presetSubtype="0" fill="hold" grpId="0" nodeType="withEffect">
+                                  <p:stCondLst>
+                                    <p:cond delay="0"/>
+                                  </p:stCondLst>
+                                  <p:childTnLst>
+                                    <p:set>
+                                      <p:cBhvr>
+                                        <p:cTn id="38" dur="1" fill="hold">
+                                          <p:stCondLst>
+                                            <p:cond delay="0"/>
+                                          </p:stCondLst>
+                                        </p:cTn>
+                                        <p:tgtEl>
+                                          <p:spTgt spid="19"/>
+                                        </p:tgtEl>
+                                        <p:attrNameLst>
+                                          <p:attrName>style.visibility</p:attrName>
+                                        </p:attrNameLst>
+                                      </p:cBhvr>
+                                      <p:to>
+                                        <p:strVal val="visible"/>
+                                      </p:to>
+                                    </p:set>
+                                    <p:animEffect transition="in" filter="fade">
+                                      <p:cBhvr>
+                                        <p:cTn id="39" dur="350"/>
+                                        <p:tgtEl>
+                                          <p:spTgt spid="19"/>
+                                        </p:tgtEl>
+                                      </p:cBhvr>
+                                    </p:animEffect>
+                                  </p:childTnLst>
+                                </p:cTn>
+                              </p:par>
+                              <p:par>
+                                <p:cTn id="40" presetID="10" presetClass="entr" presetSubtype="0" fill="hold" grpId="0" nodeType="withEffect">
+                                  <p:stCondLst>
+                                    <p:cond delay="0"/>
+                                  </p:stCondLst>
+                                  <p:childTnLst>
+                                    <p:set>
+                                      <p:cBhvr>
+                                        <p:cTn id="41" dur="1" fill="hold">
+                                          <p:stCondLst>
+                                            <p:cond delay="0"/>
+                                          </p:stCondLst>
+                                        </p:cTn>
+                                        <p:tgtEl>
+                                          <p:spTgt spid="20"/>
+                                        </p:tgtEl>
+                                        <p:attrNameLst>
+                                          <p:attrName>style.visibility</p:attrName>
+                                        </p:attrNameLst>
+                                      </p:cBhvr>
+                                      <p:to>
+                                        <p:strVal val="visible"/>
+                                      </p:to>
+                                    </p:set>
+                                    <p:animEffect transition="in" filter="fade">
+                                      <p:cBhvr>
+                                        <p:cTn id="42" dur="350"/>
+                                        <p:tgtEl>
+                                          <p:spTgt spid="20"/>
                                         </p:tgtEl>
                                       </p:cBhvr>
                                     </p:animEffect>
@@ -2977,14 +3403,16 @@
       </p:par>
     </p:tnLst>
     <p:bldLst>
-      <p:bldP spid="5" grpId="0" animBg="1"/>
       <p:bldP spid="6" grpId="0" animBg="1"/>
-      <p:bldP spid="9" grpId="0"/>
+      <p:bldP spid="7" grpId="0" animBg="1"/>
       <p:bldP spid="10" grpId="0"/>
-      <p:bldP spid="12" grpId="0"/>
-      <p:bldP spid="13" grpId="0"/>
+      <p:bldP spid="11" grpId="0"/>
       <p:bldP spid="15" grpId="0"/>
       <p:bldP spid="16" grpId="0"/>
+      <p:bldP spid="17" grpId="0"/>
+      <p:bldP spid="18" grpId="0"/>
+      <p:bldP spid="19" grpId="0"/>
+      <p:bldP spid="20" grpId="0"/>
     </p:bldLst>
   </p:timing>
 </p:sld>
@@ -2996,7 +3424,7 @@
     <p:bg>
       <p:bgPr>
         <a:solidFill>
-          <a:srgbClr val="F7FAF9"/>
+          <a:srgbClr val="F6F4EE"/>
         </a:solidFill>
         <a:effectLst/>
       </p:bgPr>
@@ -3017,10 +3445,10 @@
       </p:grpSpPr>
       <p:sp>
         <p:nvSpPr>
-          <p:cNvPr id="8" name="S03-title">
+          <p:cNvPr id="9" name="S03-section">
             <a:extLst>
               <a:ext uri="{FF2B5EF4-FFF2-40B4-BE49-F238E27FC236}">
-                <a16:creationId xmlns:a16="http://schemas.microsoft.com/office/drawing/2014/main" id="{9D8094C0-743D-4103-9048-C9F1F1EFEC0A}"/>
+                <a16:creationId xmlns:a16="http://schemas.microsoft.com/office/drawing/2014/main" id="{533610C8-20CD-4FFE-B28E-BAD1925CE24F}"/>
               </a:ext>
             </a:extLst>
           </p:cNvPr>
@@ -3031,8 +3459,8 @@
         </p:nvSpPr>
         <p:spPr>
           <a:xfrm>
-            <a:off x="609600" y="438150"/>
-            <a:ext cx="10972800" cy="666750"/>
+            <a:off x="685800" y="400050"/>
+            <a:ext cx="10744200" cy="257175"/>
           </a:xfrm>
           <a:prstGeom prst="rect">
             <a:avLst/>
@@ -3049,35 +3477,35 @@
           <a:lstStyle/>
           <a:p>
             <a:pPr>
-              <a:defRPr sz="3375" b="1">
-                <a:solidFill>
-                  <a:srgbClr val="173F40"/>
-                </a:solidFill>
-                <a:latin typeface="Malgun Gothic"/>
-                <a:ea typeface="Malgun Gothic"/>
-                <a:cs typeface="Malgun Gothic"/>
+              <a:defRPr sz="1425" b="0">
+                <a:solidFill>
+                  <a:srgbClr val="287D78"/>
+                </a:solidFill>
+                <a:latin typeface="Segoe UI"/>
+                <a:ea typeface="Segoe UI"/>
+                <a:cs typeface="Segoe UI"/>
               </a:defRPr>
             </a:pPr>
             <a:r>
-              <a:rPr sz="3375" b="1">
-                <a:solidFill>
-                  <a:srgbClr val="173F40"/>
-                </a:solidFill>
-                <a:latin typeface="Malgun Gothic"/>
-                <a:ea typeface="Malgun Gothic"/>
-                <a:cs typeface="Malgun Gothic"/>
+              <a:rPr sz="1425" b="0">
+                <a:solidFill>
+                  <a:srgbClr val="287D78"/>
+                </a:solidFill>
+                <a:latin typeface="Segoe UI"/>
+                <a:ea typeface="Segoe UI"/>
+                <a:cs typeface="Segoe UI"/>
               </a:rPr>
-              <a:t>동일 장치·데이터에서 비교한 가상 성능</a:t>
+              <a:t>EVIDENCE / FICTIONAL COMPARISON</a:t>
             </a:r>
           </a:p>
         </p:txBody>
       </p:sp>
       <p:sp>
         <p:nvSpPr>
-          <p:cNvPr id="2" name="S03-disclosure">
+          <p:cNvPr id="2" name="S03-title">
             <a:extLst>
               <a:ext uri="{FF2B5EF4-FFF2-40B4-BE49-F238E27FC236}">
-                <a16:creationId xmlns:a16="http://schemas.microsoft.com/office/drawing/2014/main" id="{DB2D7A61-BFAE-4FC4-B914-68911C377983}"/>
+                <a16:creationId xmlns:a16="http://schemas.microsoft.com/office/drawing/2014/main" id="{CE70BED3-63C0-4CDA-8B29-D663C34D27C9}"/>
               </a:ext>
             </a:extLst>
           </p:cNvPr>
@@ -3088,8 +3516,8 @@
         </p:nvSpPr>
         <p:spPr>
           <a:xfrm>
-            <a:off x="609600" y="6286500"/>
-            <a:ext cx="9525000" cy="285750"/>
+            <a:off x="685800" y="895350"/>
+            <a:ext cx="10820400" cy="666750"/>
           </a:xfrm>
           <a:prstGeom prst="rect">
             <a:avLst/>
@@ -3106,35 +3534,35 @@
           <a:lstStyle/>
           <a:p>
             <a:pPr>
-              <a:defRPr sz="1425" b="0">
-                <a:solidFill>
-                  <a:srgbClr val="456162"/>
-                </a:solidFill>
-                <a:latin typeface="Malgun Gothic"/>
-                <a:ea typeface="Malgun Gothic"/>
-                <a:cs typeface="Malgun Gothic"/>
+              <a:defRPr sz="3225" b="0">
+                <a:solidFill>
+                  <a:srgbClr val="1E302F"/>
+                </a:solidFill>
+                <a:latin typeface="Segoe UI"/>
+                <a:ea typeface="Segoe UI"/>
+                <a:cs typeface="Segoe UI"/>
               </a:defRPr>
             </a:pPr>
             <a:r>
-              <a:rPr sz="1425" b="0">
-                <a:solidFill>
-                  <a:srgbClr val="456162"/>
-                </a:solidFill>
-                <a:latin typeface="Malgun Gothic"/>
-                <a:ea typeface="Malgun Gothic"/>
-                <a:cs typeface="Malgun Gothic"/>
+              <a:rPr sz="3225" b="0">
+                <a:solidFill>
+                  <a:srgbClr val="1E302F"/>
+                </a:solidFill>
+                <a:latin typeface="Segoe UI"/>
+                <a:ea typeface="Segoe UI"/>
+                <a:cs typeface="Segoe UI"/>
               </a:rPr>
-              <a:t>모든 성능 수치는 가상 예시입니다</a:t>
+              <a:t>Three models. One shared comparison.</a:t>
             </a:r>
           </a:p>
         </p:txBody>
       </p:sp>
       <p:sp>
         <p:nvSpPr>
-          <p:cNvPr id="3" name="S03-number">
+          <p:cNvPr id="3" name="S03-disclosure">
             <a:extLst>
               <a:ext uri="{FF2B5EF4-FFF2-40B4-BE49-F238E27FC236}">
-                <a16:creationId xmlns:a16="http://schemas.microsoft.com/office/drawing/2014/main" id="{D3329BEC-519C-4FC7-84AC-A418E010F3F7}"/>
+                <a16:creationId xmlns:a16="http://schemas.microsoft.com/office/drawing/2014/main" id="{58292DC1-2B05-42C8-A46E-08495A59EBFA}"/>
               </a:ext>
             </a:extLst>
           </p:cNvPr>
@@ -3145,8 +3573,8 @@
         </p:nvSpPr>
         <p:spPr>
           <a:xfrm>
-            <a:off x="10953750" y="6286500"/>
-            <a:ext cx="609600" cy="285750"/>
+            <a:off x="685800" y="6372225"/>
+            <a:ext cx="9525000" cy="219075"/>
           </a:xfrm>
           <a:prstGeom prst="rect">
             <a:avLst/>
@@ -3163,37 +3591,151 @@
           <a:lstStyle/>
           <a:p>
             <a:pPr>
-              <a:defRPr sz="1425" b="0">
-                <a:solidFill>
-                  <a:srgbClr val="456162"/>
-                </a:solidFill>
-                <a:latin typeface="Malgun Gothic"/>
-                <a:ea typeface="Malgun Gothic"/>
-                <a:cs typeface="Malgun Gothic"/>
+              <a:defRPr sz="1275" b="0">
+                <a:solidFill>
+                  <a:srgbClr val="586C68"/>
+                </a:solidFill>
+                <a:latin typeface="Segoe UI"/>
+                <a:ea typeface="Segoe UI"/>
+                <a:cs typeface="Segoe UI"/>
               </a:defRPr>
             </a:pPr>
             <a:r>
-              <a:rPr sz="1425" b="0">
-                <a:solidFill>
-                  <a:srgbClr val="456162"/>
-                </a:solidFill>
-                <a:latin typeface="Malgun Gothic"/>
-                <a:ea typeface="Malgun Gothic"/>
-                <a:cs typeface="Malgun Gothic"/>
+              <a:rPr sz="1275" b="0">
+                <a:solidFill>
+                  <a:srgbClr val="586C68"/>
+                </a:solidFill>
+                <a:latin typeface="Segoe UI"/>
+                <a:ea typeface="Segoe UI"/>
+                <a:cs typeface="Segoe UI"/>
+              </a:rPr>
+              <a:t>Illustrative data · not experimental results</a:t>
+            </a:r>
+          </a:p>
+        </p:txBody>
+      </p:sp>
+      <p:sp>
+        <p:nvSpPr>
+          <p:cNvPr id="4" name="S03-number">
+            <a:extLst>
+              <a:ext uri="{FF2B5EF4-FFF2-40B4-BE49-F238E27FC236}">
+                <a16:creationId xmlns:a16="http://schemas.microsoft.com/office/drawing/2014/main" id="{2A831829-C4C5-4502-AA30-B5947112B1A9}"/>
+              </a:ext>
+            </a:extLst>
+          </p:cNvPr>
+          <p:cNvSpPr>
+            <a:spLocks noGrp="1"/>
+          </p:cNvSpPr>
+          <p:nvPr/>
+        </p:nvSpPr>
+        <p:spPr>
+          <a:xfrm>
+            <a:off x="11144250" y="6372225"/>
+            <a:ext cx="361950" cy="219075"/>
+          </a:xfrm>
+          <a:prstGeom prst="rect">
+            <a:avLst/>
+          </a:prstGeom>
+          <a:noFill/>
+          <a:ln w="0">
+            <a:noFill/>
+          </a:ln>
+        </p:spPr>
+        <p:txBody>
+          <a:bodyPr wrap="none" lIns="0" tIns="0" rIns="0" bIns="0" anchor="ctr">
+            <a:noAutofit/>
+          </a:bodyPr>
+          <a:lstStyle/>
+          <a:p>
+            <a:pPr>
+              <a:defRPr sz="1275" b="0">
+                <a:solidFill>
+                  <a:srgbClr val="586C68"/>
+                </a:solidFill>
+                <a:latin typeface="Segoe UI"/>
+                <a:ea typeface="Segoe UI"/>
+                <a:cs typeface="Segoe UI"/>
+              </a:defRPr>
+            </a:pPr>
+            <a:r>
+              <a:rPr sz="1275" b="0">
+                <a:solidFill>
+                  <a:srgbClr val="586C68"/>
+                </a:solidFill>
+                <a:latin typeface="Segoe UI"/>
+                <a:ea typeface="Segoe UI"/>
+                <a:cs typeface="Segoe UI"/>
               </a:rPr>
               <a:t>03</a:t>
             </a:r>
           </a:p>
         </p:txBody>
       </p:sp>
+      <p:sp>
+        <p:nvSpPr>
+          <p:cNvPr id="5" name="S03-direction">
+            <a:extLst>
+              <a:ext uri="{FF2B5EF4-FFF2-40B4-BE49-F238E27FC236}">
+                <a16:creationId xmlns:a16="http://schemas.microsoft.com/office/drawing/2014/main" id="{5F860A98-9107-4FD4-958D-C1FFF623BA7B}"/>
+              </a:ext>
+            </a:extLst>
+          </p:cNvPr>
+          <p:cNvSpPr>
+            <a:spLocks noGrp="1"/>
+          </p:cNvSpPr>
+          <p:nvPr/>
+        </p:nvSpPr>
+        <p:spPr>
+          <a:xfrm>
+            <a:off x="685800" y="1628775"/>
+            <a:ext cx="10820400" cy="381000"/>
+          </a:xfrm>
+          <a:prstGeom prst="rect">
+            <a:avLst/>
+          </a:prstGeom>
+          <a:noFill/>
+          <a:ln w="0">
+            <a:noFill/>
+          </a:ln>
+        </p:spPr>
+        <p:txBody>
+          <a:bodyPr wrap="none" lIns="0" tIns="0" rIns="0" bIns="0" anchor="ctr">
+            <a:noAutofit/>
+          </a:bodyPr>
+          <a:lstStyle/>
+          <a:p>
+            <a:pPr>
+              <a:defRPr sz="1800" b="0">
+                <a:solidFill>
+                  <a:srgbClr val="586C68"/>
+                </a:solidFill>
+                <a:latin typeface="Segoe UI"/>
+                <a:ea typeface="Segoe UI"/>
+                <a:cs typeface="Segoe UI"/>
+              </a:defRPr>
+            </a:pPr>
+            <a:r>
+              <a:rPr sz="1800" b="0">
+                <a:solidFill>
+                  <a:srgbClr val="586C68"/>
+                </a:solidFill>
+                <a:latin typeface="Segoe UI"/>
+                <a:ea typeface="Segoe UI"/>
+                <a:cs typeface="Segoe UI"/>
+              </a:rPr>
+              <a:t>Lower latency and size are better; higher F1 is better.</a:t>
+            </a:r>
+          </a:p>
+        </p:txBody>
+      </p:sp>
       <p:graphicFrame>
         <p:nvGraphicFramePr>
-          <p:cNvPr id="11" name="표 10"/>
+          <p:cNvPr id="14" name="표 13"/>
           <p:cNvGraphicFramePr/>
           <p:nvPr/>
         </p:nvGraphicFramePr>
         <p:xfrm>
-          <a:off x="609600" y="2171700"/>
+          <a:off x="609600" y="2314575"/>
           <a:ext cx="10972800" cy="2857500"/>
         </p:xfrm>
         <a:graphic>
@@ -3201,28 +3743,28 @@
             <a:tbl>
               <a:tblPr/>
               <a:tblGrid>
-                <a:gridCol w="3200400">
+                <a:gridCol w="3429000">
                   <a:extLst>
                     <a:ext uri="{9D8B030D-6E8A-4147-A177-3AD203B41FA5}">
                       <a16:colId xmlns:a16="http://schemas.microsoft.com/office/drawing/2014/main" val="20000"/>
                     </a:ext>
                   </a:extLst>
                 </a:gridCol>
-                <a:gridCol w="2476500">
+                <a:gridCol w="2667000">
                   <a:extLst>
                     <a:ext uri="{9D8B030D-6E8A-4147-A177-3AD203B41FA5}">
                       <a16:colId xmlns:a16="http://schemas.microsoft.com/office/drawing/2014/main" val="20001"/>
                     </a:ext>
                   </a:extLst>
                 </a:gridCol>
-                <a:gridCol w="2190750">
+                <a:gridCol w="2209800">
                   <a:extLst>
                     <a:ext uri="{9D8B030D-6E8A-4147-A177-3AD203B41FA5}">
                       <a16:colId xmlns:a16="http://schemas.microsoft.com/office/drawing/2014/main" val="20002"/>
                     </a:ext>
                   </a:extLst>
                 </a:gridCol>
-                <a:gridCol w="3105150">
+                <a:gridCol w="2667000">
                   <a:extLst>
                     <a:ext uri="{9D8B030D-6E8A-4147-A177-3AD203B41FA5}">
                       <a16:colId xmlns:a16="http://schemas.microsoft.com/office/drawing/2014/main" val="20003"/>
@@ -3238,21 +3780,39 @@
                     <a:p>
                       <a:pPr algn="l"/>
                       <a:r>
-                        <a:rPr sz="2175" b="1">
+                        <a:rPr sz="1800" b="0">
                           <a:solidFill>
-                            <a:srgbClr val="FFFFFF"/>
+                            <a:srgbClr val="586C68"/>
                           </a:solidFill>
-                          <a:latin typeface="Malgun Gothic"/>
-                          <a:ea typeface="Malgun Gothic"/>
-                          <a:cs typeface="Malgun Gothic"/>
+                          <a:latin typeface="Segoe UI"/>
+                          <a:ea typeface="Segoe UI"/>
+                          <a:cs typeface="Segoe UI"/>
                         </a:rPr>
-                        <a:t>모델</a:t>
+                        <a:t>Model</a:t>
                       </a:r>
                     </a:p>
                   </a:txBody>
-                  <a:tcPr anchor="ctr">
+                  <a:tcPr marL="95250" marR="95250" marT="95250" marB="95250" anchor="ctr">
+                    <a:lnL w="12700">
+                      <a:noFill/>
+                    </a:lnL>
+                    <a:lnR w="12700">
+                      <a:noFill/>
+                    </a:lnR>
+                    <a:lnT w="12700">
+                      <a:noFill/>
+                    </a:lnT>
+                    <a:lnB w="12700">
+                      <a:noFill/>
+                    </a:lnB>
+                    <a:lnTlToBr w="12700">
+                      <a:noFill/>
+                    </a:lnTlToBr>
+                    <a:lnBlToTr w="12700">
+                      <a:noFill/>
+                    </a:lnBlToTr>
                     <a:solidFill>
-                      <a:srgbClr val="173F40"/>
+                      <a:srgbClr val="F6F4EE"/>
                     </a:solidFill>
                   </a:tcPr>
                 </a:tc>
@@ -3263,21 +3823,39 @@
                     <a:p>
                       <a:pPr algn="ctr"/>
                       <a:r>
-                        <a:rPr sz="2175" b="1">
+                        <a:rPr sz="1800" b="0">
                           <a:solidFill>
-                            <a:srgbClr val="FFFFFF"/>
+                            <a:srgbClr val="586C68"/>
                           </a:solidFill>
-                          <a:latin typeface="Malgun Gothic"/>
-                          <a:ea typeface="Malgun Gothic"/>
-                          <a:cs typeface="Malgun Gothic"/>
+                          <a:latin typeface="Segoe UI"/>
+                          <a:ea typeface="Segoe UI"/>
+                          <a:cs typeface="Segoe UI"/>
                         </a:rPr>
-                        <a:t>지연 (ms)</a:t>
+                        <a:t>Latency (ms)</a:t>
                       </a:r>
                     </a:p>
                   </a:txBody>
-                  <a:tcPr anchor="ctr">
+                  <a:tcPr marL="95250" marR="95250" marT="95250" marB="95250" anchor="ctr">
+                    <a:lnL w="12700">
+                      <a:noFill/>
+                    </a:lnL>
+                    <a:lnR w="12700">
+                      <a:noFill/>
+                    </a:lnR>
+                    <a:lnT w="12700">
+                      <a:noFill/>
+                    </a:lnT>
+                    <a:lnB w="12700">
+                      <a:noFill/>
+                    </a:lnB>
+                    <a:lnTlToBr w="12700">
+                      <a:noFill/>
+                    </a:lnTlToBr>
+                    <a:lnBlToTr w="12700">
+                      <a:noFill/>
+                    </a:lnBlToTr>
                     <a:solidFill>
-                      <a:srgbClr val="173F40"/>
+                      <a:srgbClr val="F6F4EE"/>
                     </a:solidFill>
                   </a:tcPr>
                 </a:tc>
@@ -3288,21 +3866,39 @@
                     <a:p>
                       <a:pPr algn="ctr"/>
                       <a:r>
-                        <a:rPr sz="2175" b="1">
+                        <a:rPr sz="1800" b="0">
                           <a:solidFill>
-                            <a:srgbClr val="FFFFFF"/>
+                            <a:srgbClr val="586C68"/>
                           </a:solidFill>
-                          <a:latin typeface="Malgun Gothic"/>
-                          <a:ea typeface="Malgun Gothic"/>
-                          <a:cs typeface="Malgun Gothic"/>
+                          <a:latin typeface="Segoe UI"/>
+                          <a:ea typeface="Segoe UI"/>
+                          <a:cs typeface="Segoe UI"/>
                         </a:rPr>
                         <a:t>F1</a:t>
                       </a:r>
                     </a:p>
                   </a:txBody>
-                  <a:tcPr anchor="ctr">
+                  <a:tcPr marL="95250" marR="95250" marT="95250" marB="95250" anchor="ctr">
+                    <a:lnL w="12700">
+                      <a:noFill/>
+                    </a:lnL>
+                    <a:lnR w="12700">
+                      <a:noFill/>
+                    </a:lnR>
+                    <a:lnT w="12700">
+                      <a:noFill/>
+                    </a:lnT>
+                    <a:lnB w="12700">
+                      <a:noFill/>
+                    </a:lnB>
+                    <a:lnTlToBr w="12700">
+                      <a:noFill/>
+                    </a:lnTlToBr>
+                    <a:lnBlToTr w="12700">
+                      <a:noFill/>
+                    </a:lnBlToTr>
                     <a:solidFill>
-                      <a:srgbClr val="173F40"/>
+                      <a:srgbClr val="F6F4EE"/>
                     </a:solidFill>
                   </a:tcPr>
                 </a:tc>
@@ -3313,21 +3909,39 @@
                     <a:p>
                       <a:pPr algn="ctr"/>
                       <a:r>
-                        <a:rPr sz="2175" b="1">
+                        <a:rPr sz="1800" b="0">
                           <a:solidFill>
-                            <a:srgbClr val="FFFFFF"/>
+                            <a:srgbClr val="586C68"/>
                           </a:solidFill>
-                          <a:latin typeface="Malgun Gothic"/>
-                          <a:ea typeface="Malgun Gothic"/>
-                          <a:cs typeface="Malgun Gothic"/>
+                          <a:latin typeface="Segoe UI"/>
+                          <a:ea typeface="Segoe UI"/>
+                          <a:cs typeface="Segoe UI"/>
                         </a:rPr>
-                        <a:t>모델 크기 (MB)</a:t>
+                        <a:t>Size (MB)</a:t>
                       </a:r>
                     </a:p>
                   </a:txBody>
-                  <a:tcPr anchor="ctr">
+                  <a:tcPr marL="95250" marR="95250" marT="95250" marB="95250" anchor="ctr">
+                    <a:lnL w="12700">
+                      <a:noFill/>
+                    </a:lnL>
+                    <a:lnR w="12700">
+                      <a:noFill/>
+                    </a:lnR>
+                    <a:lnT w="12700">
+                      <a:noFill/>
+                    </a:lnT>
+                    <a:lnB w="12700">
+                      <a:noFill/>
+                    </a:lnB>
+                    <a:lnTlToBr w="12700">
+                      <a:noFill/>
+                    </a:lnTlToBr>
+                    <a:lnBlToTr w="12700">
+                      <a:noFill/>
+                    </a:lnBlToTr>
                     <a:solidFill>
-                      <a:srgbClr val="173F40"/>
+                      <a:srgbClr val="F6F4EE"/>
                     </a:solidFill>
                   </a:tcPr>
                 </a:tc>
@@ -3345,21 +3959,39 @@
                     <a:p>
                       <a:pPr algn="l"/>
                       <a:r>
-                        <a:rPr sz="2175" b="0">
+                        <a:rPr sz="2400" b="0">
                           <a:solidFill>
-                            <a:srgbClr val="173F40"/>
+                            <a:srgbClr val="1E302F"/>
                           </a:solidFill>
-                          <a:latin typeface="Malgun Gothic"/>
-                          <a:ea typeface="Malgun Gothic"/>
-                          <a:cs typeface="Malgun Gothic"/>
+                          <a:latin typeface="Segoe UI"/>
+                          <a:ea typeface="Segoe UI"/>
+                          <a:cs typeface="Segoe UI"/>
                         </a:rPr>
                         <a:t>baseline</a:t>
                       </a:r>
                     </a:p>
                   </a:txBody>
-                  <a:tcPr anchor="ctr">
+                  <a:tcPr marL="95250" marR="95250" marT="95250" marB="95250" anchor="ctr">
+                    <a:lnL w="12700">
+                      <a:noFill/>
+                    </a:lnL>
+                    <a:lnR w="12700">
+                      <a:noFill/>
+                    </a:lnR>
+                    <a:lnT w="12700">
+                      <a:noFill/>
+                    </a:lnT>
+                    <a:lnB w="12700">
+                      <a:noFill/>
+                    </a:lnB>
+                    <a:lnTlToBr w="12700">
+                      <a:noFill/>
+                    </a:lnTlToBr>
+                    <a:lnBlToTr w="12700">
+                      <a:noFill/>
+                    </a:lnBlToTr>
                     <a:solidFill>
-                      <a:srgbClr val="FFFFFF"/>
+                      <a:srgbClr val="F6F4EE"/>
                     </a:solidFill>
                   </a:tcPr>
                 </a:tc>
@@ -3370,21 +4002,39 @@
                     <a:p>
                       <a:pPr algn="ctr"/>
                       <a:r>
-                        <a:rPr sz="2175" b="0">
+                        <a:rPr sz="2400" b="0">
                           <a:solidFill>
-                            <a:srgbClr val="173F40"/>
+                            <a:srgbClr val="1E302F"/>
                           </a:solidFill>
-                          <a:latin typeface="Malgun Gothic"/>
-                          <a:ea typeface="Malgun Gothic"/>
-                          <a:cs typeface="Malgun Gothic"/>
+                          <a:latin typeface="Segoe UI"/>
+                          <a:ea typeface="Segoe UI"/>
+                          <a:cs typeface="Segoe UI"/>
                         </a:rPr>
                         <a:t>120</a:t>
                       </a:r>
                     </a:p>
                   </a:txBody>
-                  <a:tcPr anchor="ctr">
+                  <a:tcPr marL="95250" marR="95250" marT="95250" marB="95250" anchor="ctr">
+                    <a:lnL w="12700">
+                      <a:noFill/>
+                    </a:lnL>
+                    <a:lnR w="12700">
+                      <a:noFill/>
+                    </a:lnR>
+                    <a:lnT w="12700">
+                      <a:noFill/>
+                    </a:lnT>
+                    <a:lnB w="12700">
+                      <a:noFill/>
+                    </a:lnB>
+                    <a:lnTlToBr w="12700">
+                      <a:noFill/>
+                    </a:lnTlToBr>
+                    <a:lnBlToTr w="12700">
+                      <a:noFill/>
+                    </a:lnBlToTr>
                     <a:solidFill>
-                      <a:srgbClr val="FFFFFF"/>
+                      <a:srgbClr val="F6F4EE"/>
                     </a:solidFill>
                   </a:tcPr>
                 </a:tc>
@@ -3395,21 +4045,39 @@
                     <a:p>
                       <a:pPr algn="ctr"/>
                       <a:r>
-                        <a:rPr sz="2175" b="0">
+                        <a:rPr sz="2400" b="0">
                           <a:solidFill>
-                            <a:srgbClr val="173F40"/>
+                            <a:srgbClr val="1E302F"/>
                           </a:solidFill>
-                          <a:latin typeface="Malgun Gothic"/>
-                          <a:ea typeface="Malgun Gothic"/>
-                          <a:cs typeface="Malgun Gothic"/>
+                          <a:latin typeface="Segoe UI"/>
+                          <a:ea typeface="Segoe UI"/>
+                          <a:cs typeface="Segoe UI"/>
                         </a:rPr>
                         <a:t>0.910</a:t>
                       </a:r>
                     </a:p>
                   </a:txBody>
-                  <a:tcPr anchor="ctr">
+                  <a:tcPr marL="95250" marR="95250" marT="95250" marB="95250" anchor="ctr">
+                    <a:lnL w="12700">
+                      <a:noFill/>
+                    </a:lnL>
+                    <a:lnR w="12700">
+                      <a:noFill/>
+                    </a:lnR>
+                    <a:lnT w="12700">
+                      <a:noFill/>
+                    </a:lnT>
+                    <a:lnB w="12700">
+                      <a:noFill/>
+                    </a:lnB>
+                    <a:lnTlToBr w="12700">
+                      <a:noFill/>
+                    </a:lnTlToBr>
+                    <a:lnBlToTr w="12700">
+                      <a:noFill/>
+                    </a:lnBlToTr>
                     <a:solidFill>
-                      <a:srgbClr val="FFFFFF"/>
+                      <a:srgbClr val="F6F4EE"/>
                     </a:solidFill>
                   </a:tcPr>
                 </a:tc>
@@ -3420,21 +4088,39 @@
                     <a:p>
                       <a:pPr algn="ctr"/>
                       <a:r>
-                        <a:rPr sz="2175" b="0">
+                        <a:rPr sz="2400" b="0">
                           <a:solidFill>
-                            <a:srgbClr val="173F40"/>
+                            <a:srgbClr val="1E302F"/>
                           </a:solidFill>
-                          <a:latin typeface="Malgun Gothic"/>
-                          <a:ea typeface="Malgun Gothic"/>
-                          <a:cs typeface="Malgun Gothic"/>
+                          <a:latin typeface="Segoe UI"/>
+                          <a:ea typeface="Segoe UI"/>
+                          <a:cs typeface="Segoe UI"/>
                         </a:rPr>
                         <a:t>48</a:t>
                       </a:r>
                     </a:p>
                   </a:txBody>
-                  <a:tcPr anchor="ctr">
+                  <a:tcPr marL="95250" marR="95250" marT="95250" marB="95250" anchor="ctr">
+                    <a:lnL w="12700">
+                      <a:noFill/>
+                    </a:lnL>
+                    <a:lnR w="12700">
+                      <a:noFill/>
+                    </a:lnR>
+                    <a:lnT w="12700">
+                      <a:noFill/>
+                    </a:lnT>
+                    <a:lnB w="12700">
+                      <a:noFill/>
+                    </a:lnB>
+                    <a:lnTlToBr w="12700">
+                      <a:noFill/>
+                    </a:lnTlToBr>
+                    <a:lnBlToTr w="12700">
+                      <a:noFill/>
+                    </a:lnBlToTr>
                     <a:solidFill>
-                      <a:srgbClr val="FFFFFF"/>
+                      <a:srgbClr val="F6F4EE"/>
                     </a:solidFill>
                   </a:tcPr>
                 </a:tc>
@@ -3452,21 +4138,39 @@
                     <a:p>
                       <a:pPr algn="l"/>
                       <a:r>
-                        <a:rPr sz="2175" b="0">
+                        <a:rPr sz="2400" b="0">
                           <a:solidFill>
-                            <a:srgbClr val="173F40"/>
+                            <a:srgbClr val="1E302F"/>
                           </a:solidFill>
-                          <a:latin typeface="Malgun Gothic"/>
-                          <a:ea typeface="Malgun Gothic"/>
-                          <a:cs typeface="Malgun Gothic"/>
+                          <a:latin typeface="Segoe UI"/>
+                          <a:ea typeface="Segoe UI"/>
+                          <a:cs typeface="Segoe UI"/>
                         </a:rPr>
                         <a:t>distilled</a:t>
                       </a:r>
                     </a:p>
                   </a:txBody>
-                  <a:tcPr anchor="ctr">
+                  <a:tcPr marL="95250" marR="95250" marT="95250" marB="95250" anchor="ctr">
+                    <a:lnL w="12700">
+                      <a:noFill/>
+                    </a:lnL>
+                    <a:lnR w="12700">
+                      <a:noFill/>
+                    </a:lnR>
+                    <a:lnT w="12700">
+                      <a:noFill/>
+                    </a:lnT>
+                    <a:lnB w="12700">
+                      <a:noFill/>
+                    </a:lnB>
+                    <a:lnTlToBr w="12700">
+                      <a:noFill/>
+                    </a:lnTlToBr>
+                    <a:lnBlToTr w="12700">
+                      <a:noFill/>
+                    </a:lnBlToTr>
                     <a:solidFill>
-                      <a:srgbClr val="FFFFFF"/>
+                      <a:srgbClr val="F6F4EE"/>
                     </a:solidFill>
                   </a:tcPr>
                 </a:tc>
@@ -3477,21 +4181,39 @@
                     <a:p>
                       <a:pPr algn="ctr"/>
                       <a:r>
-                        <a:rPr sz="2175" b="0">
+                        <a:rPr sz="2400" b="0">
                           <a:solidFill>
-                            <a:srgbClr val="173F40"/>
+                            <a:srgbClr val="1E302F"/>
                           </a:solidFill>
-                          <a:latin typeface="Malgun Gothic"/>
-                          <a:ea typeface="Malgun Gothic"/>
-                          <a:cs typeface="Malgun Gothic"/>
+                          <a:latin typeface="Segoe UI"/>
+                          <a:ea typeface="Segoe UI"/>
+                          <a:cs typeface="Segoe UI"/>
                         </a:rPr>
                         <a:t>72</a:t>
                       </a:r>
                     </a:p>
                   </a:txBody>
-                  <a:tcPr anchor="ctr">
+                  <a:tcPr marL="95250" marR="95250" marT="95250" marB="95250" anchor="ctr">
+                    <a:lnL w="12700">
+                      <a:noFill/>
+                    </a:lnL>
+                    <a:lnR w="12700">
+                      <a:noFill/>
+                    </a:lnR>
+                    <a:lnT w="12700">
+                      <a:noFill/>
+                    </a:lnT>
+                    <a:lnB w="12700">
+                      <a:noFill/>
+                    </a:lnB>
+                    <a:lnTlToBr w="12700">
+                      <a:noFill/>
+                    </a:lnTlToBr>
+                    <a:lnBlToTr w="12700">
+                      <a:noFill/>
+                    </a:lnBlToTr>
                     <a:solidFill>
-                      <a:srgbClr val="FFFFFF"/>
+                      <a:srgbClr val="F6F4EE"/>
                     </a:solidFill>
                   </a:tcPr>
                 </a:tc>
@@ -3502,21 +4224,39 @@
                     <a:p>
                       <a:pPr algn="ctr"/>
                       <a:r>
-                        <a:rPr sz="2175" b="0">
+                        <a:rPr sz="2400" b="0">
                           <a:solidFill>
-                            <a:srgbClr val="173F40"/>
+                            <a:srgbClr val="1E302F"/>
                           </a:solidFill>
-                          <a:latin typeface="Malgun Gothic"/>
-                          <a:ea typeface="Malgun Gothic"/>
-                          <a:cs typeface="Malgun Gothic"/>
+                          <a:latin typeface="Segoe UI"/>
+                          <a:ea typeface="Segoe UI"/>
+                          <a:cs typeface="Segoe UI"/>
                         </a:rPr>
                         <a:t>0.902</a:t>
                       </a:r>
                     </a:p>
                   </a:txBody>
-                  <a:tcPr anchor="ctr">
+                  <a:tcPr marL="95250" marR="95250" marT="95250" marB="95250" anchor="ctr">
+                    <a:lnL w="12700">
+                      <a:noFill/>
+                    </a:lnL>
+                    <a:lnR w="12700">
+                      <a:noFill/>
+                    </a:lnR>
+                    <a:lnT w="12700">
+                      <a:noFill/>
+                    </a:lnT>
+                    <a:lnB w="12700">
+                      <a:noFill/>
+                    </a:lnB>
+                    <a:lnTlToBr w="12700">
+                      <a:noFill/>
+                    </a:lnTlToBr>
+                    <a:lnBlToTr w="12700">
+                      <a:noFill/>
+                    </a:lnBlToTr>
                     <a:solidFill>
-                      <a:srgbClr val="FFFFFF"/>
+                      <a:srgbClr val="F6F4EE"/>
                     </a:solidFill>
                   </a:tcPr>
                 </a:tc>
@@ -3527,21 +4267,39 @@
                     <a:p>
                       <a:pPr algn="ctr"/>
                       <a:r>
-                        <a:rPr sz="2175" b="0">
+                        <a:rPr sz="2400" b="0">
                           <a:solidFill>
-                            <a:srgbClr val="173F40"/>
+                            <a:srgbClr val="1E302F"/>
                           </a:solidFill>
-                          <a:latin typeface="Malgun Gothic"/>
-                          <a:ea typeface="Malgun Gothic"/>
-                          <a:cs typeface="Malgun Gothic"/>
+                          <a:latin typeface="Segoe UI"/>
+                          <a:ea typeface="Segoe UI"/>
+                          <a:cs typeface="Segoe UI"/>
                         </a:rPr>
                         <a:t>18</a:t>
                       </a:r>
                     </a:p>
                   </a:txBody>
-                  <a:tcPr anchor="ctr">
+                  <a:tcPr marL="95250" marR="95250" marT="95250" marB="95250" anchor="ctr">
+                    <a:lnL w="12700">
+                      <a:noFill/>
+                    </a:lnL>
+                    <a:lnR w="12700">
+                      <a:noFill/>
+                    </a:lnR>
+                    <a:lnT w="12700">
+                      <a:noFill/>
+                    </a:lnT>
+                    <a:lnB w="12700">
+                      <a:noFill/>
+                    </a:lnB>
+                    <a:lnTlToBr w="12700">
+                      <a:noFill/>
+                    </a:lnTlToBr>
+                    <a:lnBlToTr w="12700">
+                      <a:noFill/>
+                    </a:lnBlToTr>
                     <a:solidFill>
-                      <a:srgbClr val="FFFFFF"/>
+                      <a:srgbClr val="F6F4EE"/>
                     </a:solidFill>
                   </a:tcPr>
                 </a:tc>
@@ -3559,21 +4317,39 @@
                     <a:p>
                       <a:pPr algn="l"/>
                       <a:r>
-                        <a:rPr sz="2175" b="1">
+                        <a:rPr sz="2400" b="0">
                           <a:solidFill>
-                            <a:srgbClr val="173F40"/>
+                            <a:srgbClr val="287D78"/>
                           </a:solidFill>
-                          <a:latin typeface="Malgun Gothic"/>
-                          <a:ea typeface="Malgun Gothic"/>
-                          <a:cs typeface="Malgun Gothic"/>
+                          <a:latin typeface="Segoe UI"/>
+                          <a:ea typeface="Segoe UI"/>
+                          <a:cs typeface="Segoe UI"/>
                         </a:rPr>
                         <a:t>int8</a:t>
                       </a:r>
                     </a:p>
                   </a:txBody>
-                  <a:tcPr anchor="ctr">
+                  <a:tcPr marL="95250" marR="95250" marT="95250" marB="95250" anchor="ctr">
+                    <a:lnL w="12700">
+                      <a:noFill/>
+                    </a:lnL>
+                    <a:lnR w="12700">
+                      <a:noFill/>
+                    </a:lnR>
+                    <a:lnT w="12700">
+                      <a:noFill/>
+                    </a:lnT>
+                    <a:lnB w="12700">
+                      <a:noFill/>
+                    </a:lnB>
+                    <a:lnTlToBr w="12700">
+                      <a:noFill/>
+                    </a:lnTlToBr>
+                    <a:lnBlToTr w="12700">
+                      <a:noFill/>
+                    </a:lnBlToTr>
                     <a:solidFill>
-                      <a:srgbClr val="E4F0EE"/>
+                      <a:srgbClr val="E8EDE5"/>
                     </a:solidFill>
                   </a:tcPr>
                 </a:tc>
@@ -3584,21 +4360,39 @@
                     <a:p>
                       <a:pPr algn="ctr"/>
                       <a:r>
-                        <a:rPr sz="2175" b="1">
+                        <a:rPr sz="2400" b="0">
                           <a:solidFill>
-                            <a:srgbClr val="173F40"/>
+                            <a:srgbClr val="287D78"/>
                           </a:solidFill>
-                          <a:latin typeface="Malgun Gothic"/>
-                          <a:ea typeface="Malgun Gothic"/>
-                          <a:cs typeface="Malgun Gothic"/>
+                          <a:latin typeface="Segoe UI"/>
+                          <a:ea typeface="Segoe UI"/>
+                          <a:cs typeface="Segoe UI"/>
                         </a:rPr>
                         <a:t>54</a:t>
                       </a:r>
                     </a:p>
                   </a:txBody>
-                  <a:tcPr anchor="ctr">
+                  <a:tcPr marL="95250" marR="95250" marT="95250" marB="95250" anchor="ctr">
+                    <a:lnL w="12700">
+                      <a:noFill/>
+                    </a:lnL>
+                    <a:lnR w="12700">
+                      <a:noFill/>
+                    </a:lnR>
+                    <a:lnT w="12700">
+                      <a:noFill/>
+                    </a:lnT>
+                    <a:lnB w="12700">
+                      <a:noFill/>
+                    </a:lnB>
+                    <a:lnTlToBr w="12700">
+                      <a:noFill/>
+                    </a:lnTlToBr>
+                    <a:lnBlToTr w="12700">
+                      <a:noFill/>
+                    </a:lnBlToTr>
                     <a:solidFill>
-                      <a:srgbClr val="E4F0EE"/>
+                      <a:srgbClr val="E8EDE5"/>
                     </a:solidFill>
                   </a:tcPr>
                 </a:tc>
@@ -3609,21 +4403,39 @@
                     <a:p>
                       <a:pPr algn="ctr"/>
                       <a:r>
-                        <a:rPr sz="2175" b="1">
+                        <a:rPr sz="2400" b="0">
                           <a:solidFill>
-                            <a:srgbClr val="173F40"/>
+                            <a:srgbClr val="287D78"/>
                           </a:solidFill>
-                          <a:latin typeface="Malgun Gothic"/>
-                          <a:ea typeface="Malgun Gothic"/>
-                          <a:cs typeface="Malgun Gothic"/>
+                          <a:latin typeface="Segoe UI"/>
+                          <a:ea typeface="Segoe UI"/>
+                          <a:cs typeface="Segoe UI"/>
                         </a:rPr>
                         <a:t>0.896</a:t>
                       </a:r>
                     </a:p>
                   </a:txBody>
-                  <a:tcPr anchor="ctr">
+                  <a:tcPr marL="95250" marR="95250" marT="95250" marB="95250" anchor="ctr">
+                    <a:lnL w="12700">
+                      <a:noFill/>
+                    </a:lnL>
+                    <a:lnR w="12700">
+                      <a:noFill/>
+                    </a:lnR>
+                    <a:lnT w="12700">
+                      <a:noFill/>
+                    </a:lnT>
+                    <a:lnB w="12700">
+                      <a:noFill/>
+                    </a:lnB>
+                    <a:lnTlToBr w="12700">
+                      <a:noFill/>
+                    </a:lnTlToBr>
+                    <a:lnBlToTr w="12700">
+                      <a:noFill/>
+                    </a:lnBlToTr>
                     <a:solidFill>
-                      <a:srgbClr val="E4F0EE"/>
+                      <a:srgbClr val="E8EDE5"/>
                     </a:solidFill>
                   </a:tcPr>
                 </a:tc>
@@ -3634,21 +4446,39 @@
                     <a:p>
                       <a:pPr algn="ctr"/>
                       <a:r>
-                        <a:rPr sz="2175" b="1">
+                        <a:rPr sz="2400" b="0">
                           <a:solidFill>
-                            <a:srgbClr val="173F40"/>
+                            <a:srgbClr val="287D78"/>
                           </a:solidFill>
-                          <a:latin typeface="Malgun Gothic"/>
-                          <a:ea typeface="Malgun Gothic"/>
-                          <a:cs typeface="Malgun Gothic"/>
+                          <a:latin typeface="Segoe UI"/>
+                          <a:ea typeface="Segoe UI"/>
+                          <a:cs typeface="Segoe UI"/>
                         </a:rPr>
                         <a:t>12</a:t>
                       </a:r>
                     </a:p>
                   </a:txBody>
-                  <a:tcPr anchor="ctr">
+                  <a:tcPr marL="95250" marR="95250" marT="95250" marB="95250" anchor="ctr">
+                    <a:lnL w="12700">
+                      <a:noFill/>
+                    </a:lnL>
+                    <a:lnR w="12700">
+                      <a:noFill/>
+                    </a:lnR>
+                    <a:lnT w="12700">
+                      <a:noFill/>
+                    </a:lnT>
+                    <a:lnB w="12700">
+                      <a:noFill/>
+                    </a:lnB>
+                    <a:lnTlToBr w="12700">
+                      <a:noFill/>
+                    </a:lnTlToBr>
+                    <a:lnBlToTr w="12700">
+                      <a:noFill/>
+                    </a:lnBlToTr>
                     <a:solidFill>
-                      <a:srgbClr val="E4F0EE"/>
+                      <a:srgbClr val="E8EDE5"/>
                     </a:solidFill>
                   </a:tcPr>
                 </a:tc>
@@ -3664,10 +4494,10 @@
       </p:graphicFrame>
       <p:sp>
         <p:nvSpPr>
-          <p:cNvPr id="5" name="S03-direction">
+          <p:cNvPr id="7" name="S03-header-rule">
             <a:extLst>
               <a:ext uri="{FF2B5EF4-FFF2-40B4-BE49-F238E27FC236}">
-                <a16:creationId xmlns:a16="http://schemas.microsoft.com/office/drawing/2014/main" id="{5AA9D0A0-C261-4751-A545-A3C4CDEC1635}"/>
+                <a16:creationId xmlns:a16="http://schemas.microsoft.com/office/drawing/2014/main" id="{4F4933A8-7935-4902-85C4-E8CFE5886EB0}"/>
               </a:ext>
             </a:extLst>
           </p:cNvPr>
@@ -3678,8 +4508,37 @@
         </p:nvSpPr>
         <p:spPr>
           <a:xfrm>
-            <a:off x="609600" y="1562100"/>
-            <a:ext cx="10972800" cy="361950"/>
+            <a:off x="685800" y="3028950"/>
+            <a:ext cx="10820400" cy="0"/>
+          </a:xfrm>
+          <a:prstGeom prst="line">
+            <a:avLst/>
+          </a:prstGeom>
+          <a:ln w="9525">
+            <a:solidFill>
+              <a:srgbClr val="CFD8D1"/>
+            </a:solidFill>
+          </a:ln>
+        </p:spPr>
+      </p:sp>
+      <p:sp>
+        <p:nvSpPr>
+          <p:cNvPr id="8" name="S03-limit">
+            <a:extLst>
+              <a:ext uri="{FF2B5EF4-FFF2-40B4-BE49-F238E27FC236}">
+                <a16:creationId xmlns:a16="http://schemas.microsoft.com/office/drawing/2014/main" id="{B6827B90-3AF9-4418-89BF-646D006B2760}"/>
+              </a:ext>
+            </a:extLst>
+          </p:cNvPr>
+          <p:cNvSpPr>
+            <a:spLocks noGrp="1"/>
+          </p:cNvSpPr>
+          <p:nvPr/>
+        </p:nvSpPr>
+        <p:spPr>
+          <a:xfrm>
+            <a:off x="685800" y="5619750"/>
+            <a:ext cx="10820400" cy="400050"/>
           </a:xfrm>
           <a:prstGeom prst="rect">
             <a:avLst/>
@@ -3696,139 +4555,25 @@
           <a:lstStyle/>
           <a:p>
             <a:pPr>
-              <a:defRPr sz="1800" b="0">
-                <a:solidFill>
-                  <a:srgbClr val="456162"/>
-                </a:solidFill>
-                <a:latin typeface="Malgun Gothic"/>
-                <a:ea typeface="Malgun Gothic"/>
-                <a:cs typeface="Malgun Gothic"/>
+              <a:defRPr sz="1575" b="0">
+                <a:solidFill>
+                  <a:srgbClr val="586C68"/>
+                </a:solidFill>
+                <a:latin typeface="Segoe UI"/>
+                <a:ea typeface="Segoe UI"/>
+                <a:cs typeface="Segoe UI"/>
               </a:defRPr>
             </a:pPr>
             <a:r>
-              <a:rPr sz="1800" b="0">
-                <a:solidFill>
-                  <a:srgbClr val="456162"/>
-                </a:solidFill>
-                <a:latin typeface="Malgun Gothic"/>
-                <a:ea typeface="Malgun Gothic"/>
-                <a:cs typeface="Malgun Gothic"/>
+              <a:rPr sz="1575" b="0">
+                <a:solidFill>
+                  <a:srgbClr val="586C68"/>
+                </a:solidFill>
+                <a:latin typeface="Segoe UI"/>
+                <a:ea typeface="Segoe UI"/>
+                <a:cs typeface="Segoe UI"/>
               </a:rPr>
-              <a:t>지연·모델 크기는 낮을수록, F1은 높을수록 좋음</a:t>
-            </a:r>
-          </a:p>
-        </p:txBody>
-      </p:sp>
-      <p:sp>
-        <p:nvSpPr>
-          <p:cNvPr id="6" name="S03-missing">
-            <a:extLst>
-              <a:ext uri="{FF2B5EF4-FFF2-40B4-BE49-F238E27FC236}">
-                <a16:creationId xmlns:a16="http://schemas.microsoft.com/office/drawing/2014/main" id="{148DD3D7-4E27-464B-A042-60E267C53DEB}"/>
-              </a:ext>
-            </a:extLst>
-          </p:cNvPr>
-          <p:cNvSpPr>
-            <a:spLocks noGrp="1"/>
-          </p:cNvSpPr>
-          <p:nvPr/>
-        </p:nvSpPr>
-        <p:spPr>
-          <a:xfrm>
-            <a:off x="609600" y="5334000"/>
-            <a:ext cx="10972800" cy="342900"/>
-          </a:xfrm>
-          <a:prstGeom prst="rect">
-            <a:avLst/>
-          </a:prstGeom>
-          <a:noFill/>
-          <a:ln w="0">
-            <a:noFill/>
-          </a:ln>
-        </p:spPr>
-        <p:txBody>
-          <a:bodyPr wrap="none" lIns="0" tIns="0" rIns="0" bIns="0" anchor="ctr">
-            <a:noAutofit/>
-          </a:bodyPr>
-          <a:lstStyle/>
-          <a:p>
-            <a:pPr>
-              <a:defRPr sz="2025" b="1">
-                <a:solidFill>
-                  <a:srgbClr val="173F40"/>
-                </a:solidFill>
-                <a:latin typeface="Malgun Gothic"/>
-                <a:ea typeface="Malgun Gothic"/>
-                <a:cs typeface="Malgun Gothic"/>
-              </a:defRPr>
-            </a:pPr>
-            <a:r>
-              <a:rPr sz="2025" b="1">
-                <a:solidFill>
-                  <a:srgbClr val="173F40"/>
-                </a:solidFill>
-                <a:latin typeface="Malgun Gothic"/>
-                <a:ea typeface="Malgun Gothic"/>
-                <a:cs typeface="Malgun Gothic"/>
-              </a:rPr>
-              <a:t>표본수·분산·실제 데이터셋명 미제공</a:t>
-            </a:r>
-          </a:p>
-        </p:txBody>
-      </p:sp>
-      <p:sp>
-        <p:nvSpPr>
-          <p:cNvPr id="7" name="S03-limit">
-            <a:extLst>
-              <a:ext uri="{FF2B5EF4-FFF2-40B4-BE49-F238E27FC236}">
-                <a16:creationId xmlns:a16="http://schemas.microsoft.com/office/drawing/2014/main" id="{EF3C35A4-45B5-4D51-AB8F-5890D6C53FD2}"/>
-              </a:ext>
-            </a:extLst>
-          </p:cNvPr>
-          <p:cNvSpPr>
-            <a:spLocks noGrp="1"/>
-          </p:cNvSpPr>
-          <p:nvPr/>
-        </p:nvSpPr>
-        <p:spPr>
-          <a:xfrm>
-            <a:off x="609600" y="5724525"/>
-            <a:ext cx="10972800" cy="342900"/>
-          </a:xfrm>
-          <a:prstGeom prst="rect">
-            <a:avLst/>
-          </a:prstGeom>
-          <a:noFill/>
-          <a:ln w="0">
-            <a:noFill/>
-          </a:ln>
-        </p:spPr>
-        <p:txBody>
-          <a:bodyPr wrap="none" lIns="0" tIns="0" rIns="0" bIns="0" anchor="ctr">
-            <a:noAutofit/>
-          </a:bodyPr>
-          <a:lstStyle/>
-          <a:p>
-            <a:pPr>
-              <a:defRPr sz="1800" b="0">
-                <a:solidFill>
-                  <a:srgbClr val="456162"/>
-                </a:solidFill>
-                <a:latin typeface="Malgun Gothic"/>
-                <a:ea typeface="Malgun Gothic"/>
-                <a:cs typeface="Malgun Gothic"/>
-              </a:defRPr>
-            </a:pPr>
-            <a:r>
-              <a:rPr sz="1800" b="0">
-                <a:solidFill>
-                  <a:srgbClr val="456162"/>
-                </a:solidFill>
-                <a:latin typeface="Malgun Gothic"/>
-                <a:ea typeface="Malgun Gothic"/>
-                <a:cs typeface="Malgun Gothic"/>
-              </a:rPr>
-              <a:t>통계적 유의성이나 신뢰구간을 계산할 수 없음</a:t>
+              <a:t>Same device and data assumed. Sample count, variance and dataset are unspecified.</a:t>
             </a:r>
           </a:p>
         </p:txBody>
@@ -3836,7 +4581,7 @@
     </p:spTree>
     <p:extLst>
       <p:ext uri="{BB962C8B-B14F-4D97-AF65-F5344CB8AC3E}">
-        <p14:creationId xmlns:p14="http://schemas.microsoft.com/office/powerpoint/2010/main" val="159994177"/>
+        <p14:creationId xmlns:p14="http://schemas.microsoft.com/office/powerpoint/2010/main" val="1011031294"/>
       </p:ext>
     </p:extLst>
   </p:cSld>
@@ -3852,7 +4597,7 @@
     <p:bg>
       <p:bgPr>
         <a:solidFill>
-          <a:srgbClr val="F7FAF9"/>
+          <a:srgbClr val="F6F4EE"/>
         </a:solidFill>
         <a:effectLst/>
       </p:bgPr>
@@ -3873,10 +4618,10 @@
       </p:grpSpPr>
       <p:sp>
         <p:nvSpPr>
-          <p:cNvPr id="13" name="S04-title">
+          <p:cNvPr id="17" name="S04-section">
             <a:extLst>
               <a:ext uri="{FF2B5EF4-FFF2-40B4-BE49-F238E27FC236}">
-                <a16:creationId xmlns:a16="http://schemas.microsoft.com/office/drawing/2014/main" id="{45CE6C9E-03EA-4E61-9492-3EF2E0A6070B}"/>
+                <a16:creationId xmlns:a16="http://schemas.microsoft.com/office/drawing/2014/main" id="{BC636639-B28F-4A01-9CE4-2ADE76FFCFCA}"/>
               </a:ext>
             </a:extLst>
           </p:cNvPr>
@@ -3887,8 +4632,8 @@
         </p:nvSpPr>
         <p:spPr>
           <a:xfrm>
-            <a:off x="609600" y="438150"/>
-            <a:ext cx="10972800" cy="666750"/>
+            <a:off x="685800" y="400050"/>
+            <a:ext cx="10744200" cy="257175"/>
           </a:xfrm>
           <a:prstGeom prst="rect">
             <a:avLst/>
@@ -3905,35 +4650,35 @@
           <a:lstStyle/>
           <a:p>
             <a:pPr>
-              <a:defRPr sz="3375" b="1">
-                <a:solidFill>
-                  <a:srgbClr val="173F40"/>
-                </a:solidFill>
-                <a:latin typeface="Malgun Gothic"/>
-                <a:ea typeface="Malgun Gothic"/>
-                <a:cs typeface="Malgun Gothic"/>
+              <a:defRPr sz="1425" b="0">
+                <a:solidFill>
+                  <a:srgbClr val="287D78"/>
+                </a:solidFill>
+                <a:latin typeface="Segoe UI"/>
+                <a:ea typeface="Segoe UI"/>
+                <a:cs typeface="Segoe UI"/>
               </a:defRPr>
             </a:pPr>
             <a:r>
-              <a:rPr sz="3375" b="1">
-                <a:solidFill>
-                  <a:srgbClr val="173F40"/>
-                </a:solidFill>
-                <a:latin typeface="Malgun Gothic"/>
-                <a:ea typeface="Malgun Gothic"/>
-                <a:cs typeface="Malgun Gothic"/>
+              <a:rPr sz="1425" b="0">
+                <a:solidFill>
+                  <a:srgbClr val="287D78"/>
+                </a:solidFill>
+                <a:latin typeface="Segoe UI"/>
+                <a:ea typeface="Segoe UI"/>
+                <a:cs typeface="Segoe UI"/>
               </a:rPr>
-              <a:t>지연 55% 감소와 F1 0.014 하락</a:t>
+              <a:t>RESULT / BASELINE TO INT8</a:t>
             </a:r>
           </a:p>
         </p:txBody>
       </p:sp>
       <p:sp>
         <p:nvSpPr>
-          <p:cNvPr id="2" name="S04-disclosure">
+          <p:cNvPr id="2" name="S04-title">
             <a:extLst>
               <a:ext uri="{FF2B5EF4-FFF2-40B4-BE49-F238E27FC236}">
-                <a16:creationId xmlns:a16="http://schemas.microsoft.com/office/drawing/2014/main" id="{C8AC3A78-949B-41F9-AD9A-77F2925D5AF3}"/>
+                <a16:creationId xmlns:a16="http://schemas.microsoft.com/office/drawing/2014/main" id="{F2711B63-5182-4F65-BEE2-70658FD0BC1E}"/>
               </a:ext>
             </a:extLst>
           </p:cNvPr>
@@ -3944,8 +4689,8 @@
         </p:nvSpPr>
         <p:spPr>
           <a:xfrm>
-            <a:off x="609600" y="6286500"/>
-            <a:ext cx="9525000" cy="285750"/>
+            <a:off x="685800" y="895350"/>
+            <a:ext cx="10820400" cy="666750"/>
           </a:xfrm>
           <a:prstGeom prst="rect">
             <a:avLst/>
@@ -3962,35 +4707,35 @@
           <a:lstStyle/>
           <a:p>
             <a:pPr>
-              <a:defRPr sz="1425" b="0">
-                <a:solidFill>
-                  <a:srgbClr val="456162"/>
-                </a:solidFill>
-                <a:latin typeface="Malgun Gothic"/>
-                <a:ea typeface="Malgun Gothic"/>
-                <a:cs typeface="Malgun Gothic"/>
+              <a:defRPr sz="3225" b="0">
+                <a:solidFill>
+                  <a:srgbClr val="1E302F"/>
+                </a:solidFill>
+                <a:latin typeface="Segoe UI"/>
+                <a:ea typeface="Segoe UI"/>
+                <a:cs typeface="Segoe UI"/>
               </a:defRPr>
             </a:pPr>
             <a:r>
-              <a:rPr sz="1425" b="0">
-                <a:solidFill>
-                  <a:srgbClr val="456162"/>
-                </a:solidFill>
-                <a:latin typeface="Malgun Gothic"/>
-                <a:ea typeface="Malgun Gothic"/>
-                <a:cs typeface="Malgun Gothic"/>
+              <a:rPr sz="3225" b="0">
+                <a:solidFill>
+                  <a:srgbClr val="1E302F"/>
+                </a:solidFill>
+                <a:latin typeface="Segoe UI"/>
+                <a:ea typeface="Segoe UI"/>
+                <a:cs typeface="Segoe UI"/>
               </a:rPr>
-              <a:t>모든 성능 수치는 가상 예시입니다</a:t>
+              <a:t>Lower latency, lower F1</a:t>
             </a:r>
           </a:p>
         </p:txBody>
       </p:sp>
       <p:sp>
         <p:nvSpPr>
-          <p:cNvPr id="3" name="S04-number">
+          <p:cNvPr id="3" name="S04-disclosure">
             <a:extLst>
               <a:ext uri="{FF2B5EF4-FFF2-40B4-BE49-F238E27FC236}">
-                <a16:creationId xmlns:a16="http://schemas.microsoft.com/office/drawing/2014/main" id="{26C6A625-8088-4565-9944-0F41CE84CACC}"/>
+                <a16:creationId xmlns:a16="http://schemas.microsoft.com/office/drawing/2014/main" id="{1169E09D-882C-428B-B46C-44A8F3BC6EE5}"/>
               </a:ext>
             </a:extLst>
           </p:cNvPr>
@@ -4001,8 +4746,8 @@
         </p:nvSpPr>
         <p:spPr>
           <a:xfrm>
-            <a:off x="10953750" y="6286500"/>
-            <a:ext cx="609600" cy="285750"/>
+            <a:off x="685800" y="6372225"/>
+            <a:ext cx="9525000" cy="219075"/>
           </a:xfrm>
           <a:prstGeom prst="rect">
             <a:avLst/>
@@ -4019,35 +4764,35 @@
           <a:lstStyle/>
           <a:p>
             <a:pPr>
-              <a:defRPr sz="1425" b="0">
-                <a:solidFill>
-                  <a:srgbClr val="456162"/>
-                </a:solidFill>
-                <a:latin typeface="Malgun Gothic"/>
-                <a:ea typeface="Malgun Gothic"/>
-                <a:cs typeface="Malgun Gothic"/>
+              <a:defRPr sz="1275" b="0">
+                <a:solidFill>
+                  <a:srgbClr val="586C68"/>
+                </a:solidFill>
+                <a:latin typeface="Segoe UI"/>
+                <a:ea typeface="Segoe UI"/>
+                <a:cs typeface="Segoe UI"/>
               </a:defRPr>
             </a:pPr>
             <a:r>
-              <a:rPr sz="1425" b="0">
-                <a:solidFill>
-                  <a:srgbClr val="456162"/>
-                </a:solidFill>
-                <a:latin typeface="Malgun Gothic"/>
-                <a:ea typeface="Malgun Gothic"/>
-                <a:cs typeface="Malgun Gothic"/>
+              <a:rPr sz="1275" b="0">
+                <a:solidFill>
+                  <a:srgbClr val="586C68"/>
+                </a:solidFill>
+                <a:latin typeface="Segoe UI"/>
+                <a:ea typeface="Segoe UI"/>
+                <a:cs typeface="Segoe UI"/>
               </a:rPr>
-              <a:t>04</a:t>
+              <a:t>Illustrative data · not experimental results</a:t>
             </a:r>
           </a:p>
         </p:txBody>
       </p:sp>
       <p:sp>
         <p:nvSpPr>
-          <p:cNvPr id="4" name="S04-chart-unit">
+          <p:cNvPr id="4" name="S04-number">
             <a:extLst>
               <a:ext uri="{FF2B5EF4-FFF2-40B4-BE49-F238E27FC236}">
-                <a16:creationId xmlns:a16="http://schemas.microsoft.com/office/drawing/2014/main" id="{302C4B0E-EAE5-4E5E-B13A-2E945741B099}"/>
+                <a16:creationId xmlns:a16="http://schemas.microsoft.com/office/drawing/2014/main" id="{20447F9E-9B5C-4ACF-8067-BE987339E42F}"/>
               </a:ext>
             </a:extLst>
           </p:cNvPr>
@@ -4058,8 +4803,8 @@
         </p:nvSpPr>
         <p:spPr>
           <a:xfrm>
-            <a:off x="609600" y="1495425"/>
-            <a:ext cx="5715000" cy="381000"/>
+            <a:off x="11144250" y="6372225"/>
+            <a:ext cx="361950" cy="219075"/>
           </a:xfrm>
           <a:prstGeom prst="rect">
             <a:avLst/>
@@ -4076,38 +4821,95 @@
           <a:lstStyle/>
           <a:p>
             <a:pPr>
-              <a:defRPr sz="2025" b="1">
-                <a:solidFill>
-                  <a:srgbClr val="173F40"/>
-                </a:solidFill>
-                <a:latin typeface="Malgun Gothic"/>
-                <a:ea typeface="Malgun Gothic"/>
-                <a:cs typeface="Malgun Gothic"/>
+              <a:defRPr sz="1275" b="0">
+                <a:solidFill>
+                  <a:srgbClr val="586C68"/>
+                </a:solidFill>
+                <a:latin typeface="Segoe UI"/>
+                <a:ea typeface="Segoe UI"/>
+                <a:cs typeface="Segoe UI"/>
               </a:defRPr>
             </a:pPr>
             <a:r>
-              <a:rPr sz="2025" b="1">
-                <a:solidFill>
-                  <a:srgbClr val="173F40"/>
-                </a:solidFill>
-                <a:latin typeface="Malgun Gothic"/>
-                <a:ea typeface="Malgun Gothic"/>
-                <a:cs typeface="Malgun Gothic"/>
+              <a:rPr sz="1275" b="0">
+                <a:solidFill>
+                  <a:srgbClr val="586C68"/>
+                </a:solidFill>
+                <a:latin typeface="Segoe UI"/>
+                <a:ea typeface="Segoe UI"/>
+                <a:cs typeface="Segoe UI"/>
               </a:rPr>
-              <a:t>지연 (ms)</a:t>
+              <a:t>04</a:t>
+            </a:r>
+          </a:p>
+        </p:txBody>
+      </p:sp>
+      <p:sp>
+        <p:nvSpPr>
+          <p:cNvPr id="5" name="S04-chart-unit">
+            <a:extLst>
+              <a:ext uri="{FF2B5EF4-FFF2-40B4-BE49-F238E27FC236}">
+                <a16:creationId xmlns:a16="http://schemas.microsoft.com/office/drawing/2014/main" id="{E36052B5-A6F9-4623-8165-C8AFF2552BD9}"/>
+              </a:ext>
+            </a:extLst>
+          </p:cNvPr>
+          <p:cNvSpPr>
+            <a:spLocks noGrp="1"/>
+          </p:cNvSpPr>
+          <p:nvPr/>
+        </p:nvSpPr>
+        <p:spPr>
+          <a:xfrm>
+            <a:off x="685800" y="1828800"/>
+            <a:ext cx="6000750" cy="352425"/>
+          </a:xfrm>
+          <a:prstGeom prst="rect">
+            <a:avLst/>
+          </a:prstGeom>
+          <a:noFill/>
+          <a:ln w="0">
+            <a:noFill/>
+          </a:ln>
+        </p:spPr>
+        <p:txBody>
+          <a:bodyPr wrap="none" lIns="0" tIns="0" rIns="0" bIns="0" anchor="ctr">
+            <a:noAutofit/>
+          </a:bodyPr>
+          <a:lstStyle/>
+          <a:p>
+            <a:pPr>
+              <a:defRPr sz="1800" b="0">
+                <a:solidFill>
+                  <a:srgbClr val="586C68"/>
+                </a:solidFill>
+                <a:latin typeface="Segoe UI"/>
+                <a:ea typeface="Segoe UI"/>
+                <a:cs typeface="Segoe UI"/>
+              </a:defRPr>
+            </a:pPr>
+            <a:r>
+              <a:rPr sz="1800" b="0">
+                <a:solidFill>
+                  <a:srgbClr val="586C68"/>
+                </a:solidFill>
+                <a:latin typeface="Segoe UI"/>
+                <a:ea typeface="Segoe UI"/>
+                <a:cs typeface="Segoe UI"/>
+              </a:rPr>
+              <a:t>Latency (ms)</a:t>
             </a:r>
           </a:p>
         </p:txBody>
       </p:sp>
       <p:graphicFrame>
         <p:nvGraphicFramePr>
-          <p:cNvPr id="17" name="Chart"/>
+          <p:cNvPr id="22" name="Chart"/>
           <p:cNvGraphicFramePr/>
           <p:nvPr/>
         </p:nvGraphicFramePr>
         <p:xfrm>
-          <a:off x="514350" y="2076450"/>
-          <a:ext cx="6810375" cy="3000375"/>
+          <a:off x="552450" y="2343150"/>
+          <a:ext cx="6810375" cy="2857500"/>
         </p:xfrm>
         <a:graphic>
           <a:graphicData uri="http://schemas.openxmlformats.org/drawingml/2006/chart">
@@ -4117,10 +4919,10 @@
       </p:graphicFrame>
       <p:sp>
         <p:nvSpPr>
-          <p:cNvPr id="6" name="S04-frame">
+          <p:cNvPr id="7" name="S04-latency">
             <a:extLst>
               <a:ext uri="{FF2B5EF4-FFF2-40B4-BE49-F238E27FC236}">
-                <a16:creationId xmlns:a16="http://schemas.microsoft.com/office/drawing/2014/main" id="{58211554-628A-464E-A9A4-A4B317904E97}"/>
+                <a16:creationId xmlns:a16="http://schemas.microsoft.com/office/drawing/2014/main" id="{D51546B4-1D7A-4253-87A8-B3272307B943}"/>
               </a:ext>
             </a:extLst>
           </p:cNvPr>
@@ -4131,8 +4933,8 @@
         </p:nvSpPr>
         <p:spPr>
           <a:xfrm>
-            <a:off x="7981950" y="1524000"/>
-            <a:ext cx="3600450" cy="381000"/>
+            <a:off x="8058150" y="1885950"/>
+            <a:ext cx="3276600" cy="809625"/>
           </a:xfrm>
           <a:prstGeom prst="rect">
             <a:avLst/>
@@ -4149,35 +4951,35 @@
           <a:lstStyle/>
           <a:p>
             <a:pPr>
-              <a:defRPr sz="1875" b="0">
-                <a:solidFill>
-                  <a:srgbClr val="456162"/>
-                </a:solidFill>
-                <a:latin typeface="Malgun Gothic"/>
-                <a:ea typeface="Malgun Gothic"/>
-                <a:cs typeface="Malgun Gothic"/>
+              <a:defRPr sz="5325" b="0">
+                <a:solidFill>
+                  <a:srgbClr val="287D78"/>
+                </a:solidFill>
+                <a:latin typeface="Segoe UI"/>
+                <a:ea typeface="Segoe UI"/>
+                <a:cs typeface="Segoe UI"/>
               </a:defRPr>
             </a:pPr>
             <a:r>
-              <a:rPr sz="1875" b="0">
-                <a:solidFill>
-                  <a:srgbClr val="456162"/>
-                </a:solidFill>
-                <a:latin typeface="Malgun Gothic"/>
-                <a:ea typeface="Malgun Gothic"/>
-                <a:cs typeface="Malgun Gothic"/>
+              <a:rPr sz="5325" b="0">
+                <a:solidFill>
+                  <a:srgbClr val="287D78"/>
+                </a:solidFill>
+                <a:latin typeface="Segoe UI"/>
+                <a:ea typeface="Segoe UI"/>
+                <a:cs typeface="Segoe UI"/>
               </a:rPr>
-              <a:t>baseline 대비 INT8</a:t>
+              <a:t>55%</a:t>
             </a:r>
           </a:p>
         </p:txBody>
       </p:sp>
       <p:sp>
         <p:nvSpPr>
-          <p:cNvPr id="7" name="S04-size">
+          <p:cNvPr id="8" name="S04-latency-label">
             <a:extLst>
               <a:ext uri="{FF2B5EF4-FFF2-40B4-BE49-F238E27FC236}">
-                <a16:creationId xmlns:a16="http://schemas.microsoft.com/office/drawing/2014/main" id="{BF8E7648-6A8E-4018-8147-B4024D61CF8D}"/>
+                <a16:creationId xmlns:a16="http://schemas.microsoft.com/office/drawing/2014/main" id="{7AF19377-FAD8-4B0E-84D6-C88DC070BAA3}"/>
               </a:ext>
             </a:extLst>
           </p:cNvPr>
@@ -4188,8 +4990,8 @@
         </p:nvSpPr>
         <p:spPr>
           <a:xfrm>
-            <a:off x="7981950" y="2190750"/>
-            <a:ext cx="3600450" cy="523875"/>
+            <a:off x="8058150" y="2714625"/>
+            <a:ext cx="3448050" cy="342900"/>
           </a:xfrm>
           <a:prstGeom prst="rect">
             <a:avLst/>
@@ -4206,35 +5008,35 @@
           <a:lstStyle/>
           <a:p>
             <a:pPr>
-              <a:defRPr sz="2400" b="1">
-                <a:solidFill>
-                  <a:srgbClr val="007E80"/>
-                </a:solidFill>
-                <a:latin typeface="Malgun Gothic"/>
-                <a:ea typeface="Malgun Gothic"/>
-                <a:cs typeface="Malgun Gothic"/>
+              <a:defRPr sz="1725" b="0">
+                <a:solidFill>
+                  <a:srgbClr val="586C68"/>
+                </a:solidFill>
+                <a:latin typeface="Segoe UI"/>
+                <a:ea typeface="Segoe UI"/>
+                <a:cs typeface="Segoe UI"/>
               </a:defRPr>
             </a:pPr>
             <a:r>
-              <a:rPr sz="2400" b="1">
-                <a:solidFill>
-                  <a:srgbClr val="007E80"/>
-                </a:solidFill>
-                <a:latin typeface="Malgun Gothic"/>
-                <a:ea typeface="Malgun Gothic"/>
-                <a:cs typeface="Malgun Gothic"/>
+              <a:rPr sz="1725" b="0">
+                <a:solidFill>
+                  <a:srgbClr val="586C68"/>
+                </a:solidFill>
+                <a:latin typeface="Segoe UI"/>
+                <a:ea typeface="Segoe UI"/>
+                <a:cs typeface="Segoe UI"/>
               </a:rPr>
-              <a:t>모델 크기 75% 감소</a:t>
+              <a:t>lower latency · 120 → 54 ms</a:t>
             </a:r>
           </a:p>
         </p:txBody>
       </p:sp>
       <p:sp>
         <p:nvSpPr>
-          <p:cNvPr id="8" name="S04-size-values">
+          <p:cNvPr id="9" name="S04-size">
             <a:extLst>
               <a:ext uri="{FF2B5EF4-FFF2-40B4-BE49-F238E27FC236}">
-                <a16:creationId xmlns:a16="http://schemas.microsoft.com/office/drawing/2014/main" id="{D85D80CB-1927-456A-93EC-7A03BE76C26E}"/>
+                <a16:creationId xmlns:a16="http://schemas.microsoft.com/office/drawing/2014/main" id="{E86F22F7-99DC-49C0-8EA3-1C600B671779}"/>
               </a:ext>
             </a:extLst>
           </p:cNvPr>
@@ -4245,8 +5047,8 @@
         </p:nvSpPr>
         <p:spPr>
           <a:xfrm>
-            <a:off x="7981950" y="2743200"/>
-            <a:ext cx="3600450" cy="400050"/>
+            <a:off x="8058150" y="3352800"/>
+            <a:ext cx="1524000" cy="647700"/>
           </a:xfrm>
           <a:prstGeom prst="rect">
             <a:avLst/>
@@ -4263,35 +5065,35 @@
           <a:lstStyle/>
           <a:p>
             <a:pPr>
-              <a:defRPr sz="2025" b="0">
-                <a:solidFill>
-                  <a:srgbClr val="456162"/>
-                </a:solidFill>
-                <a:latin typeface="Malgun Gothic"/>
-                <a:ea typeface="Malgun Gothic"/>
-                <a:cs typeface="Malgun Gothic"/>
+              <a:defRPr sz="3975" b="0">
+                <a:solidFill>
+                  <a:srgbClr val="1E302F"/>
+                </a:solidFill>
+                <a:latin typeface="Segoe UI"/>
+                <a:ea typeface="Segoe UI"/>
+                <a:cs typeface="Segoe UI"/>
               </a:defRPr>
             </a:pPr>
             <a:r>
-              <a:rPr sz="2025" b="0">
-                <a:solidFill>
-                  <a:srgbClr val="456162"/>
-                </a:solidFill>
-                <a:latin typeface="Malgun Gothic"/>
-                <a:ea typeface="Malgun Gothic"/>
-                <a:cs typeface="Malgun Gothic"/>
+              <a:rPr sz="3975" b="0">
+                <a:solidFill>
+                  <a:srgbClr val="1E302F"/>
+                </a:solidFill>
+                <a:latin typeface="Segoe UI"/>
+                <a:ea typeface="Segoe UI"/>
+                <a:cs typeface="Segoe UI"/>
               </a:rPr>
-              <a:t>48MB에서 12MB</a:t>
+              <a:t>75%</a:t>
             </a:r>
           </a:p>
         </p:txBody>
       </p:sp>
       <p:sp>
         <p:nvSpPr>
-          <p:cNvPr id="9" name="S04-f1">
+          <p:cNvPr id="10" name="S04-f1">
             <a:extLst>
               <a:ext uri="{FF2B5EF4-FFF2-40B4-BE49-F238E27FC236}">
-                <a16:creationId xmlns:a16="http://schemas.microsoft.com/office/drawing/2014/main" id="{4376FA26-13A3-43EC-89C1-42E80DFB369B}"/>
+                <a16:creationId xmlns:a16="http://schemas.microsoft.com/office/drawing/2014/main" id="{0FCD41A2-3991-4C2D-B5EF-51FDD86D8E73}"/>
               </a:ext>
             </a:extLst>
           </p:cNvPr>
@@ -4302,8 +5104,8 @@
         </p:nvSpPr>
         <p:spPr>
           <a:xfrm>
-            <a:off x="7981950" y="3590925"/>
-            <a:ext cx="3600450" cy="523875"/>
+            <a:off x="9906000" y="3352800"/>
+            <a:ext cx="1657350" cy="647700"/>
           </a:xfrm>
           <a:prstGeom prst="rect">
             <a:avLst/>
@@ -4320,35 +5122,35 @@
           <a:lstStyle/>
           <a:p>
             <a:pPr>
-              <a:defRPr sz="2400" b="1">
-                <a:solidFill>
-                  <a:srgbClr val="173F40"/>
-                </a:solidFill>
-                <a:latin typeface="Malgun Gothic"/>
-                <a:ea typeface="Malgun Gothic"/>
-                <a:cs typeface="Malgun Gothic"/>
+              <a:defRPr sz="3525" b="0">
+                <a:solidFill>
+                  <a:srgbClr val="A3563E"/>
+                </a:solidFill>
+                <a:latin typeface="Segoe UI"/>
+                <a:ea typeface="Segoe UI"/>
+                <a:cs typeface="Segoe UI"/>
               </a:defRPr>
             </a:pPr>
             <a:r>
-              <a:rPr sz="2400" b="1">
-                <a:solidFill>
-                  <a:srgbClr val="173F40"/>
-                </a:solidFill>
-                <a:latin typeface="Malgun Gothic"/>
-                <a:ea typeface="Malgun Gothic"/>
-                <a:cs typeface="Malgun Gothic"/>
+              <a:rPr sz="3525" b="0">
+                <a:solidFill>
+                  <a:srgbClr val="A3563E"/>
+                </a:solidFill>
+                <a:latin typeface="Segoe UI"/>
+                <a:ea typeface="Segoe UI"/>
+                <a:cs typeface="Segoe UI"/>
               </a:rPr>
-              <a:t>F1 0.014 하락</a:t>
+              <a:t>−0.014</a:t>
             </a:r>
           </a:p>
         </p:txBody>
       </p:sp>
       <p:sp>
         <p:nvSpPr>
-          <p:cNvPr id="10" name="S04-f1-values">
+          <p:cNvPr id="11" name="S04-size-label">
             <a:extLst>
               <a:ext uri="{FF2B5EF4-FFF2-40B4-BE49-F238E27FC236}">
-                <a16:creationId xmlns:a16="http://schemas.microsoft.com/office/drawing/2014/main" id="{551D06A7-F77C-41B5-BB2A-B5E8BEFEF372}"/>
+                <a16:creationId xmlns:a16="http://schemas.microsoft.com/office/drawing/2014/main" id="{C6FCB46E-3BC3-4326-8492-B1CF566E6F91}"/>
               </a:ext>
             </a:extLst>
           </p:cNvPr>
@@ -4359,8 +5161,8 @@
         </p:nvSpPr>
         <p:spPr>
           <a:xfrm>
-            <a:off x="7981950" y="4143375"/>
-            <a:ext cx="3600450" cy="400050"/>
+            <a:off x="8058150" y="4076700"/>
+            <a:ext cx="1752600" cy="314325"/>
           </a:xfrm>
           <a:prstGeom prst="rect">
             <a:avLst/>
@@ -4377,35 +5179,35 @@
           <a:lstStyle/>
           <a:p>
             <a:pPr>
-              <a:defRPr sz="2025" b="0">
-                <a:solidFill>
-                  <a:srgbClr val="456162"/>
-                </a:solidFill>
-                <a:latin typeface="Malgun Gothic"/>
-                <a:ea typeface="Malgun Gothic"/>
-                <a:cs typeface="Malgun Gothic"/>
+              <a:defRPr sz="1575" b="0">
+                <a:solidFill>
+                  <a:srgbClr val="586C68"/>
+                </a:solidFill>
+                <a:latin typeface="Segoe UI"/>
+                <a:ea typeface="Segoe UI"/>
+                <a:cs typeface="Segoe UI"/>
               </a:defRPr>
             </a:pPr>
             <a:r>
-              <a:rPr sz="2025" b="0">
-                <a:solidFill>
-                  <a:srgbClr val="456162"/>
-                </a:solidFill>
-                <a:latin typeface="Malgun Gothic"/>
-                <a:ea typeface="Malgun Gothic"/>
-                <a:cs typeface="Malgun Gothic"/>
+              <a:rPr sz="1575" b="0">
+                <a:solidFill>
+                  <a:srgbClr val="586C68"/>
+                </a:solidFill>
+                <a:latin typeface="Segoe UI"/>
+                <a:ea typeface="Segoe UI"/>
+                <a:cs typeface="Segoe UI"/>
               </a:rPr>
-              <a:t>0.910에서 0.896</a:t>
+              <a:t>smaller model</a:t>
             </a:r>
           </a:p>
         </p:txBody>
       </p:sp>
       <p:sp>
         <p:nvSpPr>
-          <p:cNvPr id="11" name="S04-stage1">
+          <p:cNvPr id="12" name="S04-f1-label">
             <a:extLst>
               <a:ext uri="{FF2B5EF4-FFF2-40B4-BE49-F238E27FC236}">
-                <a16:creationId xmlns:a16="http://schemas.microsoft.com/office/drawing/2014/main" id="{9676950D-6679-4B2E-8247-8724338616F9}"/>
+                <a16:creationId xmlns:a16="http://schemas.microsoft.com/office/drawing/2014/main" id="{DF2DAA3B-0B09-48FF-8978-997403DABA6D}"/>
               </a:ext>
             </a:extLst>
           </p:cNvPr>
@@ -4416,8 +5218,8 @@
         </p:nvSpPr>
         <p:spPr>
           <a:xfrm>
-            <a:off x="609600" y="5343525"/>
-            <a:ext cx="10972800" cy="371475"/>
+            <a:off x="9906000" y="4076700"/>
+            <a:ext cx="1657350" cy="314325"/>
           </a:xfrm>
           <a:prstGeom prst="rect">
             <a:avLst/>
@@ -4434,35 +5236,35 @@
           <a:lstStyle/>
           <a:p>
             <a:pPr>
-              <a:defRPr sz="1875" b="0">
-                <a:solidFill>
-                  <a:srgbClr val="173F40"/>
-                </a:solidFill>
-                <a:latin typeface="Malgun Gothic"/>
-                <a:ea typeface="Malgun Gothic"/>
-                <a:cs typeface="Malgun Gothic"/>
+              <a:defRPr sz="1575" b="0">
+                <a:solidFill>
+                  <a:srgbClr val="586C68"/>
+                </a:solidFill>
+                <a:latin typeface="Segoe UI"/>
+                <a:ea typeface="Segoe UI"/>
+                <a:cs typeface="Segoe UI"/>
               </a:defRPr>
             </a:pPr>
             <a:r>
-              <a:rPr sz="1875" b="0">
-                <a:solidFill>
-                  <a:srgbClr val="173F40"/>
-                </a:solidFill>
-                <a:latin typeface="Malgun Gothic"/>
-                <a:ea typeface="Malgun Gothic"/>
-                <a:cs typeface="Malgun Gothic"/>
+              <a:rPr sz="1575" b="0">
+                <a:solidFill>
+                  <a:srgbClr val="586C68"/>
+                </a:solidFill>
+                <a:latin typeface="Segoe UI"/>
+                <a:ea typeface="Segoe UI"/>
+                <a:cs typeface="Segoe UI"/>
               </a:rPr>
-              <a:t>증류 단계: 지연 40% 감소, F1 0.008 하락</a:t>
+              <a:t>F1 difference</a:t>
             </a:r>
           </a:p>
         </p:txBody>
       </p:sp>
       <p:sp>
         <p:nvSpPr>
-          <p:cNvPr id="12" name="S04-stage2">
+          <p:cNvPr id="13" name="S04-size-values">
             <a:extLst>
               <a:ext uri="{FF2B5EF4-FFF2-40B4-BE49-F238E27FC236}">
-                <a16:creationId xmlns:a16="http://schemas.microsoft.com/office/drawing/2014/main" id="{205EE3CA-0AC9-48BB-BE6B-159C6BE53E73}"/>
+                <a16:creationId xmlns:a16="http://schemas.microsoft.com/office/drawing/2014/main" id="{DEB4987F-D5F1-4E13-9ECD-BF1E86019B54}"/>
               </a:ext>
             </a:extLst>
           </p:cNvPr>
@@ -4473,8 +5275,8 @@
         </p:nvSpPr>
         <p:spPr>
           <a:xfrm>
-            <a:off x="609600" y="5743575"/>
-            <a:ext cx="10972800" cy="371475"/>
+            <a:off x="8058150" y="4524375"/>
+            <a:ext cx="1762125" cy="323850"/>
           </a:xfrm>
           <a:prstGeom prst="rect">
             <a:avLst/>
@@ -4491,25 +5293,196 @@
           <a:lstStyle/>
           <a:p>
             <a:pPr>
-              <a:defRPr sz="1875" b="0">
-                <a:solidFill>
-                  <a:srgbClr val="173F40"/>
-                </a:solidFill>
-                <a:latin typeface="Malgun Gothic"/>
-                <a:ea typeface="Malgun Gothic"/>
-                <a:cs typeface="Malgun Gothic"/>
+              <a:defRPr sz="1650" b="0">
+                <a:solidFill>
+                  <a:srgbClr val="1E302F"/>
+                </a:solidFill>
+                <a:latin typeface="Segoe UI"/>
+                <a:ea typeface="Segoe UI"/>
+                <a:cs typeface="Segoe UI"/>
               </a:defRPr>
             </a:pPr>
             <a:r>
-              <a:rPr sz="1875" b="0">
-                <a:solidFill>
-                  <a:srgbClr val="173F40"/>
-                </a:solidFill>
-                <a:latin typeface="Malgun Gothic"/>
-                <a:ea typeface="Malgun Gothic"/>
-                <a:cs typeface="Malgun Gothic"/>
+              <a:rPr sz="1650" b="0">
+                <a:solidFill>
+                  <a:srgbClr val="1E302F"/>
+                </a:solidFill>
+                <a:latin typeface="Segoe UI"/>
+                <a:ea typeface="Segoe UI"/>
+                <a:cs typeface="Segoe UI"/>
               </a:rPr>
-              <a:t>추가 INT8 단계: 지연 25% 감소, F1 0.006 하락</a:t>
+              <a:t>48 → 12 MB</a:t>
+            </a:r>
+          </a:p>
+        </p:txBody>
+      </p:sp>
+      <p:sp>
+        <p:nvSpPr>
+          <p:cNvPr id="14" name="S04-f1-values">
+            <a:extLst>
+              <a:ext uri="{FF2B5EF4-FFF2-40B4-BE49-F238E27FC236}">
+                <a16:creationId xmlns:a16="http://schemas.microsoft.com/office/drawing/2014/main" id="{E5AFD2F2-0A46-4796-985A-BB72239C16CC}"/>
+              </a:ext>
+            </a:extLst>
+          </p:cNvPr>
+          <p:cNvSpPr>
+            <a:spLocks noGrp="1"/>
+          </p:cNvSpPr>
+          <p:nvPr/>
+        </p:nvSpPr>
+        <p:spPr>
+          <a:xfrm>
+            <a:off x="9906000" y="4524375"/>
+            <a:ext cx="1657350" cy="323850"/>
+          </a:xfrm>
+          <a:prstGeom prst="rect">
+            <a:avLst/>
+          </a:prstGeom>
+          <a:noFill/>
+          <a:ln w="0">
+            <a:noFill/>
+          </a:ln>
+        </p:spPr>
+        <p:txBody>
+          <a:bodyPr wrap="none" lIns="0" tIns="0" rIns="0" bIns="0" anchor="ctr">
+            <a:noAutofit/>
+          </a:bodyPr>
+          <a:lstStyle/>
+          <a:p>
+            <a:pPr>
+              <a:defRPr sz="1575" b="0">
+                <a:solidFill>
+                  <a:srgbClr val="1E302F"/>
+                </a:solidFill>
+                <a:latin typeface="Segoe UI"/>
+                <a:ea typeface="Segoe UI"/>
+                <a:cs typeface="Segoe UI"/>
+              </a:defRPr>
+            </a:pPr>
+            <a:r>
+              <a:rPr sz="1575" b="0">
+                <a:solidFill>
+                  <a:srgbClr val="1E302F"/>
+                </a:solidFill>
+                <a:latin typeface="Segoe UI"/>
+                <a:ea typeface="Segoe UI"/>
+                <a:cs typeface="Segoe UI"/>
+              </a:rPr>
+              <a:t>0.910 → 0.896</a:t>
+            </a:r>
+          </a:p>
+        </p:txBody>
+      </p:sp>
+      <p:sp>
+        <p:nvSpPr>
+          <p:cNvPr id="15" name="S04-stage1">
+            <a:extLst>
+              <a:ext uri="{FF2B5EF4-FFF2-40B4-BE49-F238E27FC236}">
+                <a16:creationId xmlns:a16="http://schemas.microsoft.com/office/drawing/2014/main" id="{6A9C1FD7-A266-4FB7-8965-BC9BE4EC65F6}"/>
+              </a:ext>
+            </a:extLst>
+          </p:cNvPr>
+          <p:cNvSpPr>
+            <a:spLocks noGrp="1"/>
+          </p:cNvSpPr>
+          <p:nvPr/>
+        </p:nvSpPr>
+        <p:spPr>
+          <a:xfrm>
+            <a:off x="685800" y="5467350"/>
+            <a:ext cx="10820400" cy="304800"/>
+          </a:xfrm>
+          <a:prstGeom prst="rect">
+            <a:avLst/>
+          </a:prstGeom>
+          <a:noFill/>
+          <a:ln w="0">
+            <a:noFill/>
+          </a:ln>
+        </p:spPr>
+        <p:txBody>
+          <a:bodyPr wrap="none" lIns="0" tIns="0" rIns="0" bIns="0" anchor="ctr">
+            <a:noAutofit/>
+          </a:bodyPr>
+          <a:lstStyle/>
+          <a:p>
+            <a:pPr>
+              <a:defRPr sz="1650" b="0">
+                <a:solidFill>
+                  <a:srgbClr val="586C68"/>
+                </a:solidFill>
+                <a:latin typeface="Segoe UI"/>
+                <a:ea typeface="Segoe UI"/>
+                <a:cs typeface="Segoe UI"/>
+              </a:defRPr>
+            </a:pPr>
+            <a:r>
+              <a:rPr sz="1650" b="0">
+                <a:solidFill>
+                  <a:srgbClr val="586C68"/>
+                </a:solidFill>
+                <a:latin typeface="Segoe UI"/>
+                <a:ea typeface="Segoe UI"/>
+                <a:cs typeface="Segoe UI"/>
+              </a:rPr>
+              <a:t>Distillation: latency −40%; F1 −0.008</a:t>
+            </a:r>
+          </a:p>
+        </p:txBody>
+      </p:sp>
+      <p:sp>
+        <p:nvSpPr>
+          <p:cNvPr id="16" name="S04-stage2">
+            <a:extLst>
+              <a:ext uri="{FF2B5EF4-FFF2-40B4-BE49-F238E27FC236}">
+                <a16:creationId xmlns:a16="http://schemas.microsoft.com/office/drawing/2014/main" id="{C8BF7D9E-B914-41F4-9848-53C09B8400B1}"/>
+              </a:ext>
+            </a:extLst>
+          </p:cNvPr>
+          <p:cNvSpPr>
+            <a:spLocks noGrp="1"/>
+          </p:cNvSpPr>
+          <p:nvPr/>
+        </p:nvSpPr>
+        <p:spPr>
+          <a:xfrm>
+            <a:off x="685800" y="5810250"/>
+            <a:ext cx="10820400" cy="304800"/>
+          </a:xfrm>
+          <a:prstGeom prst="rect">
+            <a:avLst/>
+          </a:prstGeom>
+          <a:noFill/>
+          <a:ln w="0">
+            <a:noFill/>
+          </a:ln>
+        </p:spPr>
+        <p:txBody>
+          <a:bodyPr wrap="none" lIns="0" tIns="0" rIns="0" bIns="0" anchor="ctr">
+            <a:noAutofit/>
+          </a:bodyPr>
+          <a:lstStyle/>
+          <a:p>
+            <a:pPr>
+              <a:defRPr sz="1650" b="0">
+                <a:solidFill>
+                  <a:srgbClr val="586C68"/>
+                </a:solidFill>
+                <a:latin typeface="Segoe UI"/>
+                <a:ea typeface="Segoe UI"/>
+                <a:cs typeface="Segoe UI"/>
+              </a:defRPr>
+            </a:pPr>
+            <a:r>
+              <a:rPr sz="1650" b="0">
+                <a:solidFill>
+                  <a:srgbClr val="586C68"/>
+                </a:solidFill>
+                <a:latin typeface="Segoe UI"/>
+                <a:ea typeface="Segoe UI"/>
+                <a:cs typeface="Segoe UI"/>
+              </a:rPr>
+              <a:t>Additional INT8 step: latency −25%; F1 −0.006</a:t>
             </a:r>
           </a:p>
         </p:txBody>
@@ -4517,7 +5490,7 @@
     </p:spTree>
     <p:extLst>
       <p:ext uri="{BB962C8B-B14F-4D97-AF65-F5344CB8AC3E}">
-        <p14:creationId xmlns:p14="http://schemas.microsoft.com/office/powerpoint/2010/main" val="1646886148"/>
+        <p14:creationId xmlns:p14="http://schemas.microsoft.com/office/powerpoint/2010/main" val="1633204563"/>
       </p:ext>
     </p:extLst>
   </p:cSld>
@@ -4533,7 +5506,7 @@
     <p:bg>
       <p:bgPr>
         <a:solidFill>
-          <a:srgbClr val="F7FAF9"/>
+          <a:srgbClr val="F6F4EE"/>
         </a:solidFill>
         <a:effectLst/>
       </p:bgPr>
@@ -4554,10 +5527,10 @@
       </p:grpSpPr>
       <p:sp>
         <p:nvSpPr>
-          <p:cNvPr id="11" name="S05-title">
+          <p:cNvPr id="15" name="S05-section">
             <a:extLst>
               <a:ext uri="{FF2B5EF4-FFF2-40B4-BE49-F238E27FC236}">
-                <a16:creationId xmlns:a16="http://schemas.microsoft.com/office/drawing/2014/main" id="{97241E12-D374-4609-A1D5-A0F06B37E48A}"/>
+                <a16:creationId xmlns:a16="http://schemas.microsoft.com/office/drawing/2014/main" id="{4C19C853-E6B9-461C-9EC7-7EE3FA1203C8}"/>
               </a:ext>
             </a:extLst>
           </p:cNvPr>
@@ -4568,8 +5541,8 @@
         </p:nvSpPr>
         <p:spPr>
           <a:xfrm>
-            <a:off x="609600" y="438150"/>
-            <a:ext cx="10972800" cy="666750"/>
+            <a:off x="685800" y="400050"/>
+            <a:ext cx="10744200" cy="257175"/>
           </a:xfrm>
           <a:prstGeom prst="rect">
             <a:avLst/>
@@ -4586,35 +5559,35 @@
           <a:lstStyle/>
           <a:p>
             <a:pPr>
-              <a:defRPr sz="3375" b="1">
-                <a:solidFill>
-                  <a:srgbClr val="173F40"/>
-                </a:solidFill>
-                <a:latin typeface="Malgun Gothic"/>
-                <a:ea typeface="Malgun Gothic"/>
-                <a:cs typeface="Malgun Gothic"/>
+              <a:defRPr sz="1425" b="0">
+                <a:solidFill>
+                  <a:srgbClr val="287D78"/>
+                </a:solidFill>
+                <a:latin typeface="Segoe UI"/>
+                <a:ea typeface="Segoe UI"/>
+                <a:cs typeface="Segoe UI"/>
               </a:defRPr>
             </a:pPr>
             <a:r>
-              <a:rPr sz="3375" b="1">
-                <a:solidFill>
-                  <a:srgbClr val="173F40"/>
-                </a:solidFill>
-                <a:latin typeface="Malgun Gothic"/>
-                <a:ea typeface="Malgun Gothic"/>
-                <a:cs typeface="Malgun Gothic"/>
+              <a:rPr sz="1425" b="0">
+                <a:solidFill>
+                  <a:srgbClr val="287D78"/>
+                </a:solidFill>
+                <a:latin typeface="Segoe UI"/>
+                <a:ea typeface="Segoe UI"/>
+                <a:cs typeface="Segoe UI"/>
               </a:rPr>
-              <a:t>배포 판단에 필요한 추가 근거</a:t>
+              <a:t>NEXT / DEFINE THE ACCEPTABLE TRADE-OFF</a:t>
             </a:r>
           </a:p>
         </p:txBody>
       </p:sp>
       <p:sp>
         <p:nvSpPr>
-          <p:cNvPr id="2" name="S05-disclosure">
+          <p:cNvPr id="2" name="S05-title">
             <a:extLst>
               <a:ext uri="{FF2B5EF4-FFF2-40B4-BE49-F238E27FC236}">
-                <a16:creationId xmlns:a16="http://schemas.microsoft.com/office/drawing/2014/main" id="{616B4BA6-73F0-4A0F-904F-FD5BC39C737C}"/>
+                <a16:creationId xmlns:a16="http://schemas.microsoft.com/office/drawing/2014/main" id="{F2634974-6713-4142-9EA7-CE889EB9FAE3}"/>
               </a:ext>
             </a:extLst>
           </p:cNvPr>
@@ -4625,8 +5598,8 @@
         </p:nvSpPr>
         <p:spPr>
           <a:xfrm>
-            <a:off x="609600" y="6286500"/>
-            <a:ext cx="9525000" cy="285750"/>
+            <a:off x="685800" y="895350"/>
+            <a:ext cx="10820400" cy="666750"/>
           </a:xfrm>
           <a:prstGeom prst="rect">
             <a:avLst/>
@@ -4643,35 +5616,35 @@
           <a:lstStyle/>
           <a:p>
             <a:pPr>
-              <a:defRPr sz="1425" b="0">
-                <a:solidFill>
-                  <a:srgbClr val="456162"/>
-                </a:solidFill>
-                <a:latin typeface="Malgun Gothic"/>
-                <a:ea typeface="Malgun Gothic"/>
-                <a:cs typeface="Malgun Gothic"/>
+              <a:defRPr sz="3225" b="0">
+                <a:solidFill>
+                  <a:srgbClr val="1E302F"/>
+                </a:solidFill>
+                <a:latin typeface="Segoe UI"/>
+                <a:ea typeface="Segoe UI"/>
+                <a:cs typeface="Segoe UI"/>
               </a:defRPr>
             </a:pPr>
             <a:r>
-              <a:rPr sz="1425" b="0">
-                <a:solidFill>
-                  <a:srgbClr val="456162"/>
-                </a:solidFill>
-                <a:latin typeface="Malgun Gothic"/>
-                <a:ea typeface="Malgun Gothic"/>
-                <a:cs typeface="Malgun Gothic"/>
+              <a:rPr sz="3225" b="0">
+                <a:solidFill>
+                  <a:srgbClr val="1E302F"/>
+                </a:solidFill>
+                <a:latin typeface="Segoe UI"/>
+                <a:ea typeface="Segoe UI"/>
+                <a:cs typeface="Segoe UI"/>
               </a:rPr>
-              <a:t>모든 성능 수치는 가상 예시입니다</a:t>
+              <a:t>Decide what the trade-off is worth</a:t>
             </a:r>
           </a:p>
         </p:txBody>
       </p:sp>
       <p:sp>
         <p:nvSpPr>
-          <p:cNvPr id="3" name="S05-number">
+          <p:cNvPr id="3" name="S05-disclosure">
             <a:extLst>
               <a:ext uri="{FF2B5EF4-FFF2-40B4-BE49-F238E27FC236}">
-                <a16:creationId xmlns:a16="http://schemas.microsoft.com/office/drawing/2014/main" id="{888C7DBF-F9E7-4D8E-81BA-8BEECFD4C5D3}"/>
+                <a16:creationId xmlns:a16="http://schemas.microsoft.com/office/drawing/2014/main" id="{BFC2A32B-D2F4-4DD0-AD21-BD9C3F67C5DE}"/>
               </a:ext>
             </a:extLst>
           </p:cNvPr>
@@ -4682,8 +5655,8 @@
         </p:nvSpPr>
         <p:spPr>
           <a:xfrm>
-            <a:off x="10953750" y="6286500"/>
-            <a:ext cx="609600" cy="285750"/>
+            <a:off x="685800" y="6372225"/>
+            <a:ext cx="9525000" cy="219075"/>
           </a:xfrm>
           <a:prstGeom prst="rect">
             <a:avLst/>
@@ -4700,35 +5673,35 @@
           <a:lstStyle/>
           <a:p>
             <a:pPr>
-              <a:defRPr sz="1425" b="0">
-                <a:solidFill>
-                  <a:srgbClr val="456162"/>
-                </a:solidFill>
-                <a:latin typeface="Malgun Gothic"/>
-                <a:ea typeface="Malgun Gothic"/>
-                <a:cs typeface="Malgun Gothic"/>
+              <a:defRPr sz="1275" b="0">
+                <a:solidFill>
+                  <a:srgbClr val="586C68"/>
+                </a:solidFill>
+                <a:latin typeface="Segoe UI"/>
+                <a:ea typeface="Segoe UI"/>
+                <a:cs typeface="Segoe UI"/>
               </a:defRPr>
             </a:pPr>
             <a:r>
-              <a:rPr sz="1425" b="0">
-                <a:solidFill>
-                  <a:srgbClr val="456162"/>
-                </a:solidFill>
-                <a:latin typeface="Malgun Gothic"/>
-                <a:ea typeface="Malgun Gothic"/>
-                <a:cs typeface="Malgun Gothic"/>
+              <a:rPr sz="1275" b="0">
+                <a:solidFill>
+                  <a:srgbClr val="586C68"/>
+                </a:solidFill>
+                <a:latin typeface="Segoe UI"/>
+                <a:ea typeface="Segoe UI"/>
+                <a:cs typeface="Segoe UI"/>
               </a:rPr>
-              <a:t>05</a:t>
+              <a:t>Illustrative data · not experimental results</a:t>
             </a:r>
           </a:p>
         </p:txBody>
       </p:sp>
       <p:sp>
         <p:nvSpPr>
-          <p:cNvPr id="4" name="S05-main">
+          <p:cNvPr id="4" name="S05-number">
             <a:extLst>
               <a:ext uri="{FF2B5EF4-FFF2-40B4-BE49-F238E27FC236}">
-                <a16:creationId xmlns:a16="http://schemas.microsoft.com/office/drawing/2014/main" id="{AE9119FC-5889-4105-9317-FCD7088CEDA9}"/>
+                <a16:creationId xmlns:a16="http://schemas.microsoft.com/office/drawing/2014/main" id="{E378D239-3D97-45CC-8321-8823A487088C}"/>
               </a:ext>
             </a:extLst>
           </p:cNvPr>
@@ -4739,8 +5712,8 @@
         </p:nvSpPr>
         <p:spPr>
           <a:xfrm>
-            <a:off x="609600" y="1600200"/>
-            <a:ext cx="10972800" cy="1143000"/>
+            <a:off x="11144250" y="6372225"/>
+            <a:ext cx="361950" cy="219075"/>
           </a:xfrm>
           <a:prstGeom prst="rect">
             <a:avLst/>
@@ -4757,58 +5730,35 @@
           <a:lstStyle/>
           <a:p>
             <a:pPr>
-              <a:defRPr sz="3000" b="1">
-                <a:solidFill>
-                  <a:srgbClr val="007E80"/>
-                </a:solidFill>
-                <a:latin typeface="Malgun Gothic"/>
-                <a:ea typeface="Malgun Gothic"/>
-                <a:cs typeface="Malgun Gothic"/>
+              <a:defRPr sz="1275" b="0">
+                <a:solidFill>
+                  <a:srgbClr val="586C68"/>
+                </a:solidFill>
+                <a:latin typeface="Segoe UI"/>
+                <a:ea typeface="Segoe UI"/>
+                <a:cs typeface="Segoe UI"/>
               </a:defRPr>
             </a:pPr>
             <a:r>
-              <a:rPr sz="3000" b="1">
-                <a:solidFill>
-                  <a:srgbClr val="007E80"/>
-                </a:solidFill>
-                <a:latin typeface="Malgun Gothic"/>
-                <a:ea typeface="Malgun Gothic"/>
-                <a:cs typeface="Malgun Gothic"/>
+              <a:rPr sz="1275" b="0">
+                <a:solidFill>
+                  <a:srgbClr val="586C68"/>
+                </a:solidFill>
+                <a:latin typeface="Segoe UI"/>
+                <a:ea typeface="Segoe UI"/>
+                <a:cs typeface="Segoe UI"/>
               </a:rPr>
-              <a:t>이 가상 예시는 효율과 F1의</a:t>
+              <a:t>05</a:t>
             </a:r>
           </a:p>
-          <a:p>
-            <a:pPr>
-              <a:defRPr sz="3000" b="1">
-                <a:solidFill>
-                  <a:srgbClr val="007E80"/>
-                </a:solidFill>
-                <a:latin typeface="Malgun Gothic"/>
-                <a:ea typeface="Malgun Gothic"/>
-                <a:cs typeface="Malgun Gothic"/>
-              </a:defRPr>
-            </a:pPr>
-            <a:r>
-              <a:rPr sz="3000" b="1">
-                <a:solidFill>
-                  <a:srgbClr val="007E80"/>
-                </a:solidFill>
-                <a:latin typeface="Malgun Gothic"/>
-                <a:ea typeface="Malgun Gothic"/>
-                <a:cs typeface="Malgun Gothic"/>
-              </a:rPr>
-              <a:t>교환관계를 보여줍니다</a:t>
-            </a:r>
-          </a:p>
-        </p:txBody>
-      </p:sp>
-      <p:sp>
-        <p:nvSpPr>
-          <p:cNvPr id="5" name="S05-label1">
+        </p:txBody>
+      </p:sp>
+      <p:sp>
+        <p:nvSpPr>
+          <p:cNvPr id="5" name="S05-main">
             <a:extLst>
               <a:ext uri="{FF2B5EF4-FFF2-40B4-BE49-F238E27FC236}">
-                <a16:creationId xmlns:a16="http://schemas.microsoft.com/office/drawing/2014/main" id="{19CB339F-7AEC-4446-AF7D-400E8D1E571F}"/>
+                <a16:creationId xmlns:a16="http://schemas.microsoft.com/office/drawing/2014/main" id="{27DA5E0A-96B5-4B69-874C-DD0381FCFD63}"/>
               </a:ext>
             </a:extLst>
           </p:cNvPr>
@@ -4819,8 +5769,8 @@
         </p:nvSpPr>
         <p:spPr>
           <a:xfrm>
-            <a:off x="609600" y="3209925"/>
-            <a:ext cx="2952750" cy="419100"/>
+            <a:off x="685800" y="1990725"/>
+            <a:ext cx="10820400" cy="723900"/>
           </a:xfrm>
           <a:prstGeom prst="rect">
             <a:avLst/>
@@ -4837,35 +5787,35 @@
           <a:lstStyle/>
           <a:p>
             <a:pPr>
-              <a:defRPr sz="2100" b="1">
-                <a:solidFill>
-                  <a:srgbClr val="173F40"/>
-                </a:solidFill>
-                <a:latin typeface="Malgun Gothic"/>
-                <a:ea typeface="Malgun Gothic"/>
-                <a:cs typeface="Malgun Gothic"/>
+              <a:defRPr sz="3675" b="0">
+                <a:solidFill>
+                  <a:srgbClr val="287D78"/>
+                </a:solidFill>
+                <a:latin typeface="Segoe UI"/>
+                <a:ea typeface="Segoe UI"/>
+                <a:cs typeface="Segoe UI"/>
               </a:defRPr>
             </a:pPr>
             <a:r>
-              <a:rPr sz="2100" b="1">
-                <a:solidFill>
-                  <a:srgbClr val="173F40"/>
-                </a:solidFill>
-                <a:latin typeface="Malgun Gothic"/>
-                <a:ea typeface="Malgun Gothic"/>
-                <a:cs typeface="Malgun Gothic"/>
+              <a:rPr sz="3675" b="0">
+                <a:solidFill>
+                  <a:srgbClr val="287D78"/>
+                </a:solidFill>
+                <a:latin typeface="Segoe UI"/>
+                <a:ea typeface="Segoe UI"/>
+                <a:cs typeface="Segoe UI"/>
               </a:rPr>
-              <a:t>먼저 정할 기준</a:t>
+              <a:t>Efficiency gains come with lower F1</a:t>
             </a:r>
           </a:p>
         </p:txBody>
       </p:sp>
       <p:sp>
         <p:nvSpPr>
-          <p:cNvPr id="6" name="S05-body1">
+          <p:cNvPr id="6" name="S05-rule-1">
             <a:extLst>
               <a:ext uri="{FF2B5EF4-FFF2-40B4-BE49-F238E27FC236}">
-                <a16:creationId xmlns:a16="http://schemas.microsoft.com/office/drawing/2014/main" id="{993E1567-B944-4B33-95C7-6B1DD9C309E1}"/>
+                <a16:creationId xmlns:a16="http://schemas.microsoft.com/office/drawing/2014/main" id="{9CB55CD0-84B1-438B-8667-050BCC257CC1}"/>
               </a:ext>
             </a:extLst>
           </p:cNvPr>
@@ -4876,8 +5826,37 @@
         </p:nvSpPr>
         <p:spPr>
           <a:xfrm>
-            <a:off x="3714750" y="3209925"/>
-            <a:ext cx="7867650" cy="419100"/>
+            <a:off x="685800" y="3124200"/>
+            <a:ext cx="10820400" cy="0"/>
+          </a:xfrm>
+          <a:prstGeom prst="line">
+            <a:avLst/>
+          </a:prstGeom>
+          <a:ln w="9525">
+            <a:solidFill>
+              <a:srgbClr val="CFD8D1"/>
+            </a:solidFill>
+          </a:ln>
+        </p:spPr>
+      </p:sp>
+      <p:sp>
+        <p:nvSpPr>
+          <p:cNvPr id="7" name="S05-label1">
+            <a:extLst>
+              <a:ext uri="{FF2B5EF4-FFF2-40B4-BE49-F238E27FC236}">
+                <a16:creationId xmlns:a16="http://schemas.microsoft.com/office/drawing/2014/main" id="{19CB2F7F-7D59-40B3-A705-65074EECCE48}"/>
+              </a:ext>
+            </a:extLst>
+          </p:cNvPr>
+          <p:cNvSpPr>
+            <a:spLocks noGrp="1"/>
+          </p:cNvSpPr>
+          <p:nvPr/>
+        </p:nvSpPr>
+        <p:spPr>
+          <a:xfrm>
+            <a:off x="685800" y="3257550"/>
+            <a:ext cx="2914650" cy="495300"/>
           </a:xfrm>
           <a:prstGeom prst="rect">
             <a:avLst/>
@@ -4894,35 +5873,35 @@
           <a:lstStyle/>
           <a:p>
             <a:pPr>
-              <a:defRPr sz="2100" b="0">
-                <a:solidFill>
-                  <a:srgbClr val="173F40"/>
-                </a:solidFill>
-                <a:latin typeface="Malgun Gothic"/>
-                <a:ea typeface="Malgun Gothic"/>
-                <a:cs typeface="Malgun Gothic"/>
+              <a:defRPr sz="1875" b="0">
+                <a:solidFill>
+                  <a:srgbClr val="1E302F"/>
+                </a:solidFill>
+                <a:latin typeface="Segoe UI"/>
+                <a:ea typeface="Segoe UI"/>
+                <a:cs typeface="Segoe UI"/>
               </a:defRPr>
             </a:pPr>
             <a:r>
-              <a:rPr sz="2100" b="0">
-                <a:solidFill>
-                  <a:srgbClr val="173F40"/>
-                </a:solidFill>
-                <a:latin typeface="Malgun Gothic"/>
-                <a:ea typeface="Malgun Gothic"/>
-                <a:cs typeface="Malgun Gothic"/>
+              <a:rPr sz="1875" b="0">
+                <a:solidFill>
+                  <a:srgbClr val="1E302F"/>
+                </a:solidFill>
+                <a:latin typeface="Segoe UI"/>
+                <a:ea typeface="Segoe UI"/>
+                <a:cs typeface="Segoe UI"/>
               </a:rPr>
-              <a:t>허용 가능한 F1 저하와 지연 한도</a:t>
+              <a:t>Set the threshold</a:t>
             </a:r>
           </a:p>
         </p:txBody>
       </p:sp>
       <p:sp>
         <p:nvSpPr>
-          <p:cNvPr id="7" name="S05-label2">
+          <p:cNvPr id="8" name="S05-body1">
             <a:extLst>
               <a:ext uri="{FF2B5EF4-FFF2-40B4-BE49-F238E27FC236}">
-                <a16:creationId xmlns:a16="http://schemas.microsoft.com/office/drawing/2014/main" id="{A02F50EE-787A-4C8C-A12A-AA2687B3338E}"/>
+                <a16:creationId xmlns:a16="http://schemas.microsoft.com/office/drawing/2014/main" id="{F8D4A716-829E-445A-8D85-F1F389B2925B}"/>
               </a:ext>
             </a:extLst>
           </p:cNvPr>
@@ -4933,8 +5912,8 @@
         </p:nvSpPr>
         <p:spPr>
           <a:xfrm>
-            <a:off x="609600" y="4019550"/>
-            <a:ext cx="2952750" cy="419100"/>
+            <a:off x="3829050" y="3257550"/>
+            <a:ext cx="7677150" cy="495300"/>
           </a:xfrm>
           <a:prstGeom prst="rect">
             <a:avLst/>
@@ -4951,35 +5930,35 @@
           <a:lstStyle/>
           <a:p>
             <a:pPr>
-              <a:defRPr sz="2100" b="1">
-                <a:solidFill>
-                  <a:srgbClr val="173F40"/>
-                </a:solidFill>
-                <a:latin typeface="Malgun Gothic"/>
-                <a:ea typeface="Malgun Gothic"/>
-                <a:cs typeface="Malgun Gothic"/>
+              <a:defRPr sz="1800" b="0">
+                <a:solidFill>
+                  <a:srgbClr val="586C68"/>
+                </a:solidFill>
+                <a:latin typeface="Segoe UI"/>
+                <a:ea typeface="Segoe UI"/>
+                <a:cs typeface="Segoe UI"/>
               </a:defRPr>
             </a:pPr>
             <a:r>
-              <a:rPr sz="2100" b="1">
-                <a:solidFill>
-                  <a:srgbClr val="173F40"/>
-                </a:solidFill>
-                <a:latin typeface="Malgun Gothic"/>
-                <a:ea typeface="Malgun Gothic"/>
-                <a:cs typeface="Malgun Gothic"/>
+              <a:rPr sz="1800" b="0">
+                <a:solidFill>
+                  <a:srgbClr val="586C68"/>
+                </a:solidFill>
+                <a:latin typeface="Segoe UI"/>
+                <a:ea typeface="Segoe UI"/>
+                <a:cs typeface="Segoe UI"/>
               </a:rPr>
-              <a:t>다음 검증</a:t>
+              <a:t>Acceptable F1 loss and latency budget.</a:t>
             </a:r>
           </a:p>
         </p:txBody>
       </p:sp>
       <p:sp>
         <p:nvSpPr>
-          <p:cNvPr id="8" name="S05-body2">
+          <p:cNvPr id="9" name="S05-rule-2">
             <a:extLst>
               <a:ext uri="{FF2B5EF4-FFF2-40B4-BE49-F238E27FC236}">
-                <a16:creationId xmlns:a16="http://schemas.microsoft.com/office/drawing/2014/main" id="{2296F06B-7A65-410C-A998-8E8885A752F5}"/>
+                <a16:creationId xmlns:a16="http://schemas.microsoft.com/office/drawing/2014/main" id="{4E24EA9A-26E7-41E2-B062-7FEBDD63D46C}"/>
               </a:ext>
             </a:extLst>
           </p:cNvPr>
@@ -4990,8 +5969,37 @@
         </p:nvSpPr>
         <p:spPr>
           <a:xfrm>
-            <a:off x="3714750" y="4019550"/>
-            <a:ext cx="7867650" cy="419100"/>
+            <a:off x="685800" y="3962400"/>
+            <a:ext cx="10820400" cy="0"/>
+          </a:xfrm>
+          <a:prstGeom prst="line">
+            <a:avLst/>
+          </a:prstGeom>
+          <a:ln w="9525">
+            <a:solidFill>
+              <a:srgbClr val="CFD8D1"/>
+            </a:solidFill>
+          </a:ln>
+        </p:spPr>
+      </p:sp>
+      <p:sp>
+        <p:nvSpPr>
+          <p:cNvPr id="10" name="S05-label2">
+            <a:extLst>
+              <a:ext uri="{FF2B5EF4-FFF2-40B4-BE49-F238E27FC236}">
+                <a16:creationId xmlns:a16="http://schemas.microsoft.com/office/drawing/2014/main" id="{BF8C2591-9A1E-4116-AF1A-A960257A7944}"/>
+              </a:ext>
+            </a:extLst>
+          </p:cNvPr>
+          <p:cNvSpPr>
+            <a:spLocks noGrp="1"/>
+          </p:cNvSpPr>
+          <p:nvPr/>
+        </p:nvSpPr>
+        <p:spPr>
+          <a:xfrm>
+            <a:off x="685800" y="4095750"/>
+            <a:ext cx="2914650" cy="495300"/>
           </a:xfrm>
           <a:prstGeom prst="rect">
             <a:avLst/>
@@ -5008,35 +6016,35 @@
           <a:lstStyle/>
           <a:p>
             <a:pPr>
-              <a:defRPr sz="2100" b="0">
-                <a:solidFill>
-                  <a:srgbClr val="173F40"/>
-                </a:solidFill>
-                <a:latin typeface="Malgun Gothic"/>
-                <a:ea typeface="Malgun Gothic"/>
-                <a:cs typeface="Malgun Gothic"/>
+              <a:defRPr sz="1875" b="0">
+                <a:solidFill>
+                  <a:srgbClr val="1E302F"/>
+                </a:solidFill>
+                <a:latin typeface="Segoe UI"/>
+                <a:ea typeface="Segoe UI"/>
+                <a:cs typeface="Segoe UI"/>
               </a:defRPr>
             </a:pPr>
             <a:r>
-              <a:rPr sz="2100" b="0">
-                <a:solidFill>
-                  <a:srgbClr val="173F40"/>
-                </a:solidFill>
-                <a:latin typeface="Malgun Gothic"/>
-                <a:ea typeface="Malgun Gothic"/>
-                <a:cs typeface="Malgun Gothic"/>
+              <a:rPr sz="1875" b="0">
+                <a:solidFill>
+                  <a:srgbClr val="1E302F"/>
+                </a:solidFill>
+                <a:latin typeface="Segoe UI"/>
+                <a:ea typeface="Segoe UI"/>
+                <a:cs typeface="Segoe UI"/>
               </a:rPr>
-              <a:t>반복 측정의 분산, 이상 유형별 실패 사례</a:t>
+              <a:t>Test the behavior</a:t>
             </a:r>
           </a:p>
         </p:txBody>
       </p:sp>
       <p:sp>
         <p:nvSpPr>
-          <p:cNvPr id="9" name="S05-label3">
+          <p:cNvPr id="11" name="S05-body2">
             <a:extLst>
               <a:ext uri="{FF2B5EF4-FFF2-40B4-BE49-F238E27FC236}">
-                <a16:creationId xmlns:a16="http://schemas.microsoft.com/office/drawing/2014/main" id="{26FD1C54-C2BC-4896-8978-D9069F0E1372}"/>
+                <a16:creationId xmlns:a16="http://schemas.microsoft.com/office/drawing/2014/main" id="{9C0232FA-8F00-40F2-8497-E1B643158554}"/>
               </a:ext>
             </a:extLst>
           </p:cNvPr>
@@ -5047,8 +6055,8 @@
         </p:nvSpPr>
         <p:spPr>
           <a:xfrm>
-            <a:off x="609600" y="4829175"/>
-            <a:ext cx="2952750" cy="419100"/>
+            <a:off x="3829050" y="4095750"/>
+            <a:ext cx="7677150" cy="495300"/>
           </a:xfrm>
           <a:prstGeom prst="rect">
             <a:avLst/>
@@ -5065,35 +6073,35 @@
           <a:lstStyle/>
           <a:p>
             <a:pPr>
-              <a:defRPr sz="2100" b="1">
-                <a:solidFill>
-                  <a:srgbClr val="173F40"/>
-                </a:solidFill>
-                <a:latin typeface="Malgun Gothic"/>
-                <a:ea typeface="Malgun Gothic"/>
-                <a:cs typeface="Malgun Gothic"/>
+              <a:defRPr sz="1800" b="0">
+                <a:solidFill>
+                  <a:srgbClr val="586C68"/>
+                </a:solidFill>
+                <a:latin typeface="Segoe UI"/>
+                <a:ea typeface="Segoe UI"/>
+                <a:cs typeface="Segoe UI"/>
               </a:defRPr>
             </a:pPr>
             <a:r>
-              <a:rPr sz="2100" b="1">
-                <a:solidFill>
-                  <a:srgbClr val="173F40"/>
-                </a:solidFill>
-                <a:latin typeface="Malgun Gothic"/>
-                <a:ea typeface="Malgun Gothic"/>
-                <a:cs typeface="Malgun Gothic"/>
+              <a:rPr sz="1800" b="0">
+                <a:solidFill>
+                  <a:srgbClr val="586C68"/>
+                </a:solidFill>
+                <a:latin typeface="Segoe UI"/>
+                <a:ea typeface="Segoe UI"/>
+                <a:cs typeface="Segoe UI"/>
               </a:rPr>
-              <a:t>현재의 한계</a:t>
+              <a:t>Repeat measurements; inspect failures by anomaly type.</a:t>
             </a:r>
           </a:p>
         </p:txBody>
       </p:sp>
       <p:sp>
         <p:nvSpPr>
-          <p:cNvPr id="10" name="S05-body3">
+          <p:cNvPr id="12" name="S05-rule-3">
             <a:extLst>
               <a:ext uri="{FF2B5EF4-FFF2-40B4-BE49-F238E27FC236}">
-                <a16:creationId xmlns:a16="http://schemas.microsoft.com/office/drawing/2014/main" id="{707D3BC3-06DF-43DA-9123-D3A600D75989}"/>
+                <a16:creationId xmlns:a16="http://schemas.microsoft.com/office/drawing/2014/main" id="{13263353-6662-4892-8755-BB00AE96FC9F}"/>
               </a:ext>
             </a:extLst>
           </p:cNvPr>
@@ -5104,8 +6112,37 @@
         </p:nvSpPr>
         <p:spPr>
           <a:xfrm>
-            <a:off x="3714750" y="4772025"/>
-            <a:ext cx="7867650" cy="857250"/>
+            <a:off x="685800" y="4800600"/>
+            <a:ext cx="10820400" cy="0"/>
+          </a:xfrm>
+          <a:prstGeom prst="line">
+            <a:avLst/>
+          </a:prstGeom>
+          <a:ln w="9525">
+            <a:solidFill>
+              <a:srgbClr val="CFD8D1"/>
+            </a:solidFill>
+          </a:ln>
+        </p:spPr>
+      </p:sp>
+      <p:sp>
+        <p:nvSpPr>
+          <p:cNvPr id="13" name="S05-label3">
+            <a:extLst>
+              <a:ext uri="{FF2B5EF4-FFF2-40B4-BE49-F238E27FC236}">
+                <a16:creationId xmlns:a16="http://schemas.microsoft.com/office/drawing/2014/main" id="{48C5EE6A-6070-41C2-A5A8-A34B86D65264}"/>
+              </a:ext>
+            </a:extLst>
+          </p:cNvPr>
+          <p:cNvSpPr>
+            <a:spLocks noGrp="1"/>
+          </p:cNvSpPr>
+          <p:nvPr/>
+        </p:nvSpPr>
+        <p:spPr>
+          <a:xfrm>
+            <a:off x="685800" y="4933950"/>
+            <a:ext cx="2914650" cy="495300"/>
           </a:xfrm>
           <a:prstGeom prst="rect">
             <a:avLst/>
@@ -5122,48 +6159,82 @@
           <a:lstStyle/>
           <a:p>
             <a:pPr>
-              <a:defRPr sz="2100" b="0">
-                <a:solidFill>
-                  <a:srgbClr val="173F40"/>
-                </a:solidFill>
-                <a:latin typeface="Malgun Gothic"/>
-                <a:ea typeface="Malgun Gothic"/>
-                <a:cs typeface="Malgun Gothic"/>
+              <a:defRPr sz="1875" b="0">
+                <a:solidFill>
+                  <a:srgbClr val="1E302F"/>
+                </a:solidFill>
+                <a:latin typeface="Segoe UI"/>
+                <a:ea typeface="Segoe UI"/>
+                <a:cs typeface="Segoe UI"/>
               </a:defRPr>
             </a:pPr>
             <a:r>
-              <a:rPr sz="2100" b="0">
-                <a:solidFill>
-                  <a:srgbClr val="173F40"/>
-                </a:solidFill>
-                <a:latin typeface="Malgun Gothic"/>
-                <a:ea typeface="Malgun Gothic"/>
-                <a:cs typeface="Malgun Gothic"/>
+              <a:rPr sz="1875" b="0">
+                <a:solidFill>
+                  <a:srgbClr val="1E302F"/>
+                </a:solidFill>
+                <a:latin typeface="Segoe UI"/>
+                <a:ea typeface="Segoe UI"/>
+                <a:cs typeface="Segoe UI"/>
               </a:rPr>
-              <a:t>표본수·실제 데이터셋명이 없어</a:t>
+              <a:t>Keep the limit visible</a:t>
             </a:r>
           </a:p>
+        </p:txBody>
+      </p:sp>
+      <p:sp>
+        <p:nvSpPr>
+          <p:cNvPr id="14" name="S05-body3">
+            <a:extLst>
+              <a:ext uri="{FF2B5EF4-FFF2-40B4-BE49-F238E27FC236}">
+                <a16:creationId xmlns:a16="http://schemas.microsoft.com/office/drawing/2014/main" id="{CFB01367-3082-43F8-8DD6-04D660FEE560}"/>
+              </a:ext>
+            </a:extLst>
+          </p:cNvPr>
+          <p:cNvSpPr>
+            <a:spLocks noGrp="1"/>
+          </p:cNvSpPr>
+          <p:nvPr/>
+        </p:nvSpPr>
+        <p:spPr>
+          <a:xfrm>
+            <a:off x="3829050" y="4933950"/>
+            <a:ext cx="7677150" cy="495300"/>
+          </a:xfrm>
+          <a:prstGeom prst="rect">
+            <a:avLst/>
+          </a:prstGeom>
+          <a:noFill/>
+          <a:ln w="0">
+            <a:noFill/>
+          </a:ln>
+        </p:spPr>
+        <p:txBody>
+          <a:bodyPr wrap="none" lIns="0" tIns="0" rIns="0" bIns="0" anchor="ctr">
+            <a:noAutofit/>
+          </a:bodyPr>
+          <a:lstStyle/>
           <a:p>
             <a:pPr>
-              <a:defRPr sz="2100" b="0">
-                <a:solidFill>
-                  <a:srgbClr val="173F40"/>
-                </a:solidFill>
-                <a:latin typeface="Malgun Gothic"/>
-                <a:ea typeface="Malgun Gothic"/>
-                <a:cs typeface="Malgun Gothic"/>
+              <a:defRPr sz="1800" b="0">
+                <a:solidFill>
+                  <a:srgbClr val="586C68"/>
+                </a:solidFill>
+                <a:latin typeface="Segoe UI"/>
+                <a:ea typeface="Segoe UI"/>
+                <a:cs typeface="Segoe UI"/>
               </a:defRPr>
             </a:pPr>
             <a:r>
-              <a:rPr sz="2100" b="0">
-                <a:solidFill>
-                  <a:srgbClr val="173F40"/>
-                </a:solidFill>
-                <a:latin typeface="Malgun Gothic"/>
-                <a:ea typeface="Malgun Gothic"/>
-                <a:cs typeface="Malgun Gothic"/>
+              <a:rPr sz="1800" b="0">
+                <a:solidFill>
+                  <a:srgbClr val="586C68"/>
+                </a:solidFill>
+                <a:latin typeface="Segoe UI"/>
+                <a:ea typeface="Segoe UI"/>
+                <a:cs typeface="Segoe UI"/>
               </a:rPr>
-              <a:t>일반화 판단 불가</a:t>
+              <a:t>No real dataset or sample count: no generalization claim.</a:t>
             </a:r>
           </a:p>
         </p:txBody>
@@ -5171,7 +6242,7 @@
     </p:spTree>
     <p:extLst>
       <p:ext uri="{BB962C8B-B14F-4D97-AF65-F5344CB8AC3E}">
-        <p14:creationId xmlns:p14="http://schemas.microsoft.com/office/powerpoint/2010/main" val="2107399723"/>
+        <p14:creationId xmlns:p14="http://schemas.microsoft.com/office/powerpoint/2010/main" val="1359324439"/>
       </p:ext>
     </p:extLst>
   </p:cSld>

--- a/examples/research-seminar/animated.pptx
+++ b/examples/research-seminar/animated.pptx
@@ -124,63 +124,144 @@
     <c:autoTitleDeleted val="1"/>
     <c:plotArea>
       <c:layout/>
-      <c:barChart>
-        <c:barDir val="col"/>
-        <c:grouping val="clustered"/>
-        <c:varyColors val="0"/>
+      <c:scatterChart>
+        <c:scatterStyle val="lineMarker"/>
+        <c:varyColors val="1"/>
         <c:ser>
           <c:idx val="0"/>
           <c:order val="0"/>
           <c:tx>
-            <c:v>Latency (ms)</c:v>
+            <c:v>Models</c:v>
           </c:tx>
           <c:spPr>
-            <a:solidFill>
-              <a:srgbClr val="287D78"/>
-            </a:solidFill>
+            <a:ln w="0">
+              <a:noFill/>
+            </a:ln>
           </c:spPr>
-          <c:invertIfNegative val="1"/>
-          <c:dPt>
-            <c:idx val="0"/>
-            <c:invertIfNegative val="0"/>
-            <c:bubble3D val="0"/>
+          <c:marker>
+            <c:symbol val="circle"/>
+            <c:size val="10"/>
             <c:spPr>
               <a:solidFill>
-                <a:srgbClr val="9EADA5"/>
+                <a:srgbClr val="287D78"/>
               </a:solidFill>
+              <a:ln>
+                <a:noFill/>
+              </a:ln>
             </c:spPr>
-            <c:extLst>
-              <c:ext xmlns:c16="http://schemas.microsoft.com/office/drawing/2014/chart" uri="{C3380CC4-5D6E-409C-BE32-E72D297353CC}">
-                <c16:uniqueId val="{00000001-64F9-463C-BA85-3156AF375E0C}"/>
-              </c:ext>
-            </c:extLst>
-          </c:dPt>
-          <c:dPt>
-            <c:idx val="1"/>
-            <c:invertIfNegative val="0"/>
-            <c:bubble3D val="0"/>
-            <c:spPr>
-              <a:solidFill>
-                <a:srgbClr val="639D90"/>
-              </a:solidFill>
-            </c:spPr>
-            <c:extLst>
-              <c:ext xmlns:c16="http://schemas.microsoft.com/office/drawing/2014/chart" uri="{C3380CC4-5D6E-409C-BE32-E72D297353CC}">
-                <c16:uniqueId val="{00000003-64F9-463C-BA85-3156AF375E0C}"/>
-              </c:ext>
-            </c:extLst>
-          </c:dPt>
-          <c:dPt>
-            <c:idx val="2"/>
-            <c:invertIfNegative val="0"/>
-            <c:bubble3D val="0"/>
-            <c:extLst>
-              <c:ext xmlns:c16="http://schemas.microsoft.com/office/drawing/2014/chart" uri="{C3380CC4-5D6E-409C-BE32-E72D297353CC}">
-                <c16:uniqueId val="{00000005-64F9-463C-BA85-3156AF375E0C}"/>
-              </c:ext>
-            </c:extLst>
-          </c:dPt>
+          </c:marker>
           <c:dLbls>
+            <c:dLbl>
+              <c:idx val="0"/>
+              <c:tx>
+                <c:rich>
+                  <a:bodyPr/>
+                  <a:lstStyle/>
+                  <a:p>
+                    <a:r>
+                      <a:rPr sz="1800">
+                        <a:solidFill>
+                          <a:srgbClr val="1E302F"/>
+                        </a:solidFill>
+                        <a:latin typeface="Segoe UI"/>
+                        <a:ea typeface="Segoe UI"/>
+                        <a:cs typeface="Segoe UI"/>
+                      </a:rPr>
+                      <a:t>baseline</a:t>
+                    </a:r>
+                  </a:p>
+                </c:rich>
+              </c:tx>
+              <c:spPr/>
+              <c:showLegendKey val="0"/>
+              <c:showVal val="0"/>
+              <c:showCatName val="0"/>
+              <c:showSerName val="0"/>
+              <c:showPercent val="0"/>
+              <c:showBubbleSize val="0"/>
+              <c:extLst>
+                <c:ext xmlns:c15="http://schemas.microsoft.com/office/drawing/2012/chart" uri="{CE6537A1-D6FC-4f65-9D91-7224C49458BB}">
+                  <c15:showDataLabelsRange val="0"/>
+                </c:ext>
+                <c:ext xmlns:c16="http://schemas.microsoft.com/office/drawing/2014/chart" uri="{C3380CC4-5D6E-409C-BE32-E72D297353CC}">
+                  <c16:uniqueId val="{00000000-3A6B-4776-8658-E4A6E0065C65}"/>
+                </c:ext>
+              </c:extLst>
+            </c:dLbl>
+            <c:dLbl>
+              <c:idx val="1"/>
+              <c:tx>
+                <c:rich>
+                  <a:bodyPr/>
+                  <a:lstStyle/>
+                  <a:p>
+                    <a:r>
+                      <a:rPr sz="1800">
+                        <a:solidFill>
+                          <a:srgbClr val="1E302F"/>
+                        </a:solidFill>
+                        <a:latin typeface="Segoe UI"/>
+                        <a:ea typeface="Segoe UI"/>
+                        <a:cs typeface="Segoe UI"/>
+                      </a:rPr>
+                      <a:t>distilled</a:t>
+                    </a:r>
+                  </a:p>
+                </c:rich>
+              </c:tx>
+              <c:spPr/>
+              <c:showLegendKey val="0"/>
+              <c:showVal val="0"/>
+              <c:showCatName val="0"/>
+              <c:showSerName val="0"/>
+              <c:showPercent val="0"/>
+              <c:showBubbleSize val="0"/>
+              <c:extLst>
+                <c:ext xmlns:c15="http://schemas.microsoft.com/office/drawing/2012/chart" uri="{CE6537A1-D6FC-4f65-9D91-7224C49458BB}">
+                  <c15:showDataLabelsRange val="0"/>
+                </c:ext>
+                <c:ext xmlns:c16="http://schemas.microsoft.com/office/drawing/2014/chart" uri="{C3380CC4-5D6E-409C-BE32-E72D297353CC}">
+                  <c16:uniqueId val="{00000001-3A6B-4776-8658-E4A6E0065C65}"/>
+                </c:ext>
+              </c:extLst>
+            </c:dLbl>
+            <c:dLbl>
+              <c:idx val="2"/>
+              <c:tx>
+                <c:rich>
+                  <a:bodyPr/>
+                  <a:lstStyle/>
+                  <a:p>
+                    <a:r>
+                      <a:rPr sz="1800">
+                        <a:solidFill>
+                          <a:srgbClr val="1E302F"/>
+                        </a:solidFill>
+                        <a:latin typeface="Segoe UI"/>
+                        <a:ea typeface="Segoe UI"/>
+                        <a:cs typeface="Segoe UI"/>
+                      </a:rPr>
+                      <a:t>int8</a:t>
+                    </a:r>
+                  </a:p>
+                </c:rich>
+              </c:tx>
+              <c:spPr/>
+              <c:showLegendKey val="0"/>
+              <c:showVal val="0"/>
+              <c:showCatName val="0"/>
+              <c:showSerName val="0"/>
+              <c:showPercent val="0"/>
+              <c:showBubbleSize val="0"/>
+              <c:extLst>
+                <c:ext xmlns:c15="http://schemas.microsoft.com/office/drawing/2012/chart" uri="{CE6537A1-D6FC-4f65-9D91-7224C49458BB}">
+                  <c15:showDataLabelsRange val="0"/>
+                </c:ext>
+                <c:ext xmlns:c16="http://schemas.microsoft.com/office/drawing/2014/chart" uri="{C3380CC4-5D6E-409C-BE32-E72D297353CC}">
+                  <c16:uniqueId val="{00000002-3A6B-4776-8658-E4A6E0065C65}"/>
+                </c:ext>
+              </c:extLst>
+            </c:dLbl>
             <c:spPr>
               <a:noFill/>
               <a:ln>
@@ -188,30 +269,12 @@
               </a:ln>
               <a:effectLst/>
             </c:spPr>
-            <c:txPr>
-              <a:bodyPr anchorCtr="1"/>
-              <a:lstStyle/>
-              <a:p>
-                <a:pPr>
-                  <a:defRPr sz="2025">
-                    <a:solidFill>
-                      <a:srgbClr val="1E302F"/>
-                    </a:solidFill>
-                    <a:latin typeface="Segoe UI"/>
-                    <a:ea typeface="Segoe UI"/>
-                    <a:cs typeface="Segoe UI"/>
-                  </a:defRPr>
-                </a:pPr>
-                <a:endParaRPr lang="ko-KR"/>
-              </a:p>
-            </c:txPr>
-            <c:dLblPos val="outEnd"/>
-            <c:showLegendKey val="0"/>
+            <c:showLegendKey val="1"/>
             <c:showVal val="1"/>
-            <c:showCatName val="0"/>
-            <c:showSerName val="0"/>
-            <c:showPercent val="0"/>
-            <c:showBubbleSize val="0"/>
+            <c:showCatName val="1"/>
+            <c:showSerName val="1"/>
+            <c:showPercent val="1"/>
+            <c:showBubbleSize val="1"/>
             <c:showLeaderLines val="0"/>
             <c:extLst>
               <c:ext xmlns:c15="http://schemas.microsoft.com/office/drawing/2012/chart" uri="{CE6537A1-D6FC-4f65-9D91-7224C49458BB}">
@@ -219,28 +282,11 @@
               </c:ext>
             </c:extLst>
           </c:dLbls>
-          <c:cat>
-            <c:strRef>
+          <c:xVal>
+            <c:numRef>
               <c:f>'Chart Data'!$A$2:$A$4</c:f>
-              <c:strCache>
-                <c:ptCount val="3"/>
-                <c:pt idx="0">
-                  <c:v>baseline</c:v>
-                </c:pt>
-                <c:pt idx="1">
-                  <c:v>distilled</c:v>
-                </c:pt>
-                <c:pt idx="2">
-                  <c:v>int8</c:v>
-                </c:pt>
-              </c:strCache>
-            </c:strRef>
-          </c:cat>
-          <c:val>
-            <c:numRef>
-              <c:f>'Chart Data'!$B$2:$B$4</c:f>
               <c:numCache>
-                <c:formatCode>0</c:formatCode>
+                <c:formatCode>General</c:formatCode>
                 <c:ptCount val="3"/>
                 <c:pt idx="0">
                   <c:v>120</c:v>
@@ -253,39 +299,100 @@
                 </c:pt>
               </c:numCache>
             </c:numRef>
-          </c:val>
+          </c:xVal>
+          <c:yVal>
+            <c:numRef>
+              <c:f>'Chart Data'!$B$2:$B$4</c:f>
+              <c:numCache>
+                <c:formatCode>0.000</c:formatCode>
+                <c:ptCount val="3"/>
+                <c:pt idx="0">
+                  <c:v>0.91</c:v>
+                </c:pt>
+                <c:pt idx="1">
+                  <c:v>0.90200000000000002</c:v>
+                </c:pt>
+                <c:pt idx="2">
+                  <c:v>0.89600000000000002</c:v>
+                </c:pt>
+              </c:numCache>
+            </c:numRef>
+          </c:yVal>
+          <c:smooth val="1"/>
           <c:extLst>
-            <c:ext xmlns:c14="http://schemas.microsoft.com/office/drawing/2007/8/2/chart" uri="{6F2FDCE9-48DA-4B69-8628-5D25D57E5C99}">
-              <c14:invertSolidFillFmt>
-                <c14:spPr xmlns:c14="http://schemas.microsoft.com/office/drawing/2007/8/2/chart">
-                  <a:solidFill>
-                    <a:srgbClr val="FFFFFF"/>
-                  </a:solidFill>
-                </c14:spPr>
-              </c14:invertSolidFillFmt>
-            </c:ext>
             <c:ext xmlns:c16="http://schemas.microsoft.com/office/drawing/2014/chart" uri="{C3380CC4-5D6E-409C-BE32-E72D297353CC}">
-              <c16:uniqueId val="{00000006-64F9-463C-BA85-3156AF375E0C}"/>
+              <c16:uniqueId val="{00000003-3A6B-4776-8658-E4A6E0065C65}"/>
             </c:ext>
           </c:extLst>
         </c:ser>
         <c:dLbls>
-          <c:dLblPos val="outEnd"/>
           <c:showLegendKey val="0"/>
-          <c:showVal val="1"/>
+          <c:showVal val="0"/>
           <c:showCatName val="0"/>
           <c:showSerName val="0"/>
           <c:showPercent val="0"/>
           <c:showBubbleSize val="0"/>
         </c:dLbls>
-        <c:gapWidth val="130"/>
         <c:axId val="48650112"/>
         <c:axId val="48672768"/>
-      </c:barChart>
-      <c:catAx>
+      </c:scatterChart>
+      <c:valAx>
+        <c:axId val="48672768"/>
+        <c:scaling>
+          <c:orientation val="minMax"/>
+          <c:max val="0.91500000000000004"/>
+          <c:min val="0.89"/>
+        </c:scaling>
+        <c:delete val="0"/>
+        <c:axPos val="l"/>
+        <c:majorGridlines>
+          <c:spPr>
+            <a:ln w="6668">
+              <a:solidFill>
+                <a:srgbClr val="CFD8D1"/>
+              </a:solidFill>
+            </a:ln>
+          </c:spPr>
+        </c:majorGridlines>
+        <c:numFmt formatCode="0.000" sourceLinked="1"/>
+        <c:majorTickMark val="none"/>
+        <c:minorTickMark val="none"/>
+        <c:tickLblPos val="nextTo"/>
+        <c:spPr>
+          <a:ln w="9525">
+            <a:solidFill>
+              <a:srgbClr val="CFD8D1"/>
+            </a:solidFill>
+          </a:ln>
+        </c:spPr>
+        <c:txPr>
+          <a:bodyPr anchorCtr="1"/>
+          <a:lstStyle/>
+          <a:p>
+            <a:pPr>
+              <a:defRPr sz="1725">
+                <a:solidFill>
+                  <a:srgbClr val="1E302F"/>
+                </a:solidFill>
+                <a:latin typeface="Segoe UI"/>
+                <a:ea typeface="Segoe UI"/>
+                <a:cs typeface="Segoe UI"/>
+              </a:defRPr>
+            </a:pPr>
+            <a:endParaRPr lang="ko-KR"/>
+          </a:p>
+        </c:txPr>
+        <c:crossAx val="48650112"/>
+        <c:crosses val="autoZero"/>
+        <c:crossBetween val="midCat"/>
+        <c:majorUnit val="5.0000000000000001E-3"/>
+      </c:valAx>
+      <c:valAx>
         <c:axId val="48650112"/>
         <c:scaling>
           <c:orientation val="minMax"/>
+          <c:max val="140"/>
+          <c:min val="40"/>
         </c:scaling>
         <c:delete val="0"/>
         <c:axPos val="b"/>
@@ -319,62 +426,8 @@
         </c:txPr>
         <c:crossAx val="48672768"/>
         <c:crosses val="autoZero"/>
-        <c:auto val="1"/>
-        <c:lblAlgn val="ctr"/>
-        <c:lblOffset val="100"/>
-        <c:noMultiLvlLbl val="1"/>
-      </c:catAx>
-      <c:valAx>
-        <c:axId val="48672768"/>
-        <c:scaling>
-          <c:orientation val="minMax"/>
-          <c:max val="140"/>
-          <c:min val="0"/>
-        </c:scaling>
-        <c:delete val="0"/>
-        <c:axPos val="l"/>
-        <c:majorGridlines>
-          <c:spPr>
-            <a:ln w="6668">
-              <a:solidFill>
-                <a:srgbClr val="CFD8D1"/>
-              </a:solidFill>
-            </a:ln>
-          </c:spPr>
-        </c:majorGridlines>
-        <c:numFmt formatCode="0" sourceLinked="1"/>
-        <c:majorTickMark val="none"/>
-        <c:minorTickMark val="none"/>
-        <c:tickLblPos val="nextTo"/>
-        <c:spPr>
-          <a:ln w="9525">
-            <a:solidFill>
-              <a:srgbClr val="D4D4D4"/>
-            </a:solidFill>
-            <a:prstDash val="solid"/>
-          </a:ln>
-        </c:spPr>
-        <c:txPr>
-          <a:bodyPr anchorCtr="1"/>
-          <a:lstStyle/>
-          <a:p>
-            <a:pPr>
-              <a:defRPr sz="1425">
-                <a:solidFill>
-                  <a:srgbClr val="586C68"/>
-                </a:solidFill>
-                <a:latin typeface="Segoe UI"/>
-                <a:ea typeface="Segoe UI"/>
-                <a:cs typeface="Segoe UI"/>
-              </a:defRPr>
-            </a:pPr>
-            <a:endParaRPr lang="ko-KR"/>
-          </a:p>
-        </c:txPr>
-        <c:crossAx val="48650112"/>
-        <c:crosses val="autoZero"/>
-        <c:crossBetween val="between"/>
-        <c:majorUnit val="40"/>
+        <c:crossBetween val="midCat"/>
+        <c:majorUnit val="20"/>
       </c:valAx>
       <c:spPr>
         <a:solidFill>
@@ -613,7 +666,7 @@
           <a:lstStyle/>
           <a:p>
             <a:r>
-              <a:t>30 seconds. All performance values in this deck are fictional user-supplied examples. They are not empirical findings. A common device and dataset are assumed, but their identities are unspecified. The cover is AI-generated conceptual artwork, not a model architecture or a measurement.</a:t>
+              <a:t>30 seconds. This seminar examines model compression for sensor anomaly detection. The overview compares baseline with INT8 using equally prominent latency, F1 and size values. All values are fictional user-supplied examples, not empirical findings. A common device and dataset are assumed but unspecified. No acceptable accuracy-loss threshold is supplied.</a:t>
             </a:r>
           </a:p>
         </p:txBody>
@@ -1311,37 +1364,12 @@
           <a:chExt cx="0" cy="0"/>
         </a:xfrm>
       </p:grpSpPr>
-      <p:pic>
-        <p:nvPicPr>
-          <p:cNvPr id="7" name="그림 6"/>
-          <p:cNvPicPr>
-            <a:picLocks noChangeAspect="1"/>
-          </p:cNvPicPr>
-          <p:nvPr/>
-        </p:nvPicPr>
-        <p:blipFill>
-          <a:blip r:embed="rId3"/>
-          <a:srcRect l="6092" r="6092"/>
-          <a:stretch>
-            <a:fillRect/>
-          </a:stretch>
-        </p:blipFill>
-        <p:spPr>
-          <a:xfrm>
-            <a:off x="7372350" y="0"/>
-            <a:ext cx="4819650" cy="6858000"/>
-          </a:xfrm>
-          <a:prstGeom prst="rect">
-            <a:avLst/>
-          </a:prstGeom>
-        </p:spPr>
-      </p:pic>
-      <p:sp>
-        <p:nvSpPr>
-          <p:cNvPr id="2" name="S01-section">
+      <p:sp>
+        <p:nvSpPr>
+          <p:cNvPr id="13" name="S01-section">
             <a:extLst>
               <a:ext uri="{FF2B5EF4-FFF2-40B4-BE49-F238E27FC236}">
-                <a16:creationId xmlns:a16="http://schemas.microsoft.com/office/drawing/2014/main" id="{D6E8A9ED-5F1A-40DB-B550-14998D956CD9}"/>
+                <a16:creationId xmlns:a16="http://schemas.microsoft.com/office/drawing/2014/main" id="{23FDFD73-9A5B-4C0A-B98C-31B94BE5255E}"/>
               </a:ext>
             </a:extLst>
           </p:cNvPr>
@@ -1352,8 +1380,8 @@
         </p:nvSpPr>
         <p:spPr>
           <a:xfrm>
-            <a:off x="685800" y="590550"/>
-            <a:ext cx="6191250" cy="285750"/>
+            <a:off x="685800" y="609600"/>
+            <a:ext cx="10820400" cy="333375"/>
           </a:xfrm>
           <a:prstGeom prst="rect">
             <a:avLst/>
@@ -1370,9 +1398,9 @@
           <a:lstStyle/>
           <a:p>
             <a:pPr>
-              <a:defRPr sz="1425" b="0">
-                <a:solidFill>
-                  <a:srgbClr val="287D78"/>
+              <a:defRPr sz="1650" b="0">
+                <a:solidFill>
+                  <a:srgbClr val="586C68"/>
                 </a:solidFill>
                 <a:latin typeface="Segoe UI"/>
                 <a:ea typeface="Segoe UI"/>
@@ -1380,25 +1408,25 @@
               </a:defRPr>
             </a:pPr>
             <a:r>
-              <a:rPr sz="1425" b="0">
-                <a:solidFill>
-                  <a:srgbClr val="287D78"/>
+              <a:rPr sz="1650" b="0">
+                <a:solidFill>
+                  <a:srgbClr val="586C68"/>
                 </a:solidFill>
                 <a:latin typeface="Segoe UI"/>
                 <a:ea typeface="Segoe UI"/>
                 <a:cs typeface="Segoe UI"/>
               </a:rPr>
-              <a:t>RESEARCH NOTE / 01</a:t>
+              <a:t>Lab seminar · 5 minutes</a:t>
             </a:r>
           </a:p>
         </p:txBody>
       </p:sp>
       <p:sp>
         <p:nvSpPr>
-          <p:cNvPr id="3" name="S01-title">
+          <p:cNvPr id="2" name="S01-title">
             <a:extLst>
               <a:ext uri="{FF2B5EF4-FFF2-40B4-BE49-F238E27FC236}">
-                <a16:creationId xmlns:a16="http://schemas.microsoft.com/office/drawing/2014/main" id="{4C2F98CD-761C-4BE1-B0E6-D8D7623A14E2}"/>
+                <a16:creationId xmlns:a16="http://schemas.microsoft.com/office/drawing/2014/main" id="{34A5D45D-6C44-4AE8-9AC4-0C1512BB90E8}"/>
               </a:ext>
             </a:extLst>
           </p:cNvPr>
@@ -1409,8 +1437,8 @@
         </p:nvSpPr>
         <p:spPr>
           <a:xfrm>
-            <a:off x="685800" y="1895475"/>
-            <a:ext cx="6591300" cy="1600200"/>
+            <a:off x="685800" y="1438275"/>
+            <a:ext cx="10820400" cy="1476375"/>
           </a:xfrm>
           <a:prstGeom prst="rect">
             <a:avLst/>
@@ -1427,7 +1455,7 @@
           <a:lstStyle/>
           <a:p>
             <a:pPr>
-              <a:defRPr sz="4200" b="0">
+              <a:defRPr sz="4275" b="0">
                 <a:solidFill>
                   <a:srgbClr val="1E302F"/>
                 </a:solidFill>
@@ -1437,7 +1465,7 @@
               </a:defRPr>
             </a:pPr>
             <a:r>
-              <a:rPr sz="4200" b="0">
+              <a:rPr sz="4275" b="0">
                 <a:solidFill>
                   <a:srgbClr val="1E302F"/>
                 </a:solidFill>
@@ -1445,12 +1473,12 @@
                 <a:ea typeface="Segoe UI"/>
                 <a:cs typeface="Segoe UI"/>
               </a:rPr>
-              <a:t>Smaller models.</a:t>
+              <a:t>Sensor anomaly detection</a:t>
             </a:r>
           </a:p>
           <a:p>
             <a:pPr>
-              <a:defRPr sz="4200" b="0">
+              <a:defRPr sz="4275" b="0">
                 <a:solidFill>
                   <a:srgbClr val="1E302F"/>
                 </a:solidFill>
@@ -1460,7 +1488,7 @@
               </a:defRPr>
             </a:pPr>
             <a:r>
-              <a:rPr sz="4200" b="0">
+              <a:rPr sz="4275" b="0">
                 <a:solidFill>
                   <a:srgbClr val="1E302F"/>
                 </a:solidFill>
@@ -1468,17 +1496,17 @@
                 <a:ea typeface="Segoe UI"/>
                 <a:cs typeface="Segoe UI"/>
               </a:rPr>
-              <a:t>Considered trade-offs.</a:t>
+              <a:t>with smaller models</a:t>
             </a:r>
           </a:p>
         </p:txBody>
       </p:sp>
       <p:sp>
         <p:nvSpPr>
-          <p:cNvPr id="4" name="S01-subtitle">
+          <p:cNvPr id="3" name="S01-subtitle">
             <a:extLst>
               <a:ext uri="{FF2B5EF4-FFF2-40B4-BE49-F238E27FC236}">
-                <a16:creationId xmlns:a16="http://schemas.microsoft.com/office/drawing/2014/main" id="{26242D5B-C040-47B5-8284-A994E17ED53A}"/>
+                <a16:creationId xmlns:a16="http://schemas.microsoft.com/office/drawing/2014/main" id="{7A4B8756-23EB-40E8-91F0-371575F490E6}"/>
               </a:ext>
             </a:extLst>
           </p:cNvPr>
@@ -1489,8 +1517,8 @@
         </p:nvSpPr>
         <p:spPr>
           <a:xfrm>
-            <a:off x="723900" y="3905250"/>
-            <a:ext cx="6048375" cy="781050"/>
+            <a:off x="685800" y="3133725"/>
+            <a:ext cx="10820400" cy="495300"/>
           </a:xfrm>
           <a:prstGeom prst="rect">
             <a:avLst/>
@@ -1525,40 +1553,17 @@
                 <a:ea typeface="Segoe UI"/>
                 <a:cs typeface="Segoe UI"/>
               </a:rPr>
-              <a:t>Sensor anomaly detection with</a:t>
+              <a:t>Knowledge distillation and INT8 quantization</a:t>
             </a:r>
           </a:p>
-          <a:p>
-            <a:pPr>
-              <a:defRPr sz="2175" b="0">
-                <a:solidFill>
-                  <a:srgbClr val="586C68"/>
-                </a:solidFill>
-                <a:latin typeface="Segoe UI"/>
-                <a:ea typeface="Segoe UI"/>
-                <a:cs typeface="Segoe UI"/>
-              </a:defRPr>
-            </a:pPr>
-            <a:r>
-              <a:rPr sz="2175" b="0">
-                <a:solidFill>
-                  <a:srgbClr val="586C68"/>
-                </a:solidFill>
-                <a:latin typeface="Segoe UI"/>
-                <a:ea typeface="Segoe UI"/>
-                <a:cs typeface="Segoe UI"/>
-              </a:rPr>
-              <a:t>distillation and INT8 quantization</a:t>
-            </a:r>
-          </a:p>
-        </p:txBody>
-      </p:sp>
-      <p:sp>
-        <p:nvSpPr>
-          <p:cNvPr id="5" name="S01-context">
+        </p:txBody>
+      </p:sp>
+      <p:sp>
+        <p:nvSpPr>
+          <p:cNvPr id="4" name="S01-basis">
             <a:extLst>
               <a:ext uri="{FF2B5EF4-FFF2-40B4-BE49-F238E27FC236}">
-                <a16:creationId xmlns:a16="http://schemas.microsoft.com/office/drawing/2014/main" id="{CE5D0945-2804-42F1-BE98-430B6393548F}"/>
+                <a16:creationId xmlns:a16="http://schemas.microsoft.com/office/drawing/2014/main" id="{2873CBBE-1F0F-4820-96BC-7E6C00C02996}"/>
               </a:ext>
             </a:extLst>
           </p:cNvPr>
@@ -1569,8 +1574,8 @@
         </p:nvSpPr>
         <p:spPr>
           <a:xfrm>
-            <a:off x="723900" y="5410200"/>
-            <a:ext cx="5905500" cy="333375"/>
+            <a:off x="685800" y="4105275"/>
+            <a:ext cx="10820400" cy="342900"/>
           </a:xfrm>
           <a:prstGeom prst="rect">
             <a:avLst/>
@@ -1589,7 +1594,7 @@
             <a:pPr>
               <a:defRPr sz="1725" b="0">
                 <a:solidFill>
-                  <a:srgbClr val="1E302F"/>
+                  <a:srgbClr val="586C68"/>
                 </a:solidFill>
                 <a:latin typeface="Segoe UI"/>
                 <a:ea typeface="Segoe UI"/>
@@ -1599,23 +1604,23 @@
             <a:r>
               <a:rPr sz="1725" b="0">
                 <a:solidFill>
-                  <a:srgbClr val="1E302F"/>
+                  <a:srgbClr val="586C68"/>
                 </a:solidFill>
                 <a:latin typeface="Segoe UI"/>
                 <a:ea typeface="Segoe UI"/>
                 <a:cs typeface="Segoe UI"/>
               </a:rPr>
-              <a:t>Lab seminar · 5 minutes</a:t>
+              <a:t>Baseline compared with INT8</a:t>
             </a:r>
           </a:p>
         </p:txBody>
       </p:sp>
       <p:sp>
         <p:nvSpPr>
-          <p:cNvPr id="6" name="S01-disclosure">
+          <p:cNvPr id="5" name="S01-value-1">
             <a:extLst>
               <a:ext uri="{FF2B5EF4-FFF2-40B4-BE49-F238E27FC236}">
-                <a16:creationId xmlns:a16="http://schemas.microsoft.com/office/drawing/2014/main" id="{A847D8A6-1E81-4416-955C-608099BBDF94}"/>
+                <a16:creationId xmlns:a16="http://schemas.microsoft.com/office/drawing/2014/main" id="{295A3C64-3346-4FA6-A502-45C5C3C59CC8}"/>
               </a:ext>
             </a:extLst>
           </p:cNvPr>
@@ -1626,8 +1631,8 @@
         </p:nvSpPr>
         <p:spPr>
           <a:xfrm>
-            <a:off x="723900" y="6343650"/>
-            <a:ext cx="6191250" cy="247650"/>
+            <a:off x="685800" y="4619625"/>
+            <a:ext cx="2952750" cy="628650"/>
           </a:xfrm>
           <a:prstGeom prst="rect">
             <a:avLst/>
@@ -1644,6 +1649,348 @@
           <a:lstStyle/>
           <a:p>
             <a:pPr>
+              <a:defRPr sz="3225" b="0">
+                <a:solidFill>
+                  <a:srgbClr val="1E302F"/>
+                </a:solidFill>
+                <a:latin typeface="Segoe UI"/>
+                <a:ea typeface="Segoe UI"/>
+                <a:cs typeface="Segoe UI"/>
+              </a:defRPr>
+            </a:pPr>
+            <a:r>
+              <a:rPr sz="3225" b="0">
+                <a:solidFill>
+                  <a:srgbClr val="1E302F"/>
+                </a:solidFill>
+                <a:latin typeface="Segoe UI"/>
+                <a:ea typeface="Segoe UI"/>
+                <a:cs typeface="Segoe UI"/>
+              </a:rPr>
+              <a:t>120 → 54</a:t>
+            </a:r>
+          </a:p>
+        </p:txBody>
+      </p:sp>
+      <p:sp>
+        <p:nvSpPr>
+          <p:cNvPr id="6" name="S01-label-1">
+            <a:extLst>
+              <a:ext uri="{FF2B5EF4-FFF2-40B4-BE49-F238E27FC236}">
+                <a16:creationId xmlns:a16="http://schemas.microsoft.com/office/drawing/2014/main" id="{EBFBEFFB-C1D3-4DEE-B7B8-7EC8A0FC27BD}"/>
+              </a:ext>
+            </a:extLst>
+          </p:cNvPr>
+          <p:cNvSpPr>
+            <a:spLocks noGrp="1"/>
+          </p:cNvSpPr>
+          <p:nvPr/>
+        </p:nvSpPr>
+        <p:spPr>
+          <a:xfrm>
+            <a:off x="685800" y="5314950"/>
+            <a:ext cx="3143250" cy="361950"/>
+          </a:xfrm>
+          <a:prstGeom prst="rect">
+            <a:avLst/>
+          </a:prstGeom>
+          <a:noFill/>
+          <a:ln w="0">
+            <a:noFill/>
+          </a:ln>
+        </p:spPr>
+        <p:txBody>
+          <a:bodyPr wrap="none" lIns="0" tIns="0" rIns="0" bIns="0" anchor="ctr">
+            <a:noAutofit/>
+          </a:bodyPr>
+          <a:lstStyle/>
+          <a:p>
+            <a:pPr>
+              <a:defRPr sz="1800" b="0">
+                <a:solidFill>
+                  <a:srgbClr val="586C68"/>
+                </a:solidFill>
+                <a:latin typeface="Segoe UI"/>
+                <a:ea typeface="Segoe UI"/>
+                <a:cs typeface="Segoe UI"/>
+              </a:defRPr>
+            </a:pPr>
+            <a:r>
+              <a:rPr sz="1800" b="0">
+                <a:solidFill>
+                  <a:srgbClr val="586C68"/>
+                </a:solidFill>
+                <a:latin typeface="Segoe UI"/>
+                <a:ea typeface="Segoe UI"/>
+                <a:cs typeface="Segoe UI"/>
+              </a:rPr>
+              <a:t>Latency (ms)</a:t>
+            </a:r>
+          </a:p>
+        </p:txBody>
+      </p:sp>
+      <p:sp>
+        <p:nvSpPr>
+          <p:cNvPr id="7" name="S01-value-2">
+            <a:extLst>
+              <a:ext uri="{FF2B5EF4-FFF2-40B4-BE49-F238E27FC236}">
+                <a16:creationId xmlns:a16="http://schemas.microsoft.com/office/drawing/2014/main" id="{16A73283-4CC7-4F48-87F3-803DBD5C4C7F}"/>
+              </a:ext>
+            </a:extLst>
+          </p:cNvPr>
+          <p:cNvSpPr>
+            <a:spLocks noGrp="1"/>
+          </p:cNvSpPr>
+          <p:nvPr/>
+        </p:nvSpPr>
+        <p:spPr>
+          <a:xfrm>
+            <a:off x="4419600" y="4619625"/>
+            <a:ext cx="3810000" cy="628650"/>
+          </a:xfrm>
+          <a:prstGeom prst="rect">
+            <a:avLst/>
+          </a:prstGeom>
+          <a:noFill/>
+          <a:ln w="0">
+            <a:noFill/>
+          </a:ln>
+        </p:spPr>
+        <p:txBody>
+          <a:bodyPr wrap="none" lIns="0" tIns="0" rIns="0" bIns="0" anchor="ctr">
+            <a:noAutofit/>
+          </a:bodyPr>
+          <a:lstStyle/>
+          <a:p>
+            <a:pPr>
+              <a:defRPr sz="3225" b="0">
+                <a:solidFill>
+                  <a:srgbClr val="1E302F"/>
+                </a:solidFill>
+                <a:latin typeface="Segoe UI"/>
+                <a:ea typeface="Segoe UI"/>
+                <a:cs typeface="Segoe UI"/>
+              </a:defRPr>
+            </a:pPr>
+            <a:r>
+              <a:rPr sz="3225" b="0">
+                <a:solidFill>
+                  <a:srgbClr val="1E302F"/>
+                </a:solidFill>
+                <a:latin typeface="Segoe UI"/>
+                <a:ea typeface="Segoe UI"/>
+                <a:cs typeface="Segoe UI"/>
+              </a:rPr>
+              <a:t>0.910 → 0.896</a:t>
+            </a:r>
+          </a:p>
+        </p:txBody>
+      </p:sp>
+      <p:sp>
+        <p:nvSpPr>
+          <p:cNvPr id="8" name="S01-label-2">
+            <a:extLst>
+              <a:ext uri="{FF2B5EF4-FFF2-40B4-BE49-F238E27FC236}">
+                <a16:creationId xmlns:a16="http://schemas.microsoft.com/office/drawing/2014/main" id="{729CC653-091B-44A5-A028-48A585C0C178}"/>
+              </a:ext>
+            </a:extLst>
+          </p:cNvPr>
+          <p:cNvSpPr>
+            <a:spLocks noGrp="1"/>
+          </p:cNvSpPr>
+          <p:nvPr/>
+        </p:nvSpPr>
+        <p:spPr>
+          <a:xfrm>
+            <a:off x="4419600" y="5314950"/>
+            <a:ext cx="3143250" cy="361950"/>
+          </a:xfrm>
+          <a:prstGeom prst="rect">
+            <a:avLst/>
+          </a:prstGeom>
+          <a:noFill/>
+          <a:ln w="0">
+            <a:noFill/>
+          </a:ln>
+        </p:spPr>
+        <p:txBody>
+          <a:bodyPr wrap="none" lIns="0" tIns="0" rIns="0" bIns="0" anchor="ctr">
+            <a:noAutofit/>
+          </a:bodyPr>
+          <a:lstStyle/>
+          <a:p>
+            <a:pPr>
+              <a:defRPr sz="1800" b="0">
+                <a:solidFill>
+                  <a:srgbClr val="586C68"/>
+                </a:solidFill>
+                <a:latin typeface="Segoe UI"/>
+                <a:ea typeface="Segoe UI"/>
+                <a:cs typeface="Segoe UI"/>
+              </a:defRPr>
+            </a:pPr>
+            <a:r>
+              <a:rPr sz="1800" b="0">
+                <a:solidFill>
+                  <a:srgbClr val="586C68"/>
+                </a:solidFill>
+                <a:latin typeface="Segoe UI"/>
+                <a:ea typeface="Segoe UI"/>
+                <a:cs typeface="Segoe UI"/>
+              </a:rPr>
+              <a:t>F1</a:t>
+            </a:r>
+          </a:p>
+        </p:txBody>
+      </p:sp>
+      <p:sp>
+        <p:nvSpPr>
+          <p:cNvPr id="9" name="S01-value-3">
+            <a:extLst>
+              <a:ext uri="{FF2B5EF4-FFF2-40B4-BE49-F238E27FC236}">
+                <a16:creationId xmlns:a16="http://schemas.microsoft.com/office/drawing/2014/main" id="{F592BA26-D889-4153-99C9-91B55DF1C412}"/>
+              </a:ext>
+            </a:extLst>
+          </p:cNvPr>
+          <p:cNvSpPr>
+            <a:spLocks noGrp="1"/>
+          </p:cNvSpPr>
+          <p:nvPr/>
+        </p:nvSpPr>
+        <p:spPr>
+          <a:xfrm>
+            <a:off x="8572500" y="4619625"/>
+            <a:ext cx="2952750" cy="628650"/>
+          </a:xfrm>
+          <a:prstGeom prst="rect">
+            <a:avLst/>
+          </a:prstGeom>
+          <a:noFill/>
+          <a:ln w="0">
+            <a:noFill/>
+          </a:ln>
+        </p:spPr>
+        <p:txBody>
+          <a:bodyPr wrap="none" lIns="0" tIns="0" rIns="0" bIns="0" anchor="ctr">
+            <a:noAutofit/>
+          </a:bodyPr>
+          <a:lstStyle/>
+          <a:p>
+            <a:pPr>
+              <a:defRPr sz="3225" b="0">
+                <a:solidFill>
+                  <a:srgbClr val="1E302F"/>
+                </a:solidFill>
+                <a:latin typeface="Segoe UI"/>
+                <a:ea typeface="Segoe UI"/>
+                <a:cs typeface="Segoe UI"/>
+              </a:defRPr>
+            </a:pPr>
+            <a:r>
+              <a:rPr sz="3225" b="0">
+                <a:solidFill>
+                  <a:srgbClr val="1E302F"/>
+                </a:solidFill>
+                <a:latin typeface="Segoe UI"/>
+                <a:ea typeface="Segoe UI"/>
+                <a:cs typeface="Segoe UI"/>
+              </a:rPr>
+              <a:t>48 → 12</a:t>
+            </a:r>
+          </a:p>
+        </p:txBody>
+      </p:sp>
+      <p:sp>
+        <p:nvSpPr>
+          <p:cNvPr id="10" name="S01-label-3">
+            <a:extLst>
+              <a:ext uri="{FF2B5EF4-FFF2-40B4-BE49-F238E27FC236}">
+                <a16:creationId xmlns:a16="http://schemas.microsoft.com/office/drawing/2014/main" id="{95A599DF-353D-42E0-9D56-5245DC7B8391}"/>
+              </a:ext>
+            </a:extLst>
+          </p:cNvPr>
+          <p:cNvSpPr>
+            <a:spLocks noGrp="1"/>
+          </p:cNvSpPr>
+          <p:nvPr/>
+        </p:nvSpPr>
+        <p:spPr>
+          <a:xfrm>
+            <a:off x="8572500" y="5314950"/>
+            <a:ext cx="3143250" cy="361950"/>
+          </a:xfrm>
+          <a:prstGeom prst="rect">
+            <a:avLst/>
+          </a:prstGeom>
+          <a:noFill/>
+          <a:ln w="0">
+            <a:noFill/>
+          </a:ln>
+        </p:spPr>
+        <p:txBody>
+          <a:bodyPr wrap="none" lIns="0" tIns="0" rIns="0" bIns="0" anchor="ctr">
+            <a:noAutofit/>
+          </a:bodyPr>
+          <a:lstStyle/>
+          <a:p>
+            <a:pPr>
+              <a:defRPr sz="1800" b="0">
+                <a:solidFill>
+                  <a:srgbClr val="586C68"/>
+                </a:solidFill>
+                <a:latin typeface="Segoe UI"/>
+                <a:ea typeface="Segoe UI"/>
+                <a:cs typeface="Segoe UI"/>
+              </a:defRPr>
+            </a:pPr>
+            <a:r>
+              <a:rPr sz="1800" b="0">
+                <a:solidFill>
+                  <a:srgbClr val="586C68"/>
+                </a:solidFill>
+                <a:latin typeface="Segoe UI"/>
+                <a:ea typeface="Segoe UI"/>
+                <a:cs typeface="Segoe UI"/>
+              </a:rPr>
+              <a:t>Model size (MB)</a:t>
+            </a:r>
+          </a:p>
+        </p:txBody>
+      </p:sp>
+      <p:sp>
+        <p:nvSpPr>
+          <p:cNvPr id="11" name="S01-disclosure">
+            <a:extLst>
+              <a:ext uri="{FF2B5EF4-FFF2-40B4-BE49-F238E27FC236}">
+                <a16:creationId xmlns:a16="http://schemas.microsoft.com/office/drawing/2014/main" id="{DFF9007E-EFA7-42DB-BE04-E78D98B57CC9}"/>
+              </a:ext>
+            </a:extLst>
+          </p:cNvPr>
+          <p:cNvSpPr>
+            <a:spLocks noGrp="1"/>
+          </p:cNvSpPr>
+          <p:nvPr/>
+        </p:nvSpPr>
+        <p:spPr>
+          <a:xfrm>
+            <a:off x="685800" y="6372225"/>
+            <a:ext cx="9525000" cy="219075"/>
+          </a:xfrm>
+          <a:prstGeom prst="rect">
+            <a:avLst/>
+          </a:prstGeom>
+          <a:noFill/>
+          <a:ln w="0">
+            <a:noFill/>
+          </a:ln>
+        </p:spPr>
+        <p:txBody>
+          <a:bodyPr wrap="none" lIns="0" tIns="0" rIns="0" bIns="0" anchor="ctr">
+            <a:noAutofit/>
+          </a:bodyPr>
+          <a:lstStyle/>
+          <a:p>
+            <a:pPr>
               <a:defRPr sz="1275" b="0">
                 <a:solidFill>
                   <a:srgbClr val="586C68"/>
@@ -1667,10 +2014,67 @@
           </a:p>
         </p:txBody>
       </p:sp>
+      <p:sp>
+        <p:nvSpPr>
+          <p:cNvPr id="12" name="S01-number">
+            <a:extLst>
+              <a:ext uri="{FF2B5EF4-FFF2-40B4-BE49-F238E27FC236}">
+                <a16:creationId xmlns:a16="http://schemas.microsoft.com/office/drawing/2014/main" id="{EEC9B55A-5E3F-4C8F-BEF1-115C002FB54B}"/>
+              </a:ext>
+            </a:extLst>
+          </p:cNvPr>
+          <p:cNvSpPr>
+            <a:spLocks noGrp="1"/>
+          </p:cNvSpPr>
+          <p:nvPr/>
+        </p:nvSpPr>
+        <p:spPr>
+          <a:xfrm>
+            <a:off x="11144250" y="6372225"/>
+            <a:ext cx="361950" cy="219075"/>
+          </a:xfrm>
+          <a:prstGeom prst="rect">
+            <a:avLst/>
+          </a:prstGeom>
+          <a:noFill/>
+          <a:ln w="0">
+            <a:noFill/>
+          </a:ln>
+        </p:spPr>
+        <p:txBody>
+          <a:bodyPr wrap="none" lIns="0" tIns="0" rIns="0" bIns="0" anchor="ctr">
+            <a:noAutofit/>
+          </a:bodyPr>
+          <a:lstStyle/>
+          <a:p>
+            <a:pPr>
+              <a:defRPr sz="1275" b="0">
+                <a:solidFill>
+                  <a:srgbClr val="586C68"/>
+                </a:solidFill>
+                <a:latin typeface="Segoe UI"/>
+                <a:ea typeface="Segoe UI"/>
+                <a:cs typeface="Segoe UI"/>
+              </a:defRPr>
+            </a:pPr>
+            <a:r>
+              <a:rPr sz="1275" b="0">
+                <a:solidFill>
+                  <a:srgbClr val="586C68"/>
+                </a:solidFill>
+                <a:latin typeface="Segoe UI"/>
+                <a:ea typeface="Segoe UI"/>
+                <a:cs typeface="Segoe UI"/>
+              </a:rPr>
+              <a:t>01</a:t>
+            </a:r>
+          </a:p>
+        </p:txBody>
+      </p:sp>
     </p:spTree>
     <p:extLst>
       <p:ext uri="{BB962C8B-B14F-4D97-AF65-F5344CB8AC3E}">
-        <p14:creationId xmlns:p14="http://schemas.microsoft.com/office/powerpoint/2010/main" val="872901537"/>
+        <p14:creationId xmlns:p14="http://schemas.microsoft.com/office/powerpoint/2010/main" val="612005508"/>
       </p:ext>
     </p:extLst>
   </p:cSld>
@@ -1707,67 +2111,10 @@
       </p:grpSpPr>
       <p:sp>
         <p:nvSpPr>
-          <p:cNvPr id="22" name="S02-section">
+          <p:cNvPr id="21" name="S02-title">
             <a:extLst>
               <a:ext uri="{FF2B5EF4-FFF2-40B4-BE49-F238E27FC236}">
-                <a16:creationId xmlns:a16="http://schemas.microsoft.com/office/drawing/2014/main" id="{38AF2B2F-DFDC-44CF-AFD0-A937CEF5A931}"/>
-              </a:ext>
-            </a:extLst>
-          </p:cNvPr>
-          <p:cNvSpPr>
-            <a:spLocks noGrp="1"/>
-          </p:cNvSpPr>
-          <p:nvPr/>
-        </p:nvSpPr>
-        <p:spPr>
-          <a:xfrm>
-            <a:off x="685800" y="400050"/>
-            <a:ext cx="10744200" cy="257175"/>
-          </a:xfrm>
-          <a:prstGeom prst="rect">
-            <a:avLst/>
-          </a:prstGeom>
-          <a:noFill/>
-          <a:ln w="0">
-            <a:noFill/>
-          </a:ln>
-        </p:spPr>
-        <p:txBody>
-          <a:bodyPr wrap="none" lIns="0" tIns="0" rIns="0" bIns="0" anchor="ctr">
-            <a:noAutofit/>
-          </a:bodyPr>
-          <a:lstStyle/>
-          <a:p>
-            <a:pPr>
-              <a:defRPr sz="1425" b="0">
-                <a:solidFill>
-                  <a:srgbClr val="287D78"/>
-                </a:solidFill>
-                <a:latin typeface="Segoe UI"/>
-                <a:ea typeface="Segoe UI"/>
-                <a:cs typeface="Segoe UI"/>
-              </a:defRPr>
-            </a:pPr>
-            <a:r>
-              <a:rPr sz="1425" b="0">
-                <a:solidFill>
-                  <a:srgbClr val="287D78"/>
-                </a:solidFill>
-                <a:latin typeface="Segoe UI"/>
-                <a:ea typeface="Segoe UI"/>
-                <a:cs typeface="Segoe UI"/>
-              </a:rPr>
-              <a:t>METHOD / TWO COMPRESSION STEPS</a:t>
-            </a:r>
-          </a:p>
-        </p:txBody>
-      </p:sp>
-      <p:sp>
-        <p:nvSpPr>
-          <p:cNvPr id="2" name="S02-title">
-            <a:extLst>
-              <a:ext uri="{FF2B5EF4-FFF2-40B4-BE49-F238E27FC236}">
-                <a16:creationId xmlns:a16="http://schemas.microsoft.com/office/drawing/2014/main" id="{B0A18481-3748-46C8-B040-D773482F990F}"/>
+                <a16:creationId xmlns:a16="http://schemas.microsoft.com/office/drawing/2014/main" id="{CF9B9C6A-E02D-4CA3-AEF1-A426334290F4}"/>
               </a:ext>
             </a:extLst>
           </p:cNvPr>
@@ -1814,17 +2161,17 @@
                 <a:ea typeface="Segoe UI"/>
                 <a:cs typeface="Segoe UI"/>
               </a:rPr>
-              <a:t>From a teacher to a compact student</a:t>
+              <a:t>Model states and compression steps</a:t>
             </a:r>
           </a:p>
         </p:txBody>
       </p:sp>
       <p:sp>
         <p:nvSpPr>
-          <p:cNvPr id="3" name="S02-disclosure">
+          <p:cNvPr id="2" name="S02-disclosure">
             <a:extLst>
               <a:ext uri="{FF2B5EF4-FFF2-40B4-BE49-F238E27FC236}">
-                <a16:creationId xmlns:a16="http://schemas.microsoft.com/office/drawing/2014/main" id="{0D26C020-E687-43A2-9252-B85FDA2591D6}"/>
+                <a16:creationId xmlns:a16="http://schemas.microsoft.com/office/drawing/2014/main" id="{8044D044-51B9-422C-ADC4-E290AFFF6F6B}"/>
               </a:ext>
             </a:extLst>
           </p:cNvPr>
@@ -1878,10 +2225,10 @@
       </p:sp>
       <p:sp>
         <p:nvSpPr>
-          <p:cNvPr id="4" name="S02-number">
+          <p:cNvPr id="3" name="S02-number">
             <a:extLst>
               <a:ext uri="{FF2B5EF4-FFF2-40B4-BE49-F238E27FC236}">
-                <a16:creationId xmlns:a16="http://schemas.microsoft.com/office/drawing/2014/main" id="{16C78E3E-1CEB-47EA-B53A-2BEE9C7E5285}"/>
+                <a16:creationId xmlns:a16="http://schemas.microsoft.com/office/drawing/2014/main" id="{A928C312-CE69-49D3-9B5A-B53A5B76A4E4}"/>
               </a:ext>
             </a:extLst>
           </p:cNvPr>
@@ -1935,10 +2282,10 @@
       </p:sp>
       <p:sp>
         <p:nvSpPr>
-          <p:cNvPr id="5" name="S02-marker-1">
+          <p:cNvPr id="4" name="S02-marker-1">
             <a:extLst>
               <a:ext uri="{FF2B5EF4-FFF2-40B4-BE49-F238E27FC236}">
-                <a16:creationId xmlns:a16="http://schemas.microsoft.com/office/drawing/2014/main" id="{A1CCCF3E-D131-4C6A-8EBA-BE7D30BBDCC5}"/>
+                <a16:creationId xmlns:a16="http://schemas.microsoft.com/office/drawing/2014/main" id="{10E9B863-F42B-43DC-84F3-52620772A672}"/>
               </a:ext>
             </a:extLst>
           </p:cNvPr>
@@ -1992,10 +2339,10 @@
       </p:sp>
       <p:sp>
         <p:nvSpPr>
-          <p:cNvPr id="6" name="S02-marker-2">
+          <p:cNvPr id="5" name="S02-marker-2">
             <a:extLst>
               <a:ext uri="{FF2B5EF4-FFF2-40B4-BE49-F238E27FC236}">
-                <a16:creationId xmlns:a16="http://schemas.microsoft.com/office/drawing/2014/main" id="{E30A7E0B-6A7F-4EB3-B049-ED9215FC7920}"/>
+                <a16:creationId xmlns:a16="http://schemas.microsoft.com/office/drawing/2014/main" id="{8AD87FB6-4FB9-439B-9564-F455B4A48EAB}"/>
               </a:ext>
             </a:extLst>
           </p:cNvPr>
@@ -2049,10 +2396,10 @@
       </p:sp>
       <p:sp>
         <p:nvSpPr>
-          <p:cNvPr id="7" name="S02-marker-3">
+          <p:cNvPr id="6" name="S02-marker-3">
             <a:extLst>
               <a:ext uri="{FF2B5EF4-FFF2-40B4-BE49-F238E27FC236}">
-                <a16:creationId xmlns:a16="http://schemas.microsoft.com/office/drawing/2014/main" id="{589A3122-8F0E-4C97-A5B4-3A6FE7F24859}"/>
+                <a16:creationId xmlns:a16="http://schemas.microsoft.com/office/drawing/2014/main" id="{C001C507-8BD2-49F8-8146-F4911000A5A0}"/>
               </a:ext>
             </a:extLst>
           </p:cNvPr>
@@ -2106,7 +2453,32 @@
       </p:sp>
       <p:cxnSp>
         <p:nvCxnSpPr>
-          <p:cNvPr id="29" name="S02-link-2"/>
+          <p:cNvPr id="27" name="S02-link-2"/>
+          <p:cNvCxnSpPr>
+            <a:stCxn id="4" idx="6"/>
+            <a:endCxn id="5" idx="2"/>
+          </p:cNvCxnSpPr>
+          <p:nvPr/>
+        </p:nvCxnSpPr>
+        <p:spPr>
+          <a:xfrm>
+            <a:off x="1219200" y="2600325"/>
+            <a:ext cx="3429000" cy="0"/>
+          </a:xfrm>
+          <a:prstGeom prst="straightConnector1">
+            <a:avLst/>
+          </a:prstGeom>
+          <a:ln w="17145">
+            <a:solidFill>
+              <a:srgbClr val="9EADA5"/>
+            </a:solidFill>
+            <a:tailEnd type="triangle" w="sm" len="sm"/>
+          </a:ln>
+        </p:spPr>
+      </p:cxnSp>
+      <p:cxnSp>
+        <p:nvCxnSpPr>
+          <p:cNvPr id="28" name="S02-link-3"/>
           <p:cNvCxnSpPr>
             <a:stCxn id="5" idx="6"/>
             <a:endCxn id="6" idx="2"/>
@@ -2115,7 +2487,7 @@
         </p:nvCxnSpPr>
         <p:spPr>
           <a:xfrm>
-            <a:off x="1219200" y="2600325"/>
+            <a:off x="5181600" y="2600325"/>
             <a:ext cx="3429000" cy="0"/>
           </a:xfrm>
           <a:prstGeom prst="straightConnector1">
@@ -2129,37 +2501,12 @@
           </a:ln>
         </p:spPr>
       </p:cxnSp>
-      <p:cxnSp>
-        <p:nvCxnSpPr>
-          <p:cNvPr id="30" name="S02-link-3"/>
-          <p:cNvCxnSpPr>
-            <a:stCxn id="6" idx="6"/>
-            <a:endCxn id="7" idx="2"/>
-          </p:cNvCxnSpPr>
-          <p:nvPr/>
-        </p:nvCxnSpPr>
-        <p:spPr>
-          <a:xfrm>
-            <a:off x="5181600" y="2600325"/>
-            <a:ext cx="3429000" cy="0"/>
-          </a:xfrm>
-          <a:prstGeom prst="straightConnector1">
-            <a:avLst/>
-          </a:prstGeom>
-          <a:ln w="17145">
-            <a:solidFill>
-              <a:srgbClr val="9EADA5"/>
-            </a:solidFill>
-            <a:tailEnd type="triangle" w="sm" len="sm"/>
-          </a:ln>
-        </p:spPr>
-      </p:cxnSp>
-      <p:sp>
-        <p:nvSpPr>
-          <p:cNvPr id="10" name="S02-flow-2">
+      <p:sp>
+        <p:nvSpPr>
+          <p:cNvPr id="9" name="S02-flow-2">
             <a:extLst>
               <a:ext uri="{FF2B5EF4-FFF2-40B4-BE49-F238E27FC236}">
-                <a16:creationId xmlns:a16="http://schemas.microsoft.com/office/drawing/2014/main" id="{C3FB482B-8C3A-4AF4-9139-6144D2C21705}"/>
+                <a16:creationId xmlns:a16="http://schemas.microsoft.com/office/drawing/2014/main" id="{3704B231-8F02-49A2-8FE9-040F3058EF8C}"/>
               </a:ext>
             </a:extLst>
           </p:cNvPr>
@@ -2206,17 +2553,17 @@
                 <a:ea typeface="Segoe UI"/>
                 <a:cs typeface="Segoe UI"/>
               </a:rPr>
-              <a:t>Prediction transfer</a:t>
+              <a:t>Knowledge distillation</a:t>
             </a:r>
           </a:p>
         </p:txBody>
       </p:sp>
       <p:sp>
         <p:nvSpPr>
-          <p:cNvPr id="11" name="S02-flow-3">
+          <p:cNvPr id="10" name="S02-flow-3">
             <a:extLst>
               <a:ext uri="{FF2B5EF4-FFF2-40B4-BE49-F238E27FC236}">
-                <a16:creationId xmlns:a16="http://schemas.microsoft.com/office/drawing/2014/main" id="{D6EC3D8F-1037-4D7D-8D4F-6F442121BDBC}"/>
+                <a16:creationId xmlns:a16="http://schemas.microsoft.com/office/drawing/2014/main" id="{CF9684AC-1473-4EA1-B9F5-3627FA976239}"/>
               </a:ext>
             </a:extLst>
           </p:cNvPr>
@@ -2263,17 +2610,17 @@
                 <a:ea typeface="Segoe UI"/>
                 <a:cs typeface="Segoe UI"/>
               </a:rPr>
-              <a:t>Numeric conversion</a:t>
+              <a:t>INT8 quantization</a:t>
             </a:r>
           </a:p>
         </p:txBody>
       </p:sp>
       <p:sp>
         <p:nvSpPr>
-          <p:cNvPr id="12" name="S02-stage-1">
+          <p:cNvPr id="11" name="S02-stage-1">
             <a:extLst>
               <a:ext uri="{FF2B5EF4-FFF2-40B4-BE49-F238E27FC236}">
-                <a16:creationId xmlns:a16="http://schemas.microsoft.com/office/drawing/2014/main" id="{8985360B-9721-48F9-B506-A2502A8D348A}"/>
+                <a16:creationId xmlns:a16="http://schemas.microsoft.com/office/drawing/2014/main" id="{574D80A0-4E2E-413A-B157-8A93FDA0FB3D}"/>
               </a:ext>
             </a:extLst>
           </p:cNvPr>
@@ -2320,17 +2667,17 @@
                 <a:ea typeface="Segoe UI"/>
                 <a:cs typeface="Segoe UI"/>
               </a:rPr>
-              <a:t>Baseline</a:t>
+              <a:t>Teacher model</a:t>
             </a:r>
           </a:p>
         </p:txBody>
       </p:sp>
       <p:sp>
         <p:nvSpPr>
-          <p:cNvPr id="13" name="S02-name-1">
+          <p:cNvPr id="12" name="S02-name-1">
             <a:extLst>
               <a:ext uri="{FF2B5EF4-FFF2-40B4-BE49-F238E27FC236}">
-                <a16:creationId xmlns:a16="http://schemas.microsoft.com/office/drawing/2014/main" id="{95049510-C349-4929-8584-5DBC90F89AA2}"/>
+                <a16:creationId xmlns:a16="http://schemas.microsoft.com/office/drawing/2014/main" id="{57A2D65F-AFD6-4FE7-9345-862BCC2D3B35}"/>
               </a:ext>
             </a:extLst>
           </p:cNvPr>
@@ -2384,10 +2731,10 @@
       </p:sp>
       <p:sp>
         <p:nvSpPr>
-          <p:cNvPr id="14" name="S02-detail-1">
+          <p:cNvPr id="13" name="S02-detail-1">
             <a:extLst>
               <a:ext uri="{FF2B5EF4-FFF2-40B4-BE49-F238E27FC236}">
-                <a16:creationId xmlns:a16="http://schemas.microsoft.com/office/drawing/2014/main" id="{125424C2-44BA-44FE-848B-84FD7909F3D1}"/>
+                <a16:creationId xmlns:a16="http://schemas.microsoft.com/office/drawing/2014/main" id="{0FA1038E-FF2B-4C5E-A76C-80AE52B2910A}"/>
               </a:ext>
             </a:extLst>
           </p:cNvPr>
@@ -2464,10 +2811,10 @@
       </p:sp>
       <p:sp>
         <p:nvSpPr>
-          <p:cNvPr id="15" name="S02-stage-2">
+          <p:cNvPr id="14" name="S02-stage-2">
             <a:extLst>
               <a:ext uri="{FF2B5EF4-FFF2-40B4-BE49-F238E27FC236}">
-                <a16:creationId xmlns:a16="http://schemas.microsoft.com/office/drawing/2014/main" id="{E5F9886C-E7E3-4633-A958-E5212F8E5317}"/>
+                <a16:creationId xmlns:a16="http://schemas.microsoft.com/office/drawing/2014/main" id="{83B69A53-8C5F-4DF5-8FBC-D802B0AE4A0F}"/>
               </a:ext>
             </a:extLst>
           </p:cNvPr>
@@ -2514,17 +2861,17 @@
                 <a:ea typeface="Segoe UI"/>
                 <a:cs typeface="Segoe UI"/>
               </a:rPr>
-              <a:t>Distillation</a:t>
+              <a:t>Student model</a:t>
             </a:r>
           </a:p>
         </p:txBody>
       </p:sp>
       <p:sp>
         <p:nvSpPr>
-          <p:cNvPr id="16" name="S02-name-2">
+          <p:cNvPr id="15" name="S02-name-2">
             <a:extLst>
               <a:ext uri="{FF2B5EF4-FFF2-40B4-BE49-F238E27FC236}">
-                <a16:creationId xmlns:a16="http://schemas.microsoft.com/office/drawing/2014/main" id="{8E293791-745A-4D99-A079-03922D0FDB19}"/>
+                <a16:creationId xmlns:a16="http://schemas.microsoft.com/office/drawing/2014/main" id="{633B045A-B0D5-418B-B662-03C4B84871B7}"/>
               </a:ext>
             </a:extLst>
           </p:cNvPr>
@@ -2578,10 +2925,10 @@
       </p:sp>
       <p:sp>
         <p:nvSpPr>
-          <p:cNvPr id="17" name="S02-detail-2">
+          <p:cNvPr id="16" name="S02-detail-2">
             <a:extLst>
               <a:ext uri="{FF2B5EF4-FFF2-40B4-BE49-F238E27FC236}">
-                <a16:creationId xmlns:a16="http://schemas.microsoft.com/office/drawing/2014/main" id="{83CF5FE0-4AD3-4D18-9AFA-7920E8EF220E}"/>
+                <a16:creationId xmlns:a16="http://schemas.microsoft.com/office/drawing/2014/main" id="{45E8AC73-47E3-48FE-B12E-A99216CA0A79}"/>
               </a:ext>
             </a:extLst>
           </p:cNvPr>
@@ -2658,10 +3005,10 @@
       </p:sp>
       <p:sp>
         <p:nvSpPr>
-          <p:cNvPr id="18" name="S02-stage-3">
+          <p:cNvPr id="17" name="S02-stage-3">
             <a:extLst>
               <a:ext uri="{FF2B5EF4-FFF2-40B4-BE49-F238E27FC236}">
-                <a16:creationId xmlns:a16="http://schemas.microsoft.com/office/drawing/2014/main" id="{7DF34022-0808-4707-8EB5-EE5830F647D9}"/>
+                <a16:creationId xmlns:a16="http://schemas.microsoft.com/office/drawing/2014/main" id="{85311D4C-D613-4589-BE43-CB1DF321C346}"/>
               </a:ext>
             </a:extLst>
           </p:cNvPr>
@@ -2708,17 +3055,17 @@
                 <a:ea typeface="Segoe UI"/>
                 <a:cs typeface="Segoe UI"/>
               </a:rPr>
-              <a:t>INT8 quantization</a:t>
+              <a:t>INT8 student</a:t>
             </a:r>
           </a:p>
         </p:txBody>
       </p:sp>
       <p:sp>
         <p:nvSpPr>
-          <p:cNvPr id="19" name="S02-name-3">
+          <p:cNvPr id="18" name="S02-name-3">
             <a:extLst>
               <a:ext uri="{FF2B5EF4-FFF2-40B4-BE49-F238E27FC236}">
-                <a16:creationId xmlns:a16="http://schemas.microsoft.com/office/drawing/2014/main" id="{636C148B-A2F9-4F48-A1EE-72E6A939F67A}"/>
+                <a16:creationId xmlns:a16="http://schemas.microsoft.com/office/drawing/2014/main" id="{93C3164F-A989-44D9-8207-95A53AED8BB2}"/>
               </a:ext>
             </a:extLst>
           </p:cNvPr>
@@ -2772,10 +3119,10 @@
       </p:sp>
       <p:sp>
         <p:nvSpPr>
-          <p:cNvPr id="20" name="S02-detail-3">
+          <p:cNvPr id="19" name="S02-detail-3">
             <a:extLst>
               <a:ext uri="{FF2B5EF4-FFF2-40B4-BE49-F238E27FC236}">
-                <a16:creationId xmlns:a16="http://schemas.microsoft.com/office/drawing/2014/main" id="{EA4199E6-94C7-46AF-BBBF-B1A92E9459A7}"/>
+                <a16:creationId xmlns:a16="http://schemas.microsoft.com/office/drawing/2014/main" id="{6B8938CF-FBFD-433E-AE3D-984C8CFA21CB}"/>
               </a:ext>
             </a:extLst>
           </p:cNvPr>
@@ -2822,7 +3169,7 @@
                 <a:ea typeface="Segoe UI"/>
                 <a:cs typeface="Segoe UI"/>
               </a:rPr>
-              <a:t>Represent student numbers</a:t>
+              <a:t>Use 8-bit integers for</a:t>
             </a:r>
           </a:p>
           <a:p>
@@ -2845,17 +3192,17 @@
                 <a:ea typeface="Segoe UI"/>
                 <a:cs typeface="Segoe UI"/>
               </a:rPr>
-              <a:t>as 8-bit integers.</a:t>
+              <a:t>selected model quantities.</a:t>
             </a:r>
           </a:p>
         </p:txBody>
       </p:sp>
       <p:sp>
         <p:nvSpPr>
-          <p:cNvPr id="21" name="S02-caveat">
+          <p:cNvPr id="20" name="S02-caveat">
             <a:extLst>
               <a:ext uri="{FF2B5EF4-FFF2-40B4-BE49-F238E27FC236}">
-                <a16:creationId xmlns:a16="http://schemas.microsoft.com/office/drawing/2014/main" id="{C57FDE32-D10D-4606-886B-C68F08802B4B}"/>
+                <a16:creationId xmlns:a16="http://schemas.microsoft.com/office/drawing/2014/main" id="{51464756-4A43-4402-BF13-D16988103052}"/>
               </a:ext>
             </a:extLst>
           </p:cNvPr>
@@ -2910,7 +3257,7 @@
     </p:spTree>
     <p:extLst>
       <p:ext uri="{BB962C8B-B14F-4D97-AF65-F5344CB8AC3E}">
-        <p14:creationId xmlns:p14="http://schemas.microsoft.com/office/powerpoint/2010/main" val="1999575251"/>
+        <p14:creationId xmlns:p14="http://schemas.microsoft.com/office/powerpoint/2010/main" val="275575726"/>
       </p:ext>
     </p:extLst>
   </p:cSld>
@@ -2951,7 +3298,7 @@
                                           </p:stCondLst>
                                         </p:cTn>
                                         <p:tgtEl>
-                                          <p:spTgt spid="6"/>
+                                          <p:spTgt spid="5"/>
                                         </p:tgtEl>
                                         <p:attrNameLst>
                                           <p:attrName>style.visibility</p:attrName>
@@ -2965,7 +3312,7 @@
                                       <p:cBhvr>
                                         <p:cTn id="7" dur="350"/>
                                         <p:tgtEl>
-                                          <p:spTgt spid="6"/>
+                                          <p:spTgt spid="5"/>
                                         </p:tgtEl>
                                       </p:cBhvr>
                                     </p:animEffect>
@@ -2986,7 +3333,7 @@
                                           </p:stCondLst>
                                         </p:cTn>
                                         <p:tgtEl>
-                                          <p:spTgt spid="29"/>
+                                          <p:spTgt spid="27"/>
                                         </p:tgtEl>
                                         <p:attrNameLst>
                                           <p:attrName>style.visibility</p:attrName>
@@ -3000,7 +3347,7 @@
                                       <p:cBhvr>
                                         <p:cTn id="10" dur="350"/>
                                         <p:tgtEl>
-                                          <p:spTgt spid="29"/>
+                                          <p:spTgt spid="27"/>
                                         </p:tgtEl>
                                       </p:cBhvr>
                                     </p:animEffect>
@@ -3021,7 +3368,7 @@
                                           </p:stCondLst>
                                         </p:cTn>
                                         <p:tgtEl>
-                                          <p:spTgt spid="10"/>
+                                          <p:spTgt spid="9"/>
                                         </p:tgtEl>
                                         <p:attrNameLst>
                                           <p:attrName>style.visibility</p:attrName>
@@ -3035,7 +3382,7 @@
                                       <p:cBhvr>
                                         <p:cTn id="13" dur="350"/>
                                         <p:tgtEl>
-                                          <p:spTgt spid="10"/>
+                                          <p:spTgt spid="9"/>
                                         </p:tgtEl>
                                       </p:cBhvr>
                                     </p:animEffect>
@@ -3056,7 +3403,7 @@
                                           </p:stCondLst>
                                         </p:cTn>
                                         <p:tgtEl>
-                                          <p:spTgt spid="15"/>
+                                          <p:spTgt spid="14"/>
                                         </p:tgtEl>
                                         <p:attrNameLst>
                                           <p:attrName>style.visibility</p:attrName>
@@ -3070,7 +3417,7 @@
                                       <p:cBhvr>
                                         <p:cTn id="16" dur="350"/>
                                         <p:tgtEl>
-                                          <p:spTgt spid="15"/>
+                                          <p:spTgt spid="14"/>
                                         </p:tgtEl>
                                       </p:cBhvr>
                                     </p:animEffect>
@@ -3091,7 +3438,7 @@
                                           </p:stCondLst>
                                         </p:cTn>
                                         <p:tgtEl>
-                                          <p:spTgt spid="16"/>
+                                          <p:spTgt spid="15"/>
                                         </p:tgtEl>
                                         <p:attrNameLst>
                                           <p:attrName>style.visibility</p:attrName>
@@ -3105,7 +3452,7 @@
                                       <p:cBhvr>
                                         <p:cTn id="19" dur="350"/>
                                         <p:tgtEl>
-                                          <p:spTgt spid="16"/>
+                                          <p:spTgt spid="15"/>
                                         </p:tgtEl>
                                       </p:cBhvr>
                                     </p:animEffect>
@@ -3126,7 +3473,7 @@
                                           </p:stCondLst>
                                         </p:cTn>
                                         <p:tgtEl>
-                                          <p:spTgt spid="17"/>
+                                          <p:spTgt spid="16"/>
                                         </p:tgtEl>
                                         <p:attrNameLst>
                                           <p:attrName>style.visibility</p:attrName>
@@ -3140,7 +3487,7 @@
                                       <p:cBhvr>
                                         <p:cTn id="22" dur="350"/>
                                         <p:tgtEl>
-                                          <p:spTgt spid="17"/>
+                                          <p:spTgt spid="16"/>
                                         </p:tgtEl>
                                       </p:cBhvr>
                                     </p:animEffect>
@@ -3179,7 +3526,7 @@
                                           </p:stCondLst>
                                         </p:cTn>
                                         <p:tgtEl>
-                                          <p:spTgt spid="7"/>
+                                          <p:spTgt spid="6"/>
                                         </p:tgtEl>
                                         <p:attrNameLst>
                                           <p:attrName>style.visibility</p:attrName>
@@ -3193,7 +3540,7 @@
                                       <p:cBhvr>
                                         <p:cTn id="27" dur="350"/>
                                         <p:tgtEl>
-                                          <p:spTgt spid="7"/>
+                                          <p:spTgt spid="6"/>
                                         </p:tgtEl>
                                       </p:cBhvr>
                                     </p:animEffect>
@@ -3214,7 +3561,7 @@
                                           </p:stCondLst>
                                         </p:cTn>
                                         <p:tgtEl>
-                                          <p:spTgt spid="30"/>
+                                          <p:spTgt spid="28"/>
                                         </p:tgtEl>
                                         <p:attrNameLst>
                                           <p:attrName>style.visibility</p:attrName>
@@ -3228,7 +3575,7 @@
                                       <p:cBhvr>
                                         <p:cTn id="30" dur="350"/>
                                         <p:tgtEl>
-                                          <p:spTgt spid="30"/>
+                                          <p:spTgt spid="28"/>
                                         </p:tgtEl>
                                       </p:cBhvr>
                                     </p:animEffect>
@@ -3249,7 +3596,7 @@
                                           </p:stCondLst>
                                         </p:cTn>
                                         <p:tgtEl>
-                                          <p:spTgt spid="11"/>
+                                          <p:spTgt spid="10"/>
                                         </p:tgtEl>
                                         <p:attrNameLst>
                                           <p:attrName>style.visibility</p:attrName>
@@ -3263,7 +3610,7 @@
                                       <p:cBhvr>
                                         <p:cTn id="33" dur="350"/>
                                         <p:tgtEl>
-                                          <p:spTgt spid="11"/>
+                                          <p:spTgt spid="10"/>
                                         </p:tgtEl>
                                       </p:cBhvr>
                                     </p:animEffect>
@@ -3284,7 +3631,7 @@
                                           </p:stCondLst>
                                         </p:cTn>
                                         <p:tgtEl>
-                                          <p:spTgt spid="18"/>
+                                          <p:spTgt spid="17"/>
                                         </p:tgtEl>
                                         <p:attrNameLst>
                                           <p:attrName>style.visibility</p:attrName>
@@ -3298,7 +3645,7 @@
                                       <p:cBhvr>
                                         <p:cTn id="36" dur="350"/>
                                         <p:tgtEl>
-                                          <p:spTgt spid="18"/>
+                                          <p:spTgt spid="17"/>
                                         </p:tgtEl>
                                       </p:cBhvr>
                                     </p:animEffect>
@@ -3319,7 +3666,7 @@
                                           </p:stCondLst>
                                         </p:cTn>
                                         <p:tgtEl>
-                                          <p:spTgt spid="19"/>
+                                          <p:spTgt spid="18"/>
                                         </p:tgtEl>
                                         <p:attrNameLst>
                                           <p:attrName>style.visibility</p:attrName>
@@ -3333,7 +3680,7 @@
                                       <p:cBhvr>
                                         <p:cTn id="39" dur="350"/>
                                         <p:tgtEl>
-                                          <p:spTgt spid="19"/>
+                                          <p:spTgt spid="18"/>
                                         </p:tgtEl>
                                       </p:cBhvr>
                                     </p:animEffect>
@@ -3354,7 +3701,7 @@
                                           </p:stCondLst>
                                         </p:cTn>
                                         <p:tgtEl>
-                                          <p:spTgt spid="20"/>
+                                          <p:spTgt spid="19"/>
                                         </p:tgtEl>
                                         <p:attrNameLst>
                                           <p:attrName>style.visibility</p:attrName>
@@ -3368,7 +3715,7 @@
                                       <p:cBhvr>
                                         <p:cTn id="42" dur="350"/>
                                         <p:tgtEl>
-                                          <p:spTgt spid="20"/>
+                                          <p:spTgt spid="19"/>
                                         </p:tgtEl>
                                       </p:cBhvr>
                                     </p:animEffect>
@@ -3403,16 +3750,16 @@
       </p:par>
     </p:tnLst>
     <p:bldLst>
+      <p:bldP spid="5" grpId="0" animBg="1"/>
       <p:bldP spid="6" grpId="0" animBg="1"/>
-      <p:bldP spid="7" grpId="0" animBg="1"/>
+      <p:bldP spid="9" grpId="0"/>
       <p:bldP spid="10" grpId="0"/>
-      <p:bldP spid="11" grpId="0"/>
+      <p:bldP spid="14" grpId="0"/>
       <p:bldP spid="15" grpId="0"/>
       <p:bldP spid="16" grpId="0"/>
       <p:bldP spid="17" grpId="0"/>
       <p:bldP spid="18" grpId="0"/>
       <p:bldP spid="19" grpId="0"/>
-      <p:bldP spid="20" grpId="0"/>
     </p:bldLst>
   </p:timing>
 </p:sld>
@@ -3445,67 +3792,10 @@
       </p:grpSpPr>
       <p:sp>
         <p:nvSpPr>
-          <p:cNvPr id="9" name="S03-section">
+          <p:cNvPr id="8" name="S03-title">
             <a:extLst>
               <a:ext uri="{FF2B5EF4-FFF2-40B4-BE49-F238E27FC236}">
-                <a16:creationId xmlns:a16="http://schemas.microsoft.com/office/drawing/2014/main" id="{533610C8-20CD-4FFE-B28E-BAD1925CE24F}"/>
-              </a:ext>
-            </a:extLst>
-          </p:cNvPr>
-          <p:cNvSpPr>
-            <a:spLocks noGrp="1"/>
-          </p:cNvSpPr>
-          <p:nvPr/>
-        </p:nvSpPr>
-        <p:spPr>
-          <a:xfrm>
-            <a:off x="685800" y="400050"/>
-            <a:ext cx="10744200" cy="257175"/>
-          </a:xfrm>
-          <a:prstGeom prst="rect">
-            <a:avLst/>
-          </a:prstGeom>
-          <a:noFill/>
-          <a:ln w="0">
-            <a:noFill/>
-          </a:ln>
-        </p:spPr>
-        <p:txBody>
-          <a:bodyPr wrap="none" lIns="0" tIns="0" rIns="0" bIns="0" anchor="ctr">
-            <a:noAutofit/>
-          </a:bodyPr>
-          <a:lstStyle/>
-          <a:p>
-            <a:pPr>
-              <a:defRPr sz="1425" b="0">
-                <a:solidFill>
-                  <a:srgbClr val="287D78"/>
-                </a:solidFill>
-                <a:latin typeface="Segoe UI"/>
-                <a:ea typeface="Segoe UI"/>
-                <a:cs typeface="Segoe UI"/>
-              </a:defRPr>
-            </a:pPr>
-            <a:r>
-              <a:rPr sz="1425" b="0">
-                <a:solidFill>
-                  <a:srgbClr val="287D78"/>
-                </a:solidFill>
-                <a:latin typeface="Segoe UI"/>
-                <a:ea typeface="Segoe UI"/>
-                <a:cs typeface="Segoe UI"/>
-              </a:rPr>
-              <a:t>EVIDENCE / FICTIONAL COMPARISON</a:t>
-            </a:r>
-          </a:p>
-        </p:txBody>
-      </p:sp>
-      <p:sp>
-        <p:nvSpPr>
-          <p:cNvPr id="2" name="S03-title">
-            <a:extLst>
-              <a:ext uri="{FF2B5EF4-FFF2-40B4-BE49-F238E27FC236}">
-                <a16:creationId xmlns:a16="http://schemas.microsoft.com/office/drawing/2014/main" id="{CE70BED3-63C0-4CDA-8B29-D663C34D27C9}"/>
+                <a16:creationId xmlns:a16="http://schemas.microsoft.com/office/drawing/2014/main" id="{CA0C6520-1051-4AA0-8098-A9EBEC2A03E8}"/>
               </a:ext>
             </a:extLst>
           </p:cNvPr>
@@ -3552,17 +3842,17 @@
                 <a:ea typeface="Segoe UI"/>
                 <a:cs typeface="Segoe UI"/>
               </a:rPr>
-              <a:t>Three models. One shared comparison.</a:t>
+              <a:t>Latency, F1 and model size</a:t>
             </a:r>
           </a:p>
         </p:txBody>
       </p:sp>
       <p:sp>
         <p:nvSpPr>
-          <p:cNvPr id="3" name="S03-disclosure">
+          <p:cNvPr id="2" name="S03-disclosure">
             <a:extLst>
               <a:ext uri="{FF2B5EF4-FFF2-40B4-BE49-F238E27FC236}">
-                <a16:creationId xmlns:a16="http://schemas.microsoft.com/office/drawing/2014/main" id="{58292DC1-2B05-42C8-A46E-08495A59EBFA}"/>
+                <a16:creationId xmlns:a16="http://schemas.microsoft.com/office/drawing/2014/main" id="{409FF452-2A3F-4AFF-9C01-23A352274B0A}"/>
               </a:ext>
             </a:extLst>
           </p:cNvPr>
@@ -3616,10 +3906,10 @@
       </p:sp>
       <p:sp>
         <p:nvSpPr>
-          <p:cNvPr id="4" name="S03-number">
+          <p:cNvPr id="3" name="S03-number">
             <a:extLst>
               <a:ext uri="{FF2B5EF4-FFF2-40B4-BE49-F238E27FC236}">
-                <a16:creationId xmlns:a16="http://schemas.microsoft.com/office/drawing/2014/main" id="{2A831829-C4C5-4502-AA30-B5947112B1A9}"/>
+                <a16:creationId xmlns:a16="http://schemas.microsoft.com/office/drawing/2014/main" id="{F8B9AE3B-FFAC-470A-A925-2F6D2168D6BC}"/>
               </a:ext>
             </a:extLst>
           </p:cNvPr>
@@ -3673,10 +3963,10 @@
       </p:sp>
       <p:sp>
         <p:nvSpPr>
-          <p:cNvPr id="5" name="S03-direction">
+          <p:cNvPr id="4" name="S03-direction">
             <a:extLst>
               <a:ext uri="{FF2B5EF4-FFF2-40B4-BE49-F238E27FC236}">
-                <a16:creationId xmlns:a16="http://schemas.microsoft.com/office/drawing/2014/main" id="{5F860A98-9107-4FD4-958D-C1FFF623BA7B}"/>
+                <a16:creationId xmlns:a16="http://schemas.microsoft.com/office/drawing/2014/main" id="{28228544-2890-45EB-B8D8-226835515F16}"/>
               </a:ext>
             </a:extLst>
           </p:cNvPr>
@@ -3730,7 +4020,7 @@
       </p:sp>
       <p:graphicFrame>
         <p:nvGraphicFramePr>
-          <p:cNvPr id="14" name="표 13"/>
+          <p:cNvPr id="12" name="표 11"/>
           <p:cNvGraphicFramePr/>
           <p:nvPr/>
         </p:nvGraphicFramePr>
@@ -4319,7 +4609,7 @@
                       <a:r>
                         <a:rPr sz="2400" b="0">
                           <a:solidFill>
-                            <a:srgbClr val="287D78"/>
+                            <a:srgbClr val="1E302F"/>
                           </a:solidFill>
                           <a:latin typeface="Segoe UI"/>
                           <a:ea typeface="Segoe UI"/>
@@ -4349,7 +4639,7 @@
                       <a:noFill/>
                     </a:lnBlToTr>
                     <a:solidFill>
-                      <a:srgbClr val="E8EDE5"/>
+                      <a:srgbClr val="F6F4EE"/>
                     </a:solidFill>
                   </a:tcPr>
                 </a:tc>
@@ -4362,7 +4652,7 @@
                       <a:r>
                         <a:rPr sz="2400" b="0">
                           <a:solidFill>
-                            <a:srgbClr val="287D78"/>
+                            <a:srgbClr val="1E302F"/>
                           </a:solidFill>
                           <a:latin typeface="Segoe UI"/>
                           <a:ea typeface="Segoe UI"/>
@@ -4392,7 +4682,7 @@
                       <a:noFill/>
                     </a:lnBlToTr>
                     <a:solidFill>
-                      <a:srgbClr val="E8EDE5"/>
+                      <a:srgbClr val="F6F4EE"/>
                     </a:solidFill>
                   </a:tcPr>
                 </a:tc>
@@ -4405,7 +4695,7 @@
                       <a:r>
                         <a:rPr sz="2400" b="0">
                           <a:solidFill>
-                            <a:srgbClr val="287D78"/>
+                            <a:srgbClr val="1E302F"/>
                           </a:solidFill>
                           <a:latin typeface="Segoe UI"/>
                           <a:ea typeface="Segoe UI"/>
@@ -4435,7 +4725,7 @@
                       <a:noFill/>
                     </a:lnBlToTr>
                     <a:solidFill>
-                      <a:srgbClr val="E8EDE5"/>
+                      <a:srgbClr val="F6F4EE"/>
                     </a:solidFill>
                   </a:tcPr>
                 </a:tc>
@@ -4448,7 +4738,7 @@
                       <a:r>
                         <a:rPr sz="2400" b="0">
                           <a:solidFill>
-                            <a:srgbClr val="287D78"/>
+                            <a:srgbClr val="1E302F"/>
                           </a:solidFill>
                           <a:latin typeface="Segoe UI"/>
                           <a:ea typeface="Segoe UI"/>
@@ -4478,7 +4768,7 @@
                       <a:noFill/>
                     </a:lnBlToTr>
                     <a:solidFill>
-                      <a:srgbClr val="E8EDE5"/>
+                      <a:srgbClr val="F6F4EE"/>
                     </a:solidFill>
                   </a:tcPr>
                 </a:tc>
@@ -4494,10 +4784,10 @@
       </p:graphicFrame>
       <p:sp>
         <p:nvSpPr>
-          <p:cNvPr id="7" name="S03-header-rule">
+          <p:cNvPr id="6" name="S03-header-rule">
             <a:extLst>
               <a:ext uri="{FF2B5EF4-FFF2-40B4-BE49-F238E27FC236}">
-                <a16:creationId xmlns:a16="http://schemas.microsoft.com/office/drawing/2014/main" id="{4F4933A8-7935-4902-85C4-E8CFE5886EB0}"/>
+                <a16:creationId xmlns:a16="http://schemas.microsoft.com/office/drawing/2014/main" id="{2A2AAF51-46A5-463E-A7F5-84E1C43F04C6}"/>
               </a:ext>
             </a:extLst>
           </p:cNvPr>
@@ -4523,10 +4813,10 @@
       </p:sp>
       <p:sp>
         <p:nvSpPr>
-          <p:cNvPr id="8" name="S03-limit">
+          <p:cNvPr id="7" name="S03-limit">
             <a:extLst>
               <a:ext uri="{FF2B5EF4-FFF2-40B4-BE49-F238E27FC236}">
-                <a16:creationId xmlns:a16="http://schemas.microsoft.com/office/drawing/2014/main" id="{B6827B90-3AF9-4418-89BF-646D006B2760}"/>
+                <a16:creationId xmlns:a16="http://schemas.microsoft.com/office/drawing/2014/main" id="{C76E3D28-D525-484C-A6B4-EAEAC9D4C8F1}"/>
               </a:ext>
             </a:extLst>
           </p:cNvPr>
@@ -4581,7 +4871,7 @@
     </p:spTree>
     <p:extLst>
       <p:ext uri="{BB962C8B-B14F-4D97-AF65-F5344CB8AC3E}">
-        <p14:creationId xmlns:p14="http://schemas.microsoft.com/office/powerpoint/2010/main" val="1011031294"/>
+        <p14:creationId xmlns:p14="http://schemas.microsoft.com/office/powerpoint/2010/main" val="988851997"/>
       </p:ext>
     </p:extLst>
   </p:cSld>
@@ -4618,67 +4908,10 @@
       </p:grpSpPr>
       <p:sp>
         <p:nvSpPr>
-          <p:cNvPr id="17" name="S04-section">
+          <p:cNvPr id="15" name="S04-title">
             <a:extLst>
               <a:ext uri="{FF2B5EF4-FFF2-40B4-BE49-F238E27FC236}">
-                <a16:creationId xmlns:a16="http://schemas.microsoft.com/office/drawing/2014/main" id="{BC636639-B28F-4A01-9CE4-2ADE76FFCFCA}"/>
-              </a:ext>
-            </a:extLst>
-          </p:cNvPr>
-          <p:cNvSpPr>
-            <a:spLocks noGrp="1"/>
-          </p:cNvSpPr>
-          <p:nvPr/>
-        </p:nvSpPr>
-        <p:spPr>
-          <a:xfrm>
-            <a:off x="685800" y="400050"/>
-            <a:ext cx="10744200" cy="257175"/>
-          </a:xfrm>
-          <a:prstGeom prst="rect">
-            <a:avLst/>
-          </a:prstGeom>
-          <a:noFill/>
-          <a:ln w="0">
-            <a:noFill/>
-          </a:ln>
-        </p:spPr>
-        <p:txBody>
-          <a:bodyPr wrap="none" lIns="0" tIns="0" rIns="0" bIns="0" anchor="ctr">
-            <a:noAutofit/>
-          </a:bodyPr>
-          <a:lstStyle/>
-          <a:p>
-            <a:pPr>
-              <a:defRPr sz="1425" b="0">
-                <a:solidFill>
-                  <a:srgbClr val="287D78"/>
-                </a:solidFill>
-                <a:latin typeface="Segoe UI"/>
-                <a:ea typeface="Segoe UI"/>
-                <a:cs typeface="Segoe UI"/>
-              </a:defRPr>
-            </a:pPr>
-            <a:r>
-              <a:rPr sz="1425" b="0">
-                <a:solidFill>
-                  <a:srgbClr val="287D78"/>
-                </a:solidFill>
-                <a:latin typeface="Segoe UI"/>
-                <a:ea typeface="Segoe UI"/>
-                <a:cs typeface="Segoe UI"/>
-              </a:rPr>
-              <a:t>RESULT / BASELINE TO INT8</a:t>
-            </a:r>
-          </a:p>
-        </p:txBody>
-      </p:sp>
-      <p:sp>
-        <p:nvSpPr>
-          <p:cNvPr id="2" name="S04-title">
-            <a:extLst>
-              <a:ext uri="{FF2B5EF4-FFF2-40B4-BE49-F238E27FC236}">
-                <a16:creationId xmlns:a16="http://schemas.microsoft.com/office/drawing/2014/main" id="{F2711B63-5182-4F65-BEE2-70658FD0BC1E}"/>
+                <a16:creationId xmlns:a16="http://schemas.microsoft.com/office/drawing/2014/main" id="{F9D51027-223B-41BC-AC17-197B3DBF7543}"/>
               </a:ext>
             </a:extLst>
           </p:cNvPr>
@@ -4732,10 +4965,10 @@
       </p:sp>
       <p:sp>
         <p:nvSpPr>
-          <p:cNvPr id="3" name="S04-disclosure">
+          <p:cNvPr id="2" name="S04-disclosure">
             <a:extLst>
               <a:ext uri="{FF2B5EF4-FFF2-40B4-BE49-F238E27FC236}">
-                <a16:creationId xmlns:a16="http://schemas.microsoft.com/office/drawing/2014/main" id="{1169E09D-882C-428B-B46C-44A8F3BC6EE5}"/>
+                <a16:creationId xmlns:a16="http://schemas.microsoft.com/office/drawing/2014/main" id="{1EB260BA-4F27-4BA6-8D38-37B44F32EEC2}"/>
               </a:ext>
             </a:extLst>
           </p:cNvPr>
@@ -4789,10 +5022,10 @@
       </p:sp>
       <p:sp>
         <p:nvSpPr>
-          <p:cNvPr id="4" name="S04-number">
+          <p:cNvPr id="3" name="S04-number">
             <a:extLst>
               <a:ext uri="{FF2B5EF4-FFF2-40B4-BE49-F238E27FC236}">
-                <a16:creationId xmlns:a16="http://schemas.microsoft.com/office/drawing/2014/main" id="{20447F9E-9B5C-4ACF-8067-BE987339E42F}"/>
+                <a16:creationId xmlns:a16="http://schemas.microsoft.com/office/drawing/2014/main" id="{5DA3B840-52E2-4CFB-9E71-57EF81AC896D}"/>
               </a:ext>
             </a:extLst>
           </p:cNvPr>
@@ -4846,10 +5079,10 @@
       </p:sp>
       <p:sp>
         <p:nvSpPr>
-          <p:cNvPr id="5" name="S04-chart-unit">
+          <p:cNvPr id="4" name="S04-chart-unit">
             <a:extLst>
               <a:ext uri="{FF2B5EF4-FFF2-40B4-BE49-F238E27FC236}">
-                <a16:creationId xmlns:a16="http://schemas.microsoft.com/office/drawing/2014/main" id="{E36052B5-A6F9-4623-8165-C8AFF2552BD9}"/>
+                <a16:creationId xmlns:a16="http://schemas.microsoft.com/office/drawing/2014/main" id="{7DFB2E3B-7E59-49D9-9E9F-766AAD1A3147}"/>
               </a:ext>
             </a:extLst>
           </p:cNvPr>
@@ -4860,8 +5093,8 @@
         </p:nvSpPr>
         <p:spPr>
           <a:xfrm>
-            <a:off x="685800" y="1828800"/>
-            <a:ext cx="6000750" cy="352425"/>
+            <a:off x="685800" y="1647825"/>
+            <a:ext cx="6762750" cy="361950"/>
           </a:xfrm>
           <a:prstGeom prst="rect">
             <a:avLst/>
@@ -4896,20 +5129,20 @@
                 <a:ea typeface="Segoe UI"/>
                 <a:cs typeface="Segoe UI"/>
               </a:rPr>
-              <a:t>Latency (ms)</a:t>
+              <a:t>F1 · higher is better</a:t>
             </a:r>
           </a:p>
         </p:txBody>
       </p:sp>
       <p:graphicFrame>
         <p:nvGraphicFramePr>
-          <p:cNvPr id="22" name="Chart"/>
+          <p:cNvPr id="19" name="Chart"/>
           <p:cNvGraphicFramePr/>
           <p:nvPr/>
         </p:nvGraphicFramePr>
         <p:xfrm>
-          <a:off x="552450" y="2343150"/>
-          <a:ext cx="6810375" cy="2857500"/>
+          <a:off x="619125" y="2095500"/>
+          <a:ext cx="7191375" cy="3219450"/>
         </p:xfrm>
         <a:graphic>
           <a:graphicData uri="http://schemas.openxmlformats.org/drawingml/2006/chart">
@@ -4919,10 +5152,10 @@
       </p:graphicFrame>
       <p:sp>
         <p:nvSpPr>
-          <p:cNvPr id="7" name="S04-latency">
+          <p:cNvPr id="6" name="S04-x-unit">
             <a:extLst>
               <a:ext uri="{FF2B5EF4-FFF2-40B4-BE49-F238E27FC236}">
-                <a16:creationId xmlns:a16="http://schemas.microsoft.com/office/drawing/2014/main" id="{D51546B4-1D7A-4253-87A8-B3272307B943}"/>
+                <a16:creationId xmlns:a16="http://schemas.microsoft.com/office/drawing/2014/main" id="{A3024077-E05A-49AE-8D99-6588D9426546}"/>
               </a:ext>
             </a:extLst>
           </p:cNvPr>
@@ -4933,8 +5166,8 @@
         </p:nvSpPr>
         <p:spPr>
           <a:xfrm>
-            <a:off x="8058150" y="1885950"/>
-            <a:ext cx="3276600" cy="809625"/>
+            <a:off x="1428750" y="5181600"/>
+            <a:ext cx="6191250" cy="333375"/>
           </a:xfrm>
           <a:prstGeom prst="rect">
             <a:avLst/>
@@ -4951,9 +5184,9 @@
           <a:lstStyle/>
           <a:p>
             <a:pPr>
-              <a:defRPr sz="5325" b="0">
-                <a:solidFill>
-                  <a:srgbClr val="287D78"/>
+              <a:defRPr sz="1725" b="0">
+                <a:solidFill>
+                  <a:srgbClr val="586C68"/>
                 </a:solidFill>
                 <a:latin typeface="Segoe UI"/>
                 <a:ea typeface="Segoe UI"/>
@@ -4961,25 +5194,25 @@
               </a:defRPr>
             </a:pPr>
             <a:r>
-              <a:rPr sz="5325" b="0">
-                <a:solidFill>
-                  <a:srgbClr val="287D78"/>
+              <a:rPr sz="1725" b="0">
+                <a:solidFill>
+                  <a:srgbClr val="586C68"/>
                 </a:solidFill>
                 <a:latin typeface="Segoe UI"/>
                 <a:ea typeface="Segoe UI"/>
                 <a:cs typeface="Segoe UI"/>
               </a:rPr>
-              <a:t>55%</a:t>
+              <a:t>Latency (ms) · lower is better</a:t>
             </a:r>
           </a:p>
         </p:txBody>
       </p:sp>
       <p:sp>
         <p:nvSpPr>
-          <p:cNvPr id="8" name="S04-latency-label">
+          <p:cNvPr id="7" name="S04-basis">
             <a:extLst>
               <a:ext uri="{FF2B5EF4-FFF2-40B4-BE49-F238E27FC236}">
-                <a16:creationId xmlns:a16="http://schemas.microsoft.com/office/drawing/2014/main" id="{7AF19377-FAD8-4B0E-84D6-C88DC070BAA3}"/>
+                <a16:creationId xmlns:a16="http://schemas.microsoft.com/office/drawing/2014/main" id="{7E3D2D07-C993-4C7A-B953-E86CF8ABB4AF}"/>
               </a:ext>
             </a:extLst>
           </p:cNvPr>
@@ -4990,8 +5223,8 @@
         </p:nvSpPr>
         <p:spPr>
           <a:xfrm>
-            <a:off x="8058150" y="2714625"/>
-            <a:ext cx="3448050" cy="342900"/>
+            <a:off x="8382000" y="1714500"/>
+            <a:ext cx="3124200" cy="333375"/>
           </a:xfrm>
           <a:prstGeom prst="rect">
             <a:avLst/>
@@ -5008,6 +5241,120 @@
           <a:lstStyle/>
           <a:p>
             <a:pPr>
+              <a:defRPr sz="1800" b="0">
+                <a:solidFill>
+                  <a:srgbClr val="586C68"/>
+                </a:solidFill>
+                <a:latin typeface="Segoe UI"/>
+                <a:ea typeface="Segoe UI"/>
+                <a:cs typeface="Segoe UI"/>
+              </a:defRPr>
+            </a:pPr>
+            <a:r>
+              <a:rPr sz="1800" b="0">
+                <a:solidFill>
+                  <a:srgbClr val="586C68"/>
+                </a:solidFill>
+                <a:latin typeface="Segoe UI"/>
+                <a:ea typeface="Segoe UI"/>
+                <a:cs typeface="Segoe UI"/>
+              </a:rPr>
+              <a:t>Baseline to INT8</a:t>
+            </a:r>
+          </a:p>
+        </p:txBody>
+      </p:sp>
+      <p:sp>
+        <p:nvSpPr>
+          <p:cNvPr id="8" name="S04-latency">
+            <a:extLst>
+              <a:ext uri="{FF2B5EF4-FFF2-40B4-BE49-F238E27FC236}">
+                <a16:creationId xmlns:a16="http://schemas.microsoft.com/office/drawing/2014/main" id="{9E9EFD97-D574-47D8-BA46-B9C4F0004432}"/>
+              </a:ext>
+            </a:extLst>
+          </p:cNvPr>
+          <p:cNvSpPr>
+            <a:spLocks noGrp="1"/>
+          </p:cNvSpPr>
+          <p:nvPr/>
+        </p:nvSpPr>
+        <p:spPr>
+          <a:xfrm>
+            <a:off x="8382000" y="2247900"/>
+            <a:ext cx="3048000" cy="628650"/>
+          </a:xfrm>
+          <a:prstGeom prst="rect">
+            <a:avLst/>
+          </a:prstGeom>
+          <a:noFill/>
+          <a:ln w="0">
+            <a:noFill/>
+          </a:ln>
+        </p:spPr>
+        <p:txBody>
+          <a:bodyPr wrap="none" lIns="0" tIns="0" rIns="0" bIns="0" anchor="ctr">
+            <a:noAutofit/>
+          </a:bodyPr>
+          <a:lstStyle/>
+          <a:p>
+            <a:pPr>
+              <a:defRPr sz="3450" b="0">
+                <a:solidFill>
+                  <a:srgbClr val="1E302F"/>
+                </a:solidFill>
+                <a:latin typeface="Segoe UI"/>
+                <a:ea typeface="Segoe UI"/>
+                <a:cs typeface="Segoe UI"/>
+              </a:defRPr>
+            </a:pPr>
+            <a:r>
+              <a:rPr sz="3450" b="0">
+                <a:solidFill>
+                  <a:srgbClr val="1E302F"/>
+                </a:solidFill>
+                <a:latin typeface="Segoe UI"/>
+                <a:ea typeface="Segoe UI"/>
+                <a:cs typeface="Segoe UI"/>
+              </a:rPr>
+              <a:t>−55%</a:t>
+            </a:r>
+          </a:p>
+        </p:txBody>
+      </p:sp>
+      <p:sp>
+        <p:nvSpPr>
+          <p:cNvPr id="9" name="S04-latency-label">
+            <a:extLst>
+              <a:ext uri="{FF2B5EF4-FFF2-40B4-BE49-F238E27FC236}">
+                <a16:creationId xmlns:a16="http://schemas.microsoft.com/office/drawing/2014/main" id="{F2A126D7-6A59-49B2-8FDE-AE6428678721}"/>
+              </a:ext>
+            </a:extLst>
+          </p:cNvPr>
+          <p:cNvSpPr>
+            <a:spLocks noGrp="1"/>
+          </p:cNvSpPr>
+          <p:nvPr/>
+        </p:nvSpPr>
+        <p:spPr>
+          <a:xfrm>
+            <a:off x="8382000" y="2876550"/>
+            <a:ext cx="3124200" cy="361950"/>
+          </a:xfrm>
+          <a:prstGeom prst="rect">
+            <a:avLst/>
+          </a:prstGeom>
+          <a:noFill/>
+          <a:ln w="0">
+            <a:noFill/>
+          </a:ln>
+        </p:spPr>
+        <p:txBody>
+          <a:bodyPr wrap="none" lIns="0" tIns="0" rIns="0" bIns="0" anchor="ctr">
+            <a:noAutofit/>
+          </a:bodyPr>
+          <a:lstStyle/>
+          <a:p>
+            <a:pPr>
               <a:defRPr sz="1725" b="0">
                 <a:solidFill>
                   <a:srgbClr val="586C68"/>
@@ -5026,17 +5373,17 @@
                 <a:ea typeface="Segoe UI"/>
                 <a:cs typeface="Segoe UI"/>
               </a:rPr>
-              <a:t>lower latency · 120 → 54 ms</a:t>
+              <a:t>Latency · 120 → 54 ms</a:t>
             </a:r>
           </a:p>
         </p:txBody>
       </p:sp>
       <p:sp>
         <p:nvSpPr>
-          <p:cNvPr id="9" name="S04-size">
+          <p:cNvPr id="10" name="S04-f1">
             <a:extLst>
               <a:ext uri="{FF2B5EF4-FFF2-40B4-BE49-F238E27FC236}">
-                <a16:creationId xmlns:a16="http://schemas.microsoft.com/office/drawing/2014/main" id="{E86F22F7-99DC-49C0-8EA3-1C600B671779}"/>
+                <a16:creationId xmlns:a16="http://schemas.microsoft.com/office/drawing/2014/main" id="{A239B722-567F-4F26-A1B0-867523DD5901}"/>
               </a:ext>
             </a:extLst>
           </p:cNvPr>
@@ -5047,8 +5394,8 @@
         </p:nvSpPr>
         <p:spPr>
           <a:xfrm>
-            <a:off x="8058150" y="3352800"/>
-            <a:ext cx="1524000" cy="647700"/>
+            <a:off x="8382000" y="3419475"/>
+            <a:ext cx="3048000" cy="628650"/>
           </a:xfrm>
           <a:prstGeom prst="rect">
             <a:avLst/>
@@ -5065,7 +5412,7 @@
           <a:lstStyle/>
           <a:p>
             <a:pPr>
-              <a:defRPr sz="3975" b="0">
+              <a:defRPr sz="3450" b="0">
                 <a:solidFill>
                   <a:srgbClr val="1E302F"/>
                 </a:solidFill>
@@ -5075,7 +5422,7 @@
               </a:defRPr>
             </a:pPr>
             <a:r>
-              <a:rPr sz="3975" b="0">
+              <a:rPr sz="3450" b="0">
                 <a:solidFill>
                   <a:srgbClr val="1E302F"/>
                 </a:solidFill>
@@ -5083,17 +5430,17 @@
                 <a:ea typeface="Segoe UI"/>
                 <a:cs typeface="Segoe UI"/>
               </a:rPr>
-              <a:t>75%</a:t>
+              <a:t>−0.014</a:t>
             </a:r>
           </a:p>
         </p:txBody>
       </p:sp>
       <p:sp>
         <p:nvSpPr>
-          <p:cNvPr id="10" name="S04-f1">
+          <p:cNvPr id="11" name="S04-f1-label">
             <a:extLst>
               <a:ext uri="{FF2B5EF4-FFF2-40B4-BE49-F238E27FC236}">
-                <a16:creationId xmlns:a16="http://schemas.microsoft.com/office/drawing/2014/main" id="{0FCD41A2-3991-4C2D-B5EF-51FDD86D8E73}"/>
+                <a16:creationId xmlns:a16="http://schemas.microsoft.com/office/drawing/2014/main" id="{0C4B5FF2-4E78-480B-A1B2-DCE08F07FD46}"/>
               </a:ext>
             </a:extLst>
           </p:cNvPr>
@@ -5104,8 +5451,8 @@
         </p:nvSpPr>
         <p:spPr>
           <a:xfrm>
-            <a:off x="9906000" y="3352800"/>
-            <a:ext cx="1657350" cy="647700"/>
+            <a:off x="8382000" y="4048125"/>
+            <a:ext cx="3124200" cy="361950"/>
           </a:xfrm>
           <a:prstGeom prst="rect">
             <a:avLst/>
@@ -5122,9 +5469,9 @@
           <a:lstStyle/>
           <a:p>
             <a:pPr>
-              <a:defRPr sz="3525" b="0">
-                <a:solidFill>
-                  <a:srgbClr val="A3563E"/>
+              <a:defRPr sz="1725" b="0">
+                <a:solidFill>
+                  <a:srgbClr val="586C68"/>
                 </a:solidFill>
                 <a:latin typeface="Segoe UI"/>
                 <a:ea typeface="Segoe UI"/>
@@ -5132,25 +5479,25 @@
               </a:defRPr>
             </a:pPr>
             <a:r>
-              <a:rPr sz="3525" b="0">
-                <a:solidFill>
-                  <a:srgbClr val="A3563E"/>
+              <a:rPr sz="1725" b="0">
+                <a:solidFill>
+                  <a:srgbClr val="586C68"/>
                 </a:solidFill>
                 <a:latin typeface="Segoe UI"/>
                 <a:ea typeface="Segoe UI"/>
                 <a:cs typeface="Segoe UI"/>
               </a:rPr>
-              <a:t>−0.014</a:t>
+              <a:t>F1 · absolute difference</a:t>
             </a:r>
           </a:p>
         </p:txBody>
       </p:sp>
       <p:sp>
         <p:nvSpPr>
-          <p:cNvPr id="11" name="S04-size-label">
+          <p:cNvPr id="12" name="S04-size-values">
             <a:extLst>
               <a:ext uri="{FF2B5EF4-FFF2-40B4-BE49-F238E27FC236}">
-                <a16:creationId xmlns:a16="http://schemas.microsoft.com/office/drawing/2014/main" id="{C6FCB46E-3BC3-4326-8492-B1CF566E6F91}"/>
+                <a16:creationId xmlns:a16="http://schemas.microsoft.com/office/drawing/2014/main" id="{74F1FCF4-FC36-4AC8-A03A-B9752510C58C}"/>
               </a:ext>
             </a:extLst>
           </p:cNvPr>
@@ -5161,8 +5508,8 @@
         </p:nvSpPr>
         <p:spPr>
           <a:xfrm>
-            <a:off x="8058150" y="4076700"/>
-            <a:ext cx="1752600" cy="314325"/>
+            <a:off x="8382000" y="4772025"/>
+            <a:ext cx="3124200" cy="457200"/>
           </a:xfrm>
           <a:prstGeom prst="rect">
             <a:avLst/>
@@ -5179,123 +5526,9 @@
           <a:lstStyle/>
           <a:p>
             <a:pPr>
-              <a:defRPr sz="1575" b="0">
-                <a:solidFill>
-                  <a:srgbClr val="586C68"/>
-                </a:solidFill>
-                <a:latin typeface="Segoe UI"/>
-                <a:ea typeface="Segoe UI"/>
-                <a:cs typeface="Segoe UI"/>
-              </a:defRPr>
-            </a:pPr>
-            <a:r>
-              <a:rPr sz="1575" b="0">
-                <a:solidFill>
-                  <a:srgbClr val="586C68"/>
-                </a:solidFill>
-                <a:latin typeface="Segoe UI"/>
-                <a:ea typeface="Segoe UI"/>
-                <a:cs typeface="Segoe UI"/>
-              </a:rPr>
-              <a:t>smaller model</a:t>
-            </a:r>
-          </a:p>
-        </p:txBody>
-      </p:sp>
-      <p:sp>
-        <p:nvSpPr>
-          <p:cNvPr id="12" name="S04-f1-label">
-            <a:extLst>
-              <a:ext uri="{FF2B5EF4-FFF2-40B4-BE49-F238E27FC236}">
-                <a16:creationId xmlns:a16="http://schemas.microsoft.com/office/drawing/2014/main" id="{DF2DAA3B-0B09-48FF-8978-997403DABA6D}"/>
-              </a:ext>
-            </a:extLst>
-          </p:cNvPr>
-          <p:cNvSpPr>
-            <a:spLocks noGrp="1"/>
-          </p:cNvSpPr>
-          <p:nvPr/>
-        </p:nvSpPr>
-        <p:spPr>
-          <a:xfrm>
-            <a:off x="9906000" y="4076700"/>
-            <a:ext cx="1657350" cy="314325"/>
-          </a:xfrm>
-          <a:prstGeom prst="rect">
-            <a:avLst/>
-          </a:prstGeom>
-          <a:noFill/>
-          <a:ln w="0">
-            <a:noFill/>
-          </a:ln>
-        </p:spPr>
-        <p:txBody>
-          <a:bodyPr wrap="none" lIns="0" tIns="0" rIns="0" bIns="0" anchor="ctr">
-            <a:noAutofit/>
-          </a:bodyPr>
-          <a:lstStyle/>
-          <a:p>
-            <a:pPr>
-              <a:defRPr sz="1575" b="0">
-                <a:solidFill>
-                  <a:srgbClr val="586C68"/>
-                </a:solidFill>
-                <a:latin typeface="Segoe UI"/>
-                <a:ea typeface="Segoe UI"/>
-                <a:cs typeface="Segoe UI"/>
-              </a:defRPr>
-            </a:pPr>
-            <a:r>
-              <a:rPr sz="1575" b="0">
-                <a:solidFill>
-                  <a:srgbClr val="586C68"/>
-                </a:solidFill>
-                <a:latin typeface="Segoe UI"/>
-                <a:ea typeface="Segoe UI"/>
-                <a:cs typeface="Segoe UI"/>
-              </a:rPr>
-              <a:t>F1 difference</a:t>
-            </a:r>
-          </a:p>
-        </p:txBody>
-      </p:sp>
-      <p:sp>
-        <p:nvSpPr>
-          <p:cNvPr id="13" name="S04-size-values">
-            <a:extLst>
-              <a:ext uri="{FF2B5EF4-FFF2-40B4-BE49-F238E27FC236}">
-                <a16:creationId xmlns:a16="http://schemas.microsoft.com/office/drawing/2014/main" id="{DEB4987F-D5F1-4E13-9ECD-BF1E86019B54}"/>
-              </a:ext>
-            </a:extLst>
-          </p:cNvPr>
-          <p:cNvSpPr>
-            <a:spLocks noGrp="1"/>
-          </p:cNvSpPr>
-          <p:nvPr/>
-        </p:nvSpPr>
-        <p:spPr>
-          <a:xfrm>
-            <a:off x="8058150" y="4524375"/>
-            <a:ext cx="1762125" cy="323850"/>
-          </a:xfrm>
-          <a:prstGeom prst="rect">
-            <a:avLst/>
-          </a:prstGeom>
-          <a:noFill/>
-          <a:ln w="0">
-            <a:noFill/>
-          </a:ln>
-        </p:spPr>
-        <p:txBody>
-          <a:bodyPr wrap="none" lIns="0" tIns="0" rIns="0" bIns="0" anchor="ctr">
-            <a:noAutofit/>
-          </a:bodyPr>
-          <a:lstStyle/>
-          <a:p>
-            <a:pPr>
               <a:defRPr sz="1650" b="0">
                 <a:solidFill>
-                  <a:srgbClr val="1E302F"/>
+                  <a:srgbClr val="586C68"/>
                 </a:solidFill>
                 <a:latin typeface="Segoe UI"/>
                 <a:ea typeface="Segoe UI"/>
@@ -5305,80 +5538,23 @@
             <a:r>
               <a:rPr sz="1650" b="0">
                 <a:solidFill>
-                  <a:srgbClr val="1E302F"/>
+                  <a:srgbClr val="586C68"/>
                 </a:solidFill>
                 <a:latin typeface="Segoe UI"/>
                 <a:ea typeface="Segoe UI"/>
                 <a:cs typeface="Segoe UI"/>
               </a:rPr>
-              <a:t>48 → 12 MB</a:t>
+              <a:t>Size: 48 → 12 MB (−75%)</a:t>
             </a:r>
           </a:p>
         </p:txBody>
       </p:sp>
       <p:sp>
         <p:nvSpPr>
-          <p:cNvPr id="14" name="S04-f1-values">
+          <p:cNvPr id="13" name="S04-stage1">
             <a:extLst>
               <a:ext uri="{FF2B5EF4-FFF2-40B4-BE49-F238E27FC236}">
-                <a16:creationId xmlns:a16="http://schemas.microsoft.com/office/drawing/2014/main" id="{E5AFD2F2-0A46-4796-985A-BB72239C16CC}"/>
-              </a:ext>
-            </a:extLst>
-          </p:cNvPr>
-          <p:cNvSpPr>
-            <a:spLocks noGrp="1"/>
-          </p:cNvSpPr>
-          <p:nvPr/>
-        </p:nvSpPr>
-        <p:spPr>
-          <a:xfrm>
-            <a:off x="9906000" y="4524375"/>
-            <a:ext cx="1657350" cy="323850"/>
-          </a:xfrm>
-          <a:prstGeom prst="rect">
-            <a:avLst/>
-          </a:prstGeom>
-          <a:noFill/>
-          <a:ln w="0">
-            <a:noFill/>
-          </a:ln>
-        </p:spPr>
-        <p:txBody>
-          <a:bodyPr wrap="none" lIns="0" tIns="0" rIns="0" bIns="0" anchor="ctr">
-            <a:noAutofit/>
-          </a:bodyPr>
-          <a:lstStyle/>
-          <a:p>
-            <a:pPr>
-              <a:defRPr sz="1575" b="0">
-                <a:solidFill>
-                  <a:srgbClr val="1E302F"/>
-                </a:solidFill>
-                <a:latin typeface="Segoe UI"/>
-                <a:ea typeface="Segoe UI"/>
-                <a:cs typeface="Segoe UI"/>
-              </a:defRPr>
-            </a:pPr>
-            <a:r>
-              <a:rPr sz="1575" b="0">
-                <a:solidFill>
-                  <a:srgbClr val="1E302F"/>
-                </a:solidFill>
-                <a:latin typeface="Segoe UI"/>
-                <a:ea typeface="Segoe UI"/>
-                <a:cs typeface="Segoe UI"/>
-              </a:rPr>
-              <a:t>0.910 → 0.896</a:t>
-            </a:r>
-          </a:p>
-        </p:txBody>
-      </p:sp>
-      <p:sp>
-        <p:nvSpPr>
-          <p:cNvPr id="15" name="S04-stage1">
-            <a:extLst>
-              <a:ext uri="{FF2B5EF4-FFF2-40B4-BE49-F238E27FC236}">
-                <a16:creationId xmlns:a16="http://schemas.microsoft.com/office/drawing/2014/main" id="{6A9C1FD7-A266-4FB7-8965-BC9BE4EC65F6}"/>
+                <a16:creationId xmlns:a16="http://schemas.microsoft.com/office/drawing/2014/main" id="{D7E5A57D-54CB-40FF-B95C-46E49A441E55}"/>
               </a:ext>
             </a:extLst>
           </p:cNvPr>
@@ -5432,10 +5608,10 @@
       </p:sp>
       <p:sp>
         <p:nvSpPr>
-          <p:cNvPr id="16" name="S04-stage2">
+          <p:cNvPr id="14" name="S04-stage2">
             <a:extLst>
               <a:ext uri="{FF2B5EF4-FFF2-40B4-BE49-F238E27FC236}">
-                <a16:creationId xmlns:a16="http://schemas.microsoft.com/office/drawing/2014/main" id="{C8BF7D9E-B914-41F4-9848-53C09B8400B1}"/>
+                <a16:creationId xmlns:a16="http://schemas.microsoft.com/office/drawing/2014/main" id="{EA8991D9-3BB2-48EA-9E6A-59478E9AA55D}"/>
               </a:ext>
             </a:extLst>
           </p:cNvPr>
@@ -5490,7 +5666,7 @@
     </p:spTree>
     <p:extLst>
       <p:ext uri="{BB962C8B-B14F-4D97-AF65-F5344CB8AC3E}">
-        <p14:creationId xmlns:p14="http://schemas.microsoft.com/office/powerpoint/2010/main" val="1633204563"/>
+        <p14:creationId xmlns:p14="http://schemas.microsoft.com/office/powerpoint/2010/main" val="1568015087"/>
       </p:ext>
     </p:extLst>
   </p:cSld>
@@ -5527,67 +5703,10 @@
       </p:grpSpPr>
       <p:sp>
         <p:nvSpPr>
-          <p:cNvPr id="15" name="S05-section">
+          <p:cNvPr id="14" name="S05-title">
             <a:extLst>
               <a:ext uri="{FF2B5EF4-FFF2-40B4-BE49-F238E27FC236}">
-                <a16:creationId xmlns:a16="http://schemas.microsoft.com/office/drawing/2014/main" id="{4C19C853-E6B9-461C-9EC7-7EE3FA1203C8}"/>
-              </a:ext>
-            </a:extLst>
-          </p:cNvPr>
-          <p:cNvSpPr>
-            <a:spLocks noGrp="1"/>
-          </p:cNvSpPr>
-          <p:nvPr/>
-        </p:nvSpPr>
-        <p:spPr>
-          <a:xfrm>
-            <a:off x="685800" y="400050"/>
-            <a:ext cx="10744200" cy="257175"/>
-          </a:xfrm>
-          <a:prstGeom prst="rect">
-            <a:avLst/>
-          </a:prstGeom>
-          <a:noFill/>
-          <a:ln w="0">
-            <a:noFill/>
-          </a:ln>
-        </p:spPr>
-        <p:txBody>
-          <a:bodyPr wrap="none" lIns="0" tIns="0" rIns="0" bIns="0" anchor="ctr">
-            <a:noAutofit/>
-          </a:bodyPr>
-          <a:lstStyle/>
-          <a:p>
-            <a:pPr>
-              <a:defRPr sz="1425" b="0">
-                <a:solidFill>
-                  <a:srgbClr val="287D78"/>
-                </a:solidFill>
-                <a:latin typeface="Segoe UI"/>
-                <a:ea typeface="Segoe UI"/>
-                <a:cs typeface="Segoe UI"/>
-              </a:defRPr>
-            </a:pPr>
-            <a:r>
-              <a:rPr sz="1425" b="0">
-                <a:solidFill>
-                  <a:srgbClr val="287D78"/>
-                </a:solidFill>
-                <a:latin typeface="Segoe UI"/>
-                <a:ea typeface="Segoe UI"/>
-                <a:cs typeface="Segoe UI"/>
-              </a:rPr>
-              <a:t>NEXT / DEFINE THE ACCEPTABLE TRADE-OFF</a:t>
-            </a:r>
-          </a:p>
-        </p:txBody>
-      </p:sp>
-      <p:sp>
-        <p:nvSpPr>
-          <p:cNvPr id="2" name="S05-title">
-            <a:extLst>
-              <a:ext uri="{FF2B5EF4-FFF2-40B4-BE49-F238E27FC236}">
-                <a16:creationId xmlns:a16="http://schemas.microsoft.com/office/drawing/2014/main" id="{F2634974-6713-4142-9EA7-CE889EB9FAE3}"/>
+                <a16:creationId xmlns:a16="http://schemas.microsoft.com/office/drawing/2014/main" id="{305BBB2B-B82D-481D-9367-26198045A45B}"/>
               </a:ext>
             </a:extLst>
           </p:cNvPr>
@@ -5634,17 +5753,17 @@
                 <a:ea typeface="Segoe UI"/>
                 <a:cs typeface="Segoe UI"/>
               </a:rPr>
-              <a:t>Decide what the trade-off is worth</a:t>
+              <a:t>Deployment criteria remain open</a:t>
             </a:r>
           </a:p>
         </p:txBody>
       </p:sp>
       <p:sp>
         <p:nvSpPr>
-          <p:cNvPr id="3" name="S05-disclosure">
+          <p:cNvPr id="2" name="S05-disclosure">
             <a:extLst>
               <a:ext uri="{FF2B5EF4-FFF2-40B4-BE49-F238E27FC236}">
-                <a16:creationId xmlns:a16="http://schemas.microsoft.com/office/drawing/2014/main" id="{BFC2A32B-D2F4-4DD0-AD21-BD9C3F67C5DE}"/>
+                <a16:creationId xmlns:a16="http://schemas.microsoft.com/office/drawing/2014/main" id="{B0D8AE88-FFF3-4B76-959C-9EDFD88C5C6F}"/>
               </a:ext>
             </a:extLst>
           </p:cNvPr>
@@ -5698,10 +5817,10 @@
       </p:sp>
       <p:sp>
         <p:nvSpPr>
-          <p:cNvPr id="4" name="S05-number">
+          <p:cNvPr id="3" name="S05-number">
             <a:extLst>
               <a:ext uri="{FF2B5EF4-FFF2-40B4-BE49-F238E27FC236}">
-                <a16:creationId xmlns:a16="http://schemas.microsoft.com/office/drawing/2014/main" id="{E378D239-3D97-45CC-8321-8823A487088C}"/>
+                <a16:creationId xmlns:a16="http://schemas.microsoft.com/office/drawing/2014/main" id="{BEA8FA2B-D07E-4036-8236-7B6B6F8529FF}"/>
               </a:ext>
             </a:extLst>
           </p:cNvPr>
@@ -5755,10 +5874,10 @@
       </p:sp>
       <p:sp>
         <p:nvSpPr>
-          <p:cNvPr id="5" name="S05-main">
+          <p:cNvPr id="4" name="S05-main">
             <a:extLst>
               <a:ext uri="{FF2B5EF4-FFF2-40B4-BE49-F238E27FC236}">
-                <a16:creationId xmlns:a16="http://schemas.microsoft.com/office/drawing/2014/main" id="{27DA5E0A-96B5-4B69-874C-DD0381FCFD63}"/>
+                <a16:creationId xmlns:a16="http://schemas.microsoft.com/office/drawing/2014/main" id="{F3844DB1-120B-449A-990B-47862B560B28}"/>
               </a:ext>
             </a:extLst>
           </p:cNvPr>
@@ -5812,10 +5931,10 @@
       </p:sp>
       <p:sp>
         <p:nvSpPr>
-          <p:cNvPr id="6" name="S05-rule-1">
+          <p:cNvPr id="5" name="S05-rule-1">
             <a:extLst>
               <a:ext uri="{FF2B5EF4-FFF2-40B4-BE49-F238E27FC236}">
-                <a16:creationId xmlns:a16="http://schemas.microsoft.com/office/drawing/2014/main" id="{9CB55CD0-84B1-438B-8667-050BCC257CC1}"/>
+                <a16:creationId xmlns:a16="http://schemas.microsoft.com/office/drawing/2014/main" id="{6A36D0D8-6C39-41CC-87C7-2D53318D70A2}"/>
               </a:ext>
             </a:extLst>
           </p:cNvPr>
@@ -5841,10 +5960,10 @@
       </p:sp>
       <p:sp>
         <p:nvSpPr>
-          <p:cNvPr id="7" name="S05-label1">
+          <p:cNvPr id="6" name="S05-label1">
             <a:extLst>
               <a:ext uri="{FF2B5EF4-FFF2-40B4-BE49-F238E27FC236}">
-                <a16:creationId xmlns:a16="http://schemas.microsoft.com/office/drawing/2014/main" id="{19CB2F7F-7D59-40B3-A705-65074EECCE48}"/>
+                <a16:creationId xmlns:a16="http://schemas.microsoft.com/office/drawing/2014/main" id="{BD92DF92-0C21-42CF-B3D6-616F43AFD118}"/>
               </a:ext>
             </a:extLst>
           </p:cNvPr>
@@ -5898,10 +6017,10 @@
       </p:sp>
       <p:sp>
         <p:nvSpPr>
-          <p:cNvPr id="8" name="S05-body1">
+          <p:cNvPr id="7" name="S05-body1">
             <a:extLst>
               <a:ext uri="{FF2B5EF4-FFF2-40B4-BE49-F238E27FC236}">
-                <a16:creationId xmlns:a16="http://schemas.microsoft.com/office/drawing/2014/main" id="{F8D4A716-829E-445A-8D85-F1F389B2925B}"/>
+                <a16:creationId xmlns:a16="http://schemas.microsoft.com/office/drawing/2014/main" id="{47516BCC-3FD6-4DBC-BE59-3A8CAA7C06B5}"/>
               </a:ext>
             </a:extLst>
           </p:cNvPr>
@@ -5955,10 +6074,10 @@
       </p:sp>
       <p:sp>
         <p:nvSpPr>
-          <p:cNvPr id="9" name="S05-rule-2">
+          <p:cNvPr id="8" name="S05-rule-2">
             <a:extLst>
               <a:ext uri="{FF2B5EF4-FFF2-40B4-BE49-F238E27FC236}">
-                <a16:creationId xmlns:a16="http://schemas.microsoft.com/office/drawing/2014/main" id="{4E24EA9A-26E7-41E2-B062-7FEBDD63D46C}"/>
+                <a16:creationId xmlns:a16="http://schemas.microsoft.com/office/drawing/2014/main" id="{B0CFAE70-80A6-4E01-B636-6E245BCBC22C}"/>
               </a:ext>
             </a:extLst>
           </p:cNvPr>
@@ -5984,10 +6103,10 @@
       </p:sp>
       <p:sp>
         <p:nvSpPr>
-          <p:cNvPr id="10" name="S05-label2">
+          <p:cNvPr id="9" name="S05-label2">
             <a:extLst>
               <a:ext uri="{FF2B5EF4-FFF2-40B4-BE49-F238E27FC236}">
-                <a16:creationId xmlns:a16="http://schemas.microsoft.com/office/drawing/2014/main" id="{BF8C2591-9A1E-4116-AF1A-A960257A7944}"/>
+                <a16:creationId xmlns:a16="http://schemas.microsoft.com/office/drawing/2014/main" id="{89801CBE-3DCE-4518-A0E3-9DECD1C8AB7C}"/>
               </a:ext>
             </a:extLst>
           </p:cNvPr>
@@ -6041,10 +6160,10 @@
       </p:sp>
       <p:sp>
         <p:nvSpPr>
-          <p:cNvPr id="11" name="S05-body2">
+          <p:cNvPr id="10" name="S05-body2">
             <a:extLst>
               <a:ext uri="{FF2B5EF4-FFF2-40B4-BE49-F238E27FC236}">
-                <a16:creationId xmlns:a16="http://schemas.microsoft.com/office/drawing/2014/main" id="{9C0232FA-8F00-40F2-8497-E1B643158554}"/>
+                <a16:creationId xmlns:a16="http://schemas.microsoft.com/office/drawing/2014/main" id="{B0E9ABF8-C5E1-4EEC-B9D8-E5B8825C501B}"/>
               </a:ext>
             </a:extLst>
           </p:cNvPr>
@@ -6098,10 +6217,10 @@
       </p:sp>
       <p:sp>
         <p:nvSpPr>
-          <p:cNvPr id="12" name="S05-rule-3">
+          <p:cNvPr id="11" name="S05-rule-3">
             <a:extLst>
               <a:ext uri="{FF2B5EF4-FFF2-40B4-BE49-F238E27FC236}">
-                <a16:creationId xmlns:a16="http://schemas.microsoft.com/office/drawing/2014/main" id="{13263353-6662-4892-8755-BB00AE96FC9F}"/>
+                <a16:creationId xmlns:a16="http://schemas.microsoft.com/office/drawing/2014/main" id="{EDAA87F0-4471-407F-A632-D41D6CF07E39}"/>
               </a:ext>
             </a:extLst>
           </p:cNvPr>
@@ -6127,10 +6246,10 @@
       </p:sp>
       <p:sp>
         <p:nvSpPr>
-          <p:cNvPr id="13" name="S05-label3">
+          <p:cNvPr id="12" name="S05-label3">
             <a:extLst>
               <a:ext uri="{FF2B5EF4-FFF2-40B4-BE49-F238E27FC236}">
-                <a16:creationId xmlns:a16="http://schemas.microsoft.com/office/drawing/2014/main" id="{48C5EE6A-6070-41C2-A5A8-A34B86D65264}"/>
+                <a16:creationId xmlns:a16="http://schemas.microsoft.com/office/drawing/2014/main" id="{6F62400D-1B37-4AFF-AB13-938352504CBE}"/>
               </a:ext>
             </a:extLst>
           </p:cNvPr>
@@ -6184,10 +6303,10 @@
       </p:sp>
       <p:sp>
         <p:nvSpPr>
-          <p:cNvPr id="14" name="S05-body3">
+          <p:cNvPr id="13" name="S05-body3">
             <a:extLst>
               <a:ext uri="{FF2B5EF4-FFF2-40B4-BE49-F238E27FC236}">
-                <a16:creationId xmlns:a16="http://schemas.microsoft.com/office/drawing/2014/main" id="{CFB01367-3082-43F8-8DD6-04D660FEE560}"/>
+                <a16:creationId xmlns:a16="http://schemas.microsoft.com/office/drawing/2014/main" id="{2853FCD3-4227-4C19-9D60-26170121401D}"/>
               </a:ext>
             </a:extLst>
           </p:cNvPr>
@@ -6242,7 +6361,7 @@
     </p:spTree>
     <p:extLst>
       <p:ext uri="{BB962C8B-B14F-4D97-AF65-F5344CB8AC3E}">
-        <p14:creationId xmlns:p14="http://schemas.microsoft.com/office/powerpoint/2010/main" val="1359324439"/>
+        <p14:creationId xmlns:p14="http://schemas.microsoft.com/office/powerpoint/2010/main" val="156585181"/>
       </p:ext>
     </p:extLst>
   </p:cSld>

--- a/examples/research-seminar/animated.pptx
+++ b/examples/research-seminar/animated.pptx
@@ -184,7 +184,7 @@
                   <c15:showDataLabelsRange val="0"/>
                 </c:ext>
                 <c:ext xmlns:c16="http://schemas.microsoft.com/office/drawing/2014/chart" uri="{C3380CC4-5D6E-409C-BE32-E72D297353CC}">
-                  <c16:uniqueId val="{00000000-3A6B-4776-8658-E4A6E0065C65}"/>
+                  <c16:uniqueId val="{00000000-6F3F-4E20-A3FA-EAFBD7E50878}"/>
                 </c:ext>
               </c:extLst>
             </c:dLbl>
@@ -221,7 +221,7 @@
                   <c15:showDataLabelsRange val="0"/>
                 </c:ext>
                 <c:ext xmlns:c16="http://schemas.microsoft.com/office/drawing/2014/chart" uri="{C3380CC4-5D6E-409C-BE32-E72D297353CC}">
-                  <c16:uniqueId val="{00000001-3A6B-4776-8658-E4A6E0065C65}"/>
+                  <c16:uniqueId val="{00000001-6F3F-4E20-A3FA-EAFBD7E50878}"/>
                 </c:ext>
               </c:extLst>
             </c:dLbl>
@@ -258,7 +258,7 @@
                   <c15:showDataLabelsRange val="0"/>
                 </c:ext>
                 <c:ext xmlns:c16="http://schemas.microsoft.com/office/drawing/2014/chart" uri="{C3380CC4-5D6E-409C-BE32-E72D297353CC}">
-                  <c16:uniqueId val="{00000002-3A6B-4776-8658-E4A6E0065C65}"/>
+                  <c16:uniqueId val="{00000002-6F3F-4E20-A3FA-EAFBD7E50878}"/>
                 </c:ext>
               </c:extLst>
             </c:dLbl>
@@ -321,7 +321,7 @@
           <c:smooth val="1"/>
           <c:extLst>
             <c:ext xmlns:c16="http://schemas.microsoft.com/office/drawing/2014/chart" uri="{C3380CC4-5D6E-409C-BE32-E72D297353CC}">
-              <c16:uniqueId val="{00000003-3A6B-4776-8658-E4A6E0065C65}"/>
+              <c16:uniqueId val="{00000003-6F3F-4E20-A3FA-EAFBD7E50878}"/>
             </c:ext>
           </c:extLst>
         </c:ser>
@@ -666,7 +666,7 @@
           <a:lstStyle/>
           <a:p>
             <a:r>
-              <a:t>30 seconds. This seminar examines model compression for sensor anomaly detection. The overview compares baseline with INT8 using equally prominent latency, F1 and size values. All values are fictional user-supplied examples, not empirical findings. A common device and dataset are assumed but unspecified. No acceptable accuracy-loss threshold is supplied.</a:t>
+              <a:t>We examine model compression for sensor anomaly detection and compare baseline with INT8 latency, F1 and model size. All values are fictional user-supplied examples, not empirical findings. A common device and dataset are assumed but unspecified. No acceptable accuracy-loss threshold is supplied.</a:t>
             </a:r>
           </a:p>
         </p:txBody>
@@ -743,7 +743,7 @@
           <a:lstStyle/>
           <a:p>
             <a:r>
-              <a:t>90 seconds. The teacher provides prediction knowledge for learning a smaller student; INT8 represents student numbers using 8-bit integers. Architecture, loss, quantization scope, and PTQ versus QAT are unspecified. Do not assume preservation of all teacher knowledge or claim a particular implementation. In the animated edition, reveal distillation on click 1 and INT8 on click 2. Concept sources: Hinton et al. (2015), https://arxiv.org/abs/1503.02531 ; Jacob et al. (2017), https://arxiv.org/abs/1712.05877 . No empirical results were taken from those papers.</a:t>
+              <a:t>The teacher provides prediction knowledge for learning a smaller student; INT8 represents student numbers using 8-bit integers. Architecture, loss, quantization scope, and PTQ versus QAT are unspecified. Do not assume preservation of all teacher knowledge or claim a particular implementation. Concept sources: Hinton et al. (2015), https://arxiv.org/abs/1503.02531 ; Jacob et al. (2017), https://arxiv.org/abs/1712.05877 . No empirical results were taken from those papers.</a:t>
             </a:r>
           </a:p>
         </p:txBody>
@@ -820,7 +820,7 @@
           <a:lstStyle/>
           <a:p>
             <a:r>
-              <a:t>60 seconds. Fictional values: baseline 120 ms / F1 0.910 / 48 MB; distilled 72 ms / 0.902 / 18 MB; int8 54 ms / 0.896 / 12 MB. The same device and data are assumed. Sample count, variance, dataset, split, device specifications, latency statistic, and F1 aggregation are unspecified. These are arithmetic comparisons, not evidence of statistical significance or generalization.</a:t>
+              <a:t>Fictional values: baseline 120 ms / F1 0.910 / 48 MB; distilled 72 ms / 0.902 / 18 MB; int8 54 ms / 0.896 / 12 MB. The same device and data are assumed. Sample count, variance, dataset, split, device specifications, latency statistic, and F1 aggregation are unspecified. These are arithmetic comparisons, not evidence of statistical significance or generalization.</a:t>
             </a:r>
           </a:p>
         </p:txBody>
@@ -897,7 +897,7 @@
           <a:lstStyle/>
           <a:p>
             <a:r>
-              <a:t>65 seconds. Overall latency reduction (120−54)/120 = 55%; size reduction (48−12)/48 = 75%; F1 absolute difference 0.896−0.910 = −0.014. Distillation latency reduction (120−72)/120 = 40%, F1 difference −0.008. Additional INT8 latency reduction (72−54)/72 = 25%, F1 difference −0.006. Do not add 40% and 25% because their denominators differ. No statistical inference is possible from the fictional summaries.</a:t>
+              <a:t>Overall latency reduction (120−54)/120 = 55%; size reduction (48−12)/48 = 75%; F1 absolute difference 0.896−0.910 = −0.014. Distillation latency reduction (120−72)/120 = 40%, F1 difference −0.008. Additional INT8 latency reduction (72−54)/72 = 25%, F1 difference −0.006. Do not add 40% and 25% because their denominators differ. No statistical inference is possible from the fictional summaries.</a:t>
             </a:r>
           </a:p>
         </p:txBody>
@@ -974,7 +974,7 @@
           <a:lstStyle/>
           <a:p>
             <a:r>
-              <a:t>55 seconds. These fictional values illustrate an efficiency–F1 trade-off. They do not select a universally best model. Define the acceptable loss in F1 and the latency budget for the intended environment. Repeat measurements on actual data, estimate variation, and inspect failures by anomaly type. No real dataset or sample count was supplied, so no generalization claim is justified. Total presentation time: 300 seconds.</a:t>
+              <a:t>These fictional values illustrate an efficiency–F1 trade-off. They do not select a universally best model. Define the acceptable loss in F1 and the latency budget for the intended environment. Repeat measurements on actual data, estimate variation, and inspect failures by anomaly type. No real dataset or sample count was supplied, so no generalization claim is justified.</a:t>
             </a:r>
           </a:p>
         </p:txBody>
@@ -1366,10 +1366,10 @@
       </p:grpSpPr>
       <p:sp>
         <p:nvSpPr>
-          <p:cNvPr id="13" name="S01-section">
+          <p:cNvPr id="20" name="S01-subject-field">
             <a:extLst>
               <a:ext uri="{FF2B5EF4-FFF2-40B4-BE49-F238E27FC236}">
-                <a16:creationId xmlns:a16="http://schemas.microsoft.com/office/drawing/2014/main" id="{23FDFD73-9A5B-4C0A-B98C-31B94BE5255E}"/>
+                <a16:creationId xmlns:a16="http://schemas.microsoft.com/office/drawing/2014/main" id="{6737AA12-7A0A-4B3F-B56B-AF331F72F84B}"/>
               </a:ext>
             </a:extLst>
           </p:cNvPr>
@@ -1380,8 +1380,38 @@
         </p:nvSpPr>
         <p:spPr>
           <a:xfrm>
-            <a:off x="685800" y="609600"/>
-            <a:ext cx="10820400" cy="333375"/>
+            <a:off x="0" y="0"/>
+            <a:ext cx="5638800" cy="6858000"/>
+          </a:xfrm>
+          <a:prstGeom prst="rect">
+            <a:avLst/>
+          </a:prstGeom>
+          <a:solidFill>
+            <a:srgbClr val="1E302F"/>
+          </a:solidFill>
+          <a:ln w="0">
+            <a:noFill/>
+          </a:ln>
+        </p:spPr>
+      </p:sp>
+      <p:sp>
+        <p:nvSpPr>
+          <p:cNvPr id="2" name="S01-title">
+            <a:extLst>
+              <a:ext uri="{FF2B5EF4-FFF2-40B4-BE49-F238E27FC236}">
+                <a16:creationId xmlns:a16="http://schemas.microsoft.com/office/drawing/2014/main" id="{0C9F25F4-DAAA-4730-875E-904C613FE82F}"/>
+              </a:ext>
+            </a:extLst>
+          </p:cNvPr>
+          <p:cNvSpPr>
+            <a:spLocks noGrp="1"/>
+          </p:cNvSpPr>
+          <p:nvPr/>
+        </p:nvSpPr>
+        <p:spPr>
+          <a:xfrm>
+            <a:off x="609600" y="1266825"/>
+            <a:ext cx="4552950" cy="2209800"/>
           </a:xfrm>
           <a:prstGeom prst="rect">
             <a:avLst/>
@@ -1398,9 +1428,9 @@
           <a:lstStyle/>
           <a:p>
             <a:pPr>
-              <a:defRPr sz="1650" b="0">
-                <a:solidFill>
-                  <a:srgbClr val="586C68"/>
+              <a:defRPr sz="3900" b="0">
+                <a:solidFill>
+                  <a:srgbClr val="FFFFFF"/>
                 </a:solidFill>
                 <a:latin typeface="Segoe UI"/>
                 <a:ea typeface="Segoe UI"/>
@@ -1408,25 +1438,71 @@
               </a:defRPr>
             </a:pPr>
             <a:r>
-              <a:rPr sz="1650" b="0">
-                <a:solidFill>
-                  <a:srgbClr val="586C68"/>
+              <a:rPr sz="3900" b="0">
+                <a:solidFill>
+                  <a:srgbClr val="FFFFFF"/>
                 </a:solidFill>
                 <a:latin typeface="Segoe UI"/>
                 <a:ea typeface="Segoe UI"/>
                 <a:cs typeface="Segoe UI"/>
               </a:rPr>
-              <a:t>Lab seminar · 5 minutes</a:t>
-            </a:r>
-          </a:p>
-        </p:txBody>
-      </p:sp>
-      <p:sp>
-        <p:nvSpPr>
-          <p:cNvPr id="2" name="S01-title">
+              <a:t>Sensor anomaly</a:t>
+            </a:r>
+          </a:p>
+          <a:p>
+            <a:pPr>
+              <a:defRPr sz="3900" b="0">
+                <a:solidFill>
+                  <a:srgbClr val="FFFFFF"/>
+                </a:solidFill>
+                <a:latin typeface="Segoe UI"/>
+                <a:ea typeface="Segoe UI"/>
+                <a:cs typeface="Segoe UI"/>
+              </a:defRPr>
+            </a:pPr>
+            <a:r>
+              <a:rPr sz="3900" b="0">
+                <a:solidFill>
+                  <a:srgbClr val="FFFFFF"/>
+                </a:solidFill>
+                <a:latin typeface="Segoe UI"/>
+                <a:ea typeface="Segoe UI"/>
+                <a:cs typeface="Segoe UI"/>
+              </a:rPr>
+              <a:t>detection with</a:t>
+            </a:r>
+          </a:p>
+          <a:p>
+            <a:pPr>
+              <a:defRPr sz="3900" b="0">
+                <a:solidFill>
+                  <a:srgbClr val="FFFFFF"/>
+                </a:solidFill>
+                <a:latin typeface="Segoe UI"/>
+                <a:ea typeface="Segoe UI"/>
+                <a:cs typeface="Segoe UI"/>
+              </a:defRPr>
+            </a:pPr>
+            <a:r>
+              <a:rPr sz="3900" b="0">
+                <a:solidFill>
+                  <a:srgbClr val="FFFFFF"/>
+                </a:solidFill>
+                <a:latin typeface="Segoe UI"/>
+                <a:ea typeface="Segoe UI"/>
+                <a:cs typeface="Segoe UI"/>
+              </a:rPr>
+              <a:t>smaller models</a:t>
+            </a:r>
+          </a:p>
+        </p:txBody>
+      </p:sp>
+      <p:sp>
+        <p:nvSpPr>
+          <p:cNvPr id="3" name="S01-subtitle">
             <a:extLst>
               <a:ext uri="{FF2B5EF4-FFF2-40B4-BE49-F238E27FC236}">
-                <a16:creationId xmlns:a16="http://schemas.microsoft.com/office/drawing/2014/main" id="{34A5D45D-6C44-4AE8-9AC4-0C1512BB90E8}"/>
+                <a16:creationId xmlns:a16="http://schemas.microsoft.com/office/drawing/2014/main" id="{6103CC81-40F6-43C7-885B-572D7F7578F1}"/>
               </a:ext>
             </a:extLst>
           </p:cNvPr>
@@ -1437,8 +1513,8 @@
         </p:nvSpPr>
         <p:spPr>
           <a:xfrm>
-            <a:off x="685800" y="1438275"/>
-            <a:ext cx="10820400" cy="1476375"/>
+            <a:off x="609600" y="3933825"/>
+            <a:ext cx="4381500" cy="990600"/>
           </a:xfrm>
           <a:prstGeom prst="rect">
             <a:avLst/>
@@ -1455,9 +1531,9 @@
           <a:lstStyle/>
           <a:p>
             <a:pPr>
-              <a:defRPr sz="4275" b="0">
-                <a:solidFill>
-                  <a:srgbClr val="1E302F"/>
+              <a:defRPr sz="2175" b="0">
+                <a:solidFill>
+                  <a:srgbClr val="B9DDD0"/>
                 </a:solidFill>
                 <a:latin typeface="Segoe UI"/>
                 <a:ea typeface="Segoe UI"/>
@@ -1465,22 +1541,22 @@
               </a:defRPr>
             </a:pPr>
             <a:r>
-              <a:rPr sz="4275" b="0">
-                <a:solidFill>
-                  <a:srgbClr val="1E302F"/>
+              <a:rPr sz="2175" b="0">
+                <a:solidFill>
+                  <a:srgbClr val="B9DDD0"/>
                 </a:solidFill>
                 <a:latin typeface="Segoe UI"/>
                 <a:ea typeface="Segoe UI"/>
                 <a:cs typeface="Segoe UI"/>
               </a:rPr>
-              <a:t>Sensor anomaly detection</a:t>
+              <a:t>Knowledge distillation</a:t>
             </a:r>
           </a:p>
           <a:p>
             <a:pPr>
-              <a:defRPr sz="4275" b="0">
-                <a:solidFill>
-                  <a:srgbClr val="1E302F"/>
+              <a:defRPr sz="2175" b="0">
+                <a:solidFill>
+                  <a:srgbClr val="B9DDD0"/>
                 </a:solidFill>
                 <a:latin typeface="Segoe UI"/>
                 <a:ea typeface="Segoe UI"/>
@@ -1488,25 +1564,25 @@
               </a:defRPr>
             </a:pPr>
             <a:r>
-              <a:rPr sz="4275" b="0">
-                <a:solidFill>
-                  <a:srgbClr val="1E302F"/>
+              <a:rPr sz="2175" b="0">
+                <a:solidFill>
+                  <a:srgbClr val="B9DDD0"/>
                 </a:solidFill>
                 <a:latin typeface="Segoe UI"/>
                 <a:ea typeface="Segoe UI"/>
                 <a:cs typeface="Segoe UI"/>
               </a:rPr>
-              <a:t>with smaller models</a:t>
-            </a:r>
-          </a:p>
-        </p:txBody>
-      </p:sp>
-      <p:sp>
-        <p:nvSpPr>
-          <p:cNvPr id="3" name="S01-subtitle">
+              <a:t>and INT8 quantization</a:t>
+            </a:r>
+          </a:p>
+        </p:txBody>
+      </p:sp>
+      <p:sp>
+        <p:nvSpPr>
+          <p:cNvPr id="4" name="S01-comparison">
             <a:extLst>
               <a:ext uri="{FF2B5EF4-FFF2-40B4-BE49-F238E27FC236}">
-                <a16:creationId xmlns:a16="http://schemas.microsoft.com/office/drawing/2014/main" id="{7A4B8756-23EB-40E8-91F0-371575F490E6}"/>
+                <a16:creationId xmlns:a16="http://schemas.microsoft.com/office/drawing/2014/main" id="{D0FD71D8-BFD1-4ACF-A99B-6FD94B12D908}"/>
               </a:ext>
             </a:extLst>
           </p:cNvPr>
@@ -1517,8 +1593,8 @@
         </p:nvSpPr>
         <p:spPr>
           <a:xfrm>
-            <a:off x="685800" y="3133725"/>
-            <a:ext cx="10820400" cy="495300"/>
+            <a:off x="6210300" y="1009650"/>
+            <a:ext cx="5353050" cy="723900"/>
           </a:xfrm>
           <a:prstGeom prst="rect">
             <a:avLst/>
@@ -1535,9 +1611,9 @@
           <a:lstStyle/>
           <a:p>
             <a:pPr>
-              <a:defRPr sz="2175" b="0">
-                <a:solidFill>
-                  <a:srgbClr val="586C68"/>
+              <a:defRPr sz="3000" b="0">
+                <a:solidFill>
+                  <a:srgbClr val="1E302F"/>
                 </a:solidFill>
                 <a:latin typeface="Segoe UI"/>
                 <a:ea typeface="Segoe UI"/>
@@ -1545,25 +1621,25 @@
               </a:defRPr>
             </a:pPr>
             <a:r>
-              <a:rPr sz="2175" b="0">
-                <a:solidFill>
-                  <a:srgbClr val="586C68"/>
+              <a:rPr sz="3000" b="0">
+                <a:solidFill>
+                  <a:srgbClr val="1E302F"/>
                 </a:solidFill>
                 <a:latin typeface="Segoe UI"/>
                 <a:ea typeface="Segoe UI"/>
                 <a:cs typeface="Segoe UI"/>
               </a:rPr>
-              <a:t>Knowledge distillation and INT8 quantization</a:t>
-            </a:r>
-          </a:p>
-        </p:txBody>
-      </p:sp>
-      <p:sp>
-        <p:nvSpPr>
-          <p:cNvPr id="4" name="S01-basis">
+              <a:t>The compression trade-off</a:t>
+            </a:r>
+          </a:p>
+        </p:txBody>
+      </p:sp>
+      <p:sp>
+        <p:nvSpPr>
+          <p:cNvPr id="5" name="S01-baseline">
             <a:extLst>
               <a:ext uri="{FF2B5EF4-FFF2-40B4-BE49-F238E27FC236}">
-                <a16:creationId xmlns:a16="http://schemas.microsoft.com/office/drawing/2014/main" id="{2873CBBE-1F0F-4820-96BC-7E6C00C02996}"/>
+                <a16:creationId xmlns:a16="http://schemas.microsoft.com/office/drawing/2014/main" id="{8B099AB0-BAEF-4D02-9388-32A0C80324A1}"/>
               </a:ext>
             </a:extLst>
           </p:cNvPr>
@@ -1574,8 +1650,8 @@
         </p:nvSpPr>
         <p:spPr>
           <a:xfrm>
-            <a:off x="685800" y="4105275"/>
-            <a:ext cx="10820400" cy="342900"/>
+            <a:off x="8258175" y="2076450"/>
+            <a:ext cx="1428750" cy="304800"/>
           </a:xfrm>
           <a:prstGeom prst="rect">
             <a:avLst/>
@@ -1610,17 +1686,17 @@
                 <a:ea typeface="Segoe UI"/>
                 <a:cs typeface="Segoe UI"/>
               </a:rPr>
-              <a:t>Baseline compared with INT8</a:t>
-            </a:r>
-          </a:p>
-        </p:txBody>
-      </p:sp>
-      <p:sp>
-        <p:nvSpPr>
-          <p:cNvPr id="5" name="S01-value-1">
+              <a:t>baseline</a:t>
+            </a:r>
+          </a:p>
+        </p:txBody>
+      </p:sp>
+      <p:sp>
+        <p:nvSpPr>
+          <p:cNvPr id="6" name="S01-int8">
             <a:extLst>
               <a:ext uri="{FF2B5EF4-FFF2-40B4-BE49-F238E27FC236}">
-                <a16:creationId xmlns:a16="http://schemas.microsoft.com/office/drawing/2014/main" id="{295A3C64-3346-4FA6-A502-45C5C3C59CC8}"/>
+                <a16:creationId xmlns:a16="http://schemas.microsoft.com/office/drawing/2014/main" id="{CFC95C89-72B9-41C9-B83A-5F837747245D}"/>
               </a:ext>
             </a:extLst>
           </p:cNvPr>
@@ -1631,8 +1707,8 @@
         </p:nvSpPr>
         <p:spPr>
           <a:xfrm>
-            <a:off x="685800" y="4619625"/>
-            <a:ext cx="2952750" cy="628650"/>
+            <a:off x="10382250" y="2076450"/>
+            <a:ext cx="1190625" cy="304800"/>
           </a:xfrm>
           <a:prstGeom prst="rect">
             <a:avLst/>
@@ -1649,9 +1725,9 @@
           <a:lstStyle/>
           <a:p>
             <a:pPr>
-              <a:defRPr sz="3225" b="0">
-                <a:solidFill>
-                  <a:srgbClr val="1E302F"/>
+              <a:defRPr sz="1725" b="0">
+                <a:solidFill>
+                  <a:srgbClr val="586C68"/>
                 </a:solidFill>
                 <a:latin typeface="Segoe UI"/>
                 <a:ea typeface="Segoe UI"/>
@@ -1659,25 +1735,25 @@
               </a:defRPr>
             </a:pPr>
             <a:r>
-              <a:rPr sz="3225" b="0">
-                <a:solidFill>
-                  <a:srgbClr val="1E302F"/>
+              <a:rPr sz="1725" b="0">
+                <a:solidFill>
+                  <a:srgbClr val="586C68"/>
                 </a:solidFill>
                 <a:latin typeface="Segoe UI"/>
                 <a:ea typeface="Segoe UI"/>
                 <a:cs typeface="Segoe UI"/>
               </a:rPr>
-              <a:t>120 → 54</a:t>
-            </a:r>
-          </a:p>
-        </p:txBody>
-      </p:sp>
-      <p:sp>
-        <p:nvSpPr>
-          <p:cNvPr id="6" name="S01-label-1">
+              <a:t>int8</a:t>
+            </a:r>
+          </a:p>
+        </p:txBody>
+      </p:sp>
+      <p:sp>
+        <p:nvSpPr>
+          <p:cNvPr id="7" name="S01-rule-0">
             <a:extLst>
               <a:ext uri="{FF2B5EF4-FFF2-40B4-BE49-F238E27FC236}">
-                <a16:creationId xmlns:a16="http://schemas.microsoft.com/office/drawing/2014/main" id="{EBFBEFFB-C1D3-4DEE-B7B8-7EC8A0FC27BD}"/>
+                <a16:creationId xmlns:a16="http://schemas.microsoft.com/office/drawing/2014/main" id="{FBDA2CE0-DCA7-453E-9DDA-C3735D83D305}"/>
               </a:ext>
             </a:extLst>
           </p:cNvPr>
@@ -1688,8 +1764,37 @@
         </p:nvSpPr>
         <p:spPr>
           <a:xfrm>
-            <a:off x="685800" y="5314950"/>
-            <a:ext cx="3143250" cy="361950"/>
+            <a:off x="6210300" y="2581275"/>
+            <a:ext cx="5372100" cy="0"/>
+          </a:xfrm>
+          <a:prstGeom prst="line">
+            <a:avLst/>
+          </a:prstGeom>
+          <a:ln w="9525">
+            <a:solidFill>
+              <a:srgbClr val="CFD8D1"/>
+            </a:solidFill>
+          </a:ln>
+        </p:spPr>
+      </p:sp>
+      <p:sp>
+        <p:nvSpPr>
+          <p:cNvPr id="8" name="S01-label-1">
+            <a:extLst>
+              <a:ext uri="{FF2B5EF4-FFF2-40B4-BE49-F238E27FC236}">
+                <a16:creationId xmlns:a16="http://schemas.microsoft.com/office/drawing/2014/main" id="{F74AA925-F749-4AE2-8037-43C53E85D467}"/>
+              </a:ext>
+            </a:extLst>
+          </p:cNvPr>
+          <p:cNvSpPr>
+            <a:spLocks noGrp="1"/>
+          </p:cNvSpPr>
+          <p:nvPr/>
+        </p:nvSpPr>
+        <p:spPr>
+          <a:xfrm>
+            <a:off x="6210300" y="2762250"/>
+            <a:ext cx="2000250" cy="523875"/>
           </a:xfrm>
           <a:prstGeom prst="rect">
             <a:avLst/>
@@ -1706,7 +1811,7 @@
           <a:lstStyle/>
           <a:p>
             <a:pPr>
-              <a:defRPr sz="1800" b="0">
+              <a:defRPr sz="1725" b="0">
                 <a:solidFill>
                   <a:srgbClr val="586C68"/>
                 </a:solidFill>
@@ -1716,7 +1821,7 @@
               </a:defRPr>
             </a:pPr>
             <a:r>
-              <a:rPr sz="1800" b="0">
+              <a:rPr sz="1725" b="0">
                 <a:solidFill>
                   <a:srgbClr val="586C68"/>
                 </a:solidFill>
@@ -1731,10 +1836,10 @@
       </p:sp>
       <p:sp>
         <p:nvSpPr>
-          <p:cNvPr id="7" name="S01-value-2">
+          <p:cNvPr id="9" name="S01-value-base-1">
             <a:extLst>
               <a:ext uri="{FF2B5EF4-FFF2-40B4-BE49-F238E27FC236}">
-                <a16:creationId xmlns:a16="http://schemas.microsoft.com/office/drawing/2014/main" id="{16A73283-4CC7-4F48-87F3-803DBD5C4C7F}"/>
+                <a16:creationId xmlns:a16="http://schemas.microsoft.com/office/drawing/2014/main" id="{71BE3480-8830-40B7-9EC6-707068393FFE}"/>
               </a:ext>
             </a:extLst>
           </p:cNvPr>
@@ -1745,8 +1850,8 @@
         </p:nvSpPr>
         <p:spPr>
           <a:xfrm>
-            <a:off x="4419600" y="4619625"/>
-            <a:ext cx="3810000" cy="628650"/>
+            <a:off x="8258175" y="2762250"/>
+            <a:ext cx="1524000" cy="523875"/>
           </a:xfrm>
           <a:prstGeom prst="rect">
             <a:avLst/>
@@ -1763,7 +1868,7 @@
           <a:lstStyle/>
           <a:p>
             <a:pPr>
-              <a:defRPr sz="3225" b="0">
+              <a:defRPr sz="2850" b="0">
                 <a:solidFill>
                   <a:srgbClr val="1E302F"/>
                 </a:solidFill>
@@ -1773,7 +1878,7 @@
               </a:defRPr>
             </a:pPr>
             <a:r>
-              <a:rPr sz="3225" b="0">
+              <a:rPr sz="2850" b="0">
                 <a:solidFill>
                   <a:srgbClr val="1E302F"/>
                 </a:solidFill>
@@ -1781,17 +1886,17 @@
                 <a:ea typeface="Segoe UI"/>
                 <a:cs typeface="Segoe UI"/>
               </a:rPr>
-              <a:t>0.910 → 0.896</a:t>
-            </a:r>
-          </a:p>
-        </p:txBody>
-      </p:sp>
-      <p:sp>
-        <p:nvSpPr>
-          <p:cNvPr id="8" name="S01-label-2">
+              <a:t>120</a:t>
+            </a:r>
+          </a:p>
+        </p:txBody>
+      </p:sp>
+      <p:sp>
+        <p:nvSpPr>
+          <p:cNvPr id="10" name="S01-value-int8-1">
             <a:extLst>
               <a:ext uri="{FF2B5EF4-FFF2-40B4-BE49-F238E27FC236}">
-                <a16:creationId xmlns:a16="http://schemas.microsoft.com/office/drawing/2014/main" id="{729CC653-091B-44A5-A028-48A585C0C178}"/>
+                <a16:creationId xmlns:a16="http://schemas.microsoft.com/office/drawing/2014/main" id="{C8258488-1E02-4433-BEE3-01F2976A324B}"/>
               </a:ext>
             </a:extLst>
           </p:cNvPr>
@@ -1802,8 +1907,8 @@
         </p:nvSpPr>
         <p:spPr>
           <a:xfrm>
-            <a:off x="4419600" y="5314950"/>
-            <a:ext cx="3143250" cy="361950"/>
+            <a:off x="10382250" y="2762250"/>
+            <a:ext cx="1428750" cy="523875"/>
           </a:xfrm>
           <a:prstGeom prst="rect">
             <a:avLst/>
@@ -1820,9 +1925,9 @@
           <a:lstStyle/>
           <a:p>
             <a:pPr>
-              <a:defRPr sz="1800" b="0">
-                <a:solidFill>
-                  <a:srgbClr val="586C68"/>
+              <a:defRPr sz="2850" b="0">
+                <a:solidFill>
+                  <a:srgbClr val="1E302F"/>
                 </a:solidFill>
                 <a:latin typeface="Segoe UI"/>
                 <a:ea typeface="Segoe UI"/>
@@ -1830,25 +1935,25 @@
               </a:defRPr>
             </a:pPr>
             <a:r>
-              <a:rPr sz="1800" b="0">
-                <a:solidFill>
-                  <a:srgbClr val="586C68"/>
+              <a:rPr sz="2850" b="0">
+                <a:solidFill>
+                  <a:srgbClr val="1E302F"/>
                 </a:solidFill>
                 <a:latin typeface="Segoe UI"/>
                 <a:ea typeface="Segoe UI"/>
                 <a:cs typeface="Segoe UI"/>
               </a:rPr>
-              <a:t>F1</a:t>
-            </a:r>
-          </a:p>
-        </p:txBody>
-      </p:sp>
-      <p:sp>
-        <p:nvSpPr>
-          <p:cNvPr id="9" name="S01-value-3">
+              <a:t>54</a:t>
+            </a:r>
+          </a:p>
+        </p:txBody>
+      </p:sp>
+      <p:sp>
+        <p:nvSpPr>
+          <p:cNvPr id="11" name="S01-rule-1">
             <a:extLst>
               <a:ext uri="{FF2B5EF4-FFF2-40B4-BE49-F238E27FC236}">
-                <a16:creationId xmlns:a16="http://schemas.microsoft.com/office/drawing/2014/main" id="{F592BA26-D889-4153-99C9-91B55DF1C412}"/>
+                <a16:creationId xmlns:a16="http://schemas.microsoft.com/office/drawing/2014/main" id="{D4719AA7-D28B-4245-9FCE-1B4B8ECC3357}"/>
               </a:ext>
             </a:extLst>
           </p:cNvPr>
@@ -1859,8 +1964,37 @@
         </p:nvSpPr>
         <p:spPr>
           <a:xfrm>
-            <a:off x="8572500" y="4619625"/>
-            <a:ext cx="2952750" cy="628650"/>
+            <a:off x="6210300" y="3648075"/>
+            <a:ext cx="5372100" cy="0"/>
+          </a:xfrm>
+          <a:prstGeom prst="line">
+            <a:avLst/>
+          </a:prstGeom>
+          <a:ln w="9525">
+            <a:solidFill>
+              <a:srgbClr val="CFD8D1"/>
+            </a:solidFill>
+          </a:ln>
+        </p:spPr>
+      </p:sp>
+      <p:sp>
+        <p:nvSpPr>
+          <p:cNvPr id="12" name="S01-label-2">
+            <a:extLst>
+              <a:ext uri="{FF2B5EF4-FFF2-40B4-BE49-F238E27FC236}">
+                <a16:creationId xmlns:a16="http://schemas.microsoft.com/office/drawing/2014/main" id="{698A14C0-4335-41D7-9A72-396DB57F4DDA}"/>
+              </a:ext>
+            </a:extLst>
+          </p:cNvPr>
+          <p:cNvSpPr>
+            <a:spLocks noGrp="1"/>
+          </p:cNvSpPr>
+          <p:nvPr/>
+        </p:nvSpPr>
+        <p:spPr>
+          <a:xfrm>
+            <a:off x="6210300" y="3829050"/>
+            <a:ext cx="2000250" cy="523875"/>
           </a:xfrm>
           <a:prstGeom prst="rect">
             <a:avLst/>
@@ -1877,9 +2011,9 @@
           <a:lstStyle/>
           <a:p>
             <a:pPr>
-              <a:defRPr sz="3225" b="0">
-                <a:solidFill>
-                  <a:srgbClr val="1E302F"/>
+              <a:defRPr sz="1725" b="0">
+                <a:solidFill>
+                  <a:srgbClr val="586C68"/>
                 </a:solidFill>
                 <a:latin typeface="Segoe UI"/>
                 <a:ea typeface="Segoe UI"/>
@@ -1887,25 +2021,25 @@
               </a:defRPr>
             </a:pPr>
             <a:r>
-              <a:rPr sz="3225" b="0">
-                <a:solidFill>
-                  <a:srgbClr val="1E302F"/>
+              <a:rPr sz="1725" b="0">
+                <a:solidFill>
+                  <a:srgbClr val="586C68"/>
                 </a:solidFill>
                 <a:latin typeface="Segoe UI"/>
                 <a:ea typeface="Segoe UI"/>
                 <a:cs typeface="Segoe UI"/>
               </a:rPr>
-              <a:t>48 → 12</a:t>
-            </a:r>
-          </a:p>
-        </p:txBody>
-      </p:sp>
-      <p:sp>
-        <p:nvSpPr>
-          <p:cNvPr id="10" name="S01-label-3">
+              <a:t>F1</a:t>
+            </a:r>
+          </a:p>
+        </p:txBody>
+      </p:sp>
+      <p:sp>
+        <p:nvSpPr>
+          <p:cNvPr id="13" name="S01-value-base-2">
             <a:extLst>
               <a:ext uri="{FF2B5EF4-FFF2-40B4-BE49-F238E27FC236}">
-                <a16:creationId xmlns:a16="http://schemas.microsoft.com/office/drawing/2014/main" id="{95A599DF-353D-42E0-9D56-5245DC7B8391}"/>
+                <a16:creationId xmlns:a16="http://schemas.microsoft.com/office/drawing/2014/main" id="{871DF7F4-C161-4301-ADFC-F2BE27DA6535}"/>
               </a:ext>
             </a:extLst>
           </p:cNvPr>
@@ -1916,8 +2050,8 @@
         </p:nvSpPr>
         <p:spPr>
           <a:xfrm>
-            <a:off x="8572500" y="5314950"/>
-            <a:ext cx="3143250" cy="361950"/>
+            <a:off x="8258175" y="3829050"/>
+            <a:ext cx="1524000" cy="523875"/>
           </a:xfrm>
           <a:prstGeom prst="rect">
             <a:avLst/>
@@ -1934,9 +2068,9 @@
           <a:lstStyle/>
           <a:p>
             <a:pPr>
-              <a:defRPr sz="1800" b="0">
-                <a:solidFill>
-                  <a:srgbClr val="586C68"/>
+              <a:defRPr sz="2850" b="0">
+                <a:solidFill>
+                  <a:srgbClr val="1E302F"/>
                 </a:solidFill>
                 <a:latin typeface="Segoe UI"/>
                 <a:ea typeface="Segoe UI"/>
@@ -1944,25 +2078,25 @@
               </a:defRPr>
             </a:pPr>
             <a:r>
-              <a:rPr sz="1800" b="0">
-                <a:solidFill>
-                  <a:srgbClr val="586C68"/>
+              <a:rPr sz="2850" b="0">
+                <a:solidFill>
+                  <a:srgbClr val="1E302F"/>
                 </a:solidFill>
                 <a:latin typeface="Segoe UI"/>
                 <a:ea typeface="Segoe UI"/>
                 <a:cs typeface="Segoe UI"/>
               </a:rPr>
-              <a:t>Model size (MB)</a:t>
-            </a:r>
-          </a:p>
-        </p:txBody>
-      </p:sp>
-      <p:sp>
-        <p:nvSpPr>
-          <p:cNvPr id="11" name="S01-disclosure">
+              <a:t>0.910</a:t>
+            </a:r>
+          </a:p>
+        </p:txBody>
+      </p:sp>
+      <p:sp>
+        <p:nvSpPr>
+          <p:cNvPr id="14" name="S01-value-int8-2">
             <a:extLst>
               <a:ext uri="{FF2B5EF4-FFF2-40B4-BE49-F238E27FC236}">
-                <a16:creationId xmlns:a16="http://schemas.microsoft.com/office/drawing/2014/main" id="{DFF9007E-EFA7-42DB-BE04-E78D98B57CC9}"/>
+                <a16:creationId xmlns:a16="http://schemas.microsoft.com/office/drawing/2014/main" id="{1AF6085E-9466-4602-A8DE-DA0E1AD6E712}"/>
               </a:ext>
             </a:extLst>
           </p:cNvPr>
@@ -1973,8 +2107,8 @@
         </p:nvSpPr>
         <p:spPr>
           <a:xfrm>
-            <a:off x="685800" y="6372225"/>
-            <a:ext cx="9525000" cy="219075"/>
+            <a:off x="10382250" y="3829050"/>
+            <a:ext cx="1428750" cy="523875"/>
           </a:xfrm>
           <a:prstGeom prst="rect">
             <a:avLst/>
@@ -1991,9 +2125,9 @@
           <a:lstStyle/>
           <a:p>
             <a:pPr>
-              <a:defRPr sz="1275" b="0">
-                <a:solidFill>
-                  <a:srgbClr val="586C68"/>
+              <a:defRPr sz="2850" b="0">
+                <a:solidFill>
+                  <a:srgbClr val="1E302F"/>
                 </a:solidFill>
                 <a:latin typeface="Segoe UI"/>
                 <a:ea typeface="Segoe UI"/>
@@ -2001,25 +2135,25 @@
               </a:defRPr>
             </a:pPr>
             <a:r>
-              <a:rPr sz="1275" b="0">
-                <a:solidFill>
-                  <a:srgbClr val="586C68"/>
+              <a:rPr sz="2850" b="0">
+                <a:solidFill>
+                  <a:srgbClr val="1E302F"/>
                 </a:solidFill>
                 <a:latin typeface="Segoe UI"/>
                 <a:ea typeface="Segoe UI"/>
                 <a:cs typeface="Segoe UI"/>
               </a:rPr>
-              <a:t>Illustrative data · not experimental results</a:t>
-            </a:r>
-          </a:p>
-        </p:txBody>
-      </p:sp>
-      <p:sp>
-        <p:nvSpPr>
-          <p:cNvPr id="12" name="S01-number">
+              <a:t>0.896</a:t>
+            </a:r>
+          </a:p>
+        </p:txBody>
+      </p:sp>
+      <p:sp>
+        <p:nvSpPr>
+          <p:cNvPr id="15" name="S01-rule-2">
             <a:extLst>
               <a:ext uri="{FF2B5EF4-FFF2-40B4-BE49-F238E27FC236}">
-                <a16:creationId xmlns:a16="http://schemas.microsoft.com/office/drawing/2014/main" id="{EEC9B55A-5E3F-4C8F-BEF1-115C002FB54B}"/>
+                <a16:creationId xmlns:a16="http://schemas.microsoft.com/office/drawing/2014/main" id="{923FF4B1-8A7F-4A93-8097-6056F0F34B86}"/>
               </a:ext>
             </a:extLst>
           </p:cNvPr>
@@ -2030,8 +2164,37 @@
         </p:nvSpPr>
         <p:spPr>
           <a:xfrm>
-            <a:off x="11144250" y="6372225"/>
-            <a:ext cx="361950" cy="219075"/>
+            <a:off x="6210300" y="4714875"/>
+            <a:ext cx="5372100" cy="0"/>
+          </a:xfrm>
+          <a:prstGeom prst="line">
+            <a:avLst/>
+          </a:prstGeom>
+          <a:ln w="9525">
+            <a:solidFill>
+              <a:srgbClr val="CFD8D1"/>
+            </a:solidFill>
+          </a:ln>
+        </p:spPr>
+      </p:sp>
+      <p:sp>
+        <p:nvSpPr>
+          <p:cNvPr id="16" name="S01-label-3">
+            <a:extLst>
+              <a:ext uri="{FF2B5EF4-FFF2-40B4-BE49-F238E27FC236}">
+                <a16:creationId xmlns:a16="http://schemas.microsoft.com/office/drawing/2014/main" id="{216EFDEA-BA8F-4716-8C62-E90476D666C2}"/>
+              </a:ext>
+            </a:extLst>
+          </p:cNvPr>
+          <p:cNvSpPr>
+            <a:spLocks noGrp="1"/>
+          </p:cNvSpPr>
+          <p:nvPr/>
+        </p:nvSpPr>
+        <p:spPr>
+          <a:xfrm>
+            <a:off x="6210300" y="4895850"/>
+            <a:ext cx="2000250" cy="523875"/>
           </a:xfrm>
           <a:prstGeom prst="rect">
             <a:avLst/>
@@ -2048,7 +2211,7 @@
           <a:lstStyle/>
           <a:p>
             <a:pPr>
-              <a:defRPr sz="1275" b="0">
+              <a:defRPr sz="1725" b="0">
                 <a:solidFill>
                   <a:srgbClr val="586C68"/>
                 </a:solidFill>
@@ -2058,15 +2221,186 @@
               </a:defRPr>
             </a:pPr>
             <a:r>
+              <a:rPr sz="1725" b="0">
+                <a:solidFill>
+                  <a:srgbClr val="586C68"/>
+                </a:solidFill>
+                <a:latin typeface="Segoe UI"/>
+                <a:ea typeface="Segoe UI"/>
+                <a:cs typeface="Segoe UI"/>
+              </a:rPr>
+              <a:t>Model size (MB)</a:t>
+            </a:r>
+          </a:p>
+        </p:txBody>
+      </p:sp>
+      <p:sp>
+        <p:nvSpPr>
+          <p:cNvPr id="17" name="S01-value-base-3">
+            <a:extLst>
+              <a:ext uri="{FF2B5EF4-FFF2-40B4-BE49-F238E27FC236}">
+                <a16:creationId xmlns:a16="http://schemas.microsoft.com/office/drawing/2014/main" id="{E2B01AB0-E115-4415-A0F1-D3D567D267BF}"/>
+              </a:ext>
+            </a:extLst>
+          </p:cNvPr>
+          <p:cNvSpPr>
+            <a:spLocks noGrp="1"/>
+          </p:cNvSpPr>
+          <p:nvPr/>
+        </p:nvSpPr>
+        <p:spPr>
+          <a:xfrm>
+            <a:off x="8258175" y="4895850"/>
+            <a:ext cx="1524000" cy="523875"/>
+          </a:xfrm>
+          <a:prstGeom prst="rect">
+            <a:avLst/>
+          </a:prstGeom>
+          <a:noFill/>
+          <a:ln w="0">
+            <a:noFill/>
+          </a:ln>
+        </p:spPr>
+        <p:txBody>
+          <a:bodyPr wrap="none" lIns="0" tIns="0" rIns="0" bIns="0" anchor="ctr">
+            <a:noAutofit/>
+          </a:bodyPr>
+          <a:lstStyle/>
+          <a:p>
+            <a:pPr>
+              <a:defRPr sz="2850" b="0">
+                <a:solidFill>
+                  <a:srgbClr val="1E302F"/>
+                </a:solidFill>
+                <a:latin typeface="Segoe UI"/>
+                <a:ea typeface="Segoe UI"/>
+                <a:cs typeface="Segoe UI"/>
+              </a:defRPr>
+            </a:pPr>
+            <a:r>
+              <a:rPr sz="2850" b="0">
+                <a:solidFill>
+                  <a:srgbClr val="1E302F"/>
+                </a:solidFill>
+                <a:latin typeface="Segoe UI"/>
+                <a:ea typeface="Segoe UI"/>
+                <a:cs typeface="Segoe UI"/>
+              </a:rPr>
+              <a:t>48</a:t>
+            </a:r>
+          </a:p>
+        </p:txBody>
+      </p:sp>
+      <p:sp>
+        <p:nvSpPr>
+          <p:cNvPr id="18" name="S01-value-int8-3">
+            <a:extLst>
+              <a:ext uri="{FF2B5EF4-FFF2-40B4-BE49-F238E27FC236}">
+                <a16:creationId xmlns:a16="http://schemas.microsoft.com/office/drawing/2014/main" id="{DABC8681-4239-4D44-819C-41121B9AFB20}"/>
+              </a:ext>
+            </a:extLst>
+          </p:cNvPr>
+          <p:cNvSpPr>
+            <a:spLocks noGrp="1"/>
+          </p:cNvSpPr>
+          <p:nvPr/>
+        </p:nvSpPr>
+        <p:spPr>
+          <a:xfrm>
+            <a:off x="10382250" y="4895850"/>
+            <a:ext cx="1428750" cy="523875"/>
+          </a:xfrm>
+          <a:prstGeom prst="rect">
+            <a:avLst/>
+          </a:prstGeom>
+          <a:noFill/>
+          <a:ln w="0">
+            <a:noFill/>
+          </a:ln>
+        </p:spPr>
+        <p:txBody>
+          <a:bodyPr wrap="none" lIns="0" tIns="0" rIns="0" bIns="0" anchor="ctr">
+            <a:noAutofit/>
+          </a:bodyPr>
+          <a:lstStyle/>
+          <a:p>
+            <a:pPr>
+              <a:defRPr sz="2850" b="0">
+                <a:solidFill>
+                  <a:srgbClr val="1E302F"/>
+                </a:solidFill>
+                <a:latin typeface="Segoe UI"/>
+                <a:ea typeface="Segoe UI"/>
+                <a:cs typeface="Segoe UI"/>
+              </a:defRPr>
+            </a:pPr>
+            <a:r>
+              <a:rPr sz="2850" b="0">
+                <a:solidFill>
+                  <a:srgbClr val="1E302F"/>
+                </a:solidFill>
+                <a:latin typeface="Segoe UI"/>
+                <a:ea typeface="Segoe UI"/>
+                <a:cs typeface="Segoe UI"/>
+              </a:rPr>
+              <a:t>12</a:t>
+            </a:r>
+          </a:p>
+        </p:txBody>
+      </p:sp>
+      <p:sp>
+        <p:nvSpPr>
+          <p:cNvPr id="19" name="S01-disclosure">
+            <a:extLst>
+              <a:ext uri="{FF2B5EF4-FFF2-40B4-BE49-F238E27FC236}">
+                <a16:creationId xmlns:a16="http://schemas.microsoft.com/office/drawing/2014/main" id="{61E693DC-5581-48FC-9C6A-2ADE68F47411}"/>
+              </a:ext>
+            </a:extLst>
+          </p:cNvPr>
+          <p:cNvSpPr>
+            <a:spLocks noGrp="1"/>
+          </p:cNvSpPr>
+          <p:nvPr/>
+        </p:nvSpPr>
+        <p:spPr>
+          <a:xfrm>
+            <a:off x="609600" y="6372225"/>
+            <a:ext cx="4572000" cy="219075"/>
+          </a:xfrm>
+          <a:prstGeom prst="rect">
+            <a:avLst/>
+          </a:prstGeom>
+          <a:noFill/>
+          <a:ln w="0">
+            <a:noFill/>
+          </a:ln>
+        </p:spPr>
+        <p:txBody>
+          <a:bodyPr wrap="none" lIns="0" tIns="0" rIns="0" bIns="0" anchor="ctr">
+            <a:noAutofit/>
+          </a:bodyPr>
+          <a:lstStyle/>
+          <a:p>
+            <a:pPr>
+              <a:defRPr sz="1275" b="0">
+                <a:solidFill>
+                  <a:srgbClr val="B9DDD0"/>
+                </a:solidFill>
+                <a:latin typeface="Segoe UI"/>
+                <a:ea typeface="Segoe UI"/>
+                <a:cs typeface="Segoe UI"/>
+              </a:defRPr>
+            </a:pPr>
+            <a:r>
               <a:rPr sz="1275" b="0">
                 <a:solidFill>
-                  <a:srgbClr val="586C68"/>
+                  <a:srgbClr val="B9DDD0"/>
                 </a:solidFill>
                 <a:latin typeface="Segoe UI"/>
                 <a:ea typeface="Segoe UI"/>
                 <a:cs typeface="Segoe UI"/>
               </a:rPr>
-              <a:t>01</a:t>
+              <a:t>Illustrative data</a:t>
             </a:r>
           </a:p>
         </p:txBody>
@@ -2074,7 +2408,7 @@
     </p:spTree>
     <p:extLst>
       <p:ext uri="{BB962C8B-B14F-4D97-AF65-F5344CB8AC3E}">
-        <p14:creationId xmlns:p14="http://schemas.microsoft.com/office/powerpoint/2010/main" val="612005508"/>
+        <p14:creationId xmlns:p14="http://schemas.microsoft.com/office/powerpoint/2010/main" val="313146245"/>
       </p:ext>
     </p:extLst>
   </p:cSld>
@@ -2111,10 +2445,10 @@
       </p:grpSpPr>
       <p:sp>
         <p:nvSpPr>
-          <p:cNvPr id="21" name="S02-title">
+          <p:cNvPr id="22" name="S02-title">
             <a:extLst>
               <a:ext uri="{FF2B5EF4-FFF2-40B4-BE49-F238E27FC236}">
-                <a16:creationId xmlns:a16="http://schemas.microsoft.com/office/drawing/2014/main" id="{CF9B9C6A-E02D-4CA3-AEF1-A426334290F4}"/>
+                <a16:creationId xmlns:a16="http://schemas.microsoft.com/office/drawing/2014/main" id="{3DD8C10D-6A5B-4ACA-964E-876524F06AEA}"/>
               </a:ext>
             </a:extLst>
           </p:cNvPr>
@@ -2171,7 +2505,7 @@
           <p:cNvPr id="2" name="S02-disclosure">
             <a:extLst>
               <a:ext uri="{FF2B5EF4-FFF2-40B4-BE49-F238E27FC236}">
-                <a16:creationId xmlns:a16="http://schemas.microsoft.com/office/drawing/2014/main" id="{8044D044-51B9-422C-ADC4-E290AFFF6F6B}"/>
+                <a16:creationId xmlns:a16="http://schemas.microsoft.com/office/drawing/2014/main" id="{4BE03733-CA5E-4306-8FFB-2AE6DE88CBBC}"/>
               </a:ext>
             </a:extLst>
           </p:cNvPr>
@@ -2218,7 +2552,7 @@
                 <a:ea typeface="Segoe UI"/>
                 <a:cs typeface="Segoe UI"/>
               </a:rPr>
-              <a:t>Illustrative data · not experimental results</a:t>
+              <a:t>Illustrative data</a:t>
             </a:r>
           </a:p>
         </p:txBody>
@@ -2228,7 +2562,7 @@
           <p:cNvPr id="3" name="S02-number">
             <a:extLst>
               <a:ext uri="{FF2B5EF4-FFF2-40B4-BE49-F238E27FC236}">
-                <a16:creationId xmlns:a16="http://schemas.microsoft.com/office/drawing/2014/main" id="{A928C312-CE69-49D3-9B5A-B53A5B76A4E4}"/>
+                <a16:creationId xmlns:a16="http://schemas.microsoft.com/office/drawing/2014/main" id="{98DE5F46-113A-4A6A-B73E-766BB4007C4D}"/>
               </a:ext>
             </a:extLst>
           </p:cNvPr>
@@ -2282,10 +2616,10 @@
       </p:sp>
       <p:sp>
         <p:nvSpPr>
-          <p:cNvPr id="4" name="S02-marker-1">
+          <p:cNvPr id="4" name="S02-method-field">
             <a:extLst>
               <a:ext uri="{FF2B5EF4-FFF2-40B4-BE49-F238E27FC236}">
-                <a16:creationId xmlns:a16="http://schemas.microsoft.com/office/drawing/2014/main" id="{10E9B863-F42B-43DC-84F3-52620772A672}"/>
+                <a16:creationId xmlns:a16="http://schemas.microsoft.com/office/drawing/2014/main" id="{C598A134-0903-497E-BE81-94253078B982}"/>
               </a:ext>
             </a:extLst>
           </p:cNvPr>
@@ -2296,10 +2630,10 @@
         </p:nvSpPr>
         <p:spPr>
           <a:xfrm>
-            <a:off x="685800" y="2333625"/>
-            <a:ext cx="533400" cy="533400"/>
+            <a:off x="457200" y="1866900"/>
+            <a:ext cx="11277600" cy="3467100"/>
           </a:xfrm>
-          <a:prstGeom prst="ellipse">
+          <a:prstGeom prst="rect">
             <a:avLst/>
           </a:prstGeom>
           <a:solidFill>
@@ -2309,40 +2643,13 @@
             <a:noFill/>
           </a:ln>
         </p:spPr>
-        <p:txBody>
-          <a:bodyPr lIns="0" tIns="0" rIns="0" bIns="0" anchor="ctr"/>
-          <a:lstStyle/>
-          <a:p>
-            <a:pPr algn="ctr">
-              <a:defRPr sz="1650">
-                <a:solidFill>
-                  <a:srgbClr val="287D78"/>
-                </a:solidFill>
-                <a:latin typeface="Segoe UI"/>
-                <a:ea typeface="Segoe UI"/>
-                <a:cs typeface="Segoe UI"/>
-              </a:defRPr>
-            </a:pPr>
-            <a:r>
-              <a:rPr sz="1650">
-                <a:solidFill>
-                  <a:srgbClr val="287D78"/>
-                </a:solidFill>
-                <a:latin typeface="Segoe UI"/>
-                <a:ea typeface="Segoe UI"/>
-                <a:cs typeface="Segoe UI"/>
-              </a:rPr>
-              <a:t>01</a:t>
-            </a:r>
-          </a:p>
-        </p:txBody>
-      </p:sp>
-      <p:sp>
-        <p:nvSpPr>
-          <p:cNvPr id="5" name="S02-marker-2">
+      </p:sp>
+      <p:sp>
+        <p:nvSpPr>
+          <p:cNvPr id="5" name="S02-marker-1">
             <a:extLst>
               <a:ext uri="{FF2B5EF4-FFF2-40B4-BE49-F238E27FC236}">
-                <a16:creationId xmlns:a16="http://schemas.microsoft.com/office/drawing/2014/main" id="{8AD87FB6-4FB9-439B-9564-F455B4A48EAB}"/>
+                <a16:creationId xmlns:a16="http://schemas.microsoft.com/office/drawing/2014/main" id="{F492FFEC-A673-4448-A76C-1A7BC4CA4ECF}"/>
               </a:ext>
             </a:extLst>
           </p:cNvPr>
@@ -2353,65 +2660,8 @@
         </p:nvSpPr>
         <p:spPr>
           <a:xfrm>
-            <a:off x="4648200" y="2333625"/>
-            <a:ext cx="533400" cy="533400"/>
-          </a:xfrm>
-          <a:prstGeom prst="ellipse">
-            <a:avLst/>
-          </a:prstGeom>
-          <a:solidFill>
-            <a:srgbClr val="E8EDE5"/>
-          </a:solidFill>
-          <a:ln w="0">
-            <a:noFill/>
-          </a:ln>
-        </p:spPr>
-        <p:txBody>
-          <a:bodyPr lIns="0" tIns="0" rIns="0" bIns="0" anchor="ctr"/>
-          <a:lstStyle/>
-          <a:p>
-            <a:pPr algn="ctr">
-              <a:defRPr sz="1650">
-                <a:solidFill>
-                  <a:srgbClr val="287D78"/>
-                </a:solidFill>
-                <a:latin typeface="Segoe UI"/>
-                <a:ea typeface="Segoe UI"/>
-                <a:cs typeface="Segoe UI"/>
-              </a:defRPr>
-            </a:pPr>
-            <a:r>
-              <a:rPr sz="1650">
-                <a:solidFill>
-                  <a:srgbClr val="287D78"/>
-                </a:solidFill>
-                <a:latin typeface="Segoe UI"/>
-                <a:ea typeface="Segoe UI"/>
-                <a:cs typeface="Segoe UI"/>
-              </a:rPr>
-              <a:t>02</a:t>
-            </a:r>
-          </a:p>
-        </p:txBody>
-      </p:sp>
-      <p:sp>
-        <p:nvSpPr>
-          <p:cNvPr id="6" name="S02-marker-3">
-            <a:extLst>
-              <a:ext uri="{FF2B5EF4-FFF2-40B4-BE49-F238E27FC236}">
-                <a16:creationId xmlns:a16="http://schemas.microsoft.com/office/drawing/2014/main" id="{C001C507-8BD2-49F8-8146-F4911000A5A0}"/>
-              </a:ext>
-            </a:extLst>
-          </p:cNvPr>
-          <p:cNvSpPr>
-            <a:spLocks noGrp="1"/>
-          </p:cNvSpPr>
-          <p:nvPr/>
-        </p:nvSpPr>
-        <p:spPr>
-          <a:xfrm>
-            <a:off x="8610600" y="2333625"/>
-            <a:ext cx="533400" cy="533400"/>
+            <a:off x="685800" y="2524125"/>
+            <a:ext cx="609600" cy="609600"/>
           </a:xfrm>
           <a:prstGeom prst="ellipse">
             <a:avLst/>
@@ -2446,6 +2696,120 @@
                 <a:ea typeface="Segoe UI"/>
                 <a:cs typeface="Segoe UI"/>
               </a:rPr>
+              <a:t>01</a:t>
+            </a:r>
+          </a:p>
+        </p:txBody>
+      </p:sp>
+      <p:sp>
+        <p:nvSpPr>
+          <p:cNvPr id="6" name="S02-marker-2">
+            <a:extLst>
+              <a:ext uri="{FF2B5EF4-FFF2-40B4-BE49-F238E27FC236}">
+                <a16:creationId xmlns:a16="http://schemas.microsoft.com/office/drawing/2014/main" id="{B94A5622-9213-4617-B319-0ECA3689005B}"/>
+              </a:ext>
+            </a:extLst>
+          </p:cNvPr>
+          <p:cNvSpPr>
+            <a:spLocks noGrp="1"/>
+          </p:cNvSpPr>
+          <p:nvPr/>
+        </p:nvSpPr>
+        <p:spPr>
+          <a:xfrm>
+            <a:off x="4648200" y="2524125"/>
+            <a:ext cx="609600" cy="609600"/>
+          </a:xfrm>
+          <a:prstGeom prst="ellipse">
+            <a:avLst/>
+          </a:prstGeom>
+          <a:solidFill>
+            <a:srgbClr val="287D78"/>
+          </a:solidFill>
+          <a:ln w="0">
+            <a:noFill/>
+          </a:ln>
+        </p:spPr>
+        <p:txBody>
+          <a:bodyPr lIns="0" tIns="0" rIns="0" bIns="0" anchor="ctr"/>
+          <a:lstStyle/>
+          <a:p>
+            <a:pPr algn="ctr">
+              <a:defRPr sz="1650">
+                <a:solidFill>
+                  <a:srgbClr val="FFFFFF"/>
+                </a:solidFill>
+                <a:latin typeface="Segoe UI"/>
+                <a:ea typeface="Segoe UI"/>
+                <a:cs typeface="Segoe UI"/>
+              </a:defRPr>
+            </a:pPr>
+            <a:r>
+              <a:rPr sz="1650">
+                <a:solidFill>
+                  <a:srgbClr val="FFFFFF"/>
+                </a:solidFill>
+                <a:latin typeface="Segoe UI"/>
+                <a:ea typeface="Segoe UI"/>
+                <a:cs typeface="Segoe UI"/>
+              </a:rPr>
+              <a:t>02</a:t>
+            </a:r>
+          </a:p>
+        </p:txBody>
+      </p:sp>
+      <p:sp>
+        <p:nvSpPr>
+          <p:cNvPr id="7" name="S02-marker-3">
+            <a:extLst>
+              <a:ext uri="{FF2B5EF4-FFF2-40B4-BE49-F238E27FC236}">
+                <a16:creationId xmlns:a16="http://schemas.microsoft.com/office/drawing/2014/main" id="{84E50D7F-F685-4483-AC1D-FA4238F014E0}"/>
+              </a:ext>
+            </a:extLst>
+          </p:cNvPr>
+          <p:cNvSpPr>
+            <a:spLocks noGrp="1"/>
+          </p:cNvSpPr>
+          <p:nvPr/>
+        </p:nvSpPr>
+        <p:spPr>
+          <a:xfrm>
+            <a:off x="8610600" y="2524125"/>
+            <a:ext cx="609600" cy="609600"/>
+          </a:xfrm>
+          <a:prstGeom prst="ellipse">
+            <a:avLst/>
+          </a:prstGeom>
+          <a:solidFill>
+            <a:srgbClr val="287D78"/>
+          </a:solidFill>
+          <a:ln w="0">
+            <a:noFill/>
+          </a:ln>
+        </p:spPr>
+        <p:txBody>
+          <a:bodyPr lIns="0" tIns="0" rIns="0" bIns="0" anchor="ctr"/>
+          <a:lstStyle/>
+          <a:p>
+            <a:pPr algn="ctr">
+              <a:defRPr sz="1650">
+                <a:solidFill>
+                  <a:srgbClr val="FFFFFF"/>
+                </a:solidFill>
+                <a:latin typeface="Segoe UI"/>
+                <a:ea typeface="Segoe UI"/>
+                <a:cs typeface="Segoe UI"/>
+              </a:defRPr>
+            </a:pPr>
+            <a:r>
+              <a:rPr sz="1650">
+                <a:solidFill>
+                  <a:srgbClr val="FFFFFF"/>
+                </a:solidFill>
+                <a:latin typeface="Segoe UI"/>
+                <a:ea typeface="Segoe UI"/>
+                <a:cs typeface="Segoe UI"/>
+              </a:rPr>
               <a:t>03</a:t>
             </a:r>
           </a:p>
@@ -2453,17 +2817,17 @@
       </p:sp>
       <p:cxnSp>
         <p:nvCxnSpPr>
-          <p:cNvPr id="27" name="S02-link-2"/>
+          <p:cNvPr id="29" name="S02-link-2"/>
           <p:cNvCxnSpPr>
-            <a:stCxn id="4" idx="6"/>
-            <a:endCxn id="5" idx="2"/>
+            <a:stCxn id="5" idx="6"/>
+            <a:endCxn id="6" idx="2"/>
           </p:cNvCxnSpPr>
           <p:nvPr/>
         </p:nvCxnSpPr>
         <p:spPr>
           <a:xfrm>
-            <a:off x="1219200" y="2600325"/>
-            <a:ext cx="3429000" cy="0"/>
+            <a:off x="1295400" y="2828925"/>
+            <a:ext cx="3352800" cy="0"/>
           </a:xfrm>
           <a:prstGeom prst="straightConnector1">
             <a:avLst/>
@@ -2478,17 +2842,17 @@
       </p:cxnSp>
       <p:cxnSp>
         <p:nvCxnSpPr>
-          <p:cNvPr id="28" name="S02-link-3"/>
+          <p:cNvPr id="30" name="S02-link-3"/>
           <p:cNvCxnSpPr>
-            <a:stCxn id="5" idx="6"/>
-            <a:endCxn id="6" idx="2"/>
+            <a:stCxn id="6" idx="6"/>
+            <a:endCxn id="7" idx="2"/>
           </p:cNvCxnSpPr>
           <p:nvPr/>
         </p:nvCxnSpPr>
         <p:spPr>
           <a:xfrm>
-            <a:off x="5181600" y="2600325"/>
-            <a:ext cx="3429000" cy="0"/>
+            <a:off x="5257800" y="2828925"/>
+            <a:ext cx="3352800" cy="0"/>
           </a:xfrm>
           <a:prstGeom prst="straightConnector1">
             <a:avLst/>
@@ -2503,10 +2867,10 @@
       </p:cxnSp>
       <p:sp>
         <p:nvSpPr>
-          <p:cNvPr id="9" name="S02-flow-2">
+          <p:cNvPr id="10" name="S02-flow-2">
             <a:extLst>
               <a:ext uri="{FF2B5EF4-FFF2-40B4-BE49-F238E27FC236}">
-                <a16:creationId xmlns:a16="http://schemas.microsoft.com/office/drawing/2014/main" id="{3704B231-8F02-49A2-8FE9-040F3058EF8C}"/>
+                <a16:creationId xmlns:a16="http://schemas.microsoft.com/office/drawing/2014/main" id="{12458779-99FE-4426-BD29-124B119DD2C0}"/>
               </a:ext>
             </a:extLst>
           </p:cNvPr>
@@ -2517,8 +2881,8 @@
         </p:nvSpPr>
         <p:spPr>
           <a:xfrm>
-            <a:off x="1466850" y="2076450"/>
-            <a:ext cx="2971800" cy="352425"/>
+            <a:off x="1524000" y="2057400"/>
+            <a:ext cx="3048000" cy="381000"/>
           </a:xfrm>
           <a:prstGeom prst="rect">
             <a:avLst/>
@@ -2560,10 +2924,10 @@
       </p:sp>
       <p:sp>
         <p:nvSpPr>
-          <p:cNvPr id="10" name="S02-flow-3">
+          <p:cNvPr id="11" name="S02-flow-3">
             <a:extLst>
               <a:ext uri="{FF2B5EF4-FFF2-40B4-BE49-F238E27FC236}">
-                <a16:creationId xmlns:a16="http://schemas.microsoft.com/office/drawing/2014/main" id="{CF9684AC-1473-4EA1-B9F5-3627FA976239}"/>
+                <a16:creationId xmlns:a16="http://schemas.microsoft.com/office/drawing/2014/main" id="{8B4E7345-704C-4861-8DE4-747978B30CE0}"/>
               </a:ext>
             </a:extLst>
           </p:cNvPr>
@@ -2574,8 +2938,8 @@
         </p:nvSpPr>
         <p:spPr>
           <a:xfrm>
-            <a:off x="5429250" y="2076450"/>
-            <a:ext cx="2971800" cy="352425"/>
+            <a:off x="5486400" y="2057400"/>
+            <a:ext cx="3048000" cy="381000"/>
           </a:xfrm>
           <a:prstGeom prst="rect">
             <a:avLst/>
@@ -2617,10 +2981,10 @@
       </p:sp>
       <p:sp>
         <p:nvSpPr>
-          <p:cNvPr id="11" name="S02-stage-1">
+          <p:cNvPr id="12" name="S02-stage-1">
             <a:extLst>
               <a:ext uri="{FF2B5EF4-FFF2-40B4-BE49-F238E27FC236}">
-                <a16:creationId xmlns:a16="http://schemas.microsoft.com/office/drawing/2014/main" id="{574D80A0-4E2E-413A-B157-8A93FDA0FB3D}"/>
+                <a16:creationId xmlns:a16="http://schemas.microsoft.com/office/drawing/2014/main" id="{D5E0E983-CBC4-415C-B85E-976FDDAC5187}"/>
               </a:ext>
             </a:extLst>
           </p:cNvPr>
@@ -2631,7 +2995,7 @@
         </p:nvSpPr>
         <p:spPr>
           <a:xfrm>
-            <a:off x="685800" y="3152775"/>
+            <a:off x="685800" y="3343275"/>
             <a:ext cx="3181350" cy="457200"/>
           </a:xfrm>
           <a:prstGeom prst="rect">
@@ -2674,10 +3038,10 @@
       </p:sp>
       <p:sp>
         <p:nvSpPr>
-          <p:cNvPr id="12" name="S02-name-1">
+          <p:cNvPr id="13" name="S02-name-1">
             <a:extLst>
               <a:ext uri="{FF2B5EF4-FFF2-40B4-BE49-F238E27FC236}">
-                <a16:creationId xmlns:a16="http://schemas.microsoft.com/office/drawing/2014/main" id="{57A2D65F-AFD6-4FE7-9345-862BCC2D3B35}"/>
+                <a16:creationId xmlns:a16="http://schemas.microsoft.com/office/drawing/2014/main" id="{6A96B8EC-AC73-4009-B569-7C8C8F461D94}"/>
               </a:ext>
             </a:extLst>
           </p:cNvPr>
@@ -2688,7 +3052,7 @@
         </p:nvSpPr>
         <p:spPr>
           <a:xfrm>
-            <a:off x="685800" y="3724275"/>
+            <a:off x="685800" y="3876675"/>
             <a:ext cx="3095625" cy="304800"/>
           </a:xfrm>
           <a:prstGeom prst="rect">
@@ -2708,7 +3072,7 @@
             <a:pPr>
               <a:defRPr sz="1575" b="0">
                 <a:solidFill>
-                  <a:srgbClr val="287D78"/>
+                  <a:srgbClr val="246E69"/>
                 </a:solidFill>
                 <a:latin typeface="Segoe UI"/>
                 <a:ea typeface="Segoe UI"/>
@@ -2718,7 +3082,7 @@
             <a:r>
               <a:rPr sz="1575" b="0">
                 <a:solidFill>
-                  <a:srgbClr val="287D78"/>
+                  <a:srgbClr val="246E69"/>
                 </a:solidFill>
                 <a:latin typeface="Segoe UI"/>
                 <a:ea typeface="Segoe UI"/>
@@ -2731,10 +3095,10 @@
       </p:sp>
       <p:sp>
         <p:nvSpPr>
-          <p:cNvPr id="13" name="S02-detail-1">
+          <p:cNvPr id="14" name="S02-detail-1">
             <a:extLst>
               <a:ext uri="{FF2B5EF4-FFF2-40B4-BE49-F238E27FC236}">
-                <a16:creationId xmlns:a16="http://schemas.microsoft.com/office/drawing/2014/main" id="{0FA1038E-FF2B-4C5E-A76C-80AE52B2910A}"/>
+                <a16:creationId xmlns:a16="http://schemas.microsoft.com/office/drawing/2014/main" id="{681D071D-F7D4-4C04-8E43-EA6E38DD69AB}"/>
               </a:ext>
             </a:extLst>
           </p:cNvPr>
@@ -2745,8 +3109,8 @@
         </p:nvSpPr>
         <p:spPr>
           <a:xfrm>
-            <a:off x="685800" y="4295775"/>
-            <a:ext cx="3181350" cy="771525"/>
+            <a:off x="685800" y="4438650"/>
+            <a:ext cx="3181350" cy="704850"/>
           </a:xfrm>
           <a:prstGeom prst="rect">
             <a:avLst/>
@@ -2811,10 +3175,10 @@
       </p:sp>
       <p:sp>
         <p:nvSpPr>
-          <p:cNvPr id="14" name="S02-stage-2">
+          <p:cNvPr id="15" name="S02-stage-2">
             <a:extLst>
               <a:ext uri="{FF2B5EF4-FFF2-40B4-BE49-F238E27FC236}">
-                <a16:creationId xmlns:a16="http://schemas.microsoft.com/office/drawing/2014/main" id="{83B69A53-8C5F-4DF5-8FBC-D802B0AE4A0F}"/>
+                <a16:creationId xmlns:a16="http://schemas.microsoft.com/office/drawing/2014/main" id="{A8DC9666-EF9F-4E92-BCF7-16FFF72ABD37}"/>
               </a:ext>
             </a:extLst>
           </p:cNvPr>
@@ -2825,7 +3189,7 @@
         </p:nvSpPr>
         <p:spPr>
           <a:xfrm>
-            <a:off x="4648200" y="3152775"/>
+            <a:off x="4648200" y="3343275"/>
             <a:ext cx="3181350" cy="457200"/>
           </a:xfrm>
           <a:prstGeom prst="rect">
@@ -2868,10 +3232,10 @@
       </p:sp>
       <p:sp>
         <p:nvSpPr>
-          <p:cNvPr id="15" name="S02-name-2">
+          <p:cNvPr id="16" name="S02-name-2">
             <a:extLst>
               <a:ext uri="{FF2B5EF4-FFF2-40B4-BE49-F238E27FC236}">
-                <a16:creationId xmlns:a16="http://schemas.microsoft.com/office/drawing/2014/main" id="{633B045A-B0D5-418B-B662-03C4B84871B7}"/>
+                <a16:creationId xmlns:a16="http://schemas.microsoft.com/office/drawing/2014/main" id="{EA89E638-CC04-4898-B7F7-1402242026FE}"/>
               </a:ext>
             </a:extLst>
           </p:cNvPr>
@@ -2882,7 +3246,7 @@
         </p:nvSpPr>
         <p:spPr>
           <a:xfrm>
-            <a:off x="4648200" y="3724275"/>
+            <a:off x="4648200" y="3876675"/>
             <a:ext cx="3095625" cy="304800"/>
           </a:xfrm>
           <a:prstGeom prst="rect">
@@ -2902,7 +3266,7 @@
             <a:pPr>
               <a:defRPr sz="1575" b="0">
                 <a:solidFill>
-                  <a:srgbClr val="287D78"/>
+                  <a:srgbClr val="246E69"/>
                 </a:solidFill>
                 <a:latin typeface="Segoe UI"/>
                 <a:ea typeface="Segoe UI"/>
@@ -2912,7 +3276,7 @@
             <a:r>
               <a:rPr sz="1575" b="0">
                 <a:solidFill>
-                  <a:srgbClr val="287D78"/>
+                  <a:srgbClr val="246E69"/>
                 </a:solidFill>
                 <a:latin typeface="Segoe UI"/>
                 <a:ea typeface="Segoe UI"/>
@@ -2925,10 +3289,10 @@
       </p:sp>
       <p:sp>
         <p:nvSpPr>
-          <p:cNvPr id="16" name="S02-detail-2">
+          <p:cNvPr id="17" name="S02-detail-2">
             <a:extLst>
               <a:ext uri="{FF2B5EF4-FFF2-40B4-BE49-F238E27FC236}">
-                <a16:creationId xmlns:a16="http://schemas.microsoft.com/office/drawing/2014/main" id="{45E8AC73-47E3-48FE-B12E-A99216CA0A79}"/>
+                <a16:creationId xmlns:a16="http://schemas.microsoft.com/office/drawing/2014/main" id="{809E60DE-62D3-4BB8-BEA7-4CF053BE6809}"/>
               </a:ext>
             </a:extLst>
           </p:cNvPr>
@@ -2939,8 +3303,8 @@
         </p:nvSpPr>
         <p:spPr>
           <a:xfrm>
-            <a:off x="4648200" y="4295775"/>
-            <a:ext cx="3181350" cy="771525"/>
+            <a:off x="4648200" y="4438650"/>
+            <a:ext cx="3181350" cy="704850"/>
           </a:xfrm>
           <a:prstGeom prst="rect">
             <a:avLst/>
@@ -3005,10 +3369,10 @@
       </p:sp>
       <p:sp>
         <p:nvSpPr>
-          <p:cNvPr id="17" name="S02-stage-3">
+          <p:cNvPr id="18" name="S02-stage-3">
             <a:extLst>
               <a:ext uri="{FF2B5EF4-FFF2-40B4-BE49-F238E27FC236}">
-                <a16:creationId xmlns:a16="http://schemas.microsoft.com/office/drawing/2014/main" id="{85311D4C-D613-4589-BE43-CB1DF321C346}"/>
+                <a16:creationId xmlns:a16="http://schemas.microsoft.com/office/drawing/2014/main" id="{E0471A0B-1A8A-4FC2-8A0A-F7045C700463}"/>
               </a:ext>
             </a:extLst>
           </p:cNvPr>
@@ -3019,7 +3383,7 @@
         </p:nvSpPr>
         <p:spPr>
           <a:xfrm>
-            <a:off x="8610600" y="3152775"/>
+            <a:off x="8610600" y="3343275"/>
             <a:ext cx="3181350" cy="457200"/>
           </a:xfrm>
           <a:prstGeom prst="rect">
@@ -3062,10 +3426,10 @@
       </p:sp>
       <p:sp>
         <p:nvSpPr>
-          <p:cNvPr id="18" name="S02-name-3">
+          <p:cNvPr id="19" name="S02-name-3">
             <a:extLst>
               <a:ext uri="{FF2B5EF4-FFF2-40B4-BE49-F238E27FC236}">
-                <a16:creationId xmlns:a16="http://schemas.microsoft.com/office/drawing/2014/main" id="{93C3164F-A989-44D9-8207-95A53AED8BB2}"/>
+                <a16:creationId xmlns:a16="http://schemas.microsoft.com/office/drawing/2014/main" id="{BB42FAD0-8B31-4C79-9D1A-39D8101F07AA}"/>
               </a:ext>
             </a:extLst>
           </p:cNvPr>
@@ -3076,7 +3440,7 @@
         </p:nvSpPr>
         <p:spPr>
           <a:xfrm>
-            <a:off x="8610600" y="3724275"/>
+            <a:off x="8610600" y="3876675"/>
             <a:ext cx="3095625" cy="304800"/>
           </a:xfrm>
           <a:prstGeom prst="rect">
@@ -3096,7 +3460,7 @@
             <a:pPr>
               <a:defRPr sz="1575" b="0">
                 <a:solidFill>
-                  <a:srgbClr val="287D78"/>
+                  <a:srgbClr val="246E69"/>
                 </a:solidFill>
                 <a:latin typeface="Segoe UI"/>
                 <a:ea typeface="Segoe UI"/>
@@ -3106,7 +3470,7 @@
             <a:r>
               <a:rPr sz="1575" b="0">
                 <a:solidFill>
-                  <a:srgbClr val="287D78"/>
+                  <a:srgbClr val="246E69"/>
                 </a:solidFill>
                 <a:latin typeface="Segoe UI"/>
                 <a:ea typeface="Segoe UI"/>
@@ -3119,10 +3483,10 @@
       </p:sp>
       <p:sp>
         <p:nvSpPr>
-          <p:cNvPr id="19" name="S02-detail-3">
+          <p:cNvPr id="20" name="S02-detail-3">
             <a:extLst>
               <a:ext uri="{FF2B5EF4-FFF2-40B4-BE49-F238E27FC236}">
-                <a16:creationId xmlns:a16="http://schemas.microsoft.com/office/drawing/2014/main" id="{6B8938CF-FBFD-433E-AE3D-984C8CFA21CB}"/>
+                <a16:creationId xmlns:a16="http://schemas.microsoft.com/office/drawing/2014/main" id="{6113C402-54DF-4065-A864-EA53B95919E7}"/>
               </a:ext>
             </a:extLst>
           </p:cNvPr>
@@ -3133,8 +3497,8 @@
         </p:nvSpPr>
         <p:spPr>
           <a:xfrm>
-            <a:off x="8610600" y="4295775"/>
-            <a:ext cx="3181350" cy="771525"/>
+            <a:off x="8610600" y="4438650"/>
+            <a:ext cx="3181350" cy="704850"/>
           </a:xfrm>
           <a:prstGeom prst="rect">
             <a:avLst/>
@@ -3199,10 +3563,10 @@
       </p:sp>
       <p:sp>
         <p:nvSpPr>
-          <p:cNvPr id="20" name="S02-caveat">
+          <p:cNvPr id="21" name="S02-caveat">
             <a:extLst>
               <a:ext uri="{FF2B5EF4-FFF2-40B4-BE49-F238E27FC236}">
-                <a16:creationId xmlns:a16="http://schemas.microsoft.com/office/drawing/2014/main" id="{51464756-4A43-4402-BF13-D16988103052}"/>
+                <a16:creationId xmlns:a16="http://schemas.microsoft.com/office/drawing/2014/main" id="{4DA499D8-7F71-4A53-8ACE-3FF710E76AAE}"/>
               </a:ext>
             </a:extLst>
           </p:cNvPr>
@@ -3249,7 +3613,7 @@
                 <a:ea typeface="Segoe UI"/>
                 <a:cs typeface="Segoe UI"/>
               </a:rPr>
-              <a:t>Conceptual workflow. Architecture and quantization scope are unspecified.</a:t>
+              <a:t>Conceptual overview; implementation details vary.</a:t>
             </a:r>
           </a:p>
         </p:txBody>
@@ -3257,7 +3621,7 @@
     </p:spTree>
     <p:extLst>
       <p:ext uri="{BB962C8B-B14F-4D97-AF65-F5344CB8AC3E}">
-        <p14:creationId xmlns:p14="http://schemas.microsoft.com/office/powerpoint/2010/main" val="275575726"/>
+        <p14:creationId xmlns:p14="http://schemas.microsoft.com/office/powerpoint/2010/main" val="625778496"/>
       </p:ext>
     </p:extLst>
   </p:cSld>
@@ -3298,7 +3662,7 @@
                                           </p:stCondLst>
                                         </p:cTn>
                                         <p:tgtEl>
-                                          <p:spTgt spid="5"/>
+                                          <p:spTgt spid="6"/>
                                         </p:tgtEl>
                                         <p:attrNameLst>
                                           <p:attrName>style.visibility</p:attrName>
@@ -3312,7 +3676,7 @@
                                       <p:cBhvr>
                                         <p:cTn id="7" dur="350"/>
                                         <p:tgtEl>
-                                          <p:spTgt spid="5"/>
+                                          <p:spTgt spid="6"/>
                                         </p:tgtEl>
                                       </p:cBhvr>
                                     </p:animEffect>
@@ -3333,7 +3697,7 @@
                                           </p:stCondLst>
                                         </p:cTn>
                                         <p:tgtEl>
-                                          <p:spTgt spid="27"/>
+                                          <p:spTgt spid="29"/>
                                         </p:tgtEl>
                                         <p:attrNameLst>
                                           <p:attrName>style.visibility</p:attrName>
@@ -3347,7 +3711,7 @@
                                       <p:cBhvr>
                                         <p:cTn id="10" dur="350"/>
                                         <p:tgtEl>
-                                          <p:spTgt spid="27"/>
+                                          <p:spTgt spid="29"/>
                                         </p:tgtEl>
                                       </p:cBhvr>
                                     </p:animEffect>
@@ -3368,7 +3732,7 @@
                                           </p:stCondLst>
                                         </p:cTn>
                                         <p:tgtEl>
-                                          <p:spTgt spid="9"/>
+                                          <p:spTgt spid="10"/>
                                         </p:tgtEl>
                                         <p:attrNameLst>
                                           <p:attrName>style.visibility</p:attrName>
@@ -3382,7 +3746,7 @@
                                       <p:cBhvr>
                                         <p:cTn id="13" dur="350"/>
                                         <p:tgtEl>
-                                          <p:spTgt spid="9"/>
+                                          <p:spTgt spid="10"/>
                                         </p:tgtEl>
                                       </p:cBhvr>
                                     </p:animEffect>
@@ -3403,7 +3767,7 @@
                                           </p:stCondLst>
                                         </p:cTn>
                                         <p:tgtEl>
-                                          <p:spTgt spid="14"/>
+                                          <p:spTgt spid="15"/>
                                         </p:tgtEl>
                                         <p:attrNameLst>
                                           <p:attrName>style.visibility</p:attrName>
@@ -3417,7 +3781,7 @@
                                       <p:cBhvr>
                                         <p:cTn id="16" dur="350"/>
                                         <p:tgtEl>
-                                          <p:spTgt spid="14"/>
+                                          <p:spTgt spid="15"/>
                                         </p:tgtEl>
                                       </p:cBhvr>
                                     </p:animEffect>
@@ -3438,7 +3802,7 @@
                                           </p:stCondLst>
                                         </p:cTn>
                                         <p:tgtEl>
-                                          <p:spTgt spid="15"/>
+                                          <p:spTgt spid="16"/>
                                         </p:tgtEl>
                                         <p:attrNameLst>
                                           <p:attrName>style.visibility</p:attrName>
@@ -3452,7 +3816,7 @@
                                       <p:cBhvr>
                                         <p:cTn id="19" dur="350"/>
                                         <p:tgtEl>
-                                          <p:spTgt spid="15"/>
+                                          <p:spTgt spid="16"/>
                                         </p:tgtEl>
                                       </p:cBhvr>
                                     </p:animEffect>
@@ -3473,7 +3837,7 @@
                                           </p:stCondLst>
                                         </p:cTn>
                                         <p:tgtEl>
-                                          <p:spTgt spid="16"/>
+                                          <p:spTgt spid="17"/>
                                         </p:tgtEl>
                                         <p:attrNameLst>
                                           <p:attrName>style.visibility</p:attrName>
@@ -3487,7 +3851,7 @@
                                       <p:cBhvr>
                                         <p:cTn id="22" dur="350"/>
                                         <p:tgtEl>
-                                          <p:spTgt spid="16"/>
+                                          <p:spTgt spid="17"/>
                                         </p:tgtEl>
                                       </p:cBhvr>
                                     </p:animEffect>
@@ -3526,7 +3890,7 @@
                                           </p:stCondLst>
                                         </p:cTn>
                                         <p:tgtEl>
-                                          <p:spTgt spid="6"/>
+                                          <p:spTgt spid="7"/>
                                         </p:tgtEl>
                                         <p:attrNameLst>
                                           <p:attrName>style.visibility</p:attrName>
@@ -3540,7 +3904,7 @@
                                       <p:cBhvr>
                                         <p:cTn id="27" dur="350"/>
                                         <p:tgtEl>
-                                          <p:spTgt spid="6"/>
+                                          <p:spTgt spid="7"/>
                                         </p:tgtEl>
                                       </p:cBhvr>
                                     </p:animEffect>
@@ -3561,7 +3925,7 @@
                                           </p:stCondLst>
                                         </p:cTn>
                                         <p:tgtEl>
-                                          <p:spTgt spid="28"/>
+                                          <p:spTgt spid="30"/>
                                         </p:tgtEl>
                                         <p:attrNameLst>
                                           <p:attrName>style.visibility</p:attrName>
@@ -3575,7 +3939,7 @@
                                       <p:cBhvr>
                                         <p:cTn id="30" dur="350"/>
                                         <p:tgtEl>
-                                          <p:spTgt spid="28"/>
+                                          <p:spTgt spid="30"/>
                                         </p:tgtEl>
                                       </p:cBhvr>
                                     </p:animEffect>
@@ -3596,7 +3960,7 @@
                                           </p:stCondLst>
                                         </p:cTn>
                                         <p:tgtEl>
-                                          <p:spTgt spid="10"/>
+                                          <p:spTgt spid="11"/>
                                         </p:tgtEl>
                                         <p:attrNameLst>
                                           <p:attrName>style.visibility</p:attrName>
@@ -3610,7 +3974,7 @@
                                       <p:cBhvr>
                                         <p:cTn id="33" dur="350"/>
                                         <p:tgtEl>
-                                          <p:spTgt spid="10"/>
+                                          <p:spTgt spid="11"/>
                                         </p:tgtEl>
                                       </p:cBhvr>
                                     </p:animEffect>
@@ -3631,7 +3995,7 @@
                                           </p:stCondLst>
                                         </p:cTn>
                                         <p:tgtEl>
-                                          <p:spTgt spid="17"/>
+                                          <p:spTgt spid="18"/>
                                         </p:tgtEl>
                                         <p:attrNameLst>
                                           <p:attrName>style.visibility</p:attrName>
@@ -3645,7 +4009,7 @@
                                       <p:cBhvr>
                                         <p:cTn id="36" dur="350"/>
                                         <p:tgtEl>
-                                          <p:spTgt spid="17"/>
+                                          <p:spTgt spid="18"/>
                                         </p:tgtEl>
                                       </p:cBhvr>
                                     </p:animEffect>
@@ -3666,7 +4030,7 @@
                                           </p:stCondLst>
                                         </p:cTn>
                                         <p:tgtEl>
-                                          <p:spTgt spid="18"/>
+                                          <p:spTgt spid="19"/>
                                         </p:tgtEl>
                                         <p:attrNameLst>
                                           <p:attrName>style.visibility</p:attrName>
@@ -3680,7 +4044,7 @@
                                       <p:cBhvr>
                                         <p:cTn id="39" dur="350"/>
                                         <p:tgtEl>
-                                          <p:spTgt spid="18"/>
+                                          <p:spTgt spid="19"/>
                                         </p:tgtEl>
                                       </p:cBhvr>
                                     </p:animEffect>
@@ -3701,7 +4065,7 @@
                                           </p:stCondLst>
                                         </p:cTn>
                                         <p:tgtEl>
-                                          <p:spTgt spid="19"/>
+                                          <p:spTgt spid="20"/>
                                         </p:tgtEl>
                                         <p:attrNameLst>
                                           <p:attrName>style.visibility</p:attrName>
@@ -3715,7 +4079,7 @@
                                       <p:cBhvr>
                                         <p:cTn id="42" dur="350"/>
                                         <p:tgtEl>
-                                          <p:spTgt spid="19"/>
+                                          <p:spTgt spid="20"/>
                                         </p:tgtEl>
                                       </p:cBhvr>
                                     </p:animEffect>
@@ -3750,16 +4114,16 @@
       </p:par>
     </p:tnLst>
     <p:bldLst>
-      <p:bldP spid="5" grpId="0" animBg="1"/>
       <p:bldP spid="6" grpId="0" animBg="1"/>
-      <p:bldP spid="9" grpId="0"/>
+      <p:bldP spid="7" grpId="0" animBg="1"/>
       <p:bldP spid="10" grpId="0"/>
-      <p:bldP spid="14" grpId="0"/>
+      <p:bldP spid="11" grpId="0"/>
       <p:bldP spid="15" grpId="0"/>
       <p:bldP spid="16" grpId="0"/>
       <p:bldP spid="17" grpId="0"/>
       <p:bldP spid="18" grpId="0"/>
       <p:bldP spid="19" grpId="0"/>
+      <p:bldP spid="20" grpId="0"/>
     </p:bldLst>
   </p:timing>
 </p:sld>
@@ -3792,10 +4156,10 @@
       </p:grpSpPr>
       <p:sp>
         <p:nvSpPr>
-          <p:cNvPr id="8" name="S03-title">
+          <p:cNvPr id="7" name="S03-title">
             <a:extLst>
               <a:ext uri="{FF2B5EF4-FFF2-40B4-BE49-F238E27FC236}">
-                <a16:creationId xmlns:a16="http://schemas.microsoft.com/office/drawing/2014/main" id="{CA0C6520-1051-4AA0-8098-A9EBEC2A03E8}"/>
+                <a16:creationId xmlns:a16="http://schemas.microsoft.com/office/drawing/2014/main" id="{CFBCA220-0E6C-4C93-9C1B-7779A7157872}"/>
               </a:ext>
             </a:extLst>
           </p:cNvPr>
@@ -3852,7 +4216,7 @@
           <p:cNvPr id="2" name="S03-disclosure">
             <a:extLst>
               <a:ext uri="{FF2B5EF4-FFF2-40B4-BE49-F238E27FC236}">
-                <a16:creationId xmlns:a16="http://schemas.microsoft.com/office/drawing/2014/main" id="{409FF452-2A3F-4AFF-9C01-23A352274B0A}"/>
+                <a16:creationId xmlns:a16="http://schemas.microsoft.com/office/drawing/2014/main" id="{D85B70CD-81C6-4447-9008-248C23ECB855}"/>
               </a:ext>
             </a:extLst>
           </p:cNvPr>
@@ -3899,7 +4263,7 @@
                 <a:ea typeface="Segoe UI"/>
                 <a:cs typeface="Segoe UI"/>
               </a:rPr>
-              <a:t>Illustrative data · not experimental results</a:t>
+              <a:t>Illustrative data</a:t>
             </a:r>
           </a:p>
         </p:txBody>
@@ -3909,7 +4273,7 @@
           <p:cNvPr id="3" name="S03-number">
             <a:extLst>
               <a:ext uri="{FF2B5EF4-FFF2-40B4-BE49-F238E27FC236}">
-                <a16:creationId xmlns:a16="http://schemas.microsoft.com/office/drawing/2014/main" id="{F8B9AE3B-FFAC-470A-A925-2F6D2168D6BC}"/>
+                <a16:creationId xmlns:a16="http://schemas.microsoft.com/office/drawing/2014/main" id="{388F65F0-FA2D-4B75-8512-2E79BD999864}"/>
               </a:ext>
             </a:extLst>
           </p:cNvPr>
@@ -3966,7 +4330,7 @@
           <p:cNvPr id="4" name="S03-direction">
             <a:extLst>
               <a:ext uri="{FF2B5EF4-FFF2-40B4-BE49-F238E27FC236}">
-                <a16:creationId xmlns:a16="http://schemas.microsoft.com/office/drawing/2014/main" id="{28228544-2890-45EB-B8D8-226835515F16}"/>
+                <a16:creationId xmlns:a16="http://schemas.microsoft.com/office/drawing/2014/main" id="{6226551B-CCC9-4228-8EE2-96ED49F67B75}"/>
               </a:ext>
             </a:extLst>
           </p:cNvPr>
@@ -4020,13 +4384,13 @@
       </p:sp>
       <p:graphicFrame>
         <p:nvGraphicFramePr>
-          <p:cNvPr id="12" name="표 11"/>
+          <p:cNvPr id="11" name="표 10"/>
           <p:cNvGraphicFramePr/>
           <p:nvPr/>
         </p:nvGraphicFramePr>
         <p:xfrm>
-          <a:off x="609600" y="2314575"/>
-          <a:ext cx="10972800" cy="2857500"/>
+          <a:off x="609600" y="2343150"/>
+          <a:ext cx="10972800" cy="2933700"/>
         </p:xfrm>
         <a:graphic>
           <a:graphicData uri="http://schemas.openxmlformats.org/drawingml/2006/table">
@@ -4062,7 +4426,7 @@
                   </a:extLst>
                 </a:gridCol>
               </a:tblGrid>
-              <a:tr h="714375">
+              <a:tr h="733425">
                 <a:tc>
                   <a:txBody>
                     <a:bodyPr/>
@@ -4072,7 +4436,7 @@
                       <a:r>
                         <a:rPr sz="1800" b="0">
                           <a:solidFill>
-                            <a:srgbClr val="586C68"/>
+                            <a:srgbClr val="FFFFFF"/>
                           </a:solidFill>
                           <a:latin typeface="Segoe UI"/>
                           <a:ea typeface="Segoe UI"/>
@@ -4102,7 +4466,7 @@
                       <a:noFill/>
                     </a:lnBlToTr>
                     <a:solidFill>
-                      <a:srgbClr val="F6F4EE"/>
+                      <a:srgbClr val="1E302F"/>
                     </a:solidFill>
                   </a:tcPr>
                 </a:tc>
@@ -4115,7 +4479,7 @@
                       <a:r>
                         <a:rPr sz="1800" b="0">
                           <a:solidFill>
-                            <a:srgbClr val="586C68"/>
+                            <a:srgbClr val="FFFFFF"/>
                           </a:solidFill>
                           <a:latin typeface="Segoe UI"/>
                           <a:ea typeface="Segoe UI"/>
@@ -4145,7 +4509,7 @@
                       <a:noFill/>
                     </a:lnBlToTr>
                     <a:solidFill>
-                      <a:srgbClr val="F6F4EE"/>
+                      <a:srgbClr val="1E302F"/>
                     </a:solidFill>
                   </a:tcPr>
                 </a:tc>
@@ -4158,7 +4522,7 @@
                       <a:r>
                         <a:rPr sz="1800" b="0">
                           <a:solidFill>
-                            <a:srgbClr val="586C68"/>
+                            <a:srgbClr val="FFFFFF"/>
                           </a:solidFill>
                           <a:latin typeface="Segoe UI"/>
                           <a:ea typeface="Segoe UI"/>
@@ -4188,7 +4552,7 @@
                       <a:noFill/>
                     </a:lnBlToTr>
                     <a:solidFill>
-                      <a:srgbClr val="F6F4EE"/>
+                      <a:srgbClr val="1E302F"/>
                     </a:solidFill>
                   </a:tcPr>
                 </a:tc>
@@ -4201,7 +4565,7 @@
                       <a:r>
                         <a:rPr sz="1800" b="0">
                           <a:solidFill>
-                            <a:srgbClr val="586C68"/>
+                            <a:srgbClr val="FFFFFF"/>
                           </a:solidFill>
                           <a:latin typeface="Segoe UI"/>
                           <a:ea typeface="Segoe UI"/>
@@ -4231,7 +4595,7 @@
                       <a:noFill/>
                     </a:lnBlToTr>
                     <a:solidFill>
-                      <a:srgbClr val="F6F4EE"/>
+                      <a:srgbClr val="1E302F"/>
                     </a:solidFill>
                   </a:tcPr>
                 </a:tc>
@@ -4241,7 +4605,7 @@
                   </a:ext>
                 </a:extLst>
               </a:tr>
-              <a:tr h="714375">
+              <a:tr h="733425">
                 <a:tc>
                   <a:txBody>
                     <a:bodyPr/>
@@ -4281,7 +4645,7 @@
                       <a:noFill/>
                     </a:lnBlToTr>
                     <a:solidFill>
-                      <a:srgbClr val="F6F4EE"/>
+                      <a:srgbClr val="E8EDE5"/>
                     </a:solidFill>
                   </a:tcPr>
                 </a:tc>
@@ -4324,7 +4688,7 @@
                       <a:noFill/>
                     </a:lnBlToTr>
                     <a:solidFill>
-                      <a:srgbClr val="F6F4EE"/>
+                      <a:srgbClr val="E8EDE5"/>
                     </a:solidFill>
                   </a:tcPr>
                 </a:tc>
@@ -4367,7 +4731,7 @@
                       <a:noFill/>
                     </a:lnBlToTr>
                     <a:solidFill>
-                      <a:srgbClr val="F6F4EE"/>
+                      <a:srgbClr val="E8EDE5"/>
                     </a:solidFill>
                   </a:tcPr>
                 </a:tc>
@@ -4410,7 +4774,7 @@
                       <a:noFill/>
                     </a:lnBlToTr>
                     <a:solidFill>
-                      <a:srgbClr val="F6F4EE"/>
+                      <a:srgbClr val="E8EDE5"/>
                     </a:solidFill>
                   </a:tcPr>
                 </a:tc>
@@ -4420,7 +4784,7 @@
                   </a:ext>
                 </a:extLst>
               </a:tr>
-              <a:tr h="714375">
+              <a:tr h="733425">
                 <a:tc>
                   <a:txBody>
                     <a:bodyPr/>
@@ -4599,7 +4963,7 @@
                   </a:ext>
                 </a:extLst>
               </a:tr>
-              <a:tr h="714375">
+              <a:tr h="733425">
                 <a:tc>
                   <a:txBody>
                     <a:bodyPr/>
@@ -4639,7 +5003,7 @@
                       <a:noFill/>
                     </a:lnBlToTr>
                     <a:solidFill>
-                      <a:srgbClr val="F6F4EE"/>
+                      <a:srgbClr val="E8EDE5"/>
                     </a:solidFill>
                   </a:tcPr>
                 </a:tc>
@@ -4682,7 +5046,7 @@
                       <a:noFill/>
                     </a:lnBlToTr>
                     <a:solidFill>
-                      <a:srgbClr val="F6F4EE"/>
+                      <a:srgbClr val="E8EDE5"/>
                     </a:solidFill>
                   </a:tcPr>
                 </a:tc>
@@ -4725,7 +5089,7 @@
                       <a:noFill/>
                     </a:lnBlToTr>
                     <a:solidFill>
-                      <a:srgbClr val="F6F4EE"/>
+                      <a:srgbClr val="E8EDE5"/>
                     </a:solidFill>
                   </a:tcPr>
                 </a:tc>
@@ -4768,7 +5132,7 @@
                       <a:noFill/>
                     </a:lnBlToTr>
                     <a:solidFill>
-                      <a:srgbClr val="F6F4EE"/>
+                      <a:srgbClr val="E8EDE5"/>
                     </a:solidFill>
                   </a:tcPr>
                 </a:tc>
@@ -4784,39 +5148,10 @@
       </p:graphicFrame>
       <p:sp>
         <p:nvSpPr>
-          <p:cNvPr id="6" name="S03-header-rule">
+          <p:cNvPr id="6" name="S03-limit">
             <a:extLst>
               <a:ext uri="{FF2B5EF4-FFF2-40B4-BE49-F238E27FC236}">
-                <a16:creationId xmlns:a16="http://schemas.microsoft.com/office/drawing/2014/main" id="{2A2AAF51-46A5-463E-A7F5-84E1C43F04C6}"/>
-              </a:ext>
-            </a:extLst>
-          </p:cNvPr>
-          <p:cNvSpPr>
-            <a:spLocks noGrp="1"/>
-          </p:cNvSpPr>
-          <p:nvPr/>
-        </p:nvSpPr>
-        <p:spPr>
-          <a:xfrm>
-            <a:off x="685800" y="3028950"/>
-            <a:ext cx="10820400" cy="0"/>
-          </a:xfrm>
-          <a:prstGeom prst="line">
-            <a:avLst/>
-          </a:prstGeom>
-          <a:ln w="9525">
-            <a:solidFill>
-              <a:srgbClr val="CFD8D1"/>
-            </a:solidFill>
-          </a:ln>
-        </p:spPr>
-      </p:sp>
-      <p:sp>
-        <p:nvSpPr>
-          <p:cNvPr id="7" name="S03-limit">
-            <a:extLst>
-              <a:ext uri="{FF2B5EF4-FFF2-40B4-BE49-F238E27FC236}">
-                <a16:creationId xmlns:a16="http://schemas.microsoft.com/office/drawing/2014/main" id="{C76E3D28-D525-484C-A6B4-EAEAC9D4C8F1}"/>
+                <a16:creationId xmlns:a16="http://schemas.microsoft.com/office/drawing/2014/main" id="{54765F4F-A0A9-4517-B1B8-EC35DADE98E3}"/>
               </a:ext>
             </a:extLst>
           </p:cNvPr>
@@ -4863,7 +5198,7 @@
                 <a:ea typeface="Segoe UI"/>
                 <a:cs typeface="Segoe UI"/>
               </a:rPr>
-              <a:t>Same device and data assumed. Sample count, variance and dataset are unspecified.</a:t>
+              <a:t>Illustrative comparison on assumed matching device and data; variability is not evaluated.</a:t>
             </a:r>
           </a:p>
         </p:txBody>
@@ -4871,7 +5206,7 @@
     </p:spTree>
     <p:extLst>
       <p:ext uri="{BB962C8B-B14F-4D97-AF65-F5344CB8AC3E}">
-        <p14:creationId xmlns:p14="http://schemas.microsoft.com/office/powerpoint/2010/main" val="988851997"/>
+        <p14:creationId xmlns:p14="http://schemas.microsoft.com/office/powerpoint/2010/main" val="966320156"/>
       </p:ext>
     </p:extLst>
   </p:cSld>
@@ -4908,10 +5243,10 @@
       </p:grpSpPr>
       <p:sp>
         <p:nvSpPr>
-          <p:cNvPr id="15" name="S04-title">
+          <p:cNvPr id="17" name="S04-title">
             <a:extLst>
               <a:ext uri="{FF2B5EF4-FFF2-40B4-BE49-F238E27FC236}">
-                <a16:creationId xmlns:a16="http://schemas.microsoft.com/office/drawing/2014/main" id="{F9D51027-223B-41BC-AC17-197B3DBF7543}"/>
+                <a16:creationId xmlns:a16="http://schemas.microsoft.com/office/drawing/2014/main" id="{724713AD-E8AF-42B6-87A4-A152929A65B7}"/>
               </a:ext>
             </a:extLst>
           </p:cNvPr>
@@ -4968,7 +5303,7 @@
           <p:cNvPr id="2" name="S04-disclosure">
             <a:extLst>
               <a:ext uri="{FF2B5EF4-FFF2-40B4-BE49-F238E27FC236}">
-                <a16:creationId xmlns:a16="http://schemas.microsoft.com/office/drawing/2014/main" id="{1EB260BA-4F27-4BA6-8D38-37B44F32EEC2}"/>
+                <a16:creationId xmlns:a16="http://schemas.microsoft.com/office/drawing/2014/main" id="{29602194-F4A2-4C9B-9097-6D5CD46C7C8C}"/>
               </a:ext>
             </a:extLst>
           </p:cNvPr>
@@ -5015,7 +5350,7 @@
                 <a:ea typeface="Segoe UI"/>
                 <a:cs typeface="Segoe UI"/>
               </a:rPr>
-              <a:t>Illustrative data · not experimental results</a:t>
+              <a:t>Illustrative data</a:t>
             </a:r>
           </a:p>
         </p:txBody>
@@ -5025,7 +5360,7 @@
           <p:cNvPr id="3" name="S04-number">
             <a:extLst>
               <a:ext uri="{FF2B5EF4-FFF2-40B4-BE49-F238E27FC236}">
-                <a16:creationId xmlns:a16="http://schemas.microsoft.com/office/drawing/2014/main" id="{5DA3B840-52E2-4CFB-9E71-57EF81AC896D}"/>
+                <a16:creationId xmlns:a16="http://schemas.microsoft.com/office/drawing/2014/main" id="{54446B09-89A2-4DC2-99B4-C89A9F025FBF}"/>
               </a:ext>
             </a:extLst>
           </p:cNvPr>
@@ -5079,10 +5414,40 @@
       </p:sp>
       <p:sp>
         <p:nvSpPr>
-          <p:cNvPr id="4" name="S04-chart-unit">
+          <p:cNvPr id="4" name="S04-interpretation-field">
             <a:extLst>
               <a:ext uri="{FF2B5EF4-FFF2-40B4-BE49-F238E27FC236}">
-                <a16:creationId xmlns:a16="http://schemas.microsoft.com/office/drawing/2014/main" id="{7DFB2E3B-7E59-49D9-9E9F-766AAD1A3147}"/>
+                <a16:creationId xmlns:a16="http://schemas.microsoft.com/office/drawing/2014/main" id="{CBE6E3D1-0467-4903-955B-ED89D99EF9C9}"/>
+              </a:ext>
+            </a:extLst>
+          </p:cNvPr>
+          <p:cNvSpPr>
+            <a:spLocks noGrp="1"/>
+          </p:cNvSpPr>
+          <p:nvPr/>
+        </p:nvSpPr>
+        <p:spPr>
+          <a:xfrm>
+            <a:off x="8143875" y="1666875"/>
+            <a:ext cx="3590925" cy="4191000"/>
+          </a:xfrm>
+          <a:prstGeom prst="rect">
+            <a:avLst/>
+          </a:prstGeom>
+          <a:solidFill>
+            <a:srgbClr val="1E302F"/>
+          </a:solidFill>
+          <a:ln w="0">
+            <a:noFill/>
+          </a:ln>
+        </p:spPr>
+      </p:sp>
+      <p:sp>
+        <p:nvSpPr>
+          <p:cNvPr id="5" name="S04-chart-unit">
+            <a:extLst>
+              <a:ext uri="{FF2B5EF4-FFF2-40B4-BE49-F238E27FC236}">
+                <a16:creationId xmlns:a16="http://schemas.microsoft.com/office/drawing/2014/main" id="{C9F2FFE2-1CE9-48EA-810B-5DBDA236213B}"/>
               </a:ext>
             </a:extLst>
           </p:cNvPr>
@@ -5136,13 +5501,13 @@
       </p:sp>
       <p:graphicFrame>
         <p:nvGraphicFramePr>
-          <p:cNvPr id="19" name="Chart"/>
+          <p:cNvPr id="22" name="Chart"/>
           <p:cNvGraphicFramePr/>
           <p:nvPr/>
         </p:nvGraphicFramePr>
         <p:xfrm>
-          <a:off x="619125" y="2095500"/>
-          <a:ext cx="7191375" cy="3219450"/>
+          <a:off x="619125" y="2114550"/>
+          <a:ext cx="7000875" cy="2857500"/>
         </p:xfrm>
         <a:graphic>
           <a:graphicData uri="http://schemas.openxmlformats.org/drawingml/2006/chart">
@@ -5152,10 +5517,10 @@
       </p:graphicFrame>
       <p:sp>
         <p:nvSpPr>
-          <p:cNvPr id="6" name="S04-x-unit">
+          <p:cNvPr id="7" name="S04-x-unit">
             <a:extLst>
               <a:ext uri="{FF2B5EF4-FFF2-40B4-BE49-F238E27FC236}">
-                <a16:creationId xmlns:a16="http://schemas.microsoft.com/office/drawing/2014/main" id="{A3024077-E05A-49AE-8D99-6588D9426546}"/>
+                <a16:creationId xmlns:a16="http://schemas.microsoft.com/office/drawing/2014/main" id="{615521AD-72B3-46A0-A99E-4554648CF5BA}"/>
               </a:ext>
             </a:extLst>
           </p:cNvPr>
@@ -5166,7 +5531,7 @@
         </p:nvSpPr>
         <p:spPr>
           <a:xfrm>
-            <a:off x="1428750" y="5181600"/>
+            <a:off x="1428750" y="4943475"/>
             <a:ext cx="6191250" cy="333375"/>
           </a:xfrm>
           <a:prstGeom prst="rect">
@@ -5209,10 +5574,10 @@
       </p:sp>
       <p:sp>
         <p:nvSpPr>
-          <p:cNvPr id="7" name="S04-basis">
+          <p:cNvPr id="8" name="S04-basis">
             <a:extLst>
               <a:ext uri="{FF2B5EF4-FFF2-40B4-BE49-F238E27FC236}">
-                <a16:creationId xmlns:a16="http://schemas.microsoft.com/office/drawing/2014/main" id="{7E3D2D07-C993-4C7A-B953-E86CF8ABB4AF}"/>
+                <a16:creationId xmlns:a16="http://schemas.microsoft.com/office/drawing/2014/main" id="{B251EC37-233C-4C3D-B44D-96BE1E3E87D8}"/>
               </a:ext>
             </a:extLst>
           </p:cNvPr>
@@ -5223,8 +5588,8 @@
         </p:nvSpPr>
         <p:spPr>
           <a:xfrm>
-            <a:off x="8382000" y="1714500"/>
-            <a:ext cx="3124200" cy="333375"/>
+            <a:off x="8439150" y="1866900"/>
+            <a:ext cx="2857500" cy="333375"/>
           </a:xfrm>
           <a:prstGeom prst="rect">
             <a:avLst/>
@@ -5243,7 +5608,7 @@
             <a:pPr>
               <a:defRPr sz="1800" b="0">
                 <a:solidFill>
-                  <a:srgbClr val="586C68"/>
+                  <a:srgbClr val="B9DDD0"/>
                 </a:solidFill>
                 <a:latin typeface="Segoe UI"/>
                 <a:ea typeface="Segoe UI"/>
@@ -5253,7 +5618,7 @@
             <a:r>
               <a:rPr sz="1800" b="0">
                 <a:solidFill>
-                  <a:srgbClr val="586C68"/>
+                  <a:srgbClr val="B9DDD0"/>
                 </a:solidFill>
                 <a:latin typeface="Segoe UI"/>
                 <a:ea typeface="Segoe UI"/>
@@ -5266,10 +5631,10 @@
       </p:sp>
       <p:sp>
         <p:nvSpPr>
-          <p:cNvPr id="8" name="S04-latency">
+          <p:cNvPr id="9" name="S04-latency">
             <a:extLst>
               <a:ext uri="{FF2B5EF4-FFF2-40B4-BE49-F238E27FC236}">
-                <a16:creationId xmlns:a16="http://schemas.microsoft.com/office/drawing/2014/main" id="{9E9EFD97-D574-47D8-BA46-B9C4F0004432}"/>
+                <a16:creationId xmlns:a16="http://schemas.microsoft.com/office/drawing/2014/main" id="{7609D483-5383-41CA-8E27-7CE72A83643A}"/>
               </a:ext>
             </a:extLst>
           </p:cNvPr>
@@ -5280,8 +5645,8 @@
         </p:nvSpPr>
         <p:spPr>
           <a:xfrm>
-            <a:off x="8382000" y="2247900"/>
-            <a:ext cx="3048000" cy="628650"/>
+            <a:off x="8439150" y="2466975"/>
+            <a:ext cx="2857500" cy="628650"/>
           </a:xfrm>
           <a:prstGeom prst="rect">
             <a:avLst/>
@@ -5300,7 +5665,7 @@
             <a:pPr>
               <a:defRPr sz="3450" b="0">
                 <a:solidFill>
-                  <a:srgbClr val="1E302F"/>
+                  <a:srgbClr val="FFFFFF"/>
                 </a:solidFill>
                 <a:latin typeface="Segoe UI"/>
                 <a:ea typeface="Segoe UI"/>
@@ -5310,7 +5675,7 @@
             <a:r>
               <a:rPr sz="3450" b="0">
                 <a:solidFill>
-                  <a:srgbClr val="1E302F"/>
+                  <a:srgbClr val="FFFFFF"/>
                 </a:solidFill>
                 <a:latin typeface="Segoe UI"/>
                 <a:ea typeface="Segoe UI"/>
@@ -5323,10 +5688,10 @@
       </p:sp>
       <p:sp>
         <p:nvSpPr>
-          <p:cNvPr id="9" name="S04-latency-label">
+          <p:cNvPr id="10" name="S04-latency-label">
             <a:extLst>
               <a:ext uri="{FF2B5EF4-FFF2-40B4-BE49-F238E27FC236}">
-                <a16:creationId xmlns:a16="http://schemas.microsoft.com/office/drawing/2014/main" id="{F2A126D7-6A59-49B2-8FDE-AE6428678721}"/>
+                <a16:creationId xmlns:a16="http://schemas.microsoft.com/office/drawing/2014/main" id="{073B1A53-07A2-4901-A88A-D3E0BBEDC10E}"/>
               </a:ext>
             </a:extLst>
           </p:cNvPr>
@@ -5337,8 +5702,8 @@
         </p:nvSpPr>
         <p:spPr>
           <a:xfrm>
-            <a:off x="8382000" y="2876550"/>
-            <a:ext cx="3124200" cy="361950"/>
+            <a:off x="8439150" y="3095625"/>
+            <a:ext cx="2857500" cy="361950"/>
           </a:xfrm>
           <a:prstGeom prst="rect">
             <a:avLst/>
@@ -5355,9 +5720,9 @@
           <a:lstStyle/>
           <a:p>
             <a:pPr>
-              <a:defRPr sz="1725" b="0">
-                <a:solidFill>
-                  <a:srgbClr val="586C68"/>
+              <a:defRPr sz="1650" b="0">
+                <a:solidFill>
+                  <a:srgbClr val="D7E6DF"/>
                 </a:solidFill>
                 <a:latin typeface="Segoe UI"/>
                 <a:ea typeface="Segoe UI"/>
@@ -5365,9 +5730,9 @@
               </a:defRPr>
             </a:pPr>
             <a:r>
-              <a:rPr sz="1725" b="0">
-                <a:solidFill>
-                  <a:srgbClr val="586C68"/>
+              <a:rPr sz="1650" b="0">
+                <a:solidFill>
+                  <a:srgbClr val="D7E6DF"/>
                 </a:solidFill>
                 <a:latin typeface="Segoe UI"/>
                 <a:ea typeface="Segoe UI"/>
@@ -5380,10 +5745,10 @@
       </p:sp>
       <p:sp>
         <p:nvSpPr>
-          <p:cNvPr id="10" name="S04-f1">
+          <p:cNvPr id="11" name="S04-f1">
             <a:extLst>
               <a:ext uri="{FF2B5EF4-FFF2-40B4-BE49-F238E27FC236}">
-                <a16:creationId xmlns:a16="http://schemas.microsoft.com/office/drawing/2014/main" id="{A239B722-567F-4F26-A1B0-867523DD5901}"/>
+                <a16:creationId xmlns:a16="http://schemas.microsoft.com/office/drawing/2014/main" id="{C84066E6-68CB-482B-BC75-5A6950B5CADD}"/>
               </a:ext>
             </a:extLst>
           </p:cNvPr>
@@ -5394,8 +5759,8 @@
         </p:nvSpPr>
         <p:spPr>
           <a:xfrm>
-            <a:off x="8382000" y="3419475"/>
-            <a:ext cx="3048000" cy="628650"/>
+            <a:off x="8439150" y="3819525"/>
+            <a:ext cx="2857500" cy="628650"/>
           </a:xfrm>
           <a:prstGeom prst="rect">
             <a:avLst/>
@@ -5414,7 +5779,7 @@
             <a:pPr>
               <a:defRPr sz="3450" b="0">
                 <a:solidFill>
-                  <a:srgbClr val="1E302F"/>
+                  <a:srgbClr val="FFFFFF"/>
                 </a:solidFill>
                 <a:latin typeface="Segoe UI"/>
                 <a:ea typeface="Segoe UI"/>
@@ -5424,7 +5789,7 @@
             <a:r>
               <a:rPr sz="3450" b="0">
                 <a:solidFill>
-                  <a:srgbClr val="1E302F"/>
+                  <a:srgbClr val="FFFFFF"/>
                 </a:solidFill>
                 <a:latin typeface="Segoe UI"/>
                 <a:ea typeface="Segoe UI"/>
@@ -5437,10 +5802,10 @@
       </p:sp>
       <p:sp>
         <p:nvSpPr>
-          <p:cNvPr id="11" name="S04-f1-label">
+          <p:cNvPr id="12" name="S04-f1-label">
             <a:extLst>
               <a:ext uri="{FF2B5EF4-FFF2-40B4-BE49-F238E27FC236}">
-                <a16:creationId xmlns:a16="http://schemas.microsoft.com/office/drawing/2014/main" id="{0C4B5FF2-4E78-480B-A1B2-DCE08F07FD46}"/>
+                <a16:creationId xmlns:a16="http://schemas.microsoft.com/office/drawing/2014/main" id="{D5F58F03-2F17-4A82-B9D3-A486F40F5AEA}"/>
               </a:ext>
             </a:extLst>
           </p:cNvPr>
@@ -5451,8 +5816,8 @@
         </p:nvSpPr>
         <p:spPr>
           <a:xfrm>
-            <a:off x="8382000" y="4048125"/>
-            <a:ext cx="3124200" cy="361950"/>
+            <a:off x="8439150" y="4448175"/>
+            <a:ext cx="2857500" cy="361950"/>
           </a:xfrm>
           <a:prstGeom prst="rect">
             <a:avLst/>
@@ -5469,9 +5834,9 @@
           <a:lstStyle/>
           <a:p>
             <a:pPr>
-              <a:defRPr sz="1725" b="0">
-                <a:solidFill>
-                  <a:srgbClr val="586C68"/>
+              <a:defRPr sz="1650" b="0">
+                <a:solidFill>
+                  <a:srgbClr val="D7E6DF"/>
                 </a:solidFill>
                 <a:latin typeface="Segoe UI"/>
                 <a:ea typeface="Segoe UI"/>
@@ -5479,9 +5844,9 @@
               </a:defRPr>
             </a:pPr>
             <a:r>
-              <a:rPr sz="1725" b="0">
-                <a:solidFill>
-                  <a:srgbClr val="586C68"/>
+              <a:rPr sz="1650" b="0">
+                <a:solidFill>
+                  <a:srgbClr val="D7E6DF"/>
                 </a:solidFill>
                 <a:latin typeface="Segoe UI"/>
                 <a:ea typeface="Segoe UI"/>
@@ -5494,10 +5859,10 @@
       </p:sp>
       <p:sp>
         <p:nvSpPr>
-          <p:cNvPr id="12" name="S04-size-values">
+          <p:cNvPr id="13" name="S04-size-values">
             <a:extLst>
               <a:ext uri="{FF2B5EF4-FFF2-40B4-BE49-F238E27FC236}">
-                <a16:creationId xmlns:a16="http://schemas.microsoft.com/office/drawing/2014/main" id="{74F1FCF4-FC36-4AC8-A03A-B9752510C58C}"/>
+                <a16:creationId xmlns:a16="http://schemas.microsoft.com/office/drawing/2014/main" id="{81A9AF14-2B79-46B0-AF7C-FBF83BCE2BB5}"/>
               </a:ext>
             </a:extLst>
           </p:cNvPr>
@@ -5508,8 +5873,8 @@
         </p:nvSpPr>
         <p:spPr>
           <a:xfrm>
-            <a:off x="8382000" y="4772025"/>
-            <a:ext cx="3124200" cy="457200"/>
+            <a:off x="8439150" y="5210175"/>
+            <a:ext cx="2857500" cy="400050"/>
           </a:xfrm>
           <a:prstGeom prst="rect">
             <a:avLst/>
@@ -5526,9 +5891,9 @@
           <a:lstStyle/>
           <a:p>
             <a:pPr>
-              <a:defRPr sz="1650" b="0">
-                <a:solidFill>
-                  <a:srgbClr val="586C68"/>
+              <a:defRPr sz="1575" b="0">
+                <a:solidFill>
+                  <a:srgbClr val="D7E6DF"/>
                 </a:solidFill>
                 <a:latin typeface="Segoe UI"/>
                 <a:ea typeface="Segoe UI"/>
@@ -5536,9 +5901,9 @@
               </a:defRPr>
             </a:pPr>
             <a:r>
-              <a:rPr sz="1650" b="0">
-                <a:solidFill>
-                  <a:srgbClr val="586C68"/>
+              <a:rPr sz="1575" b="0">
+                <a:solidFill>
+                  <a:srgbClr val="D7E6DF"/>
                 </a:solidFill>
                 <a:latin typeface="Segoe UI"/>
                 <a:ea typeface="Segoe UI"/>
@@ -5551,10 +5916,10 @@
       </p:sp>
       <p:sp>
         <p:nvSpPr>
-          <p:cNvPr id="13" name="S04-stage1">
+          <p:cNvPr id="14" name="S04-decomposition-rule">
             <a:extLst>
               <a:ext uri="{FF2B5EF4-FFF2-40B4-BE49-F238E27FC236}">
-                <a16:creationId xmlns:a16="http://schemas.microsoft.com/office/drawing/2014/main" id="{D7E5A57D-54CB-40FF-B95C-46E49A441E55}"/>
+                <a16:creationId xmlns:a16="http://schemas.microsoft.com/office/drawing/2014/main" id="{03B2B565-099F-4CDC-86C9-E62A713C9284}"/>
               </a:ext>
             </a:extLst>
           </p:cNvPr>
@@ -5565,8 +5930,37 @@
         </p:nvSpPr>
         <p:spPr>
           <a:xfrm>
-            <a:off x="685800" y="5467350"/>
-            <a:ext cx="10820400" cy="304800"/>
+            <a:off x="685800" y="5400675"/>
+            <a:ext cx="6858000" cy="0"/>
+          </a:xfrm>
+          <a:prstGeom prst="line">
+            <a:avLst/>
+          </a:prstGeom>
+          <a:ln w="9525">
+            <a:solidFill>
+              <a:srgbClr val="CFD8D1"/>
+            </a:solidFill>
+          </a:ln>
+        </p:spPr>
+      </p:sp>
+      <p:sp>
+        <p:nvSpPr>
+          <p:cNvPr id="15" name="S04-stage1">
+            <a:extLst>
+              <a:ext uri="{FF2B5EF4-FFF2-40B4-BE49-F238E27FC236}">
+                <a16:creationId xmlns:a16="http://schemas.microsoft.com/office/drawing/2014/main" id="{A8188A58-9481-423D-B95B-B1271AE30E9C}"/>
+              </a:ext>
+            </a:extLst>
+          </p:cNvPr>
+          <p:cNvSpPr>
+            <a:spLocks noGrp="1"/>
+          </p:cNvSpPr>
+          <p:nvPr/>
+        </p:nvSpPr>
+        <p:spPr>
+          <a:xfrm>
+            <a:off x="685800" y="5505450"/>
+            <a:ext cx="6858000" cy="304800"/>
           </a:xfrm>
           <a:prstGeom prst="rect">
             <a:avLst/>
@@ -5608,10 +6002,10 @@
       </p:sp>
       <p:sp>
         <p:nvSpPr>
-          <p:cNvPr id="14" name="S04-stage2">
+          <p:cNvPr id="16" name="S04-stage2">
             <a:extLst>
               <a:ext uri="{FF2B5EF4-FFF2-40B4-BE49-F238E27FC236}">
-                <a16:creationId xmlns:a16="http://schemas.microsoft.com/office/drawing/2014/main" id="{EA8991D9-3BB2-48EA-9E6A-59478E9AA55D}"/>
+                <a16:creationId xmlns:a16="http://schemas.microsoft.com/office/drawing/2014/main" id="{00FADBB8-1250-424A-82B7-5FD45AE87AE6}"/>
               </a:ext>
             </a:extLst>
           </p:cNvPr>
@@ -5622,8 +6016,8 @@
         </p:nvSpPr>
         <p:spPr>
           <a:xfrm>
-            <a:off x="685800" y="5810250"/>
-            <a:ext cx="10820400" cy="304800"/>
+            <a:off x="685800" y="5857875"/>
+            <a:ext cx="6858000" cy="304800"/>
           </a:xfrm>
           <a:prstGeom prst="rect">
             <a:avLst/>
@@ -5666,7 +6060,7 @@
     </p:spTree>
     <p:extLst>
       <p:ext uri="{BB962C8B-B14F-4D97-AF65-F5344CB8AC3E}">
-        <p14:creationId xmlns:p14="http://schemas.microsoft.com/office/powerpoint/2010/main" val="1568015087"/>
+        <p14:creationId xmlns:p14="http://schemas.microsoft.com/office/powerpoint/2010/main" val="1823795935"/>
       </p:ext>
     </p:extLst>
   </p:cSld>
@@ -5703,10 +6097,10 @@
       </p:grpSpPr>
       <p:sp>
         <p:nvSpPr>
-          <p:cNvPr id="14" name="S05-title">
+          <p:cNvPr id="14" name="S05-finding-field">
             <a:extLst>
               <a:ext uri="{FF2B5EF4-FFF2-40B4-BE49-F238E27FC236}">
-                <a16:creationId xmlns:a16="http://schemas.microsoft.com/office/drawing/2014/main" id="{305BBB2B-B82D-481D-9367-26198045A45B}"/>
+                <a16:creationId xmlns:a16="http://schemas.microsoft.com/office/drawing/2014/main" id="{AD5ACFED-B677-48EB-8A8A-A67561A4322A}"/>
               </a:ext>
             </a:extLst>
           </p:cNvPr>
@@ -5717,8 +6111,38 @@
         </p:nvSpPr>
         <p:spPr>
           <a:xfrm>
-            <a:off x="685800" y="895350"/>
-            <a:ext cx="10820400" cy="666750"/>
+            <a:off x="0" y="0"/>
+            <a:ext cx="5905500" cy="6858000"/>
+          </a:xfrm>
+          <a:prstGeom prst="rect">
+            <a:avLst/>
+          </a:prstGeom>
+          <a:solidFill>
+            <a:srgbClr val="1E302F"/>
+          </a:solidFill>
+          <a:ln w="0">
+            <a:noFill/>
+          </a:ln>
+        </p:spPr>
+      </p:sp>
+      <p:sp>
+        <p:nvSpPr>
+          <p:cNvPr id="2" name="S05-main">
+            <a:extLst>
+              <a:ext uri="{FF2B5EF4-FFF2-40B4-BE49-F238E27FC236}">
+                <a16:creationId xmlns:a16="http://schemas.microsoft.com/office/drawing/2014/main" id="{94E023DB-175F-490F-8CE9-1D426FBBBAA4}"/>
+              </a:ext>
+            </a:extLst>
+          </p:cNvPr>
+          <p:cNvSpPr>
+            <a:spLocks noGrp="1"/>
+          </p:cNvSpPr>
+          <p:nvPr/>
+        </p:nvSpPr>
+        <p:spPr>
+          <a:xfrm>
+            <a:off x="609600" y="1428750"/>
+            <a:ext cx="4781550" cy="1619250"/>
           </a:xfrm>
           <a:prstGeom prst="rect">
             <a:avLst/>
@@ -5735,9 +6159,9 @@
           <a:lstStyle/>
           <a:p>
             <a:pPr>
-              <a:defRPr sz="3225" b="0">
-                <a:solidFill>
-                  <a:srgbClr val="1E302F"/>
+              <a:defRPr sz="3675" b="0">
+                <a:solidFill>
+                  <a:srgbClr val="FFFFFF"/>
                 </a:solidFill>
                 <a:latin typeface="Segoe UI"/>
                 <a:ea typeface="Segoe UI"/>
@@ -5745,25 +6169,48 @@
               </a:defRPr>
             </a:pPr>
             <a:r>
-              <a:rPr sz="3225" b="0">
-                <a:solidFill>
-                  <a:srgbClr val="1E302F"/>
+              <a:rPr sz="3675" b="0">
+                <a:solidFill>
+                  <a:srgbClr val="FFFFFF"/>
                 </a:solidFill>
                 <a:latin typeface="Segoe UI"/>
                 <a:ea typeface="Segoe UI"/>
                 <a:cs typeface="Segoe UI"/>
               </a:rPr>
-              <a:t>Deployment criteria remain open</a:t>
-            </a:r>
-          </a:p>
-        </p:txBody>
-      </p:sp>
-      <p:sp>
-        <p:nvSpPr>
-          <p:cNvPr id="2" name="S05-disclosure">
+              <a:t>Efficiency gains</a:t>
+            </a:r>
+          </a:p>
+          <a:p>
+            <a:pPr>
+              <a:defRPr sz="3675" b="0">
+                <a:solidFill>
+                  <a:srgbClr val="FFFFFF"/>
+                </a:solidFill>
+                <a:latin typeface="Segoe UI"/>
+                <a:ea typeface="Segoe UI"/>
+                <a:cs typeface="Segoe UI"/>
+              </a:defRPr>
+            </a:pPr>
+            <a:r>
+              <a:rPr sz="3675" b="0">
+                <a:solidFill>
+                  <a:srgbClr val="FFFFFF"/>
+                </a:solidFill>
+                <a:latin typeface="Segoe UI"/>
+                <a:ea typeface="Segoe UI"/>
+                <a:cs typeface="Segoe UI"/>
+              </a:rPr>
+              <a:t>come with lower F1</a:t>
+            </a:r>
+          </a:p>
+        </p:txBody>
+      </p:sp>
+      <p:sp>
+        <p:nvSpPr>
+          <p:cNvPr id="3" name="S05-interpretation">
             <a:extLst>
               <a:ext uri="{FF2B5EF4-FFF2-40B4-BE49-F238E27FC236}">
-                <a16:creationId xmlns:a16="http://schemas.microsoft.com/office/drawing/2014/main" id="{B0D8AE88-FFF3-4B76-959C-9EDFD88C5C6F}"/>
+                <a16:creationId xmlns:a16="http://schemas.microsoft.com/office/drawing/2014/main" id="{E81C57F6-9189-4E48-AC92-77D9FA8940F9}"/>
               </a:ext>
             </a:extLst>
           </p:cNvPr>
@@ -5774,8 +6221,8 @@
         </p:nvSpPr>
         <p:spPr>
           <a:xfrm>
-            <a:off x="685800" y="6372225"/>
-            <a:ext cx="9525000" cy="219075"/>
+            <a:off x="609600" y="3695700"/>
+            <a:ext cx="4762500" cy="1104900"/>
           </a:xfrm>
           <a:prstGeom prst="rect">
             <a:avLst/>
@@ -5792,9 +6239,9 @@
           <a:lstStyle/>
           <a:p>
             <a:pPr>
-              <a:defRPr sz="1275" b="0">
-                <a:solidFill>
-                  <a:srgbClr val="586C68"/>
+              <a:defRPr sz="2025" b="0">
+                <a:solidFill>
+                  <a:srgbClr val="B9DDD0"/>
                 </a:solidFill>
                 <a:latin typeface="Segoe UI"/>
                 <a:ea typeface="Segoe UI"/>
@@ -5802,25 +6249,48 @@
               </a:defRPr>
             </a:pPr>
             <a:r>
-              <a:rPr sz="1275" b="0">
-                <a:solidFill>
-                  <a:srgbClr val="586C68"/>
+              <a:rPr sz="2025" b="0">
+                <a:solidFill>
+                  <a:srgbClr val="B9DDD0"/>
                 </a:solidFill>
                 <a:latin typeface="Segoe UI"/>
                 <a:ea typeface="Segoe UI"/>
                 <a:cs typeface="Segoe UI"/>
               </a:rPr>
-              <a:t>Illustrative data · not experimental results</a:t>
-            </a:r>
-          </a:p>
-        </p:txBody>
-      </p:sp>
-      <p:sp>
-        <p:nvSpPr>
-          <p:cNvPr id="3" name="S05-number">
+              <a:t>A deployment decision needs</a:t>
+            </a:r>
+          </a:p>
+          <a:p>
+            <a:pPr>
+              <a:defRPr sz="2025" b="0">
+                <a:solidFill>
+                  <a:srgbClr val="B9DDD0"/>
+                </a:solidFill>
+                <a:latin typeface="Segoe UI"/>
+                <a:ea typeface="Segoe UI"/>
+                <a:cs typeface="Segoe UI"/>
+              </a:defRPr>
+            </a:pPr>
+            <a:r>
+              <a:rPr sz="2025" b="0">
+                <a:solidFill>
+                  <a:srgbClr val="B9DDD0"/>
+                </a:solidFill>
+                <a:latin typeface="Segoe UI"/>
+                <a:ea typeface="Segoe UI"/>
+                <a:cs typeface="Segoe UI"/>
+              </a:rPr>
+              <a:t>acceptable latency and F1 limits.</a:t>
+            </a:r>
+          </a:p>
+        </p:txBody>
+      </p:sp>
+      <p:sp>
+        <p:nvSpPr>
+          <p:cNvPr id="4" name="S05-label1">
             <a:extLst>
               <a:ext uri="{FF2B5EF4-FFF2-40B4-BE49-F238E27FC236}">
-                <a16:creationId xmlns:a16="http://schemas.microsoft.com/office/drawing/2014/main" id="{BEA8FA2B-D07E-4036-8236-7B6B6F8529FF}"/>
+                <a16:creationId xmlns:a16="http://schemas.microsoft.com/office/drawing/2014/main" id="{54490094-9E75-4368-90B3-87E9956C891C}"/>
               </a:ext>
             </a:extLst>
           </p:cNvPr>
@@ -5831,8 +6301,8 @@
         </p:nvSpPr>
         <p:spPr>
           <a:xfrm>
-            <a:off x="11144250" y="6372225"/>
-            <a:ext cx="361950" cy="219075"/>
+            <a:off x="6515100" y="1152525"/>
+            <a:ext cx="4991100" cy="466725"/>
           </a:xfrm>
           <a:prstGeom prst="rect">
             <a:avLst/>
@@ -5849,9 +6319,9 @@
           <a:lstStyle/>
           <a:p>
             <a:pPr>
-              <a:defRPr sz="1275" b="0">
-                <a:solidFill>
-                  <a:srgbClr val="586C68"/>
+              <a:defRPr sz="2400" b="0">
+                <a:solidFill>
+                  <a:srgbClr val="1E302F"/>
                 </a:solidFill>
                 <a:latin typeface="Segoe UI"/>
                 <a:ea typeface="Segoe UI"/>
@@ -5859,25 +6329,25 @@
               </a:defRPr>
             </a:pPr>
             <a:r>
-              <a:rPr sz="1275" b="0">
-                <a:solidFill>
-                  <a:srgbClr val="586C68"/>
+              <a:rPr sz="2400" b="0">
+                <a:solidFill>
+                  <a:srgbClr val="1E302F"/>
                 </a:solidFill>
                 <a:latin typeface="Segoe UI"/>
                 <a:ea typeface="Segoe UI"/>
                 <a:cs typeface="Segoe UI"/>
               </a:rPr>
-              <a:t>05</a:t>
-            </a:r>
-          </a:p>
-        </p:txBody>
-      </p:sp>
-      <p:sp>
-        <p:nvSpPr>
-          <p:cNvPr id="4" name="S05-main">
+              <a:t>Deployment limits</a:t>
+            </a:r>
+          </a:p>
+        </p:txBody>
+      </p:sp>
+      <p:sp>
+        <p:nvSpPr>
+          <p:cNvPr id="5" name="S05-body1">
             <a:extLst>
               <a:ext uri="{FF2B5EF4-FFF2-40B4-BE49-F238E27FC236}">
-                <a16:creationId xmlns:a16="http://schemas.microsoft.com/office/drawing/2014/main" id="{F3844DB1-120B-449A-990B-47862B560B28}"/>
+                <a16:creationId xmlns:a16="http://schemas.microsoft.com/office/drawing/2014/main" id="{C23904A4-5799-4146-BCF8-269E1119A7A9}"/>
               </a:ext>
             </a:extLst>
           </p:cNvPr>
@@ -5888,8 +6358,8 @@
         </p:nvSpPr>
         <p:spPr>
           <a:xfrm>
-            <a:off x="685800" y="1990725"/>
-            <a:ext cx="10820400" cy="723900"/>
+            <a:off x="6515100" y="1704975"/>
+            <a:ext cx="4991100" cy="457200"/>
           </a:xfrm>
           <a:prstGeom prst="rect">
             <a:avLst/>
@@ -5906,9 +6376,9 @@
           <a:lstStyle/>
           <a:p>
             <a:pPr>
-              <a:defRPr sz="3675" b="0">
-                <a:solidFill>
-                  <a:srgbClr val="287D78"/>
+              <a:defRPr sz="1800" b="0">
+                <a:solidFill>
+                  <a:srgbClr val="586C68"/>
                 </a:solidFill>
                 <a:latin typeface="Segoe UI"/>
                 <a:ea typeface="Segoe UI"/>
@@ -5916,25 +6386,25 @@
               </a:defRPr>
             </a:pPr>
             <a:r>
-              <a:rPr sz="3675" b="0">
-                <a:solidFill>
-                  <a:srgbClr val="287D78"/>
+              <a:rPr sz="1800" b="0">
+                <a:solidFill>
+                  <a:srgbClr val="586C68"/>
                 </a:solidFill>
                 <a:latin typeface="Segoe UI"/>
                 <a:ea typeface="Segoe UI"/>
                 <a:cs typeface="Segoe UI"/>
               </a:rPr>
-              <a:t>Efficiency gains come with lower F1</a:t>
-            </a:r>
-          </a:p>
-        </p:txBody>
-      </p:sp>
-      <p:sp>
-        <p:nvSpPr>
-          <p:cNvPr id="5" name="S05-rule-1">
+              <a:t>Acceptable F1 loss and latency budget.</a:t>
+            </a:r>
+          </a:p>
+        </p:txBody>
+      </p:sp>
+      <p:sp>
+        <p:nvSpPr>
+          <p:cNvPr id="6" name="S05-rule-1">
             <a:extLst>
               <a:ext uri="{FF2B5EF4-FFF2-40B4-BE49-F238E27FC236}">
-                <a16:creationId xmlns:a16="http://schemas.microsoft.com/office/drawing/2014/main" id="{6A36D0D8-6C39-41CC-87C7-2D53318D70A2}"/>
+                <a16:creationId xmlns:a16="http://schemas.microsoft.com/office/drawing/2014/main" id="{EA0B1105-FDCE-4D6A-B8AB-F85035FC39FE}"/>
               </a:ext>
             </a:extLst>
           </p:cNvPr>
@@ -5945,8 +6415,8 @@
         </p:nvSpPr>
         <p:spPr>
           <a:xfrm>
-            <a:off x="685800" y="3124200"/>
-            <a:ext cx="10820400" cy="0"/>
+            <a:off x="6515100" y="2276475"/>
+            <a:ext cx="4991100" cy="0"/>
           </a:xfrm>
           <a:prstGeom prst="line">
             <a:avLst/>
@@ -5960,10 +6430,10 @@
       </p:sp>
       <p:sp>
         <p:nvSpPr>
-          <p:cNvPr id="6" name="S05-label1">
+          <p:cNvPr id="7" name="S05-label2">
             <a:extLst>
               <a:ext uri="{FF2B5EF4-FFF2-40B4-BE49-F238E27FC236}">
-                <a16:creationId xmlns:a16="http://schemas.microsoft.com/office/drawing/2014/main" id="{BD92DF92-0C21-42CF-B3D6-616F43AFD118}"/>
+                <a16:creationId xmlns:a16="http://schemas.microsoft.com/office/drawing/2014/main" id="{8BA8756E-4A99-41B8-A962-B5B85C9AF37E}"/>
               </a:ext>
             </a:extLst>
           </p:cNvPr>
@@ -5974,8 +6444,8 @@
         </p:nvSpPr>
         <p:spPr>
           <a:xfrm>
-            <a:off x="685800" y="3257550"/>
-            <a:ext cx="2914650" cy="495300"/>
+            <a:off x="6515100" y="2438400"/>
+            <a:ext cx="4991100" cy="466725"/>
           </a:xfrm>
           <a:prstGeom prst="rect">
             <a:avLst/>
@@ -5992,7 +6462,7 @@
           <a:lstStyle/>
           <a:p>
             <a:pPr>
-              <a:defRPr sz="1875" b="0">
+              <a:defRPr sz="2400" b="0">
                 <a:solidFill>
                   <a:srgbClr val="1E302F"/>
                 </a:solidFill>
@@ -6002,7 +6472,7 @@
               </a:defRPr>
             </a:pPr>
             <a:r>
-              <a:rPr sz="1875" b="0">
+              <a:rPr sz="2400" b="0">
                 <a:solidFill>
                   <a:srgbClr val="1E302F"/>
                 </a:solidFill>
@@ -6010,17 +6480,17 @@
                 <a:ea typeface="Segoe UI"/>
                 <a:cs typeface="Segoe UI"/>
               </a:rPr>
-              <a:t>Set the threshold</a:t>
-            </a:r>
-          </a:p>
-        </p:txBody>
-      </p:sp>
-      <p:sp>
-        <p:nvSpPr>
-          <p:cNvPr id="7" name="S05-body1">
+              <a:t>Repeatability</a:t>
+            </a:r>
+          </a:p>
+        </p:txBody>
+      </p:sp>
+      <p:sp>
+        <p:nvSpPr>
+          <p:cNvPr id="8" name="S05-body2">
             <a:extLst>
               <a:ext uri="{FF2B5EF4-FFF2-40B4-BE49-F238E27FC236}">
-                <a16:creationId xmlns:a16="http://schemas.microsoft.com/office/drawing/2014/main" id="{47516BCC-3FD6-4DBC-BE59-3A8CAA7C06B5}"/>
+                <a16:creationId xmlns:a16="http://schemas.microsoft.com/office/drawing/2014/main" id="{2CB7C1D0-AFF6-44EA-AFCA-2B443E82C335}"/>
               </a:ext>
             </a:extLst>
           </p:cNvPr>
@@ -6031,8 +6501,8 @@
         </p:nvSpPr>
         <p:spPr>
           <a:xfrm>
-            <a:off x="3829050" y="3257550"/>
-            <a:ext cx="7677150" cy="495300"/>
+            <a:off x="6515100" y="2990850"/>
+            <a:ext cx="4991100" cy="457200"/>
           </a:xfrm>
           <a:prstGeom prst="rect">
             <a:avLst/>
@@ -6067,17 +6537,17 @@
                 <a:ea typeface="Segoe UI"/>
                 <a:cs typeface="Segoe UI"/>
               </a:rPr>
-              <a:t>Acceptable F1 loss and latency budget.</a:t>
-            </a:r>
-          </a:p>
-        </p:txBody>
-      </p:sp>
-      <p:sp>
-        <p:nvSpPr>
-          <p:cNvPr id="8" name="S05-rule-2">
+              <a:t>Repeat measurements on real data.</a:t>
+            </a:r>
+          </a:p>
+        </p:txBody>
+      </p:sp>
+      <p:sp>
+        <p:nvSpPr>
+          <p:cNvPr id="9" name="S05-rule-2">
             <a:extLst>
               <a:ext uri="{FF2B5EF4-FFF2-40B4-BE49-F238E27FC236}">
-                <a16:creationId xmlns:a16="http://schemas.microsoft.com/office/drawing/2014/main" id="{B0CFAE70-80A6-4E01-B636-6E245BCBC22C}"/>
+                <a16:creationId xmlns:a16="http://schemas.microsoft.com/office/drawing/2014/main" id="{44D90FDB-CA1A-48AD-8D73-903F33B8067D}"/>
               </a:ext>
             </a:extLst>
           </p:cNvPr>
@@ -6088,8 +6558,8 @@
         </p:nvSpPr>
         <p:spPr>
           <a:xfrm>
-            <a:off x="685800" y="3962400"/>
-            <a:ext cx="10820400" cy="0"/>
+            <a:off x="6515100" y="3562350"/>
+            <a:ext cx="4991100" cy="0"/>
           </a:xfrm>
           <a:prstGeom prst="line">
             <a:avLst/>
@@ -6103,10 +6573,10 @@
       </p:sp>
       <p:sp>
         <p:nvSpPr>
-          <p:cNvPr id="9" name="S05-label2">
+          <p:cNvPr id="10" name="S05-label3">
             <a:extLst>
               <a:ext uri="{FF2B5EF4-FFF2-40B4-BE49-F238E27FC236}">
-                <a16:creationId xmlns:a16="http://schemas.microsoft.com/office/drawing/2014/main" id="{89801CBE-3DCE-4518-A0E3-9DECD1C8AB7C}"/>
+                <a16:creationId xmlns:a16="http://schemas.microsoft.com/office/drawing/2014/main" id="{FE8F58FE-FD2C-4DBD-9621-370F07EF827E}"/>
               </a:ext>
             </a:extLst>
           </p:cNvPr>
@@ -6117,8 +6587,8 @@
         </p:nvSpPr>
         <p:spPr>
           <a:xfrm>
-            <a:off x="685800" y="4095750"/>
-            <a:ext cx="2914650" cy="495300"/>
+            <a:off x="6515100" y="3724275"/>
+            <a:ext cx="4991100" cy="466725"/>
           </a:xfrm>
           <a:prstGeom prst="rect">
             <a:avLst/>
@@ -6135,7 +6605,7 @@
           <a:lstStyle/>
           <a:p>
             <a:pPr>
-              <a:defRPr sz="1875" b="0">
+              <a:defRPr sz="2400" b="0">
                 <a:solidFill>
                   <a:srgbClr val="1E302F"/>
                 </a:solidFill>
@@ -6145,7 +6615,7 @@
               </a:defRPr>
             </a:pPr>
             <a:r>
-              <a:rPr sz="1875" b="0">
+              <a:rPr sz="2400" b="0">
                 <a:solidFill>
                   <a:srgbClr val="1E302F"/>
                 </a:solidFill>
@@ -6153,17 +6623,17 @@
                 <a:ea typeface="Segoe UI"/>
                 <a:cs typeface="Segoe UI"/>
               </a:rPr>
-              <a:t>Test the behavior</a:t>
-            </a:r>
-          </a:p>
-        </p:txBody>
-      </p:sp>
-      <p:sp>
-        <p:nvSpPr>
-          <p:cNvPr id="10" name="S05-body2">
+              <a:t>Failure modes</a:t>
+            </a:r>
+          </a:p>
+        </p:txBody>
+      </p:sp>
+      <p:sp>
+        <p:nvSpPr>
+          <p:cNvPr id="11" name="S05-body3">
             <a:extLst>
               <a:ext uri="{FF2B5EF4-FFF2-40B4-BE49-F238E27FC236}">
-                <a16:creationId xmlns:a16="http://schemas.microsoft.com/office/drawing/2014/main" id="{B0E9ABF8-C5E1-4EEC-B9D8-E5B8825C501B}"/>
+                <a16:creationId xmlns:a16="http://schemas.microsoft.com/office/drawing/2014/main" id="{04278B5F-85DF-49D9-80ED-33355A580F46}"/>
               </a:ext>
             </a:extLst>
           </p:cNvPr>
@@ -6174,8 +6644,8 @@
         </p:nvSpPr>
         <p:spPr>
           <a:xfrm>
-            <a:off x="3829050" y="4095750"/>
-            <a:ext cx="7677150" cy="495300"/>
+            <a:off x="6515100" y="4276725"/>
+            <a:ext cx="4991100" cy="457200"/>
           </a:xfrm>
           <a:prstGeom prst="rect">
             <a:avLst/>
@@ -6210,17 +6680,17 @@
                 <a:ea typeface="Segoe UI"/>
                 <a:cs typeface="Segoe UI"/>
               </a:rPr>
-              <a:t>Repeat measurements; inspect failures by anomaly type.</a:t>
-            </a:r>
-          </a:p>
-        </p:txBody>
-      </p:sp>
-      <p:sp>
-        <p:nvSpPr>
-          <p:cNvPr id="11" name="S05-rule-3">
+              <a:t>Inspect errors by anomaly type.</a:t>
+            </a:r>
+          </a:p>
+        </p:txBody>
+      </p:sp>
+      <p:sp>
+        <p:nvSpPr>
+          <p:cNvPr id="12" name="S05-limit">
             <a:extLst>
               <a:ext uri="{FF2B5EF4-FFF2-40B4-BE49-F238E27FC236}">
-                <a16:creationId xmlns:a16="http://schemas.microsoft.com/office/drawing/2014/main" id="{EDAA87F0-4471-407F-A632-D41D6CF07E39}"/>
+                <a16:creationId xmlns:a16="http://schemas.microsoft.com/office/drawing/2014/main" id="{D08E42EB-BDCD-4D44-BD92-85BB19C11265}"/>
               </a:ext>
             </a:extLst>
           </p:cNvPr>
@@ -6231,25 +6701,76 @@
         </p:nvSpPr>
         <p:spPr>
           <a:xfrm>
-            <a:off x="685800" y="4800600"/>
-            <a:ext cx="10820400" cy="0"/>
+            <a:off x="6515100" y="5448300"/>
+            <a:ext cx="4991100" cy="723900"/>
           </a:xfrm>
-          <a:prstGeom prst="line">
-            <a:avLst/>
-          </a:prstGeom>
-          <a:ln w="9525">
-            <a:solidFill>
-              <a:srgbClr val="CFD8D1"/>
-            </a:solidFill>
-          </a:ln>
-        </p:spPr>
-      </p:sp>
-      <p:sp>
-        <p:nvSpPr>
-          <p:cNvPr id="12" name="S05-label3">
+          <a:prstGeom prst="rect">
+            <a:avLst/>
+          </a:prstGeom>
+          <a:noFill/>
+          <a:ln w="0">
+            <a:noFill/>
+          </a:ln>
+        </p:spPr>
+        <p:txBody>
+          <a:bodyPr wrap="none" lIns="0" tIns="0" rIns="0" bIns="0" anchor="ctr">
+            <a:noAutofit/>
+          </a:bodyPr>
+          <a:lstStyle/>
+          <a:p>
+            <a:pPr>
+              <a:defRPr sz="1650" b="0">
+                <a:solidFill>
+                  <a:srgbClr val="586C68"/>
+                </a:solidFill>
+                <a:latin typeface="Segoe UI"/>
+                <a:ea typeface="Segoe UI"/>
+                <a:cs typeface="Segoe UI"/>
+              </a:defRPr>
+            </a:pPr>
+            <a:r>
+              <a:rPr sz="1650" b="0">
+                <a:solidFill>
+                  <a:srgbClr val="586C68"/>
+                </a:solidFill>
+                <a:latin typeface="Segoe UI"/>
+                <a:ea typeface="Segoe UI"/>
+                <a:cs typeface="Segoe UI"/>
+              </a:rPr>
+              <a:t>No real dataset or sample count;</a:t>
+            </a:r>
+          </a:p>
+          <a:p>
+            <a:pPr>
+              <a:defRPr sz="1650" b="0">
+                <a:solidFill>
+                  <a:srgbClr val="586C68"/>
+                </a:solidFill>
+                <a:latin typeface="Segoe UI"/>
+                <a:ea typeface="Segoe UI"/>
+                <a:cs typeface="Segoe UI"/>
+              </a:defRPr>
+            </a:pPr>
+            <a:r>
+              <a:rPr sz="1650" b="0">
+                <a:solidFill>
+                  <a:srgbClr val="586C68"/>
+                </a:solidFill>
+                <a:latin typeface="Segoe UI"/>
+                <a:ea typeface="Segoe UI"/>
+                <a:cs typeface="Segoe UI"/>
+              </a:rPr>
+              <a:t>generalization remains untested.</a:t>
+            </a:r>
+          </a:p>
+        </p:txBody>
+      </p:sp>
+      <p:sp>
+        <p:nvSpPr>
+          <p:cNvPr id="13" name="S05-disclosure">
             <a:extLst>
               <a:ext uri="{FF2B5EF4-FFF2-40B4-BE49-F238E27FC236}">
-                <a16:creationId xmlns:a16="http://schemas.microsoft.com/office/drawing/2014/main" id="{6F62400D-1B37-4AFF-AB13-938352504CBE}"/>
+                <a16:creationId xmlns:a16="http://schemas.microsoft.com/office/drawing/2014/main" id="{7F6F8F34-20B1-4AFA-8F10-48FEF49A87FD}"/>
               </a:ext>
             </a:extLst>
           </p:cNvPr>
@@ -6260,8 +6781,8 @@
         </p:nvSpPr>
         <p:spPr>
           <a:xfrm>
-            <a:off x="685800" y="4933950"/>
-            <a:ext cx="2914650" cy="495300"/>
+            <a:off x="609600" y="6372225"/>
+            <a:ext cx="4572000" cy="219075"/>
           </a:xfrm>
           <a:prstGeom prst="rect">
             <a:avLst/>
@@ -6278,9 +6799,9 @@
           <a:lstStyle/>
           <a:p>
             <a:pPr>
-              <a:defRPr sz="1875" b="0">
-                <a:solidFill>
-                  <a:srgbClr val="1E302F"/>
+              <a:defRPr sz="1275" b="0">
+                <a:solidFill>
+                  <a:srgbClr val="B9DDD0"/>
                 </a:solidFill>
                 <a:latin typeface="Segoe UI"/>
                 <a:ea typeface="Segoe UI"/>
@@ -6288,72 +6809,15 @@
               </a:defRPr>
             </a:pPr>
             <a:r>
-              <a:rPr sz="1875" b="0">
-                <a:solidFill>
-                  <a:srgbClr val="1E302F"/>
+              <a:rPr sz="1275" b="0">
+                <a:solidFill>
+                  <a:srgbClr val="B9DDD0"/>
                 </a:solidFill>
                 <a:latin typeface="Segoe UI"/>
                 <a:ea typeface="Segoe UI"/>
                 <a:cs typeface="Segoe UI"/>
               </a:rPr>
-              <a:t>Keep the limit visible</a:t>
-            </a:r>
-          </a:p>
-        </p:txBody>
-      </p:sp>
-      <p:sp>
-        <p:nvSpPr>
-          <p:cNvPr id="13" name="S05-body3">
-            <a:extLst>
-              <a:ext uri="{FF2B5EF4-FFF2-40B4-BE49-F238E27FC236}">
-                <a16:creationId xmlns:a16="http://schemas.microsoft.com/office/drawing/2014/main" id="{2853FCD3-4227-4C19-9D60-26170121401D}"/>
-              </a:ext>
-            </a:extLst>
-          </p:cNvPr>
-          <p:cNvSpPr>
-            <a:spLocks noGrp="1"/>
-          </p:cNvSpPr>
-          <p:nvPr/>
-        </p:nvSpPr>
-        <p:spPr>
-          <a:xfrm>
-            <a:off x="3829050" y="4933950"/>
-            <a:ext cx="7677150" cy="495300"/>
-          </a:xfrm>
-          <a:prstGeom prst="rect">
-            <a:avLst/>
-          </a:prstGeom>
-          <a:noFill/>
-          <a:ln w="0">
-            <a:noFill/>
-          </a:ln>
-        </p:spPr>
-        <p:txBody>
-          <a:bodyPr wrap="none" lIns="0" tIns="0" rIns="0" bIns="0" anchor="ctr">
-            <a:noAutofit/>
-          </a:bodyPr>
-          <a:lstStyle/>
-          <a:p>
-            <a:pPr>
-              <a:defRPr sz="1800" b="0">
-                <a:solidFill>
-                  <a:srgbClr val="586C68"/>
-                </a:solidFill>
-                <a:latin typeface="Segoe UI"/>
-                <a:ea typeface="Segoe UI"/>
-                <a:cs typeface="Segoe UI"/>
-              </a:defRPr>
-            </a:pPr>
-            <a:r>
-              <a:rPr sz="1800" b="0">
-                <a:solidFill>
-                  <a:srgbClr val="586C68"/>
-                </a:solidFill>
-                <a:latin typeface="Segoe UI"/>
-                <a:ea typeface="Segoe UI"/>
-                <a:cs typeface="Segoe UI"/>
-              </a:rPr>
-              <a:t>No real dataset or sample count: no generalization claim.</a:t>
+              <a:t>Illustrative data</a:t>
             </a:r>
           </a:p>
         </p:txBody>
@@ -6361,7 +6825,7 @@
     </p:spTree>
     <p:extLst>
       <p:ext uri="{BB962C8B-B14F-4D97-AF65-F5344CB8AC3E}">
-        <p14:creationId xmlns:p14="http://schemas.microsoft.com/office/powerpoint/2010/main" val="156585181"/>
+        <p14:creationId xmlns:p14="http://schemas.microsoft.com/office/powerpoint/2010/main" val="504595862"/>
       </p:ext>
     </p:extLst>
   </p:cSld>
